--- a/TurnBasedPokemon/Pokemon_GameProject_Report_auto.pptx
+++ b/TurnBasedPokemon/Pokemon_GameProject_Report_auto.pptx
@@ -3234,22 +3234,22 @@
       <p:grpSpPr/>
       <p:pic>
         <p:nvPicPr>
-          <p:cNvPr id="2" name="Picture 1" descr="UC10_SaveLoad_Sequence.png"/>
-          <p:cNvPicPr>
-            <a:picLocks noChangeAspect="1"/>
-          </p:cNvPicPr>
-          <p:nvPr/>
-        </p:nvPicPr>
-        <p:blipFill>
-          <a:blip r:embed="rId2"/>
-          <a:stretch>
-            <a:fillRect/>
-          </a:stretch>
-        </p:blipFill>
-        <p:spPr>
-          <a:xfrm>
-            <a:off x="1793439" y="914400"/>
-            <a:ext cx="5557121" cy="5394960"/>
+          <p:cNvPr id="2" name="Picture 1" descr="UC2_BattleWild_Sequence.png"/>
+          <p:cNvPicPr>
+            <a:picLocks noChangeAspect="1"/>
+          </p:cNvPicPr>
+          <p:nvPr/>
+        </p:nvPicPr>
+        <p:blipFill>
+          <a:blip r:embed="rId2"/>
+          <a:stretch>
+            <a:fillRect/>
+          </a:stretch>
+        </p:blipFill>
+        <p:spPr>
+          <a:xfrm>
+            <a:off x="2258365" y="914400"/>
+            <a:ext cx="4627269" cy="5394960"/>
           </a:xfrm>
           <a:prstGeom prst="rect">
             <a:avLst/>
@@ -3276,22 +3276,22 @@
       <p:grpSpPr/>
       <p:pic>
         <p:nvPicPr>
-          <p:cNvPr id="2" name="Picture 1" descr="UC10_SaveLoad_TestCases.png"/>
-          <p:cNvPicPr>
-            <a:picLocks noChangeAspect="1"/>
-          </p:cNvPicPr>
-          <p:nvPr/>
-        </p:nvPicPr>
-        <p:blipFill>
-          <a:blip r:embed="rId2"/>
-          <a:stretch>
-            <a:fillRect/>
-          </a:stretch>
-        </p:blipFill>
-        <p:spPr>
-          <a:xfrm>
-            <a:off x="548640" y="2261532"/>
-            <a:ext cx="8046720" cy="2700695"/>
+          <p:cNvPr id="2" name="Picture 1" descr="UC2_BattleWild_TestCases.png"/>
+          <p:cNvPicPr>
+            <a:picLocks noChangeAspect="1"/>
+          </p:cNvPicPr>
+          <p:nvPr/>
+        </p:nvPicPr>
+        <p:blipFill>
+          <a:blip r:embed="rId2"/>
+          <a:stretch>
+            <a:fillRect/>
+          </a:stretch>
+        </p:blipFill>
+        <p:spPr>
+          <a:xfrm>
+            <a:off x="548640" y="1950057"/>
+            <a:ext cx="8046720" cy="3323645"/>
           </a:xfrm>
           <a:prstGeom prst="rect">
             <a:avLst/>
@@ -3318,22 +3318,22 @@
       <p:grpSpPr/>
       <p:pic>
         <p:nvPicPr>
-          <p:cNvPr id="2" name="Picture 1" descr="UC10_SaveLoad_Description.png"/>
-          <p:cNvPicPr>
-            <a:picLocks noChangeAspect="1"/>
-          </p:cNvPicPr>
-          <p:nvPr/>
-        </p:nvPicPr>
-        <p:blipFill>
-          <a:blip r:embed="rId2"/>
-          <a:stretch>
-            <a:fillRect/>
-          </a:stretch>
-        </p:blipFill>
-        <p:spPr>
-          <a:xfrm>
-            <a:off x="1447800" y="925830"/>
-            <a:ext cx="6248400" cy="5372100"/>
+          <p:cNvPr id="2" name="Picture 1" descr="UC3_Catch_Description.png"/>
+          <p:cNvPicPr>
+            <a:picLocks noChangeAspect="1"/>
+          </p:cNvPicPr>
+          <p:nvPr/>
+        </p:nvPicPr>
+        <p:blipFill>
+          <a:blip r:embed="rId2"/>
+          <a:stretch>
+            <a:fillRect/>
+          </a:stretch>
+        </p:blipFill>
+        <p:spPr>
+          <a:xfrm>
+            <a:off x="1577890" y="914400"/>
+            <a:ext cx="5988220" cy="5394960"/>
           </a:xfrm>
           <a:prstGeom prst="rect">
             <a:avLst/>
@@ -3360,22 +3360,22 @@
       <p:grpSpPr/>
       <p:pic>
         <p:nvPicPr>
-          <p:cNvPr id="2" name="Picture 1" descr="UC10_SaveLoad_Activity.png"/>
-          <p:cNvPicPr>
-            <a:picLocks noChangeAspect="1"/>
-          </p:cNvPicPr>
-          <p:nvPr/>
-        </p:nvPicPr>
-        <p:blipFill>
-          <a:blip r:embed="rId2"/>
-          <a:stretch>
-            <a:fillRect/>
-          </a:stretch>
-        </p:blipFill>
-        <p:spPr>
-          <a:xfrm>
-            <a:off x="1143471" y="914400"/>
-            <a:ext cx="6857058" cy="5394960"/>
+          <p:cNvPr id="2" name="Picture 1" descr="UC3_CatchPokemon_Activity.png"/>
+          <p:cNvPicPr>
+            <a:picLocks noChangeAspect="1"/>
+          </p:cNvPicPr>
+          <p:nvPr/>
+        </p:nvPicPr>
+        <p:blipFill>
+          <a:blip r:embed="rId2"/>
+          <a:stretch>
+            <a:fillRect/>
+          </a:stretch>
+        </p:blipFill>
+        <p:spPr>
+          <a:xfrm>
+            <a:off x="1513093" y="914400"/>
+            <a:ext cx="6117814" cy="5394960"/>
           </a:xfrm>
           <a:prstGeom prst="rect">
             <a:avLst/>
@@ -3402,22 +3402,22 @@
       <p:grpSpPr/>
       <p:pic>
         <p:nvPicPr>
-          <p:cNvPr id="2" name="Picture 1" descr="UC10_SaveLoad_Sequence.png"/>
-          <p:cNvPicPr>
-            <a:picLocks noChangeAspect="1"/>
-          </p:cNvPicPr>
-          <p:nvPr/>
-        </p:nvPicPr>
-        <p:blipFill>
-          <a:blip r:embed="rId2"/>
-          <a:stretch>
-            <a:fillRect/>
-          </a:stretch>
-        </p:blipFill>
-        <p:spPr>
-          <a:xfrm>
-            <a:off x="1793439" y="914400"/>
-            <a:ext cx="5557121" cy="5394960"/>
+          <p:cNvPr id="2" name="Picture 1" descr="UC3_CatchPokemon_Sequence.png"/>
+          <p:cNvPicPr>
+            <a:picLocks noChangeAspect="1"/>
+          </p:cNvPicPr>
+          <p:nvPr/>
+        </p:nvPicPr>
+        <p:blipFill>
+          <a:blip r:embed="rId2"/>
+          <a:stretch>
+            <a:fillRect/>
+          </a:stretch>
+        </p:blipFill>
+        <p:spPr>
+          <a:xfrm>
+            <a:off x="563843" y="914400"/>
+            <a:ext cx="8016314" cy="5394960"/>
           </a:xfrm>
           <a:prstGeom prst="rect">
             <a:avLst/>
@@ -3444,22 +3444,22 @@
       <p:grpSpPr/>
       <p:pic>
         <p:nvPicPr>
-          <p:cNvPr id="2" name="Picture 1" descr="UC10_SaveLoad_TestCases.png"/>
-          <p:cNvPicPr>
-            <a:picLocks noChangeAspect="1"/>
-          </p:cNvPicPr>
-          <p:nvPr/>
-        </p:nvPicPr>
-        <p:blipFill>
-          <a:blip r:embed="rId2"/>
-          <a:stretch>
-            <a:fillRect/>
-          </a:stretch>
-        </p:blipFill>
-        <p:spPr>
-          <a:xfrm>
-            <a:off x="548640" y="2261532"/>
-            <a:ext cx="8046720" cy="2700695"/>
+          <p:cNvPr id="2" name="Picture 1" descr="UC3_Catch_TestCases.png"/>
+          <p:cNvPicPr>
+            <a:picLocks noChangeAspect="1"/>
+          </p:cNvPicPr>
+          <p:nvPr/>
+        </p:nvPicPr>
+        <p:blipFill>
+          <a:blip r:embed="rId2"/>
+          <a:stretch>
+            <a:fillRect/>
+          </a:stretch>
+        </p:blipFill>
+        <p:spPr>
+          <a:xfrm>
+            <a:off x="1311973" y="914400"/>
+            <a:ext cx="6520053" cy="5394960"/>
           </a:xfrm>
           <a:prstGeom prst="rect">
             <a:avLst/>
@@ -3486,22 +3486,22 @@
       <p:grpSpPr/>
       <p:pic>
         <p:nvPicPr>
-          <p:cNvPr id="2" name="Picture 1" descr="UC10_SaveLoad_Description.png"/>
-          <p:cNvPicPr>
-            <a:picLocks noChangeAspect="1"/>
-          </p:cNvPicPr>
-          <p:nvPr/>
-        </p:nvPicPr>
-        <p:blipFill>
-          <a:blip r:embed="rId2"/>
-          <a:stretch>
-            <a:fillRect/>
-          </a:stretch>
-        </p:blipFill>
-        <p:spPr>
-          <a:xfrm>
-            <a:off x="1447800" y="925830"/>
-            <a:ext cx="6248400" cy="5372100"/>
+          <p:cNvPr id="2" name="Picture 1" descr="UC4_UseItems_Description.png"/>
+          <p:cNvPicPr>
+            <a:picLocks noChangeAspect="1"/>
+          </p:cNvPicPr>
+          <p:nvPr/>
+        </p:nvPicPr>
+        <p:blipFill>
+          <a:blip r:embed="rId2"/>
+          <a:stretch>
+            <a:fillRect/>
+          </a:stretch>
+        </p:blipFill>
+        <p:spPr>
+          <a:xfrm>
+            <a:off x="1624012" y="925830"/>
+            <a:ext cx="5895975" cy="5372100"/>
           </a:xfrm>
           <a:prstGeom prst="rect">
             <a:avLst/>
@@ -3528,22 +3528,22 @@
       <p:grpSpPr/>
       <p:pic>
         <p:nvPicPr>
-          <p:cNvPr id="2" name="Picture 1" descr="UC10_SaveLoad_Activity.png"/>
-          <p:cNvPicPr>
-            <a:picLocks noChangeAspect="1"/>
-          </p:cNvPicPr>
-          <p:nvPr/>
-        </p:nvPicPr>
-        <p:blipFill>
-          <a:blip r:embed="rId2"/>
-          <a:stretch>
-            <a:fillRect/>
-          </a:stretch>
-        </p:blipFill>
-        <p:spPr>
-          <a:xfrm>
-            <a:off x="1143471" y="914400"/>
-            <a:ext cx="6857058" cy="5394960"/>
+          <p:cNvPr id="2" name="Picture 1" descr="UC4_UseItems_Activity.png"/>
+          <p:cNvPicPr>
+            <a:picLocks noChangeAspect="1"/>
+          </p:cNvPicPr>
+          <p:nvPr/>
+        </p:nvPicPr>
+        <p:blipFill>
+          <a:blip r:embed="rId2"/>
+          <a:stretch>
+            <a:fillRect/>
+          </a:stretch>
+        </p:blipFill>
+        <p:spPr>
+          <a:xfrm>
+            <a:off x="548640" y="1593615"/>
+            <a:ext cx="8046720" cy="4036529"/>
           </a:xfrm>
           <a:prstGeom prst="rect">
             <a:avLst/>
@@ -3570,22 +3570,22 @@
       <p:grpSpPr/>
       <p:pic>
         <p:nvPicPr>
-          <p:cNvPr id="2" name="Picture 1" descr="UC10_SaveLoad_Sequence.png"/>
-          <p:cNvPicPr>
-            <a:picLocks noChangeAspect="1"/>
-          </p:cNvPicPr>
-          <p:nvPr/>
-        </p:nvPicPr>
-        <p:blipFill>
-          <a:blip r:embed="rId2"/>
-          <a:stretch>
-            <a:fillRect/>
-          </a:stretch>
-        </p:blipFill>
-        <p:spPr>
-          <a:xfrm>
-            <a:off x="1793439" y="914400"/>
-            <a:ext cx="5557121" cy="5394960"/>
+          <p:cNvPr id="2" name="Picture 1" descr="UC4_UseItems_Sequence.png"/>
+          <p:cNvPicPr>
+            <a:picLocks noChangeAspect="1"/>
+          </p:cNvPicPr>
+          <p:nvPr/>
+        </p:nvPicPr>
+        <p:blipFill>
+          <a:blip r:embed="rId2"/>
+          <a:stretch>
+            <a:fillRect/>
+          </a:stretch>
+        </p:blipFill>
+        <p:spPr>
+          <a:xfrm>
+            <a:off x="723891" y="914400"/>
+            <a:ext cx="7696217" cy="5394960"/>
           </a:xfrm>
           <a:prstGeom prst="rect">
             <a:avLst/>
@@ -3612,22 +3612,22 @@
       <p:grpSpPr/>
       <p:pic>
         <p:nvPicPr>
-          <p:cNvPr id="2" name="Picture 1" descr="UC10_SaveLoad_TestCases.png"/>
-          <p:cNvPicPr>
-            <a:picLocks noChangeAspect="1"/>
-          </p:cNvPicPr>
-          <p:nvPr/>
-        </p:nvPicPr>
-        <p:blipFill>
-          <a:blip r:embed="rId2"/>
-          <a:stretch>
-            <a:fillRect/>
-          </a:stretch>
-        </p:blipFill>
-        <p:spPr>
-          <a:xfrm>
-            <a:off x="548640" y="2261532"/>
-            <a:ext cx="8046720" cy="2700695"/>
+          <p:cNvPr id="2" name="Picture 1" descr="UC4_UseItems_TestCases.png"/>
+          <p:cNvPicPr>
+            <a:picLocks noChangeAspect="1"/>
+          </p:cNvPicPr>
+          <p:nvPr/>
+        </p:nvPicPr>
+        <p:blipFill>
+          <a:blip r:embed="rId2"/>
+          <a:stretch>
+            <a:fillRect/>
+          </a:stretch>
+        </p:blipFill>
+        <p:spPr>
+          <a:xfrm>
+            <a:off x="548640" y="2045717"/>
+            <a:ext cx="8046720" cy="3132326"/>
           </a:xfrm>
           <a:prstGeom prst="rect">
             <a:avLst/>
@@ -3667,11 +3667,8 @@
           <a:bodyPr/>
           <a:lstStyle/>
           <a:p>
-            <a:pPr>
-              <a:defRPr sz="1400"/>
-            </a:pPr>
             <a:r>
-              <a:t>General requirements: (no image found)</a:t>
+              <a:t>No general requirement image found</a:t>
             </a:r>
           </a:p>
         </p:txBody>
@@ -3713,6 +3710,930 @@
       <p:grpSpPr/>
       <p:pic>
         <p:nvPicPr>
+          <p:cNvPr id="2" name="Picture 1" descr="UC5_ManageTeam_Description.png"/>
+          <p:cNvPicPr>
+            <a:picLocks noChangeAspect="1"/>
+          </p:cNvPicPr>
+          <p:nvPr/>
+        </p:nvPicPr>
+        <p:blipFill>
+          <a:blip r:embed="rId2"/>
+          <a:stretch>
+            <a:fillRect/>
+          </a:stretch>
+        </p:blipFill>
+        <p:spPr>
+          <a:xfrm>
+            <a:off x="1509712" y="1092517"/>
+            <a:ext cx="6124575" cy="5038725"/>
+          </a:xfrm>
+          <a:prstGeom prst="rect">
+            <a:avLst/>
+          </a:prstGeom>
+        </p:spPr>
+      </p:pic>
+    </p:spTree>
+  </p:cSld>
+  <p:clrMapOvr>
+    <a:masterClrMapping/>
+  </p:clrMapOvr>
+</p:sld>
+</file>
+
+<file path=ppt/slides/slide21.xml><?xml version="1.0" encoding="utf-8"?>
+<p:sld xmlns:a="http://schemas.openxmlformats.org/drawingml/2006/main" xmlns:p="http://schemas.openxmlformats.org/presentationml/2006/main" xmlns:r="http://schemas.openxmlformats.org/officeDocument/2006/relationships">
+  <p:cSld>
+    <p:spTree>
+      <p:nvGrpSpPr>
+        <p:cNvPr id="1" name=""/>
+        <p:cNvGrpSpPr/>
+        <p:nvPr/>
+      </p:nvGrpSpPr>
+      <p:grpSpPr/>
+      <p:pic>
+        <p:nvPicPr>
+          <p:cNvPr id="2" name="Picture 1" descr="UC5_ManageTeam_Activity.png"/>
+          <p:cNvPicPr>
+            <a:picLocks noChangeAspect="1"/>
+          </p:cNvPicPr>
+          <p:nvPr/>
+        </p:nvPicPr>
+        <p:blipFill>
+          <a:blip r:embed="rId2"/>
+          <a:stretch>
+            <a:fillRect/>
+          </a:stretch>
+        </p:blipFill>
+        <p:spPr>
+          <a:xfrm>
+            <a:off x="1790700" y="1340167"/>
+            <a:ext cx="5562600" cy="4543425"/>
+          </a:xfrm>
+          <a:prstGeom prst="rect">
+            <a:avLst/>
+          </a:prstGeom>
+        </p:spPr>
+      </p:pic>
+    </p:spTree>
+  </p:cSld>
+  <p:clrMapOvr>
+    <a:masterClrMapping/>
+  </p:clrMapOvr>
+</p:sld>
+</file>
+
+<file path=ppt/slides/slide22.xml><?xml version="1.0" encoding="utf-8"?>
+<p:sld xmlns:a="http://schemas.openxmlformats.org/drawingml/2006/main" xmlns:p="http://schemas.openxmlformats.org/presentationml/2006/main" xmlns:r="http://schemas.openxmlformats.org/officeDocument/2006/relationships">
+  <p:cSld>
+    <p:spTree>
+      <p:nvGrpSpPr>
+        <p:cNvPr id="1" name=""/>
+        <p:cNvGrpSpPr/>
+        <p:nvPr/>
+      </p:nvGrpSpPr>
+      <p:grpSpPr/>
+      <p:pic>
+        <p:nvPicPr>
+          <p:cNvPr id="2" name="Picture 1" descr="UC5_ManageTeam_Sequence.png"/>
+          <p:cNvPicPr>
+            <a:picLocks noChangeAspect="1"/>
+          </p:cNvPicPr>
+          <p:nvPr/>
+        </p:nvPicPr>
+        <p:blipFill>
+          <a:blip r:embed="rId2"/>
+          <a:stretch>
+            <a:fillRect/>
+          </a:stretch>
+        </p:blipFill>
+        <p:spPr>
+          <a:xfrm>
+            <a:off x="1290637" y="1125855"/>
+            <a:ext cx="6562725" cy="4972050"/>
+          </a:xfrm>
+          <a:prstGeom prst="rect">
+            <a:avLst/>
+          </a:prstGeom>
+        </p:spPr>
+      </p:pic>
+    </p:spTree>
+  </p:cSld>
+  <p:clrMapOvr>
+    <a:masterClrMapping/>
+  </p:clrMapOvr>
+</p:sld>
+</file>
+
+<file path=ppt/slides/slide23.xml><?xml version="1.0" encoding="utf-8"?>
+<p:sld xmlns:a="http://schemas.openxmlformats.org/drawingml/2006/main" xmlns:p="http://schemas.openxmlformats.org/presentationml/2006/main" xmlns:r="http://schemas.openxmlformats.org/officeDocument/2006/relationships">
+  <p:cSld>
+    <p:spTree>
+      <p:nvGrpSpPr>
+        <p:cNvPr id="1" name=""/>
+        <p:cNvGrpSpPr/>
+        <p:nvPr/>
+      </p:nvGrpSpPr>
+      <p:grpSpPr/>
+      <p:pic>
+        <p:nvPicPr>
+          <p:cNvPr id="2" name="Picture 1" descr="UC5_ManageTeam_TestCases.png"/>
+          <p:cNvPicPr>
+            <a:picLocks noChangeAspect="1"/>
+          </p:cNvPicPr>
+          <p:nvPr/>
+        </p:nvPicPr>
+        <p:blipFill>
+          <a:blip r:embed="rId2"/>
+          <a:stretch>
+            <a:fillRect/>
+          </a:stretch>
+        </p:blipFill>
+        <p:spPr>
+          <a:xfrm>
+            <a:off x="548640" y="1855105"/>
+            <a:ext cx="8046720" cy="3513550"/>
+          </a:xfrm>
+          <a:prstGeom prst="rect">
+            <a:avLst/>
+          </a:prstGeom>
+        </p:spPr>
+      </p:pic>
+    </p:spTree>
+  </p:cSld>
+  <p:clrMapOvr>
+    <a:masterClrMapping/>
+  </p:clrMapOvr>
+</p:sld>
+</file>
+
+<file path=ppt/slides/slide24.xml><?xml version="1.0" encoding="utf-8"?>
+<p:sld xmlns:a="http://schemas.openxmlformats.org/drawingml/2006/main" xmlns:p="http://schemas.openxmlformats.org/presentationml/2006/main" xmlns:r="http://schemas.openxmlformats.org/officeDocument/2006/relationships">
+  <p:cSld>
+    <p:spTree>
+      <p:nvGrpSpPr>
+        <p:cNvPr id="1" name=""/>
+        <p:cNvGrpSpPr/>
+        <p:nvPr/>
+      </p:nvGrpSpPr>
+      <p:grpSpPr/>
+      <p:pic>
+        <p:nvPicPr>
+          <p:cNvPr id="2" name="Picture 1" descr="UC6_ExploreStory_Description.png"/>
+          <p:cNvPicPr>
+            <a:picLocks noChangeAspect="1"/>
+          </p:cNvPicPr>
+          <p:nvPr/>
+        </p:nvPicPr>
+        <p:blipFill>
+          <a:blip r:embed="rId2"/>
+          <a:stretch>
+            <a:fillRect/>
+          </a:stretch>
+        </p:blipFill>
+        <p:spPr>
+          <a:xfrm>
+            <a:off x="1469223" y="914400"/>
+            <a:ext cx="6205554" cy="5394960"/>
+          </a:xfrm>
+          <a:prstGeom prst="rect">
+            <a:avLst/>
+          </a:prstGeom>
+        </p:spPr>
+      </p:pic>
+    </p:spTree>
+  </p:cSld>
+  <p:clrMapOvr>
+    <a:masterClrMapping/>
+  </p:clrMapOvr>
+</p:sld>
+</file>
+
+<file path=ppt/slides/slide25.xml><?xml version="1.0" encoding="utf-8"?>
+<p:sld xmlns:a="http://schemas.openxmlformats.org/drawingml/2006/main" xmlns:p="http://schemas.openxmlformats.org/presentationml/2006/main" xmlns:r="http://schemas.openxmlformats.org/officeDocument/2006/relationships">
+  <p:cSld>
+    <p:spTree>
+      <p:nvGrpSpPr>
+        <p:cNvPr id="1" name=""/>
+        <p:cNvGrpSpPr/>
+        <p:nvPr/>
+      </p:nvGrpSpPr>
+      <p:grpSpPr/>
+      <p:pic>
+        <p:nvPicPr>
+          <p:cNvPr id="2" name="Picture 1" descr="UC6_ExploreStory_Activity.png"/>
+          <p:cNvPicPr>
+            <a:picLocks noChangeAspect="1"/>
+          </p:cNvPicPr>
+          <p:nvPr/>
+        </p:nvPicPr>
+        <p:blipFill>
+          <a:blip r:embed="rId2"/>
+          <a:stretch>
+            <a:fillRect/>
+          </a:stretch>
+        </p:blipFill>
+        <p:spPr>
+          <a:xfrm>
+            <a:off x="2379917" y="914400"/>
+            <a:ext cx="4384166" cy="5394960"/>
+          </a:xfrm>
+          <a:prstGeom prst="rect">
+            <a:avLst/>
+          </a:prstGeom>
+        </p:spPr>
+      </p:pic>
+    </p:spTree>
+  </p:cSld>
+  <p:clrMapOvr>
+    <a:masterClrMapping/>
+  </p:clrMapOvr>
+</p:sld>
+</file>
+
+<file path=ppt/slides/slide26.xml><?xml version="1.0" encoding="utf-8"?>
+<p:sld xmlns:a="http://schemas.openxmlformats.org/drawingml/2006/main" xmlns:p="http://schemas.openxmlformats.org/presentationml/2006/main" xmlns:r="http://schemas.openxmlformats.org/officeDocument/2006/relationships">
+  <p:cSld>
+    <p:spTree>
+      <p:nvGrpSpPr>
+        <p:cNvPr id="1" name=""/>
+        <p:cNvGrpSpPr/>
+        <p:nvPr/>
+      </p:nvGrpSpPr>
+      <p:grpSpPr/>
+      <p:pic>
+        <p:nvPicPr>
+          <p:cNvPr id="2" name="Picture 1" descr="UC6_ExploreStory_Sequence.png"/>
+          <p:cNvPicPr>
+            <a:picLocks noChangeAspect="1"/>
+          </p:cNvPicPr>
+          <p:nvPr/>
+        </p:nvPicPr>
+        <p:blipFill>
+          <a:blip r:embed="rId2"/>
+          <a:stretch>
+            <a:fillRect/>
+          </a:stretch>
+        </p:blipFill>
+        <p:spPr>
+          <a:xfrm>
+            <a:off x="2892635" y="914400"/>
+            <a:ext cx="3358729" cy="5394960"/>
+          </a:xfrm>
+          <a:prstGeom prst="rect">
+            <a:avLst/>
+          </a:prstGeom>
+        </p:spPr>
+      </p:pic>
+    </p:spTree>
+  </p:cSld>
+  <p:clrMapOvr>
+    <a:masterClrMapping/>
+  </p:clrMapOvr>
+</p:sld>
+</file>
+
+<file path=ppt/slides/slide27.xml><?xml version="1.0" encoding="utf-8"?>
+<p:sld xmlns:a="http://schemas.openxmlformats.org/drawingml/2006/main" xmlns:p="http://schemas.openxmlformats.org/presentationml/2006/main" xmlns:r="http://schemas.openxmlformats.org/officeDocument/2006/relationships">
+  <p:cSld>
+    <p:spTree>
+      <p:nvGrpSpPr>
+        <p:cNvPr id="1" name=""/>
+        <p:cNvGrpSpPr/>
+        <p:nvPr/>
+      </p:nvGrpSpPr>
+      <p:grpSpPr/>
+      <p:pic>
+        <p:nvPicPr>
+          <p:cNvPr id="2" name="Picture 1" descr="UC6_ExploreStory_TestCases.png"/>
+          <p:cNvPicPr>
+            <a:picLocks noChangeAspect="1"/>
+          </p:cNvPicPr>
+          <p:nvPr/>
+        </p:nvPicPr>
+        <p:blipFill>
+          <a:blip r:embed="rId2"/>
+          <a:stretch>
+            <a:fillRect/>
+          </a:stretch>
+        </p:blipFill>
+        <p:spPr>
+          <a:xfrm>
+            <a:off x="548640" y="2650564"/>
+            <a:ext cx="8046720" cy="1922631"/>
+          </a:xfrm>
+          <a:prstGeom prst="rect">
+            <a:avLst/>
+          </a:prstGeom>
+        </p:spPr>
+      </p:pic>
+    </p:spTree>
+  </p:cSld>
+  <p:clrMapOvr>
+    <a:masterClrMapping/>
+  </p:clrMapOvr>
+</p:sld>
+</file>
+
+<file path=ppt/slides/slide28.xml><?xml version="1.0" encoding="utf-8"?>
+<p:sld xmlns:a="http://schemas.openxmlformats.org/drawingml/2006/main" xmlns:p="http://schemas.openxmlformats.org/presentationml/2006/main" xmlns:r="http://schemas.openxmlformats.org/officeDocument/2006/relationships">
+  <p:cSld>
+    <p:spTree>
+      <p:nvGrpSpPr>
+        <p:cNvPr id="1" name=""/>
+        <p:cNvGrpSpPr/>
+        <p:nvPr/>
+      </p:nvGrpSpPr>
+      <p:grpSpPr/>
+      <p:pic>
+        <p:nvPicPr>
+          <p:cNvPr id="2" name="Picture 1" descr="UC7_InteractNPC_Description.png"/>
+          <p:cNvPicPr>
+            <a:picLocks noChangeAspect="1"/>
+          </p:cNvPicPr>
+          <p:nvPr/>
+        </p:nvPicPr>
+        <p:blipFill>
+          <a:blip r:embed="rId2"/>
+          <a:stretch>
+            <a:fillRect/>
+          </a:stretch>
+        </p:blipFill>
+        <p:spPr>
+          <a:xfrm>
+            <a:off x="990600" y="1011555"/>
+            <a:ext cx="7162800" cy="5200650"/>
+          </a:xfrm>
+          <a:prstGeom prst="rect">
+            <a:avLst/>
+          </a:prstGeom>
+        </p:spPr>
+      </p:pic>
+    </p:spTree>
+  </p:cSld>
+  <p:clrMapOvr>
+    <a:masterClrMapping/>
+  </p:clrMapOvr>
+</p:sld>
+</file>
+
+<file path=ppt/slides/slide29.xml><?xml version="1.0" encoding="utf-8"?>
+<p:sld xmlns:a="http://schemas.openxmlformats.org/drawingml/2006/main" xmlns:p="http://schemas.openxmlformats.org/presentationml/2006/main" xmlns:r="http://schemas.openxmlformats.org/officeDocument/2006/relationships">
+  <p:cSld>
+    <p:spTree>
+      <p:nvGrpSpPr>
+        <p:cNvPr id="1" name=""/>
+        <p:cNvGrpSpPr/>
+        <p:nvPr/>
+      </p:nvGrpSpPr>
+      <p:grpSpPr/>
+      <p:pic>
+        <p:nvPicPr>
+          <p:cNvPr id="2" name="Picture 1" descr="UC7_InteractNPC_Activity.png"/>
+          <p:cNvPicPr>
+            <a:picLocks noChangeAspect="1"/>
+          </p:cNvPicPr>
+          <p:nvPr/>
+        </p:nvPicPr>
+        <p:blipFill>
+          <a:blip r:embed="rId2"/>
+          <a:stretch>
+            <a:fillRect/>
+          </a:stretch>
+        </p:blipFill>
+        <p:spPr>
+          <a:xfrm>
+            <a:off x="1519922" y="914400"/>
+            <a:ext cx="6104156" cy="5394960"/>
+          </a:xfrm>
+          <a:prstGeom prst="rect">
+            <a:avLst/>
+          </a:prstGeom>
+        </p:spPr>
+      </p:pic>
+    </p:spTree>
+  </p:cSld>
+  <p:clrMapOvr>
+    <a:masterClrMapping/>
+  </p:clrMapOvr>
+</p:sld>
+</file>
+
+<file path=ppt/slides/slide3.xml><?xml version="1.0" encoding="utf-8"?>
+<p:sld xmlns:a="http://schemas.openxmlformats.org/drawingml/2006/main" xmlns:p="http://schemas.openxmlformats.org/presentationml/2006/main" xmlns:r="http://schemas.openxmlformats.org/officeDocument/2006/relationships">
+  <p:cSld>
+    <p:spTree>
+      <p:nvGrpSpPr>
+        <p:cNvPr id="1" name=""/>
+        <p:cNvGrpSpPr/>
+        <p:nvPr/>
+      </p:nvGrpSpPr>
+      <p:grpSpPr/>
+      <p:pic>
+        <p:nvPicPr>
+          <p:cNvPr id="2" name="Picture 1" descr="UC_Overview.png"/>
+          <p:cNvPicPr>
+            <a:picLocks noChangeAspect="1"/>
+          </p:cNvPicPr>
+          <p:nvPr/>
+        </p:nvPicPr>
+        <p:blipFill>
+          <a:blip r:embed="rId2"/>
+          <a:stretch>
+            <a:fillRect/>
+          </a:stretch>
+        </p:blipFill>
+        <p:spPr>
+          <a:xfrm>
+            <a:off x="909439" y="914400"/>
+            <a:ext cx="7325121" cy="5394960"/>
+          </a:xfrm>
+          <a:prstGeom prst="rect">
+            <a:avLst/>
+          </a:prstGeom>
+        </p:spPr>
+      </p:pic>
+    </p:spTree>
+  </p:cSld>
+  <p:clrMapOvr>
+    <a:masterClrMapping/>
+  </p:clrMapOvr>
+</p:sld>
+</file>
+
+<file path=ppt/slides/slide30.xml><?xml version="1.0" encoding="utf-8"?>
+<p:sld xmlns:a="http://schemas.openxmlformats.org/drawingml/2006/main" xmlns:p="http://schemas.openxmlformats.org/presentationml/2006/main" xmlns:r="http://schemas.openxmlformats.org/officeDocument/2006/relationships">
+  <p:cSld>
+    <p:spTree>
+      <p:nvGrpSpPr>
+        <p:cNvPr id="1" name=""/>
+        <p:cNvGrpSpPr/>
+        <p:nvPr/>
+      </p:nvGrpSpPr>
+      <p:grpSpPr/>
+      <p:pic>
+        <p:nvPicPr>
+          <p:cNvPr id="2" name="Picture 1" descr="UC7_InteractNPC_Sequence.png"/>
+          <p:cNvPicPr>
+            <a:picLocks noChangeAspect="1"/>
+          </p:cNvPicPr>
+          <p:nvPr/>
+        </p:nvPicPr>
+        <p:blipFill>
+          <a:blip r:embed="rId2"/>
+          <a:stretch>
+            <a:fillRect/>
+          </a:stretch>
+        </p:blipFill>
+        <p:spPr>
+          <a:xfrm>
+            <a:off x="1869267" y="914400"/>
+            <a:ext cx="5405466" cy="5394960"/>
+          </a:xfrm>
+          <a:prstGeom prst="rect">
+            <a:avLst/>
+          </a:prstGeom>
+        </p:spPr>
+      </p:pic>
+    </p:spTree>
+  </p:cSld>
+  <p:clrMapOvr>
+    <a:masterClrMapping/>
+  </p:clrMapOvr>
+</p:sld>
+</file>
+
+<file path=ppt/slides/slide31.xml><?xml version="1.0" encoding="utf-8"?>
+<p:sld xmlns:a="http://schemas.openxmlformats.org/drawingml/2006/main" xmlns:p="http://schemas.openxmlformats.org/presentationml/2006/main" xmlns:r="http://schemas.openxmlformats.org/officeDocument/2006/relationships">
+  <p:cSld>
+    <p:spTree>
+      <p:nvGrpSpPr>
+        <p:cNvPr id="1" name=""/>
+        <p:cNvGrpSpPr/>
+        <p:nvPr/>
+      </p:nvGrpSpPr>
+      <p:grpSpPr/>
+      <p:pic>
+        <p:nvPicPr>
+          <p:cNvPr id="2" name="Picture 1" descr="UC7_InteractNPC_TestCases.png"/>
+          <p:cNvPicPr>
+            <a:picLocks noChangeAspect="1"/>
+          </p:cNvPicPr>
+          <p:nvPr/>
+        </p:nvPicPr>
+        <p:blipFill>
+          <a:blip r:embed="rId2"/>
+          <a:stretch>
+            <a:fillRect/>
+          </a:stretch>
+        </p:blipFill>
+        <p:spPr>
+          <a:xfrm>
+            <a:off x="1762125" y="1487805"/>
+            <a:ext cx="5619750" cy="4248150"/>
+          </a:xfrm>
+          <a:prstGeom prst="rect">
+            <a:avLst/>
+          </a:prstGeom>
+        </p:spPr>
+      </p:pic>
+    </p:spTree>
+  </p:cSld>
+  <p:clrMapOvr>
+    <a:masterClrMapping/>
+  </p:clrMapOvr>
+</p:sld>
+</file>
+
+<file path=ppt/slides/slide32.xml><?xml version="1.0" encoding="utf-8"?>
+<p:sld xmlns:a="http://schemas.openxmlformats.org/drawingml/2006/main" xmlns:p="http://schemas.openxmlformats.org/presentationml/2006/main" xmlns:r="http://schemas.openxmlformats.org/officeDocument/2006/relationships">
+  <p:cSld>
+    <p:spTree>
+      <p:nvGrpSpPr>
+        <p:cNvPr id="1" name=""/>
+        <p:cNvGrpSpPr/>
+        <p:nvPr/>
+      </p:nvGrpSpPr>
+      <p:grpSpPr/>
+      <p:pic>
+        <p:nvPicPr>
+          <p:cNvPr id="2" name="Picture 1" descr="UC8_Matchmaking_Description.png"/>
+          <p:cNvPicPr>
+            <a:picLocks noChangeAspect="1"/>
+          </p:cNvPicPr>
+          <p:nvPr/>
+        </p:nvPicPr>
+        <p:blipFill>
+          <a:blip r:embed="rId2"/>
+          <a:stretch>
+            <a:fillRect/>
+          </a:stretch>
+        </p:blipFill>
+        <p:spPr>
+          <a:xfrm>
+            <a:off x="1563792" y="914400"/>
+            <a:ext cx="6016416" cy="5394960"/>
+          </a:xfrm>
+          <a:prstGeom prst="rect">
+            <a:avLst/>
+          </a:prstGeom>
+        </p:spPr>
+      </p:pic>
+    </p:spTree>
+  </p:cSld>
+  <p:clrMapOvr>
+    <a:masterClrMapping/>
+  </p:clrMapOvr>
+</p:sld>
+</file>
+
+<file path=ppt/slides/slide33.xml><?xml version="1.0" encoding="utf-8"?>
+<p:sld xmlns:a="http://schemas.openxmlformats.org/drawingml/2006/main" xmlns:p="http://schemas.openxmlformats.org/presentationml/2006/main" xmlns:r="http://schemas.openxmlformats.org/officeDocument/2006/relationships">
+  <p:cSld>
+    <p:spTree>
+      <p:nvGrpSpPr>
+        <p:cNvPr id="1" name=""/>
+        <p:cNvGrpSpPr/>
+        <p:nvPr/>
+      </p:nvGrpSpPr>
+      <p:grpSpPr/>
+      <p:pic>
+        <p:nvPicPr>
+          <p:cNvPr id="2" name="Picture 1" descr="UC8_Matchmaking_Activity.png"/>
+          <p:cNvPicPr>
+            <a:picLocks noChangeAspect="1"/>
+          </p:cNvPicPr>
+          <p:nvPr/>
+        </p:nvPicPr>
+        <p:blipFill>
+          <a:blip r:embed="rId2"/>
+          <a:stretch>
+            <a:fillRect/>
+          </a:stretch>
+        </p:blipFill>
+        <p:spPr>
+          <a:xfrm>
+            <a:off x="3058856" y="914400"/>
+            <a:ext cx="3026288" cy="5394960"/>
+          </a:xfrm>
+          <a:prstGeom prst="rect">
+            <a:avLst/>
+          </a:prstGeom>
+        </p:spPr>
+      </p:pic>
+    </p:spTree>
+  </p:cSld>
+  <p:clrMapOvr>
+    <a:masterClrMapping/>
+  </p:clrMapOvr>
+</p:sld>
+</file>
+
+<file path=ppt/slides/slide34.xml><?xml version="1.0" encoding="utf-8"?>
+<p:sld xmlns:a="http://schemas.openxmlformats.org/drawingml/2006/main" xmlns:p="http://schemas.openxmlformats.org/presentationml/2006/main" xmlns:r="http://schemas.openxmlformats.org/officeDocument/2006/relationships">
+  <p:cSld>
+    <p:spTree>
+      <p:nvGrpSpPr>
+        <p:cNvPr id="1" name=""/>
+        <p:cNvGrpSpPr/>
+        <p:nvPr/>
+      </p:nvGrpSpPr>
+      <p:grpSpPr/>
+      <p:pic>
+        <p:nvPicPr>
+          <p:cNvPr id="2" name="Picture 1" descr="UC8_Matchmaking_Sequence.png"/>
+          <p:cNvPicPr>
+            <a:picLocks noChangeAspect="1"/>
+          </p:cNvPicPr>
+          <p:nvPr/>
+        </p:nvPicPr>
+        <p:blipFill>
+          <a:blip r:embed="rId2"/>
+          <a:stretch>
+            <a:fillRect/>
+          </a:stretch>
+        </p:blipFill>
+        <p:spPr>
+          <a:xfrm>
+            <a:off x="1293435" y="914400"/>
+            <a:ext cx="6557130" cy="5394960"/>
+          </a:xfrm>
+          <a:prstGeom prst="rect">
+            <a:avLst/>
+          </a:prstGeom>
+        </p:spPr>
+      </p:pic>
+    </p:spTree>
+  </p:cSld>
+  <p:clrMapOvr>
+    <a:masterClrMapping/>
+  </p:clrMapOvr>
+</p:sld>
+</file>
+
+<file path=ppt/slides/slide35.xml><?xml version="1.0" encoding="utf-8"?>
+<p:sld xmlns:a="http://schemas.openxmlformats.org/drawingml/2006/main" xmlns:p="http://schemas.openxmlformats.org/presentationml/2006/main" xmlns:r="http://schemas.openxmlformats.org/officeDocument/2006/relationships">
+  <p:cSld>
+    <p:spTree>
+      <p:nvGrpSpPr>
+        <p:cNvPr id="1" name=""/>
+        <p:cNvGrpSpPr/>
+        <p:nvPr/>
+      </p:nvGrpSpPr>
+      <p:grpSpPr/>
+      <p:pic>
+        <p:nvPicPr>
+          <p:cNvPr id="2" name="Picture 1" descr="UC8_Matchmaking_TestCases.png"/>
+          <p:cNvPicPr>
+            <a:picLocks noChangeAspect="1"/>
+          </p:cNvPicPr>
+          <p:nvPr/>
+        </p:nvPicPr>
+        <p:blipFill>
+          <a:blip r:embed="rId2"/>
+          <a:stretch>
+            <a:fillRect/>
+          </a:stretch>
+        </p:blipFill>
+        <p:spPr>
+          <a:xfrm>
+            <a:off x="548640" y="2102325"/>
+            <a:ext cx="8046720" cy="3019109"/>
+          </a:xfrm>
+          <a:prstGeom prst="rect">
+            <a:avLst/>
+          </a:prstGeom>
+        </p:spPr>
+      </p:pic>
+    </p:spTree>
+  </p:cSld>
+  <p:clrMapOvr>
+    <a:masterClrMapping/>
+  </p:clrMapOvr>
+</p:sld>
+</file>
+
+<file path=ppt/slides/slide36.xml><?xml version="1.0" encoding="utf-8"?>
+<p:sld xmlns:a="http://schemas.openxmlformats.org/drawingml/2006/main" xmlns:p="http://schemas.openxmlformats.org/presentationml/2006/main" xmlns:r="http://schemas.openxmlformats.org/officeDocument/2006/relationships">
+  <p:cSld>
+    <p:spTree>
+      <p:nvGrpSpPr>
+        <p:cNvPr id="1" name=""/>
+        <p:cNvGrpSpPr/>
+        <p:nvPr/>
+      </p:nvGrpSpPr>
+      <p:grpSpPr/>
+      <p:pic>
+        <p:nvPicPr>
+          <p:cNvPr id="2" name="Picture 1" descr="UC9_PvPBattle_Description.png"/>
+          <p:cNvPicPr>
+            <a:picLocks noChangeAspect="1"/>
+          </p:cNvPicPr>
+          <p:nvPr/>
+        </p:nvPicPr>
+        <p:blipFill>
+          <a:blip r:embed="rId2"/>
+          <a:stretch>
+            <a:fillRect/>
+          </a:stretch>
+        </p:blipFill>
+        <p:spPr>
+          <a:xfrm>
+            <a:off x="1778338" y="914400"/>
+            <a:ext cx="5587324" cy="5394960"/>
+          </a:xfrm>
+          <a:prstGeom prst="rect">
+            <a:avLst/>
+          </a:prstGeom>
+        </p:spPr>
+      </p:pic>
+    </p:spTree>
+  </p:cSld>
+  <p:clrMapOvr>
+    <a:masterClrMapping/>
+  </p:clrMapOvr>
+</p:sld>
+</file>
+
+<file path=ppt/slides/slide37.xml><?xml version="1.0" encoding="utf-8"?>
+<p:sld xmlns:a="http://schemas.openxmlformats.org/drawingml/2006/main" xmlns:p="http://schemas.openxmlformats.org/presentationml/2006/main" xmlns:r="http://schemas.openxmlformats.org/officeDocument/2006/relationships">
+  <p:cSld>
+    <p:spTree>
+      <p:nvGrpSpPr>
+        <p:cNvPr id="1" name=""/>
+        <p:cNvGrpSpPr/>
+        <p:nvPr/>
+      </p:nvGrpSpPr>
+      <p:grpSpPr/>
+      <p:pic>
+        <p:nvPicPr>
+          <p:cNvPr id="2" name="Picture 1" descr="UC9_PvPBattle_Activity.png"/>
+          <p:cNvPicPr>
+            <a:picLocks noChangeAspect="1"/>
+          </p:cNvPicPr>
+          <p:nvPr/>
+        </p:nvPicPr>
+        <p:blipFill>
+          <a:blip r:embed="rId2"/>
+          <a:stretch>
+            <a:fillRect/>
+          </a:stretch>
+        </p:blipFill>
+        <p:spPr>
+          <a:xfrm>
+            <a:off x="3623452" y="914400"/>
+            <a:ext cx="1897095" cy="5394960"/>
+          </a:xfrm>
+          <a:prstGeom prst="rect">
+            <a:avLst/>
+          </a:prstGeom>
+        </p:spPr>
+      </p:pic>
+    </p:spTree>
+  </p:cSld>
+  <p:clrMapOvr>
+    <a:masterClrMapping/>
+  </p:clrMapOvr>
+</p:sld>
+</file>
+
+<file path=ppt/slides/slide38.xml><?xml version="1.0" encoding="utf-8"?>
+<p:sld xmlns:a="http://schemas.openxmlformats.org/drawingml/2006/main" xmlns:p="http://schemas.openxmlformats.org/presentationml/2006/main" xmlns:r="http://schemas.openxmlformats.org/officeDocument/2006/relationships">
+  <p:cSld>
+    <p:spTree>
+      <p:nvGrpSpPr>
+        <p:cNvPr id="1" name=""/>
+        <p:cNvGrpSpPr/>
+        <p:nvPr/>
+      </p:nvGrpSpPr>
+      <p:grpSpPr/>
+      <p:pic>
+        <p:nvPicPr>
+          <p:cNvPr id="2" name="Picture 1" descr="UC9_PvPBattle_Sequence.png"/>
+          <p:cNvPicPr>
+            <a:picLocks noChangeAspect="1"/>
+          </p:cNvPicPr>
+          <p:nvPr/>
+        </p:nvPicPr>
+        <p:blipFill>
+          <a:blip r:embed="rId2"/>
+          <a:stretch>
+            <a:fillRect/>
+          </a:stretch>
+        </p:blipFill>
+        <p:spPr>
+          <a:xfrm>
+            <a:off x="548640" y="1022680"/>
+            <a:ext cx="8046720" cy="5178400"/>
+          </a:xfrm>
+          <a:prstGeom prst="rect">
+            <a:avLst/>
+          </a:prstGeom>
+        </p:spPr>
+      </p:pic>
+    </p:spTree>
+  </p:cSld>
+  <p:clrMapOvr>
+    <a:masterClrMapping/>
+  </p:clrMapOvr>
+</p:sld>
+</file>
+
+<file path=ppt/slides/slide39.xml><?xml version="1.0" encoding="utf-8"?>
+<p:sld xmlns:a="http://schemas.openxmlformats.org/drawingml/2006/main" xmlns:p="http://schemas.openxmlformats.org/presentationml/2006/main" xmlns:r="http://schemas.openxmlformats.org/officeDocument/2006/relationships">
+  <p:cSld>
+    <p:spTree>
+      <p:nvGrpSpPr>
+        <p:cNvPr id="1" name=""/>
+        <p:cNvGrpSpPr/>
+        <p:nvPr/>
+      </p:nvGrpSpPr>
+      <p:grpSpPr/>
+      <p:pic>
+        <p:nvPicPr>
+          <p:cNvPr id="2" name="Picture 1" descr="UC9_PvPBattle_TestCases.png"/>
+          <p:cNvPicPr>
+            <a:picLocks noChangeAspect="1"/>
+          </p:cNvPicPr>
+          <p:nvPr/>
+        </p:nvPicPr>
+        <p:blipFill>
+          <a:blip r:embed="rId2"/>
+          <a:stretch>
+            <a:fillRect/>
+          </a:stretch>
+        </p:blipFill>
+        <p:spPr>
+          <a:xfrm>
+            <a:off x="548640" y="2565846"/>
+            <a:ext cx="8046720" cy="2092067"/>
+          </a:xfrm>
+          <a:prstGeom prst="rect">
+            <a:avLst/>
+          </a:prstGeom>
+        </p:spPr>
+      </p:pic>
+    </p:spTree>
+  </p:cSld>
+  <p:clrMapOvr>
+    <a:masterClrMapping/>
+  </p:clrMapOvr>
+</p:sld>
+</file>
+
+<file path=ppt/slides/slide4.xml><?xml version="1.0" encoding="utf-8"?>
+<p:sld xmlns:a="http://schemas.openxmlformats.org/drawingml/2006/main" xmlns:p="http://schemas.openxmlformats.org/presentationml/2006/main" xmlns:r="http://schemas.openxmlformats.org/officeDocument/2006/relationships">
+  <p:cSld>
+    <p:spTree>
+      <p:nvGrpSpPr>
+        <p:cNvPr id="1" name=""/>
+        <p:cNvGrpSpPr/>
+        <p:nvPr/>
+      </p:nvGrpSpPr>
+      <p:grpSpPr/>
+      <p:pic>
+        <p:nvPicPr>
+          <p:cNvPr id="2" name="Picture 1" descr="UC1_Login_Description.png"/>
+          <p:cNvPicPr>
+            <a:picLocks noChangeAspect="1"/>
+          </p:cNvPicPr>
+          <p:nvPr/>
+        </p:nvPicPr>
+        <p:blipFill>
+          <a:blip r:embed="rId2"/>
+          <a:stretch>
+            <a:fillRect/>
+          </a:stretch>
+        </p:blipFill>
+        <p:spPr>
+          <a:xfrm>
+            <a:off x="1543050" y="1011555"/>
+            <a:ext cx="6057900" cy="5200650"/>
+          </a:xfrm>
+          <a:prstGeom prst="rect">
+            <a:avLst/>
+          </a:prstGeom>
+        </p:spPr>
+      </p:pic>
+    </p:spTree>
+  </p:cSld>
+  <p:clrMapOvr>
+    <a:masterClrMapping/>
+  </p:clrMapOvr>
+</p:sld>
+</file>
+
+<file path=ppt/slides/slide40.xml><?xml version="1.0" encoding="utf-8"?>
+<p:sld xmlns:a="http://schemas.openxmlformats.org/drawingml/2006/main" xmlns:p="http://schemas.openxmlformats.org/presentationml/2006/main" xmlns:r="http://schemas.openxmlformats.org/officeDocument/2006/relationships">
+  <p:cSld>
+    <p:spTree>
+      <p:nvGrpSpPr>
+        <p:cNvPr id="1" name=""/>
+        <p:cNvGrpSpPr/>
+        <p:nvPr/>
+      </p:nvGrpSpPr>
+      <p:grpSpPr/>
+      <p:pic>
+        <p:nvPicPr>
           <p:cNvPr id="2" name="Picture 1" descr="UC10_SaveLoad_Description.png"/>
           <p:cNvPicPr>
             <a:picLocks noChangeAspect="1"/>
@@ -3743,7 +4664,7 @@
 </p:sld>
 </file>
 
-<file path=ppt/slides/slide21.xml><?xml version="1.0" encoding="utf-8"?>
+<file path=ppt/slides/slide41.xml><?xml version="1.0" encoding="utf-8"?>
 <p:sld xmlns:a="http://schemas.openxmlformats.org/drawingml/2006/main" xmlns:p="http://schemas.openxmlformats.org/presentationml/2006/main" xmlns:r="http://schemas.openxmlformats.org/officeDocument/2006/relationships">
   <p:cSld>
     <p:spTree>
@@ -3785,7 +4706,7 @@
 </p:sld>
 </file>
 
-<file path=ppt/slides/slide22.xml><?xml version="1.0" encoding="utf-8"?>
+<file path=ppt/slides/slide42.xml><?xml version="1.0" encoding="utf-8"?>
 <p:sld xmlns:a="http://schemas.openxmlformats.org/drawingml/2006/main" xmlns:p="http://schemas.openxmlformats.org/presentationml/2006/main" xmlns:r="http://schemas.openxmlformats.org/officeDocument/2006/relationships">
   <p:cSld>
     <p:spTree>
@@ -3827,7 +4748,7 @@
 </p:sld>
 </file>
 
-<file path=ppt/slides/slide23.xml><?xml version="1.0" encoding="utf-8"?>
+<file path=ppt/slides/slide43.xml><?xml version="1.0" encoding="utf-8"?>
 <p:sld xmlns:a="http://schemas.openxmlformats.org/drawingml/2006/main" xmlns:p="http://schemas.openxmlformats.org/presentationml/2006/main" xmlns:r="http://schemas.openxmlformats.org/officeDocument/2006/relationships">
   <p:cSld>
     <p:spTree>
@@ -3869,930 +4790,6 @@
 </p:sld>
 </file>
 
-<file path=ppt/slides/slide24.xml><?xml version="1.0" encoding="utf-8"?>
-<p:sld xmlns:a="http://schemas.openxmlformats.org/drawingml/2006/main" xmlns:p="http://schemas.openxmlformats.org/presentationml/2006/main" xmlns:r="http://schemas.openxmlformats.org/officeDocument/2006/relationships">
-  <p:cSld>
-    <p:spTree>
-      <p:nvGrpSpPr>
-        <p:cNvPr id="1" name=""/>
-        <p:cNvGrpSpPr/>
-        <p:nvPr/>
-      </p:nvGrpSpPr>
-      <p:grpSpPr/>
-      <p:pic>
-        <p:nvPicPr>
-          <p:cNvPr id="2" name="Picture 1" descr="UC10_SaveLoad_Description.png"/>
-          <p:cNvPicPr>
-            <a:picLocks noChangeAspect="1"/>
-          </p:cNvPicPr>
-          <p:nvPr/>
-        </p:nvPicPr>
-        <p:blipFill>
-          <a:blip r:embed="rId2"/>
-          <a:stretch>
-            <a:fillRect/>
-          </a:stretch>
-        </p:blipFill>
-        <p:spPr>
-          <a:xfrm>
-            <a:off x="1447800" y="925830"/>
-            <a:ext cx="6248400" cy="5372100"/>
-          </a:xfrm>
-          <a:prstGeom prst="rect">
-            <a:avLst/>
-          </a:prstGeom>
-        </p:spPr>
-      </p:pic>
-    </p:spTree>
-  </p:cSld>
-  <p:clrMapOvr>
-    <a:masterClrMapping/>
-  </p:clrMapOvr>
-</p:sld>
-</file>
-
-<file path=ppt/slides/slide25.xml><?xml version="1.0" encoding="utf-8"?>
-<p:sld xmlns:a="http://schemas.openxmlformats.org/drawingml/2006/main" xmlns:p="http://schemas.openxmlformats.org/presentationml/2006/main" xmlns:r="http://schemas.openxmlformats.org/officeDocument/2006/relationships">
-  <p:cSld>
-    <p:spTree>
-      <p:nvGrpSpPr>
-        <p:cNvPr id="1" name=""/>
-        <p:cNvGrpSpPr/>
-        <p:nvPr/>
-      </p:nvGrpSpPr>
-      <p:grpSpPr/>
-      <p:pic>
-        <p:nvPicPr>
-          <p:cNvPr id="2" name="Picture 1" descr="UC10_SaveLoad_Activity.png"/>
-          <p:cNvPicPr>
-            <a:picLocks noChangeAspect="1"/>
-          </p:cNvPicPr>
-          <p:nvPr/>
-        </p:nvPicPr>
-        <p:blipFill>
-          <a:blip r:embed="rId2"/>
-          <a:stretch>
-            <a:fillRect/>
-          </a:stretch>
-        </p:blipFill>
-        <p:spPr>
-          <a:xfrm>
-            <a:off x="1143471" y="914400"/>
-            <a:ext cx="6857058" cy="5394960"/>
-          </a:xfrm>
-          <a:prstGeom prst="rect">
-            <a:avLst/>
-          </a:prstGeom>
-        </p:spPr>
-      </p:pic>
-    </p:spTree>
-  </p:cSld>
-  <p:clrMapOvr>
-    <a:masterClrMapping/>
-  </p:clrMapOvr>
-</p:sld>
-</file>
-
-<file path=ppt/slides/slide26.xml><?xml version="1.0" encoding="utf-8"?>
-<p:sld xmlns:a="http://schemas.openxmlformats.org/drawingml/2006/main" xmlns:p="http://schemas.openxmlformats.org/presentationml/2006/main" xmlns:r="http://schemas.openxmlformats.org/officeDocument/2006/relationships">
-  <p:cSld>
-    <p:spTree>
-      <p:nvGrpSpPr>
-        <p:cNvPr id="1" name=""/>
-        <p:cNvGrpSpPr/>
-        <p:nvPr/>
-      </p:nvGrpSpPr>
-      <p:grpSpPr/>
-      <p:pic>
-        <p:nvPicPr>
-          <p:cNvPr id="2" name="Picture 1" descr="UC10_SaveLoad_Sequence.png"/>
-          <p:cNvPicPr>
-            <a:picLocks noChangeAspect="1"/>
-          </p:cNvPicPr>
-          <p:nvPr/>
-        </p:nvPicPr>
-        <p:blipFill>
-          <a:blip r:embed="rId2"/>
-          <a:stretch>
-            <a:fillRect/>
-          </a:stretch>
-        </p:blipFill>
-        <p:spPr>
-          <a:xfrm>
-            <a:off x="1793439" y="914400"/>
-            <a:ext cx="5557121" cy="5394960"/>
-          </a:xfrm>
-          <a:prstGeom prst="rect">
-            <a:avLst/>
-          </a:prstGeom>
-        </p:spPr>
-      </p:pic>
-    </p:spTree>
-  </p:cSld>
-  <p:clrMapOvr>
-    <a:masterClrMapping/>
-  </p:clrMapOvr>
-</p:sld>
-</file>
-
-<file path=ppt/slides/slide27.xml><?xml version="1.0" encoding="utf-8"?>
-<p:sld xmlns:a="http://schemas.openxmlformats.org/drawingml/2006/main" xmlns:p="http://schemas.openxmlformats.org/presentationml/2006/main" xmlns:r="http://schemas.openxmlformats.org/officeDocument/2006/relationships">
-  <p:cSld>
-    <p:spTree>
-      <p:nvGrpSpPr>
-        <p:cNvPr id="1" name=""/>
-        <p:cNvGrpSpPr/>
-        <p:nvPr/>
-      </p:nvGrpSpPr>
-      <p:grpSpPr/>
-      <p:pic>
-        <p:nvPicPr>
-          <p:cNvPr id="2" name="Picture 1" descr="UC10_SaveLoad_TestCases.png"/>
-          <p:cNvPicPr>
-            <a:picLocks noChangeAspect="1"/>
-          </p:cNvPicPr>
-          <p:nvPr/>
-        </p:nvPicPr>
-        <p:blipFill>
-          <a:blip r:embed="rId2"/>
-          <a:stretch>
-            <a:fillRect/>
-          </a:stretch>
-        </p:blipFill>
-        <p:spPr>
-          <a:xfrm>
-            <a:off x="548640" y="2261532"/>
-            <a:ext cx="8046720" cy="2700695"/>
-          </a:xfrm>
-          <a:prstGeom prst="rect">
-            <a:avLst/>
-          </a:prstGeom>
-        </p:spPr>
-      </p:pic>
-    </p:spTree>
-  </p:cSld>
-  <p:clrMapOvr>
-    <a:masterClrMapping/>
-  </p:clrMapOvr>
-</p:sld>
-</file>
-
-<file path=ppt/slides/slide28.xml><?xml version="1.0" encoding="utf-8"?>
-<p:sld xmlns:a="http://schemas.openxmlformats.org/drawingml/2006/main" xmlns:p="http://schemas.openxmlformats.org/presentationml/2006/main" xmlns:r="http://schemas.openxmlformats.org/officeDocument/2006/relationships">
-  <p:cSld>
-    <p:spTree>
-      <p:nvGrpSpPr>
-        <p:cNvPr id="1" name=""/>
-        <p:cNvGrpSpPr/>
-        <p:nvPr/>
-      </p:nvGrpSpPr>
-      <p:grpSpPr/>
-      <p:pic>
-        <p:nvPicPr>
-          <p:cNvPr id="2" name="Picture 1" descr="UC10_SaveLoad_Description.png"/>
-          <p:cNvPicPr>
-            <a:picLocks noChangeAspect="1"/>
-          </p:cNvPicPr>
-          <p:nvPr/>
-        </p:nvPicPr>
-        <p:blipFill>
-          <a:blip r:embed="rId2"/>
-          <a:stretch>
-            <a:fillRect/>
-          </a:stretch>
-        </p:blipFill>
-        <p:spPr>
-          <a:xfrm>
-            <a:off x="1447800" y="925830"/>
-            <a:ext cx="6248400" cy="5372100"/>
-          </a:xfrm>
-          <a:prstGeom prst="rect">
-            <a:avLst/>
-          </a:prstGeom>
-        </p:spPr>
-      </p:pic>
-    </p:spTree>
-  </p:cSld>
-  <p:clrMapOvr>
-    <a:masterClrMapping/>
-  </p:clrMapOvr>
-</p:sld>
-</file>
-
-<file path=ppt/slides/slide29.xml><?xml version="1.0" encoding="utf-8"?>
-<p:sld xmlns:a="http://schemas.openxmlformats.org/drawingml/2006/main" xmlns:p="http://schemas.openxmlformats.org/presentationml/2006/main" xmlns:r="http://schemas.openxmlformats.org/officeDocument/2006/relationships">
-  <p:cSld>
-    <p:spTree>
-      <p:nvGrpSpPr>
-        <p:cNvPr id="1" name=""/>
-        <p:cNvGrpSpPr/>
-        <p:nvPr/>
-      </p:nvGrpSpPr>
-      <p:grpSpPr/>
-      <p:pic>
-        <p:nvPicPr>
-          <p:cNvPr id="2" name="Picture 1" descr="UC10_SaveLoad_Activity.png"/>
-          <p:cNvPicPr>
-            <a:picLocks noChangeAspect="1"/>
-          </p:cNvPicPr>
-          <p:nvPr/>
-        </p:nvPicPr>
-        <p:blipFill>
-          <a:blip r:embed="rId2"/>
-          <a:stretch>
-            <a:fillRect/>
-          </a:stretch>
-        </p:blipFill>
-        <p:spPr>
-          <a:xfrm>
-            <a:off x="1143471" y="914400"/>
-            <a:ext cx="6857058" cy="5394960"/>
-          </a:xfrm>
-          <a:prstGeom prst="rect">
-            <a:avLst/>
-          </a:prstGeom>
-        </p:spPr>
-      </p:pic>
-    </p:spTree>
-  </p:cSld>
-  <p:clrMapOvr>
-    <a:masterClrMapping/>
-  </p:clrMapOvr>
-</p:sld>
-</file>
-
-<file path=ppt/slides/slide3.xml><?xml version="1.0" encoding="utf-8"?>
-<p:sld xmlns:a="http://schemas.openxmlformats.org/drawingml/2006/main" xmlns:p="http://schemas.openxmlformats.org/presentationml/2006/main" xmlns:r="http://schemas.openxmlformats.org/officeDocument/2006/relationships">
-  <p:cSld>
-    <p:spTree>
-      <p:nvGrpSpPr>
-        <p:cNvPr id="1" name=""/>
-        <p:cNvGrpSpPr/>
-        <p:nvPr/>
-      </p:nvGrpSpPr>
-      <p:grpSpPr/>
-      <p:pic>
-        <p:nvPicPr>
-          <p:cNvPr id="2" name="Picture 1" descr="UC_Overview.png"/>
-          <p:cNvPicPr>
-            <a:picLocks noChangeAspect="1"/>
-          </p:cNvPicPr>
-          <p:nvPr/>
-        </p:nvPicPr>
-        <p:blipFill>
-          <a:blip r:embed="rId2"/>
-          <a:stretch>
-            <a:fillRect/>
-          </a:stretch>
-        </p:blipFill>
-        <p:spPr>
-          <a:xfrm>
-            <a:off x="909439" y="914400"/>
-            <a:ext cx="7325121" cy="5394960"/>
-          </a:xfrm>
-          <a:prstGeom prst="rect">
-            <a:avLst/>
-          </a:prstGeom>
-        </p:spPr>
-      </p:pic>
-    </p:spTree>
-  </p:cSld>
-  <p:clrMapOvr>
-    <a:masterClrMapping/>
-  </p:clrMapOvr>
-</p:sld>
-</file>
-
-<file path=ppt/slides/slide30.xml><?xml version="1.0" encoding="utf-8"?>
-<p:sld xmlns:a="http://schemas.openxmlformats.org/drawingml/2006/main" xmlns:p="http://schemas.openxmlformats.org/presentationml/2006/main" xmlns:r="http://schemas.openxmlformats.org/officeDocument/2006/relationships">
-  <p:cSld>
-    <p:spTree>
-      <p:nvGrpSpPr>
-        <p:cNvPr id="1" name=""/>
-        <p:cNvGrpSpPr/>
-        <p:nvPr/>
-      </p:nvGrpSpPr>
-      <p:grpSpPr/>
-      <p:pic>
-        <p:nvPicPr>
-          <p:cNvPr id="2" name="Picture 1" descr="UC10_SaveLoad_Sequence.png"/>
-          <p:cNvPicPr>
-            <a:picLocks noChangeAspect="1"/>
-          </p:cNvPicPr>
-          <p:nvPr/>
-        </p:nvPicPr>
-        <p:blipFill>
-          <a:blip r:embed="rId2"/>
-          <a:stretch>
-            <a:fillRect/>
-          </a:stretch>
-        </p:blipFill>
-        <p:spPr>
-          <a:xfrm>
-            <a:off x="1793439" y="914400"/>
-            <a:ext cx="5557121" cy="5394960"/>
-          </a:xfrm>
-          <a:prstGeom prst="rect">
-            <a:avLst/>
-          </a:prstGeom>
-        </p:spPr>
-      </p:pic>
-    </p:spTree>
-  </p:cSld>
-  <p:clrMapOvr>
-    <a:masterClrMapping/>
-  </p:clrMapOvr>
-</p:sld>
-</file>
-
-<file path=ppt/slides/slide31.xml><?xml version="1.0" encoding="utf-8"?>
-<p:sld xmlns:a="http://schemas.openxmlformats.org/drawingml/2006/main" xmlns:p="http://schemas.openxmlformats.org/presentationml/2006/main" xmlns:r="http://schemas.openxmlformats.org/officeDocument/2006/relationships">
-  <p:cSld>
-    <p:spTree>
-      <p:nvGrpSpPr>
-        <p:cNvPr id="1" name=""/>
-        <p:cNvGrpSpPr/>
-        <p:nvPr/>
-      </p:nvGrpSpPr>
-      <p:grpSpPr/>
-      <p:pic>
-        <p:nvPicPr>
-          <p:cNvPr id="2" name="Picture 1" descr="UC10_SaveLoad_TestCases.png"/>
-          <p:cNvPicPr>
-            <a:picLocks noChangeAspect="1"/>
-          </p:cNvPicPr>
-          <p:nvPr/>
-        </p:nvPicPr>
-        <p:blipFill>
-          <a:blip r:embed="rId2"/>
-          <a:stretch>
-            <a:fillRect/>
-          </a:stretch>
-        </p:blipFill>
-        <p:spPr>
-          <a:xfrm>
-            <a:off x="548640" y="2261532"/>
-            <a:ext cx="8046720" cy="2700695"/>
-          </a:xfrm>
-          <a:prstGeom prst="rect">
-            <a:avLst/>
-          </a:prstGeom>
-        </p:spPr>
-      </p:pic>
-    </p:spTree>
-  </p:cSld>
-  <p:clrMapOvr>
-    <a:masterClrMapping/>
-  </p:clrMapOvr>
-</p:sld>
-</file>
-
-<file path=ppt/slides/slide32.xml><?xml version="1.0" encoding="utf-8"?>
-<p:sld xmlns:a="http://schemas.openxmlformats.org/drawingml/2006/main" xmlns:p="http://schemas.openxmlformats.org/presentationml/2006/main" xmlns:r="http://schemas.openxmlformats.org/officeDocument/2006/relationships">
-  <p:cSld>
-    <p:spTree>
-      <p:nvGrpSpPr>
-        <p:cNvPr id="1" name=""/>
-        <p:cNvGrpSpPr/>
-        <p:nvPr/>
-      </p:nvGrpSpPr>
-      <p:grpSpPr/>
-      <p:pic>
-        <p:nvPicPr>
-          <p:cNvPr id="2" name="Picture 1" descr="UC10_SaveLoad_Description.png"/>
-          <p:cNvPicPr>
-            <a:picLocks noChangeAspect="1"/>
-          </p:cNvPicPr>
-          <p:nvPr/>
-        </p:nvPicPr>
-        <p:blipFill>
-          <a:blip r:embed="rId2"/>
-          <a:stretch>
-            <a:fillRect/>
-          </a:stretch>
-        </p:blipFill>
-        <p:spPr>
-          <a:xfrm>
-            <a:off x="1447800" y="925830"/>
-            <a:ext cx="6248400" cy="5372100"/>
-          </a:xfrm>
-          <a:prstGeom prst="rect">
-            <a:avLst/>
-          </a:prstGeom>
-        </p:spPr>
-      </p:pic>
-    </p:spTree>
-  </p:cSld>
-  <p:clrMapOvr>
-    <a:masterClrMapping/>
-  </p:clrMapOvr>
-</p:sld>
-</file>
-
-<file path=ppt/slides/slide33.xml><?xml version="1.0" encoding="utf-8"?>
-<p:sld xmlns:a="http://schemas.openxmlformats.org/drawingml/2006/main" xmlns:p="http://schemas.openxmlformats.org/presentationml/2006/main" xmlns:r="http://schemas.openxmlformats.org/officeDocument/2006/relationships">
-  <p:cSld>
-    <p:spTree>
-      <p:nvGrpSpPr>
-        <p:cNvPr id="1" name=""/>
-        <p:cNvGrpSpPr/>
-        <p:nvPr/>
-      </p:nvGrpSpPr>
-      <p:grpSpPr/>
-      <p:pic>
-        <p:nvPicPr>
-          <p:cNvPr id="2" name="Picture 1" descr="UC10_SaveLoad_Activity.png"/>
-          <p:cNvPicPr>
-            <a:picLocks noChangeAspect="1"/>
-          </p:cNvPicPr>
-          <p:nvPr/>
-        </p:nvPicPr>
-        <p:blipFill>
-          <a:blip r:embed="rId2"/>
-          <a:stretch>
-            <a:fillRect/>
-          </a:stretch>
-        </p:blipFill>
-        <p:spPr>
-          <a:xfrm>
-            <a:off x="1143471" y="914400"/>
-            <a:ext cx="6857058" cy="5394960"/>
-          </a:xfrm>
-          <a:prstGeom prst="rect">
-            <a:avLst/>
-          </a:prstGeom>
-        </p:spPr>
-      </p:pic>
-    </p:spTree>
-  </p:cSld>
-  <p:clrMapOvr>
-    <a:masterClrMapping/>
-  </p:clrMapOvr>
-</p:sld>
-</file>
-
-<file path=ppt/slides/slide34.xml><?xml version="1.0" encoding="utf-8"?>
-<p:sld xmlns:a="http://schemas.openxmlformats.org/drawingml/2006/main" xmlns:p="http://schemas.openxmlformats.org/presentationml/2006/main" xmlns:r="http://schemas.openxmlformats.org/officeDocument/2006/relationships">
-  <p:cSld>
-    <p:spTree>
-      <p:nvGrpSpPr>
-        <p:cNvPr id="1" name=""/>
-        <p:cNvGrpSpPr/>
-        <p:nvPr/>
-      </p:nvGrpSpPr>
-      <p:grpSpPr/>
-      <p:pic>
-        <p:nvPicPr>
-          <p:cNvPr id="2" name="Picture 1" descr="UC10_SaveLoad_Sequence.png"/>
-          <p:cNvPicPr>
-            <a:picLocks noChangeAspect="1"/>
-          </p:cNvPicPr>
-          <p:nvPr/>
-        </p:nvPicPr>
-        <p:blipFill>
-          <a:blip r:embed="rId2"/>
-          <a:stretch>
-            <a:fillRect/>
-          </a:stretch>
-        </p:blipFill>
-        <p:spPr>
-          <a:xfrm>
-            <a:off x="1793439" y="914400"/>
-            <a:ext cx="5557121" cy="5394960"/>
-          </a:xfrm>
-          <a:prstGeom prst="rect">
-            <a:avLst/>
-          </a:prstGeom>
-        </p:spPr>
-      </p:pic>
-    </p:spTree>
-  </p:cSld>
-  <p:clrMapOvr>
-    <a:masterClrMapping/>
-  </p:clrMapOvr>
-</p:sld>
-</file>
-
-<file path=ppt/slides/slide35.xml><?xml version="1.0" encoding="utf-8"?>
-<p:sld xmlns:a="http://schemas.openxmlformats.org/drawingml/2006/main" xmlns:p="http://schemas.openxmlformats.org/presentationml/2006/main" xmlns:r="http://schemas.openxmlformats.org/officeDocument/2006/relationships">
-  <p:cSld>
-    <p:spTree>
-      <p:nvGrpSpPr>
-        <p:cNvPr id="1" name=""/>
-        <p:cNvGrpSpPr/>
-        <p:nvPr/>
-      </p:nvGrpSpPr>
-      <p:grpSpPr/>
-      <p:pic>
-        <p:nvPicPr>
-          <p:cNvPr id="2" name="Picture 1" descr="UC10_SaveLoad_TestCases.png"/>
-          <p:cNvPicPr>
-            <a:picLocks noChangeAspect="1"/>
-          </p:cNvPicPr>
-          <p:nvPr/>
-        </p:nvPicPr>
-        <p:blipFill>
-          <a:blip r:embed="rId2"/>
-          <a:stretch>
-            <a:fillRect/>
-          </a:stretch>
-        </p:blipFill>
-        <p:spPr>
-          <a:xfrm>
-            <a:off x="548640" y="2261532"/>
-            <a:ext cx="8046720" cy="2700695"/>
-          </a:xfrm>
-          <a:prstGeom prst="rect">
-            <a:avLst/>
-          </a:prstGeom>
-        </p:spPr>
-      </p:pic>
-    </p:spTree>
-  </p:cSld>
-  <p:clrMapOvr>
-    <a:masterClrMapping/>
-  </p:clrMapOvr>
-</p:sld>
-</file>
-
-<file path=ppt/slides/slide36.xml><?xml version="1.0" encoding="utf-8"?>
-<p:sld xmlns:a="http://schemas.openxmlformats.org/drawingml/2006/main" xmlns:p="http://schemas.openxmlformats.org/presentationml/2006/main" xmlns:r="http://schemas.openxmlformats.org/officeDocument/2006/relationships">
-  <p:cSld>
-    <p:spTree>
-      <p:nvGrpSpPr>
-        <p:cNvPr id="1" name=""/>
-        <p:cNvGrpSpPr/>
-        <p:nvPr/>
-      </p:nvGrpSpPr>
-      <p:grpSpPr/>
-      <p:pic>
-        <p:nvPicPr>
-          <p:cNvPr id="2" name="Picture 1" descr="UC10_SaveLoad_Description.png"/>
-          <p:cNvPicPr>
-            <a:picLocks noChangeAspect="1"/>
-          </p:cNvPicPr>
-          <p:nvPr/>
-        </p:nvPicPr>
-        <p:blipFill>
-          <a:blip r:embed="rId2"/>
-          <a:stretch>
-            <a:fillRect/>
-          </a:stretch>
-        </p:blipFill>
-        <p:spPr>
-          <a:xfrm>
-            <a:off x="1447800" y="925830"/>
-            <a:ext cx="6248400" cy="5372100"/>
-          </a:xfrm>
-          <a:prstGeom prst="rect">
-            <a:avLst/>
-          </a:prstGeom>
-        </p:spPr>
-      </p:pic>
-    </p:spTree>
-  </p:cSld>
-  <p:clrMapOvr>
-    <a:masterClrMapping/>
-  </p:clrMapOvr>
-</p:sld>
-</file>
-
-<file path=ppt/slides/slide37.xml><?xml version="1.0" encoding="utf-8"?>
-<p:sld xmlns:a="http://schemas.openxmlformats.org/drawingml/2006/main" xmlns:p="http://schemas.openxmlformats.org/presentationml/2006/main" xmlns:r="http://schemas.openxmlformats.org/officeDocument/2006/relationships">
-  <p:cSld>
-    <p:spTree>
-      <p:nvGrpSpPr>
-        <p:cNvPr id="1" name=""/>
-        <p:cNvGrpSpPr/>
-        <p:nvPr/>
-      </p:nvGrpSpPr>
-      <p:grpSpPr/>
-      <p:pic>
-        <p:nvPicPr>
-          <p:cNvPr id="2" name="Picture 1" descr="UC10_SaveLoad_Activity.png"/>
-          <p:cNvPicPr>
-            <a:picLocks noChangeAspect="1"/>
-          </p:cNvPicPr>
-          <p:nvPr/>
-        </p:nvPicPr>
-        <p:blipFill>
-          <a:blip r:embed="rId2"/>
-          <a:stretch>
-            <a:fillRect/>
-          </a:stretch>
-        </p:blipFill>
-        <p:spPr>
-          <a:xfrm>
-            <a:off x="1143471" y="914400"/>
-            <a:ext cx="6857058" cy="5394960"/>
-          </a:xfrm>
-          <a:prstGeom prst="rect">
-            <a:avLst/>
-          </a:prstGeom>
-        </p:spPr>
-      </p:pic>
-    </p:spTree>
-  </p:cSld>
-  <p:clrMapOvr>
-    <a:masterClrMapping/>
-  </p:clrMapOvr>
-</p:sld>
-</file>
-
-<file path=ppt/slides/slide38.xml><?xml version="1.0" encoding="utf-8"?>
-<p:sld xmlns:a="http://schemas.openxmlformats.org/drawingml/2006/main" xmlns:p="http://schemas.openxmlformats.org/presentationml/2006/main" xmlns:r="http://schemas.openxmlformats.org/officeDocument/2006/relationships">
-  <p:cSld>
-    <p:spTree>
-      <p:nvGrpSpPr>
-        <p:cNvPr id="1" name=""/>
-        <p:cNvGrpSpPr/>
-        <p:nvPr/>
-      </p:nvGrpSpPr>
-      <p:grpSpPr/>
-      <p:pic>
-        <p:nvPicPr>
-          <p:cNvPr id="2" name="Picture 1" descr="UC10_SaveLoad_Sequence.png"/>
-          <p:cNvPicPr>
-            <a:picLocks noChangeAspect="1"/>
-          </p:cNvPicPr>
-          <p:nvPr/>
-        </p:nvPicPr>
-        <p:blipFill>
-          <a:blip r:embed="rId2"/>
-          <a:stretch>
-            <a:fillRect/>
-          </a:stretch>
-        </p:blipFill>
-        <p:spPr>
-          <a:xfrm>
-            <a:off x="1793439" y="914400"/>
-            <a:ext cx="5557121" cy="5394960"/>
-          </a:xfrm>
-          <a:prstGeom prst="rect">
-            <a:avLst/>
-          </a:prstGeom>
-        </p:spPr>
-      </p:pic>
-    </p:spTree>
-  </p:cSld>
-  <p:clrMapOvr>
-    <a:masterClrMapping/>
-  </p:clrMapOvr>
-</p:sld>
-</file>
-
-<file path=ppt/slides/slide39.xml><?xml version="1.0" encoding="utf-8"?>
-<p:sld xmlns:a="http://schemas.openxmlformats.org/drawingml/2006/main" xmlns:p="http://schemas.openxmlformats.org/presentationml/2006/main" xmlns:r="http://schemas.openxmlformats.org/officeDocument/2006/relationships">
-  <p:cSld>
-    <p:spTree>
-      <p:nvGrpSpPr>
-        <p:cNvPr id="1" name=""/>
-        <p:cNvGrpSpPr/>
-        <p:nvPr/>
-      </p:nvGrpSpPr>
-      <p:grpSpPr/>
-      <p:pic>
-        <p:nvPicPr>
-          <p:cNvPr id="2" name="Picture 1" descr="UC10_SaveLoad_TestCases.png"/>
-          <p:cNvPicPr>
-            <a:picLocks noChangeAspect="1"/>
-          </p:cNvPicPr>
-          <p:nvPr/>
-        </p:nvPicPr>
-        <p:blipFill>
-          <a:blip r:embed="rId2"/>
-          <a:stretch>
-            <a:fillRect/>
-          </a:stretch>
-        </p:blipFill>
-        <p:spPr>
-          <a:xfrm>
-            <a:off x="548640" y="2261532"/>
-            <a:ext cx="8046720" cy="2700695"/>
-          </a:xfrm>
-          <a:prstGeom prst="rect">
-            <a:avLst/>
-          </a:prstGeom>
-        </p:spPr>
-      </p:pic>
-    </p:spTree>
-  </p:cSld>
-  <p:clrMapOvr>
-    <a:masterClrMapping/>
-  </p:clrMapOvr>
-</p:sld>
-</file>
-
-<file path=ppt/slides/slide4.xml><?xml version="1.0" encoding="utf-8"?>
-<p:sld xmlns:a="http://schemas.openxmlformats.org/drawingml/2006/main" xmlns:p="http://schemas.openxmlformats.org/presentationml/2006/main" xmlns:r="http://schemas.openxmlformats.org/officeDocument/2006/relationships">
-  <p:cSld>
-    <p:spTree>
-      <p:nvGrpSpPr>
-        <p:cNvPr id="1" name=""/>
-        <p:cNvGrpSpPr/>
-        <p:nvPr/>
-      </p:nvGrpSpPr>
-      <p:grpSpPr/>
-      <p:pic>
-        <p:nvPicPr>
-          <p:cNvPr id="2" name="Picture 1" descr="UC10_SaveLoad_Description.png"/>
-          <p:cNvPicPr>
-            <a:picLocks noChangeAspect="1"/>
-          </p:cNvPicPr>
-          <p:nvPr/>
-        </p:nvPicPr>
-        <p:blipFill>
-          <a:blip r:embed="rId2"/>
-          <a:stretch>
-            <a:fillRect/>
-          </a:stretch>
-        </p:blipFill>
-        <p:spPr>
-          <a:xfrm>
-            <a:off x="1447800" y="925830"/>
-            <a:ext cx="6248400" cy="5372100"/>
-          </a:xfrm>
-          <a:prstGeom prst="rect">
-            <a:avLst/>
-          </a:prstGeom>
-        </p:spPr>
-      </p:pic>
-    </p:spTree>
-  </p:cSld>
-  <p:clrMapOvr>
-    <a:masterClrMapping/>
-  </p:clrMapOvr>
-</p:sld>
-</file>
-
-<file path=ppt/slides/slide40.xml><?xml version="1.0" encoding="utf-8"?>
-<p:sld xmlns:a="http://schemas.openxmlformats.org/drawingml/2006/main" xmlns:p="http://schemas.openxmlformats.org/presentationml/2006/main" xmlns:r="http://schemas.openxmlformats.org/officeDocument/2006/relationships">
-  <p:cSld>
-    <p:spTree>
-      <p:nvGrpSpPr>
-        <p:cNvPr id="1" name=""/>
-        <p:cNvGrpSpPr/>
-        <p:nvPr/>
-      </p:nvGrpSpPr>
-      <p:grpSpPr/>
-      <p:pic>
-        <p:nvPicPr>
-          <p:cNvPr id="2" name="Picture 1" descr="UC10_SaveLoad_Description.png"/>
-          <p:cNvPicPr>
-            <a:picLocks noChangeAspect="1"/>
-          </p:cNvPicPr>
-          <p:nvPr/>
-        </p:nvPicPr>
-        <p:blipFill>
-          <a:blip r:embed="rId2"/>
-          <a:stretch>
-            <a:fillRect/>
-          </a:stretch>
-        </p:blipFill>
-        <p:spPr>
-          <a:xfrm>
-            <a:off x="1447800" y="925830"/>
-            <a:ext cx="6248400" cy="5372100"/>
-          </a:xfrm>
-          <a:prstGeom prst="rect">
-            <a:avLst/>
-          </a:prstGeom>
-        </p:spPr>
-      </p:pic>
-    </p:spTree>
-  </p:cSld>
-  <p:clrMapOvr>
-    <a:masterClrMapping/>
-  </p:clrMapOvr>
-</p:sld>
-</file>
-
-<file path=ppt/slides/slide41.xml><?xml version="1.0" encoding="utf-8"?>
-<p:sld xmlns:a="http://schemas.openxmlformats.org/drawingml/2006/main" xmlns:p="http://schemas.openxmlformats.org/presentationml/2006/main" xmlns:r="http://schemas.openxmlformats.org/officeDocument/2006/relationships">
-  <p:cSld>
-    <p:spTree>
-      <p:nvGrpSpPr>
-        <p:cNvPr id="1" name=""/>
-        <p:cNvGrpSpPr/>
-        <p:nvPr/>
-      </p:nvGrpSpPr>
-      <p:grpSpPr/>
-      <p:pic>
-        <p:nvPicPr>
-          <p:cNvPr id="2" name="Picture 1" descr="UC10_SaveLoad_Activity.png"/>
-          <p:cNvPicPr>
-            <a:picLocks noChangeAspect="1"/>
-          </p:cNvPicPr>
-          <p:nvPr/>
-        </p:nvPicPr>
-        <p:blipFill>
-          <a:blip r:embed="rId2"/>
-          <a:stretch>
-            <a:fillRect/>
-          </a:stretch>
-        </p:blipFill>
-        <p:spPr>
-          <a:xfrm>
-            <a:off x="1143471" y="914400"/>
-            <a:ext cx="6857058" cy="5394960"/>
-          </a:xfrm>
-          <a:prstGeom prst="rect">
-            <a:avLst/>
-          </a:prstGeom>
-        </p:spPr>
-      </p:pic>
-    </p:spTree>
-  </p:cSld>
-  <p:clrMapOvr>
-    <a:masterClrMapping/>
-  </p:clrMapOvr>
-</p:sld>
-</file>
-
-<file path=ppt/slides/slide42.xml><?xml version="1.0" encoding="utf-8"?>
-<p:sld xmlns:a="http://schemas.openxmlformats.org/drawingml/2006/main" xmlns:p="http://schemas.openxmlformats.org/presentationml/2006/main" xmlns:r="http://schemas.openxmlformats.org/officeDocument/2006/relationships">
-  <p:cSld>
-    <p:spTree>
-      <p:nvGrpSpPr>
-        <p:cNvPr id="1" name=""/>
-        <p:cNvGrpSpPr/>
-        <p:nvPr/>
-      </p:nvGrpSpPr>
-      <p:grpSpPr/>
-      <p:pic>
-        <p:nvPicPr>
-          <p:cNvPr id="2" name="Picture 1" descr="UC10_SaveLoad_Sequence.png"/>
-          <p:cNvPicPr>
-            <a:picLocks noChangeAspect="1"/>
-          </p:cNvPicPr>
-          <p:nvPr/>
-        </p:nvPicPr>
-        <p:blipFill>
-          <a:blip r:embed="rId2"/>
-          <a:stretch>
-            <a:fillRect/>
-          </a:stretch>
-        </p:blipFill>
-        <p:spPr>
-          <a:xfrm>
-            <a:off x="1793439" y="914400"/>
-            <a:ext cx="5557121" cy="5394960"/>
-          </a:xfrm>
-          <a:prstGeom prst="rect">
-            <a:avLst/>
-          </a:prstGeom>
-        </p:spPr>
-      </p:pic>
-    </p:spTree>
-  </p:cSld>
-  <p:clrMapOvr>
-    <a:masterClrMapping/>
-  </p:clrMapOvr>
-</p:sld>
-</file>
-
-<file path=ppt/slides/slide43.xml><?xml version="1.0" encoding="utf-8"?>
-<p:sld xmlns:a="http://schemas.openxmlformats.org/drawingml/2006/main" xmlns:p="http://schemas.openxmlformats.org/presentationml/2006/main" xmlns:r="http://schemas.openxmlformats.org/officeDocument/2006/relationships">
-  <p:cSld>
-    <p:spTree>
-      <p:nvGrpSpPr>
-        <p:cNvPr id="1" name=""/>
-        <p:cNvGrpSpPr/>
-        <p:nvPr/>
-      </p:nvGrpSpPr>
-      <p:grpSpPr/>
-      <p:pic>
-        <p:nvPicPr>
-          <p:cNvPr id="2" name="Picture 1" descr="UC10_SaveLoad_TestCases.png"/>
-          <p:cNvPicPr>
-            <a:picLocks noChangeAspect="1"/>
-          </p:cNvPicPr>
-          <p:nvPr/>
-        </p:nvPicPr>
-        <p:blipFill>
-          <a:blip r:embed="rId2"/>
-          <a:stretch>
-            <a:fillRect/>
-          </a:stretch>
-        </p:blipFill>
-        <p:spPr>
-          <a:xfrm>
-            <a:off x="548640" y="2261532"/>
-            <a:ext cx="8046720" cy="2700695"/>
-          </a:xfrm>
-          <a:prstGeom prst="rect">
-            <a:avLst/>
-          </a:prstGeom>
-        </p:spPr>
-      </p:pic>
-    </p:spTree>
-  </p:cSld>
-  <p:clrMapOvr>
-    <a:masterClrMapping/>
-  </p:clrMapOvr>
-</p:sld>
-</file>
-
 <file path=ppt/slides/slide44.xml><?xml version="1.0" encoding="utf-8"?>
 <p:sld xmlns:a="http://schemas.openxmlformats.org/drawingml/2006/main" xmlns:p="http://schemas.openxmlformats.org/presentationml/2006/main" xmlns:r="http://schemas.openxmlformats.org/officeDocument/2006/relationships">
   <p:cSld>
@@ -4805,22 +4802,22 @@
       <p:grpSpPr/>
       <p:pic>
         <p:nvPicPr>
-          <p:cNvPr id="2" name="Picture 1" descr="UC10_SaveLoad_Description.png"/>
-          <p:cNvPicPr>
-            <a:picLocks noChangeAspect="1"/>
-          </p:cNvPicPr>
-          <p:nvPr/>
-        </p:nvPicPr>
-        <p:blipFill>
-          <a:blip r:embed="rId2"/>
-          <a:stretch>
-            <a:fillRect/>
-          </a:stretch>
-        </p:blipFill>
-        <p:spPr>
-          <a:xfrm>
-            <a:off x="1447800" y="925830"/>
-            <a:ext cx="6248400" cy="5372100"/>
+          <p:cNvPr id="2" name="Picture 1" descr="UC11_MatchHistory_Description.png"/>
+          <p:cNvPicPr>
+            <a:picLocks noChangeAspect="1"/>
+          </p:cNvPicPr>
+          <p:nvPr/>
+        </p:nvPicPr>
+        <p:blipFill>
+          <a:blip r:embed="rId2"/>
+          <a:stretch>
+            <a:fillRect/>
+          </a:stretch>
+        </p:blipFill>
+        <p:spPr>
+          <a:xfrm>
+            <a:off x="1433512" y="1259205"/>
+            <a:ext cx="6276975" cy="4705350"/>
           </a:xfrm>
           <a:prstGeom prst="rect">
             <a:avLst/>
@@ -4847,22 +4844,22 @@
       <p:grpSpPr/>
       <p:pic>
         <p:nvPicPr>
-          <p:cNvPr id="2" name="Picture 1" descr="UC10_SaveLoad_Activity.png"/>
-          <p:cNvPicPr>
-            <a:picLocks noChangeAspect="1"/>
-          </p:cNvPicPr>
-          <p:nvPr/>
-        </p:nvPicPr>
-        <p:blipFill>
-          <a:blip r:embed="rId2"/>
-          <a:stretch>
-            <a:fillRect/>
-          </a:stretch>
-        </p:blipFill>
-        <p:spPr>
-          <a:xfrm>
-            <a:off x="1143471" y="914400"/>
-            <a:ext cx="6857058" cy="5394960"/>
+          <p:cNvPr id="2" name="Picture 1" descr="UC11_MatchHistory_Activity.png"/>
+          <p:cNvPicPr>
+            <a:picLocks noChangeAspect="1"/>
+          </p:cNvPicPr>
+          <p:nvPr/>
+        </p:nvPicPr>
+        <p:blipFill>
+          <a:blip r:embed="rId2"/>
+          <a:stretch>
+            <a:fillRect/>
+          </a:stretch>
+        </p:blipFill>
+        <p:spPr>
+          <a:xfrm>
+            <a:off x="1847850" y="1187767"/>
+            <a:ext cx="5448300" cy="4848225"/>
           </a:xfrm>
           <a:prstGeom prst="rect">
             <a:avLst/>
@@ -4889,22 +4886,22 @@
       <p:grpSpPr/>
       <p:pic>
         <p:nvPicPr>
-          <p:cNvPr id="2" name="Picture 1" descr="UC10_SaveLoad_Sequence.png"/>
-          <p:cNvPicPr>
-            <a:picLocks noChangeAspect="1"/>
-          </p:cNvPicPr>
-          <p:nvPr/>
-        </p:nvPicPr>
-        <p:blipFill>
-          <a:blip r:embed="rId2"/>
-          <a:stretch>
-            <a:fillRect/>
-          </a:stretch>
-        </p:blipFill>
-        <p:spPr>
-          <a:xfrm>
-            <a:off x="1793439" y="914400"/>
-            <a:ext cx="5557121" cy="5394960"/>
+          <p:cNvPr id="2" name="Picture 1" descr="UC11_MatchHistory_Sequence.png"/>
+          <p:cNvPicPr>
+            <a:picLocks noChangeAspect="1"/>
+          </p:cNvPicPr>
+          <p:nvPr/>
+        </p:nvPicPr>
+        <p:blipFill>
+          <a:blip r:embed="rId2"/>
+          <a:stretch>
+            <a:fillRect/>
+          </a:stretch>
+        </p:blipFill>
+        <p:spPr>
+          <a:xfrm>
+            <a:off x="1552575" y="1206817"/>
+            <a:ext cx="6038850" cy="4810125"/>
           </a:xfrm>
           <a:prstGeom prst="rect">
             <a:avLst/>
@@ -4931,22 +4928,22 @@
       <p:grpSpPr/>
       <p:pic>
         <p:nvPicPr>
-          <p:cNvPr id="2" name="Picture 1" descr="UC10_SaveLoad_TestCases.png"/>
-          <p:cNvPicPr>
-            <a:picLocks noChangeAspect="1"/>
-          </p:cNvPicPr>
-          <p:nvPr/>
-        </p:nvPicPr>
-        <p:blipFill>
-          <a:blip r:embed="rId2"/>
-          <a:stretch>
-            <a:fillRect/>
-          </a:stretch>
-        </p:blipFill>
-        <p:spPr>
-          <a:xfrm>
-            <a:off x="548640" y="2261532"/>
-            <a:ext cx="8046720" cy="2700695"/>
+          <p:cNvPr id="2" name="Picture 1" descr="UC11_MatchHistory_TestCases.png"/>
+          <p:cNvPicPr>
+            <a:picLocks noChangeAspect="1"/>
+          </p:cNvPicPr>
+          <p:nvPr/>
+        </p:nvPicPr>
+        <p:blipFill>
+          <a:blip r:embed="rId2"/>
+          <a:stretch>
+            <a:fillRect/>
+          </a:stretch>
+        </p:blipFill>
+        <p:spPr>
+          <a:xfrm>
+            <a:off x="548640" y="1864288"/>
+            <a:ext cx="8046720" cy="3495183"/>
           </a:xfrm>
           <a:prstGeom prst="rect">
             <a:avLst/>
@@ -4973,22 +4970,22 @@
       <p:grpSpPr/>
       <p:pic>
         <p:nvPicPr>
-          <p:cNvPr id="2" name="Picture 1" descr="UC10_SaveLoad_Description.png"/>
-          <p:cNvPicPr>
-            <a:picLocks noChangeAspect="1"/>
-          </p:cNvPicPr>
-          <p:nvPr/>
-        </p:nvPicPr>
-        <p:blipFill>
-          <a:blip r:embed="rId2"/>
-          <a:stretch>
-            <a:fillRect/>
-          </a:stretch>
-        </p:blipFill>
-        <p:spPr>
-          <a:xfrm>
-            <a:off x="1447800" y="925830"/>
-            <a:ext cx="6248400" cy="5372100"/>
+          <p:cNvPr id="2" name="Picture 1" descr="UC12_LevelUp_Description.png"/>
+          <p:cNvPicPr>
+            <a:picLocks noChangeAspect="1"/>
+          </p:cNvPicPr>
+          <p:nvPr/>
+        </p:nvPicPr>
+        <p:blipFill>
+          <a:blip r:embed="rId2"/>
+          <a:stretch>
+            <a:fillRect/>
+          </a:stretch>
+        </p:blipFill>
+        <p:spPr>
+          <a:xfrm>
+            <a:off x="1181011" y="914400"/>
+            <a:ext cx="6781978" cy="5394960"/>
           </a:xfrm>
           <a:prstGeom prst="rect">
             <a:avLst/>
@@ -5015,22 +5012,22 @@
       <p:grpSpPr/>
       <p:pic>
         <p:nvPicPr>
-          <p:cNvPr id="2" name="Picture 1" descr="UC10_SaveLoad_Activity.png"/>
-          <p:cNvPicPr>
-            <a:picLocks noChangeAspect="1"/>
-          </p:cNvPicPr>
-          <p:nvPr/>
-        </p:nvPicPr>
-        <p:blipFill>
-          <a:blip r:embed="rId2"/>
-          <a:stretch>
-            <a:fillRect/>
-          </a:stretch>
-        </p:blipFill>
-        <p:spPr>
-          <a:xfrm>
-            <a:off x="1143471" y="914400"/>
-            <a:ext cx="6857058" cy="5394960"/>
+          <p:cNvPr id="2" name="Picture 1" descr="UC12_LevelUp_Activity.png"/>
+          <p:cNvPicPr>
+            <a:picLocks noChangeAspect="1"/>
+          </p:cNvPicPr>
+          <p:nvPr/>
+        </p:nvPicPr>
+        <p:blipFill>
+          <a:blip r:embed="rId2"/>
+          <a:stretch>
+            <a:fillRect/>
+          </a:stretch>
+        </p:blipFill>
+        <p:spPr>
+          <a:xfrm>
+            <a:off x="2497015" y="914400"/>
+            <a:ext cx="4149969" cy="5394960"/>
           </a:xfrm>
           <a:prstGeom prst="rect">
             <a:avLst/>
@@ -5057,22 +5054,22 @@
       <p:grpSpPr/>
       <p:pic>
         <p:nvPicPr>
-          <p:cNvPr id="2" name="Picture 1" descr="UC10_SaveLoad_Activity.png"/>
-          <p:cNvPicPr>
-            <a:picLocks noChangeAspect="1"/>
-          </p:cNvPicPr>
-          <p:nvPr/>
-        </p:nvPicPr>
-        <p:blipFill>
-          <a:blip r:embed="rId2"/>
-          <a:stretch>
-            <a:fillRect/>
-          </a:stretch>
-        </p:blipFill>
-        <p:spPr>
-          <a:xfrm>
-            <a:off x="1143471" y="914400"/>
-            <a:ext cx="6857058" cy="5394960"/>
+          <p:cNvPr id="2" name="Picture 1" descr="UC1_Login_Activity.png"/>
+          <p:cNvPicPr>
+            <a:picLocks noChangeAspect="1"/>
+          </p:cNvPicPr>
+          <p:nvPr/>
+        </p:nvPicPr>
+        <p:blipFill>
+          <a:blip r:embed="rId2"/>
+          <a:stretch>
+            <a:fillRect/>
+          </a:stretch>
+        </p:blipFill>
+        <p:spPr>
+          <a:xfrm>
+            <a:off x="1101897" y="914400"/>
+            <a:ext cx="6940205" cy="5394960"/>
           </a:xfrm>
           <a:prstGeom prst="rect">
             <a:avLst/>
@@ -5099,22 +5096,22 @@
       <p:grpSpPr/>
       <p:pic>
         <p:nvPicPr>
-          <p:cNvPr id="2" name="Picture 1" descr="UC10_SaveLoad_Sequence.png"/>
-          <p:cNvPicPr>
-            <a:picLocks noChangeAspect="1"/>
-          </p:cNvPicPr>
-          <p:nvPr/>
-        </p:nvPicPr>
-        <p:blipFill>
-          <a:blip r:embed="rId2"/>
-          <a:stretch>
-            <a:fillRect/>
-          </a:stretch>
-        </p:blipFill>
-        <p:spPr>
-          <a:xfrm>
-            <a:off x="1793439" y="914400"/>
-            <a:ext cx="5557121" cy="5394960"/>
+          <p:cNvPr id="2" name="Picture 1" descr="UC12_LevelUp_Sequence.png"/>
+          <p:cNvPicPr>
+            <a:picLocks noChangeAspect="1"/>
+          </p:cNvPicPr>
+          <p:nvPr/>
+        </p:nvPicPr>
+        <p:blipFill>
+          <a:blip r:embed="rId2"/>
+          <a:stretch>
+            <a:fillRect/>
+          </a:stretch>
+        </p:blipFill>
+        <p:spPr>
+          <a:xfrm>
+            <a:off x="1065950" y="914400"/>
+            <a:ext cx="7012100" cy="5394960"/>
           </a:xfrm>
           <a:prstGeom prst="rect">
             <a:avLst/>
@@ -5141,22 +5138,22 @@
       <p:grpSpPr/>
       <p:pic>
         <p:nvPicPr>
-          <p:cNvPr id="2" name="Picture 1" descr="UC10_SaveLoad_TestCases.png"/>
-          <p:cNvPicPr>
-            <a:picLocks noChangeAspect="1"/>
-          </p:cNvPicPr>
-          <p:nvPr/>
-        </p:nvPicPr>
-        <p:blipFill>
-          <a:blip r:embed="rId2"/>
-          <a:stretch>
-            <a:fillRect/>
-          </a:stretch>
-        </p:blipFill>
-        <p:spPr>
-          <a:xfrm>
-            <a:off x="548640" y="2261532"/>
-            <a:ext cx="8046720" cy="2700695"/>
+          <p:cNvPr id="2" name="Picture 1" descr="UC12_LevelUp_TestCases.png"/>
+          <p:cNvPicPr>
+            <a:picLocks noChangeAspect="1"/>
+          </p:cNvPicPr>
+          <p:nvPr/>
+        </p:nvPicPr>
+        <p:blipFill>
+          <a:blip r:embed="rId2"/>
+          <a:stretch>
+            <a:fillRect/>
+          </a:stretch>
+        </p:blipFill>
+        <p:spPr>
+          <a:xfrm>
+            <a:off x="548640" y="2166499"/>
+            <a:ext cx="8046720" cy="2890761"/>
           </a:xfrm>
           <a:prstGeom prst="rect">
             <a:avLst/>
@@ -5183,22 +5180,22 @@
       <p:grpSpPr/>
       <p:pic>
         <p:nvPicPr>
-          <p:cNvPr id="2" name="Picture 1" descr="UC10_SaveLoad_Description.png"/>
-          <p:cNvPicPr>
-            <a:picLocks noChangeAspect="1"/>
-          </p:cNvPicPr>
-          <p:nvPr/>
-        </p:nvPicPr>
-        <p:blipFill>
-          <a:blip r:embed="rId2"/>
-          <a:stretch>
-            <a:fillRect/>
-          </a:stretch>
-        </p:blipFill>
-        <p:spPr>
-          <a:xfrm>
-            <a:off x="1447800" y="925830"/>
-            <a:ext cx="6248400" cy="5372100"/>
+          <p:cNvPr id="2" name="Picture 1" descr="UC13_HealTeam_Description.png"/>
+          <p:cNvPicPr>
+            <a:picLocks noChangeAspect="1"/>
+          </p:cNvPicPr>
+          <p:nvPr/>
+        </p:nvPicPr>
+        <p:blipFill>
+          <a:blip r:embed="rId2"/>
+          <a:stretch>
+            <a:fillRect/>
+          </a:stretch>
+        </p:blipFill>
+        <p:spPr>
+          <a:xfrm>
+            <a:off x="1524000" y="1092517"/>
+            <a:ext cx="6096000" cy="5038725"/>
           </a:xfrm>
           <a:prstGeom prst="rect">
             <a:avLst/>
@@ -5225,22 +5222,22 @@
       <p:grpSpPr/>
       <p:pic>
         <p:nvPicPr>
-          <p:cNvPr id="2" name="Picture 1" descr="UC10_SaveLoad_Activity.png"/>
-          <p:cNvPicPr>
-            <a:picLocks noChangeAspect="1"/>
-          </p:cNvPicPr>
-          <p:nvPr/>
-        </p:nvPicPr>
-        <p:blipFill>
-          <a:blip r:embed="rId2"/>
-          <a:stretch>
-            <a:fillRect/>
-          </a:stretch>
-        </p:blipFill>
-        <p:spPr>
-          <a:xfrm>
-            <a:off x="1143471" y="914400"/>
-            <a:ext cx="6857058" cy="5394960"/>
+          <p:cNvPr id="2" name="Picture 1" descr="UC13_HealTeam_Activity.png"/>
+          <p:cNvPicPr>
+            <a:picLocks noChangeAspect="1"/>
+          </p:cNvPicPr>
+          <p:nvPr/>
+        </p:nvPicPr>
+        <p:blipFill>
+          <a:blip r:embed="rId2"/>
+          <a:stretch>
+            <a:fillRect/>
+          </a:stretch>
+        </p:blipFill>
+        <p:spPr>
+          <a:xfrm>
+            <a:off x="2876550" y="1044892"/>
+            <a:ext cx="3390900" cy="5133975"/>
           </a:xfrm>
           <a:prstGeom prst="rect">
             <a:avLst/>
@@ -5267,22 +5264,22 @@
       <p:grpSpPr/>
       <p:pic>
         <p:nvPicPr>
-          <p:cNvPr id="2" name="Picture 1" descr="UC10_SaveLoad_Sequence.png"/>
-          <p:cNvPicPr>
-            <a:picLocks noChangeAspect="1"/>
-          </p:cNvPicPr>
-          <p:nvPr/>
-        </p:nvPicPr>
-        <p:blipFill>
-          <a:blip r:embed="rId2"/>
-          <a:stretch>
-            <a:fillRect/>
-          </a:stretch>
-        </p:blipFill>
-        <p:spPr>
-          <a:xfrm>
-            <a:off x="1793439" y="914400"/>
-            <a:ext cx="5557121" cy="5394960"/>
+          <p:cNvPr id="2" name="Picture 1" descr="UC13_HealTeam_Sequence.png"/>
+          <p:cNvPicPr>
+            <a:picLocks noChangeAspect="1"/>
+          </p:cNvPicPr>
+          <p:nvPr/>
+        </p:nvPicPr>
+        <p:blipFill>
+          <a:blip r:embed="rId2"/>
+          <a:stretch>
+            <a:fillRect/>
+          </a:stretch>
+        </p:blipFill>
+        <p:spPr>
+          <a:xfrm>
+            <a:off x="728662" y="1940242"/>
+            <a:ext cx="7686675" cy="3343275"/>
           </a:xfrm>
           <a:prstGeom prst="rect">
             <a:avLst/>
@@ -5309,22 +5306,22 @@
       <p:grpSpPr/>
       <p:pic>
         <p:nvPicPr>
-          <p:cNvPr id="2" name="Picture 1" descr="UC10_SaveLoad_TestCases.png"/>
-          <p:cNvPicPr>
-            <a:picLocks noChangeAspect="1"/>
-          </p:cNvPicPr>
-          <p:nvPr/>
-        </p:nvPicPr>
-        <p:blipFill>
-          <a:blip r:embed="rId2"/>
-          <a:stretch>
-            <a:fillRect/>
-          </a:stretch>
-        </p:blipFill>
-        <p:spPr>
-          <a:xfrm>
-            <a:off x="548640" y="2261532"/>
-            <a:ext cx="8046720" cy="2700695"/>
+          <p:cNvPr id="2" name="Picture 1" descr="UC13_HealTeam_TestCases.png"/>
+          <p:cNvPicPr>
+            <a:picLocks noChangeAspect="1"/>
+          </p:cNvPicPr>
+          <p:nvPr/>
+        </p:nvPicPr>
+        <p:blipFill>
+          <a:blip r:embed="rId2"/>
+          <a:stretch>
+            <a:fillRect/>
+          </a:stretch>
+        </p:blipFill>
+        <p:spPr>
+          <a:xfrm>
+            <a:off x="548640" y="2214466"/>
+            <a:ext cx="8046720" cy="2794827"/>
           </a:xfrm>
           <a:prstGeom prst="rect">
             <a:avLst/>
@@ -5351,22 +5348,22 @@
       <p:grpSpPr/>
       <p:pic>
         <p:nvPicPr>
-          <p:cNvPr id="2" name="Picture 1" descr="UC10_SaveLoad_Description.png"/>
-          <p:cNvPicPr>
-            <a:picLocks noChangeAspect="1"/>
-          </p:cNvPicPr>
-          <p:nvPr/>
-        </p:nvPicPr>
-        <p:blipFill>
-          <a:blip r:embed="rId2"/>
-          <a:stretch>
-            <a:fillRect/>
-          </a:stretch>
-        </p:blipFill>
-        <p:spPr>
-          <a:xfrm>
-            <a:off x="1447800" y="925830"/>
-            <a:ext cx="6248400" cy="5372100"/>
+          <p:cNvPr id="2" name="Picture 1" descr="UC14_ChallengeGym_Description.png"/>
+          <p:cNvPicPr>
+            <a:picLocks noChangeAspect="1"/>
+          </p:cNvPicPr>
+          <p:nvPr/>
+        </p:nvPicPr>
+        <p:blipFill>
+          <a:blip r:embed="rId2"/>
+          <a:stretch>
+            <a:fillRect/>
+          </a:stretch>
+        </p:blipFill>
+        <p:spPr>
+          <a:xfrm>
+            <a:off x="1480558" y="914400"/>
+            <a:ext cx="6182883" cy="5394960"/>
           </a:xfrm>
           <a:prstGeom prst="rect">
             <a:avLst/>
@@ -5393,22 +5390,22 @@
       <p:grpSpPr/>
       <p:pic>
         <p:nvPicPr>
-          <p:cNvPr id="2" name="Picture 1" descr="UC10_SaveLoad_Activity.png"/>
-          <p:cNvPicPr>
-            <a:picLocks noChangeAspect="1"/>
-          </p:cNvPicPr>
-          <p:nvPr/>
-        </p:nvPicPr>
-        <p:blipFill>
-          <a:blip r:embed="rId2"/>
-          <a:stretch>
-            <a:fillRect/>
-          </a:stretch>
-        </p:blipFill>
-        <p:spPr>
-          <a:xfrm>
-            <a:off x="1143471" y="914400"/>
-            <a:ext cx="6857058" cy="5394960"/>
+          <p:cNvPr id="2" name="Picture 1" descr="UC14_ChallengeGym_Activity.png"/>
+          <p:cNvPicPr>
+            <a:picLocks noChangeAspect="1"/>
+          </p:cNvPicPr>
+          <p:nvPr/>
+        </p:nvPicPr>
+        <p:blipFill>
+          <a:blip r:embed="rId2"/>
+          <a:stretch>
+            <a:fillRect/>
+          </a:stretch>
+        </p:blipFill>
+        <p:spPr>
+          <a:xfrm>
+            <a:off x="2504723" y="914400"/>
+            <a:ext cx="4134553" cy="5394960"/>
           </a:xfrm>
           <a:prstGeom prst="rect">
             <a:avLst/>
@@ -5435,22 +5432,22 @@
       <p:grpSpPr/>
       <p:pic>
         <p:nvPicPr>
-          <p:cNvPr id="2" name="Picture 1" descr="UC10_SaveLoad_Sequence.png"/>
-          <p:cNvPicPr>
-            <a:picLocks noChangeAspect="1"/>
-          </p:cNvPicPr>
-          <p:nvPr/>
-        </p:nvPicPr>
-        <p:blipFill>
-          <a:blip r:embed="rId2"/>
-          <a:stretch>
-            <a:fillRect/>
-          </a:stretch>
-        </p:blipFill>
-        <p:spPr>
-          <a:xfrm>
-            <a:off x="1793439" y="914400"/>
-            <a:ext cx="5557121" cy="5394960"/>
+          <p:cNvPr id="2" name="Picture 1" descr="UC14_ChallengeGym_Sequence.png"/>
+          <p:cNvPicPr>
+            <a:picLocks noChangeAspect="1"/>
+          </p:cNvPicPr>
+          <p:nvPr/>
+        </p:nvPicPr>
+        <p:blipFill>
+          <a:blip r:embed="rId2"/>
+          <a:stretch>
+            <a:fillRect/>
+          </a:stretch>
+        </p:blipFill>
+        <p:spPr>
+          <a:xfrm>
+            <a:off x="1146490" y="914400"/>
+            <a:ext cx="6851019" cy="5394960"/>
           </a:xfrm>
           <a:prstGeom prst="rect">
             <a:avLst/>
@@ -5477,22 +5474,22 @@
       <p:grpSpPr/>
       <p:pic>
         <p:nvPicPr>
-          <p:cNvPr id="2" name="Picture 1" descr="UC10_SaveLoad_TestCases.png"/>
-          <p:cNvPicPr>
-            <a:picLocks noChangeAspect="1"/>
-          </p:cNvPicPr>
-          <p:nvPr/>
-        </p:nvPicPr>
-        <p:blipFill>
-          <a:blip r:embed="rId2"/>
-          <a:stretch>
-            <a:fillRect/>
-          </a:stretch>
-        </p:blipFill>
-        <p:spPr>
-          <a:xfrm>
-            <a:off x="548640" y="2261532"/>
-            <a:ext cx="8046720" cy="2700695"/>
+          <p:cNvPr id="2" name="Picture 1" descr="UC14_ChallengeGym_TestCases.png"/>
+          <p:cNvPicPr>
+            <a:picLocks noChangeAspect="1"/>
+          </p:cNvPicPr>
+          <p:nvPr/>
+        </p:nvPicPr>
+        <p:blipFill>
+          <a:blip r:embed="rId2"/>
+          <a:stretch>
+            <a:fillRect/>
+          </a:stretch>
+        </p:blipFill>
+        <p:spPr>
+          <a:xfrm>
+            <a:off x="548640" y="1952943"/>
+            <a:ext cx="8046719" cy="3317874"/>
           </a:xfrm>
           <a:prstGeom prst="rect">
             <a:avLst/>
@@ -5519,22 +5516,22 @@
       <p:grpSpPr/>
       <p:pic>
         <p:nvPicPr>
-          <p:cNvPr id="2" name="Picture 1" descr="UC10_SaveLoad_Sequence.png"/>
-          <p:cNvPicPr>
-            <a:picLocks noChangeAspect="1"/>
-          </p:cNvPicPr>
-          <p:nvPr/>
-        </p:nvPicPr>
-        <p:blipFill>
-          <a:blip r:embed="rId2"/>
-          <a:stretch>
-            <a:fillRect/>
-          </a:stretch>
-        </p:blipFill>
-        <p:spPr>
-          <a:xfrm>
-            <a:off x="1793439" y="914400"/>
-            <a:ext cx="5557121" cy="5394960"/>
+          <p:cNvPr id="2" name="Picture 1" descr="UC1_Login_Sequence.png"/>
+          <p:cNvPicPr>
+            <a:picLocks noChangeAspect="1"/>
+          </p:cNvPicPr>
+          <p:nvPr/>
+        </p:nvPicPr>
+        <p:blipFill>
+          <a:blip r:embed="rId2"/>
+          <a:stretch>
+            <a:fillRect/>
+          </a:stretch>
+        </p:blipFill>
+        <p:spPr>
+          <a:xfrm>
+            <a:off x="548640" y="1186724"/>
+            <a:ext cx="8046720" cy="4850312"/>
           </a:xfrm>
           <a:prstGeom prst="rect">
             <a:avLst/>
@@ -5561,22 +5558,22 @@
       <p:grpSpPr/>
       <p:pic>
         <p:nvPicPr>
-          <p:cNvPr id="2" name="Picture 1" descr="UC10_SaveLoad_Description.png"/>
-          <p:cNvPicPr>
-            <a:picLocks noChangeAspect="1"/>
-          </p:cNvPicPr>
-          <p:nvPr/>
-        </p:nvPicPr>
-        <p:blipFill>
-          <a:blip r:embed="rId2"/>
-          <a:stretch>
-            <a:fillRect/>
-          </a:stretch>
-        </p:blipFill>
-        <p:spPr>
-          <a:xfrm>
-            <a:off x="1447800" y="925830"/>
-            <a:ext cx="6248400" cy="5372100"/>
+          <p:cNvPr id="2" name="Picture 1" descr="UC15_ChallengeLeague_Description.png"/>
+          <p:cNvPicPr>
+            <a:picLocks noChangeAspect="1"/>
+          </p:cNvPicPr>
+          <p:nvPr/>
+        </p:nvPicPr>
+        <p:blipFill>
+          <a:blip r:embed="rId2"/>
+          <a:stretch>
+            <a:fillRect/>
+          </a:stretch>
+        </p:blipFill>
+        <p:spPr>
+          <a:xfrm>
+            <a:off x="1691568" y="914400"/>
+            <a:ext cx="5760864" cy="5394960"/>
           </a:xfrm>
           <a:prstGeom prst="rect">
             <a:avLst/>
@@ -5603,22 +5600,22 @@
       <p:grpSpPr/>
       <p:pic>
         <p:nvPicPr>
-          <p:cNvPr id="2" name="Picture 1" descr="UC10_SaveLoad_Activity.png"/>
-          <p:cNvPicPr>
-            <a:picLocks noChangeAspect="1"/>
-          </p:cNvPicPr>
-          <p:nvPr/>
-        </p:nvPicPr>
-        <p:blipFill>
-          <a:blip r:embed="rId2"/>
-          <a:stretch>
-            <a:fillRect/>
-          </a:stretch>
-        </p:blipFill>
-        <p:spPr>
-          <a:xfrm>
-            <a:off x="1143471" y="914400"/>
-            <a:ext cx="6857058" cy="5394960"/>
+          <p:cNvPr id="2" name="Picture 1" descr="UC15_ChallengePokemonLeague_Activity.png"/>
+          <p:cNvPicPr>
+            <a:picLocks noChangeAspect="1"/>
+          </p:cNvPicPr>
+          <p:nvPr/>
+        </p:nvPicPr>
+        <p:blipFill>
+          <a:blip r:embed="rId2"/>
+          <a:stretch>
+            <a:fillRect/>
+          </a:stretch>
+        </p:blipFill>
+        <p:spPr>
+          <a:xfrm>
+            <a:off x="3024572" y="914400"/>
+            <a:ext cx="3094855" cy="5394960"/>
           </a:xfrm>
           <a:prstGeom prst="rect">
             <a:avLst/>
@@ -5645,22 +5642,22 @@
       <p:grpSpPr/>
       <p:pic>
         <p:nvPicPr>
-          <p:cNvPr id="2" name="Picture 1" descr="UC10_SaveLoad_Sequence.png"/>
-          <p:cNvPicPr>
-            <a:picLocks noChangeAspect="1"/>
-          </p:cNvPicPr>
-          <p:nvPr/>
-        </p:nvPicPr>
-        <p:blipFill>
-          <a:blip r:embed="rId2"/>
-          <a:stretch>
-            <a:fillRect/>
-          </a:stretch>
-        </p:blipFill>
-        <p:spPr>
-          <a:xfrm>
-            <a:off x="1793439" y="914400"/>
-            <a:ext cx="5557121" cy="5394960"/>
+          <p:cNvPr id="2" name="Picture 1" descr="UC15_ChallengePokemonLeague_Sequence.png"/>
+          <p:cNvPicPr>
+            <a:picLocks noChangeAspect="1"/>
+          </p:cNvPicPr>
+          <p:nvPr/>
+        </p:nvPicPr>
+        <p:blipFill>
+          <a:blip r:embed="rId2"/>
+          <a:stretch>
+            <a:fillRect/>
+          </a:stretch>
+        </p:blipFill>
+        <p:spPr>
+          <a:xfrm>
+            <a:off x="1477753" y="914400"/>
+            <a:ext cx="6188493" cy="5394960"/>
           </a:xfrm>
           <a:prstGeom prst="rect">
             <a:avLst/>
@@ -5687,22 +5684,22 @@
       <p:grpSpPr/>
       <p:pic>
         <p:nvPicPr>
-          <p:cNvPr id="2" name="Picture 1" descr="UC10_SaveLoad_TestCases.png"/>
-          <p:cNvPicPr>
-            <a:picLocks noChangeAspect="1"/>
-          </p:cNvPicPr>
-          <p:nvPr/>
-        </p:nvPicPr>
-        <p:blipFill>
-          <a:blip r:embed="rId2"/>
-          <a:stretch>
-            <a:fillRect/>
-          </a:stretch>
-        </p:blipFill>
-        <p:spPr>
-          <a:xfrm>
-            <a:off x="548640" y="2261532"/>
-            <a:ext cx="8046720" cy="2700695"/>
+          <p:cNvPr id="2" name="Picture 1" descr="UC15_ChallengeLeague_TestCases.png"/>
+          <p:cNvPicPr>
+            <a:picLocks noChangeAspect="1"/>
+          </p:cNvPicPr>
+          <p:nvPr/>
+        </p:nvPicPr>
+        <p:blipFill>
+          <a:blip r:embed="rId2"/>
+          <a:stretch>
+            <a:fillRect/>
+          </a:stretch>
+        </p:blipFill>
+        <p:spPr>
+          <a:xfrm>
+            <a:off x="548640" y="2048299"/>
+            <a:ext cx="8046720" cy="3127161"/>
           </a:xfrm>
           <a:prstGeom prst="rect">
             <a:avLst/>
@@ -5729,22 +5726,22 @@
       <p:grpSpPr/>
       <p:pic>
         <p:nvPicPr>
-          <p:cNvPr id="2" name="Picture 1" descr="UC10_SaveLoad_Description.png"/>
-          <p:cNvPicPr>
-            <a:picLocks noChangeAspect="1"/>
-          </p:cNvPicPr>
-          <p:nvPr/>
-        </p:nvPicPr>
-        <p:blipFill>
-          <a:blip r:embed="rId2"/>
-          <a:stretch>
-            <a:fillRect/>
-          </a:stretch>
-        </p:blipFill>
-        <p:spPr>
-          <a:xfrm>
-            <a:off x="1447800" y="925830"/>
-            <a:ext cx="6248400" cy="5372100"/>
+          <p:cNvPr id="2" name="Picture 1" descr="UC16_ChallengeTrainer_Description.png"/>
+          <p:cNvPicPr>
+            <a:picLocks noChangeAspect="1"/>
+          </p:cNvPicPr>
+          <p:nvPr/>
+        </p:nvPicPr>
+        <p:blipFill>
+          <a:blip r:embed="rId2"/>
+          <a:stretch>
+            <a:fillRect/>
+          </a:stretch>
+        </p:blipFill>
+        <p:spPr>
+          <a:xfrm>
+            <a:off x="1714500" y="1011555"/>
+            <a:ext cx="5715000" cy="5200650"/>
           </a:xfrm>
           <a:prstGeom prst="rect">
             <a:avLst/>
@@ -5771,22 +5768,22 @@
       <p:grpSpPr/>
       <p:pic>
         <p:nvPicPr>
-          <p:cNvPr id="2" name="Picture 1" descr="UC10_SaveLoad_Activity.png"/>
-          <p:cNvPicPr>
-            <a:picLocks noChangeAspect="1"/>
-          </p:cNvPicPr>
-          <p:nvPr/>
-        </p:nvPicPr>
-        <p:blipFill>
-          <a:blip r:embed="rId2"/>
-          <a:stretch>
-            <a:fillRect/>
-          </a:stretch>
-        </p:blipFill>
-        <p:spPr>
-          <a:xfrm>
-            <a:off x="1143471" y="914400"/>
-            <a:ext cx="6857058" cy="5394960"/>
+          <p:cNvPr id="2" name="Picture 1" descr="UC16_ChallengeTrainer_Activity.png"/>
+          <p:cNvPicPr>
+            <a:picLocks noChangeAspect="1"/>
+          </p:cNvPicPr>
+          <p:nvPr/>
+        </p:nvPicPr>
+        <p:blipFill>
+          <a:blip r:embed="rId2"/>
+          <a:stretch>
+            <a:fillRect/>
+          </a:stretch>
+        </p:blipFill>
+        <p:spPr>
+          <a:xfrm>
+            <a:off x="2037821" y="914400"/>
+            <a:ext cx="5068358" cy="5394960"/>
           </a:xfrm>
           <a:prstGeom prst="rect">
             <a:avLst/>
@@ -5813,22 +5810,22 @@
       <p:grpSpPr/>
       <p:pic>
         <p:nvPicPr>
-          <p:cNvPr id="2" name="Picture 1" descr="UC10_SaveLoad_Sequence.png"/>
-          <p:cNvPicPr>
-            <a:picLocks noChangeAspect="1"/>
-          </p:cNvPicPr>
-          <p:nvPr/>
-        </p:nvPicPr>
-        <p:blipFill>
-          <a:blip r:embed="rId2"/>
-          <a:stretch>
-            <a:fillRect/>
-          </a:stretch>
-        </p:blipFill>
-        <p:spPr>
-          <a:xfrm>
-            <a:off x="1793439" y="914400"/>
-            <a:ext cx="5557121" cy="5394960"/>
+          <p:cNvPr id="2" name="Picture 1" descr="UC16_ChallengeTrainer_Sequence.png"/>
+          <p:cNvPicPr>
+            <a:picLocks noChangeAspect="1"/>
+          </p:cNvPicPr>
+          <p:nvPr/>
+        </p:nvPicPr>
+        <p:blipFill>
+          <a:blip r:embed="rId2"/>
+          <a:stretch>
+            <a:fillRect/>
+          </a:stretch>
+        </p:blipFill>
+        <p:spPr>
+          <a:xfrm>
+            <a:off x="548640" y="964848"/>
+            <a:ext cx="8046720" cy="5294063"/>
           </a:xfrm>
           <a:prstGeom prst="rect">
             <a:avLst/>
@@ -5855,22 +5852,22 @@
       <p:grpSpPr/>
       <p:pic>
         <p:nvPicPr>
-          <p:cNvPr id="2" name="Picture 1" descr="UC10_SaveLoad_TestCases.png"/>
-          <p:cNvPicPr>
-            <a:picLocks noChangeAspect="1"/>
-          </p:cNvPicPr>
-          <p:nvPr/>
-        </p:nvPicPr>
-        <p:blipFill>
-          <a:blip r:embed="rId2"/>
-          <a:stretch>
-            <a:fillRect/>
-          </a:stretch>
-        </p:blipFill>
-        <p:spPr>
-          <a:xfrm>
-            <a:off x="548640" y="2261532"/>
-            <a:ext cx="8046720" cy="2700695"/>
+          <p:cNvPr id="2" name="Picture 1" descr="UC16_ChallengeTrainer_TestCases.png"/>
+          <p:cNvPicPr>
+            <a:picLocks noChangeAspect="1"/>
+          </p:cNvPicPr>
+          <p:nvPr/>
+        </p:nvPicPr>
+        <p:blipFill>
+          <a:blip r:embed="rId2"/>
+          <a:stretch>
+            <a:fillRect/>
+          </a:stretch>
+        </p:blipFill>
+        <p:spPr>
+          <a:xfrm>
+            <a:off x="548640" y="1704975"/>
+            <a:ext cx="8046719" cy="3813809"/>
           </a:xfrm>
           <a:prstGeom prst="rect">
             <a:avLst/>
@@ -5897,22 +5894,22 @@
       <p:grpSpPr/>
       <p:pic>
         <p:nvPicPr>
-          <p:cNvPr id="2" name="Picture 1" descr="UC10_SaveLoad_Description.png"/>
-          <p:cNvPicPr>
-            <a:picLocks noChangeAspect="1"/>
-          </p:cNvPicPr>
-          <p:nvPr/>
-        </p:nvPicPr>
-        <p:blipFill>
-          <a:blip r:embed="rId2"/>
-          <a:stretch>
-            <a:fillRect/>
-          </a:stretch>
-        </p:blipFill>
-        <p:spPr>
-          <a:xfrm>
-            <a:off x="1447800" y="925830"/>
-            <a:ext cx="6248400" cy="5372100"/>
+          <p:cNvPr id="2" name="Picture 1" descr="UC17_SelectStarter_Description.png"/>
+          <p:cNvPicPr>
+            <a:picLocks noChangeAspect="1"/>
+          </p:cNvPicPr>
+          <p:nvPr/>
+        </p:nvPicPr>
+        <p:blipFill>
+          <a:blip r:embed="rId2"/>
+          <a:stretch>
+            <a:fillRect/>
+          </a:stretch>
+        </p:blipFill>
+        <p:spPr>
+          <a:xfrm>
+            <a:off x="1366837" y="1011555"/>
+            <a:ext cx="6410325" cy="5200650"/>
           </a:xfrm>
           <a:prstGeom prst="rect">
             <a:avLst/>
@@ -5939,22 +5936,22 @@
       <p:grpSpPr/>
       <p:pic>
         <p:nvPicPr>
-          <p:cNvPr id="2" name="Picture 1" descr="UC10_SaveLoad_Activity.png"/>
-          <p:cNvPicPr>
-            <a:picLocks noChangeAspect="1"/>
-          </p:cNvPicPr>
-          <p:nvPr/>
-        </p:nvPicPr>
-        <p:blipFill>
-          <a:blip r:embed="rId2"/>
-          <a:stretch>
-            <a:fillRect/>
-          </a:stretch>
-        </p:blipFill>
-        <p:spPr>
-          <a:xfrm>
-            <a:off x="1143471" y="914400"/>
-            <a:ext cx="6857058" cy="5394960"/>
+          <p:cNvPr id="2" name="Picture 1" descr="UC17_SelectStarter_Activity.png"/>
+          <p:cNvPicPr>
+            <a:picLocks noChangeAspect="1"/>
+          </p:cNvPicPr>
+          <p:nvPr/>
+        </p:nvPicPr>
+        <p:blipFill>
+          <a:blip r:embed="rId2"/>
+          <a:stretch>
+            <a:fillRect/>
+          </a:stretch>
+        </p:blipFill>
+        <p:spPr>
+          <a:xfrm>
+            <a:off x="2566730" y="914400"/>
+            <a:ext cx="4010539" cy="5394960"/>
           </a:xfrm>
           <a:prstGeom prst="rect">
             <a:avLst/>
@@ -5981,22 +5978,22 @@
       <p:grpSpPr/>
       <p:pic>
         <p:nvPicPr>
-          <p:cNvPr id="2" name="Picture 1" descr="UC10_SaveLoad_TestCases.png"/>
-          <p:cNvPicPr>
-            <a:picLocks noChangeAspect="1"/>
-          </p:cNvPicPr>
-          <p:nvPr/>
-        </p:nvPicPr>
-        <p:blipFill>
-          <a:blip r:embed="rId2"/>
-          <a:stretch>
-            <a:fillRect/>
-          </a:stretch>
-        </p:blipFill>
-        <p:spPr>
-          <a:xfrm>
-            <a:off x="548640" y="2261532"/>
-            <a:ext cx="8046720" cy="2700695"/>
+          <p:cNvPr id="2" name="Picture 1" descr="UC1_Login_TestCases.png"/>
+          <p:cNvPicPr>
+            <a:picLocks noChangeAspect="1"/>
+          </p:cNvPicPr>
+          <p:nvPr/>
+        </p:nvPicPr>
+        <p:blipFill>
+          <a:blip r:embed="rId2"/>
+          <a:stretch>
+            <a:fillRect/>
+          </a:stretch>
+        </p:blipFill>
+        <p:spPr>
+          <a:xfrm>
+            <a:off x="548640" y="1170638"/>
+            <a:ext cx="8046720" cy="4882483"/>
           </a:xfrm>
           <a:prstGeom prst="rect">
             <a:avLst/>
@@ -6023,22 +6020,22 @@
       <p:grpSpPr/>
       <p:pic>
         <p:nvPicPr>
-          <p:cNvPr id="2" name="Picture 1" descr="UC10_SaveLoad_Sequence.png"/>
-          <p:cNvPicPr>
-            <a:picLocks noChangeAspect="1"/>
-          </p:cNvPicPr>
-          <p:nvPr/>
-        </p:nvPicPr>
-        <p:blipFill>
-          <a:blip r:embed="rId2"/>
-          <a:stretch>
-            <a:fillRect/>
-          </a:stretch>
-        </p:blipFill>
-        <p:spPr>
-          <a:xfrm>
-            <a:off x="1793439" y="914400"/>
-            <a:ext cx="5557121" cy="5394960"/>
+          <p:cNvPr id="2" name="Picture 1" descr="UC17_SelectStarter_Sequence.png"/>
+          <p:cNvPicPr>
+            <a:picLocks noChangeAspect="1"/>
+          </p:cNvPicPr>
+          <p:nvPr/>
+        </p:nvPicPr>
+        <p:blipFill>
+          <a:blip r:embed="rId2"/>
+          <a:stretch>
+            <a:fillRect/>
+          </a:stretch>
+        </p:blipFill>
+        <p:spPr>
+          <a:xfrm>
+            <a:off x="548640" y="1601816"/>
+            <a:ext cx="8046720" cy="4020128"/>
           </a:xfrm>
           <a:prstGeom prst="rect">
             <a:avLst/>
@@ -6065,22 +6062,22 @@
       <p:grpSpPr/>
       <p:pic>
         <p:nvPicPr>
-          <p:cNvPr id="2" name="Picture 1" descr="UC10_SaveLoad_TestCases.png"/>
-          <p:cNvPicPr>
-            <a:picLocks noChangeAspect="1"/>
-          </p:cNvPicPr>
-          <p:nvPr/>
-        </p:nvPicPr>
-        <p:blipFill>
-          <a:blip r:embed="rId2"/>
-          <a:stretch>
-            <a:fillRect/>
-          </a:stretch>
-        </p:blipFill>
-        <p:spPr>
-          <a:xfrm>
-            <a:off x="548640" y="2261532"/>
-            <a:ext cx="8046720" cy="2700695"/>
+          <p:cNvPr id="2" name="Picture 1" descr="UC17_SelectStarter_TestCases.png"/>
+          <p:cNvPicPr>
+            <a:picLocks noChangeAspect="1"/>
+          </p:cNvPicPr>
+          <p:nvPr/>
+        </p:nvPicPr>
+        <p:blipFill>
+          <a:blip r:embed="rId2"/>
+          <a:stretch>
+            <a:fillRect/>
+          </a:stretch>
+        </p:blipFill>
+        <p:spPr>
+          <a:xfrm>
+            <a:off x="548640" y="1911617"/>
+            <a:ext cx="8046719" cy="3400526"/>
           </a:xfrm>
           <a:prstGeom prst="rect">
             <a:avLst/>
@@ -6107,22 +6104,22 @@
       <p:grpSpPr/>
       <p:pic>
         <p:nvPicPr>
-          <p:cNvPr id="2" name="Picture 1" descr="UC10_SaveLoad_Description.png"/>
-          <p:cNvPicPr>
-            <a:picLocks noChangeAspect="1"/>
-          </p:cNvPicPr>
-          <p:nvPr/>
-        </p:nvPicPr>
-        <p:blipFill>
-          <a:blip r:embed="rId2"/>
-          <a:stretch>
-            <a:fillRect/>
-          </a:stretch>
-        </p:blipFill>
-        <p:spPr>
-          <a:xfrm>
-            <a:off x="1447800" y="925830"/>
-            <a:ext cx="6248400" cy="5372100"/>
+          <p:cNvPr id="2" name="Picture 1" descr="UC18_Register_Description.png"/>
+          <p:cNvPicPr>
+            <a:picLocks noChangeAspect="1"/>
+          </p:cNvPicPr>
+          <p:nvPr/>
+        </p:nvPicPr>
+        <p:blipFill>
+          <a:blip r:embed="rId2"/>
+          <a:stretch>
+            <a:fillRect/>
+          </a:stretch>
+        </p:blipFill>
+        <p:spPr>
+          <a:xfrm>
+            <a:off x="2086549" y="914400"/>
+            <a:ext cx="4970902" cy="5394960"/>
           </a:xfrm>
           <a:prstGeom prst="rect">
             <a:avLst/>
@@ -6149,22 +6146,22 @@
       <p:grpSpPr/>
       <p:pic>
         <p:nvPicPr>
-          <p:cNvPr id="2" name="Picture 1" descr="UC10_SaveLoad_Activity.png"/>
-          <p:cNvPicPr>
-            <a:picLocks noChangeAspect="1"/>
-          </p:cNvPicPr>
-          <p:nvPr/>
-        </p:nvPicPr>
-        <p:blipFill>
-          <a:blip r:embed="rId2"/>
-          <a:stretch>
-            <a:fillRect/>
-          </a:stretch>
-        </p:blipFill>
-        <p:spPr>
-          <a:xfrm>
-            <a:off x="1143471" y="914400"/>
-            <a:ext cx="6857058" cy="5394960"/>
+          <p:cNvPr id="2" name="Picture 1" descr="UC18_Register_Activity.png"/>
+          <p:cNvPicPr>
+            <a:picLocks noChangeAspect="1"/>
+          </p:cNvPicPr>
+          <p:nvPr/>
+        </p:nvPicPr>
+        <p:blipFill>
+          <a:blip r:embed="rId2"/>
+          <a:stretch>
+            <a:fillRect/>
+          </a:stretch>
+        </p:blipFill>
+        <p:spPr>
+          <a:xfrm>
+            <a:off x="2369976" y="914400"/>
+            <a:ext cx="4404048" cy="5394960"/>
           </a:xfrm>
           <a:prstGeom prst="rect">
             <a:avLst/>
@@ -6191,22 +6188,22 @@
       <p:grpSpPr/>
       <p:pic>
         <p:nvPicPr>
-          <p:cNvPr id="2" name="Picture 1" descr="UC10_SaveLoad_Sequence.png"/>
-          <p:cNvPicPr>
-            <a:picLocks noChangeAspect="1"/>
-          </p:cNvPicPr>
-          <p:nvPr/>
-        </p:nvPicPr>
-        <p:blipFill>
-          <a:blip r:embed="rId2"/>
-          <a:stretch>
-            <a:fillRect/>
-          </a:stretch>
-        </p:blipFill>
-        <p:spPr>
-          <a:xfrm>
-            <a:off x="1793439" y="914400"/>
-            <a:ext cx="5557121" cy="5394960"/>
+          <p:cNvPr id="2" name="Picture 1" descr="UC18_Register_Sequence.png"/>
+          <p:cNvPicPr>
+            <a:picLocks noChangeAspect="1"/>
+          </p:cNvPicPr>
+          <p:nvPr/>
+        </p:nvPicPr>
+        <p:blipFill>
+          <a:blip r:embed="rId2"/>
+          <a:stretch>
+            <a:fillRect/>
+          </a:stretch>
+        </p:blipFill>
+        <p:spPr>
+          <a:xfrm>
+            <a:off x="551933" y="914400"/>
+            <a:ext cx="8040134" cy="5394960"/>
           </a:xfrm>
           <a:prstGeom prst="rect">
             <a:avLst/>
@@ -6233,22 +6230,22 @@
       <p:grpSpPr/>
       <p:pic>
         <p:nvPicPr>
-          <p:cNvPr id="2" name="Picture 1" descr="UC10_SaveLoad_TestCases.png"/>
-          <p:cNvPicPr>
-            <a:picLocks noChangeAspect="1"/>
-          </p:cNvPicPr>
-          <p:nvPr/>
-        </p:nvPicPr>
-        <p:blipFill>
-          <a:blip r:embed="rId2"/>
-          <a:stretch>
-            <a:fillRect/>
-          </a:stretch>
-        </p:blipFill>
-        <p:spPr>
-          <a:xfrm>
-            <a:off x="548640" y="2261532"/>
-            <a:ext cx="8046720" cy="2700695"/>
+          <p:cNvPr id="2" name="Picture 1" descr="UC18_Register_TestCases.png"/>
+          <p:cNvPicPr>
+            <a:picLocks noChangeAspect="1"/>
+          </p:cNvPicPr>
+          <p:nvPr/>
+        </p:nvPicPr>
+        <p:blipFill>
+          <a:blip r:embed="rId2"/>
+          <a:stretch>
+            <a:fillRect/>
+          </a:stretch>
+        </p:blipFill>
+        <p:spPr>
+          <a:xfrm>
+            <a:off x="548640" y="1254871"/>
+            <a:ext cx="8046719" cy="4714018"/>
           </a:xfrm>
           <a:prstGeom prst="rect">
             <a:avLst/>
@@ -6443,22 +6440,22 @@
       <p:grpSpPr/>
       <p:pic>
         <p:nvPicPr>
-          <p:cNvPr id="2" name="Picture 1" descr="UC10_SaveLoad_Description.png"/>
-          <p:cNvPicPr>
-            <a:picLocks noChangeAspect="1"/>
-          </p:cNvPicPr>
-          <p:nvPr/>
-        </p:nvPicPr>
-        <p:blipFill>
-          <a:blip r:embed="rId2"/>
-          <a:stretch>
-            <a:fillRect/>
-          </a:stretch>
-        </p:blipFill>
-        <p:spPr>
-          <a:xfrm>
-            <a:off x="1447800" y="925830"/>
-            <a:ext cx="6248400" cy="5372100"/>
+          <p:cNvPr id="2" name="Picture 1" descr="UC2_BattleWild_Description.png"/>
+          <p:cNvPicPr>
+            <a:picLocks noChangeAspect="1"/>
+          </p:cNvPicPr>
+          <p:nvPr/>
+        </p:nvPicPr>
+        <p:blipFill>
+          <a:blip r:embed="rId2"/>
+          <a:stretch>
+            <a:fillRect/>
+          </a:stretch>
+        </p:blipFill>
+        <p:spPr>
+          <a:xfrm>
+            <a:off x="1402875" y="914400"/>
+            <a:ext cx="6338250" cy="5394960"/>
           </a:xfrm>
           <a:prstGeom prst="rect">
             <a:avLst/>
@@ -6905,22 +6902,22 @@
       <p:grpSpPr/>
       <p:pic>
         <p:nvPicPr>
-          <p:cNvPr id="2" name="Picture 1" descr="UC10_SaveLoad_Activity.png"/>
-          <p:cNvPicPr>
-            <a:picLocks noChangeAspect="1"/>
-          </p:cNvPicPr>
-          <p:nvPr/>
-        </p:nvPicPr>
-        <p:blipFill>
-          <a:blip r:embed="rId2"/>
-          <a:stretch>
-            <a:fillRect/>
-          </a:stretch>
-        </p:blipFill>
-        <p:spPr>
-          <a:xfrm>
-            <a:off x="1143471" y="914400"/>
-            <a:ext cx="6857058" cy="5394960"/>
+          <p:cNvPr id="2" name="Picture 1" descr="UC2_BattleWild_Activity.png"/>
+          <p:cNvPicPr>
+            <a:picLocks noChangeAspect="1"/>
+          </p:cNvPicPr>
+          <p:nvPr/>
+        </p:nvPicPr>
+        <p:blipFill>
+          <a:blip r:embed="rId2"/>
+          <a:stretch>
+            <a:fillRect/>
+          </a:stretch>
+        </p:blipFill>
+        <p:spPr>
+          <a:xfrm>
+            <a:off x="2578008" y="914400"/>
+            <a:ext cx="3987984" cy="5394960"/>
           </a:xfrm>
           <a:prstGeom prst="rect">
             <a:avLst/>

--- a/TurnBasedPokemon/Pokemon_GameProject_Report_auto.pptx
+++ b/TurnBasedPokemon/Pokemon_GameProject_Report_auto.pptx
@@ -5,95 +5,97 @@
     <p:sldMasterId id="2147483648" r:id="rId1"/>
   </p:sldMasterIdLst>
   <p:sldIdLst>
-    <p:sldId id="256" r:id="rId7"/>
-    <p:sldId id="257" r:id="rId8"/>
-    <p:sldId id="258" r:id="rId9"/>
-    <p:sldId id="259" r:id="rId10"/>
-    <p:sldId id="260" r:id="rId11"/>
-    <p:sldId id="261" r:id="rId12"/>
-    <p:sldId id="262" r:id="rId13"/>
-    <p:sldId id="263" r:id="rId14"/>
-    <p:sldId id="264" r:id="rId15"/>
-    <p:sldId id="265" r:id="rId16"/>
-    <p:sldId id="266" r:id="rId17"/>
-    <p:sldId id="267" r:id="rId18"/>
-    <p:sldId id="268" r:id="rId19"/>
-    <p:sldId id="269" r:id="rId20"/>
-    <p:sldId id="270" r:id="rId21"/>
-    <p:sldId id="271" r:id="rId22"/>
-    <p:sldId id="272" r:id="rId23"/>
-    <p:sldId id="273" r:id="rId24"/>
-    <p:sldId id="274" r:id="rId25"/>
-    <p:sldId id="275" r:id="rId26"/>
-    <p:sldId id="276" r:id="rId27"/>
-    <p:sldId id="277" r:id="rId28"/>
-    <p:sldId id="278" r:id="rId29"/>
-    <p:sldId id="279" r:id="rId30"/>
-    <p:sldId id="280" r:id="rId31"/>
-    <p:sldId id="281" r:id="rId32"/>
-    <p:sldId id="282" r:id="rId33"/>
-    <p:sldId id="283" r:id="rId34"/>
-    <p:sldId id="284" r:id="rId35"/>
-    <p:sldId id="285" r:id="rId36"/>
-    <p:sldId id="286" r:id="rId37"/>
-    <p:sldId id="287" r:id="rId38"/>
-    <p:sldId id="288" r:id="rId39"/>
-    <p:sldId id="289" r:id="rId40"/>
-    <p:sldId id="290" r:id="rId41"/>
-    <p:sldId id="291" r:id="rId42"/>
-    <p:sldId id="292" r:id="rId43"/>
-    <p:sldId id="293" r:id="rId44"/>
-    <p:sldId id="294" r:id="rId45"/>
-    <p:sldId id="295" r:id="rId46"/>
-    <p:sldId id="296" r:id="rId47"/>
-    <p:sldId id="297" r:id="rId48"/>
-    <p:sldId id="298" r:id="rId49"/>
-    <p:sldId id="299" r:id="rId50"/>
-    <p:sldId id="300" r:id="rId51"/>
-    <p:sldId id="301" r:id="rId52"/>
-    <p:sldId id="302" r:id="rId53"/>
-    <p:sldId id="303" r:id="rId54"/>
-    <p:sldId id="304" r:id="rId55"/>
-    <p:sldId id="305" r:id="rId56"/>
-    <p:sldId id="306" r:id="rId57"/>
-    <p:sldId id="307" r:id="rId58"/>
-    <p:sldId id="308" r:id="rId59"/>
-    <p:sldId id="309" r:id="rId60"/>
-    <p:sldId id="310" r:id="rId61"/>
-    <p:sldId id="311" r:id="rId62"/>
-    <p:sldId id="312" r:id="rId63"/>
-    <p:sldId id="313" r:id="rId64"/>
-    <p:sldId id="314" r:id="rId65"/>
-    <p:sldId id="315" r:id="rId66"/>
-    <p:sldId id="316" r:id="rId67"/>
-    <p:sldId id="317" r:id="rId68"/>
-    <p:sldId id="318" r:id="rId69"/>
-    <p:sldId id="319" r:id="rId70"/>
-    <p:sldId id="320" r:id="rId71"/>
-    <p:sldId id="321" r:id="rId72"/>
-    <p:sldId id="322" r:id="rId73"/>
-    <p:sldId id="323" r:id="rId74"/>
-    <p:sldId id="324" r:id="rId75"/>
-    <p:sldId id="325" r:id="rId76"/>
-    <p:sldId id="326" r:id="rId77"/>
-    <p:sldId id="327" r:id="rId78"/>
-    <p:sldId id="328" r:id="rId79"/>
-    <p:sldId id="329" r:id="rId80"/>
-    <p:sldId id="330" r:id="rId81"/>
-    <p:sldId id="331" r:id="rId82"/>
-    <p:sldId id="332" r:id="rId83"/>
-    <p:sldId id="333" r:id="rId84"/>
-    <p:sldId id="334" r:id="rId85"/>
-    <p:sldId id="335" r:id="rId86"/>
-    <p:sldId id="336" r:id="rId87"/>
-    <p:sldId id="337" r:id="rId88"/>
-    <p:sldId id="338" r:id="rId89"/>
-    <p:sldId id="339" r:id="rId90"/>
-    <p:sldId id="340" r:id="rId91"/>
-    <p:sldId id="341" r:id="rId92"/>
-    <p:sldId id="342" r:id="rId93"/>
-    <p:sldId id="343" r:id="rId94"/>
-    <p:sldId id="344" r:id="rId95"/>
+    <p:sldId id="256" r:id="rId2"/>
+    <p:sldId id="257" r:id="rId3"/>
+    <p:sldId id="345" r:id="rId4"/>
+    <p:sldId id="346" r:id="rId5"/>
+    <p:sldId id="258" r:id="rId6"/>
+    <p:sldId id="259" r:id="rId7"/>
+    <p:sldId id="260" r:id="rId8"/>
+    <p:sldId id="261" r:id="rId9"/>
+    <p:sldId id="262" r:id="rId10"/>
+    <p:sldId id="263" r:id="rId11"/>
+    <p:sldId id="264" r:id="rId12"/>
+    <p:sldId id="265" r:id="rId13"/>
+    <p:sldId id="266" r:id="rId14"/>
+    <p:sldId id="267" r:id="rId15"/>
+    <p:sldId id="268" r:id="rId16"/>
+    <p:sldId id="269" r:id="rId17"/>
+    <p:sldId id="270" r:id="rId18"/>
+    <p:sldId id="271" r:id="rId19"/>
+    <p:sldId id="272" r:id="rId20"/>
+    <p:sldId id="273" r:id="rId21"/>
+    <p:sldId id="274" r:id="rId22"/>
+    <p:sldId id="275" r:id="rId23"/>
+    <p:sldId id="276" r:id="rId24"/>
+    <p:sldId id="277" r:id="rId25"/>
+    <p:sldId id="278" r:id="rId26"/>
+    <p:sldId id="279" r:id="rId27"/>
+    <p:sldId id="280" r:id="rId28"/>
+    <p:sldId id="281" r:id="rId29"/>
+    <p:sldId id="282" r:id="rId30"/>
+    <p:sldId id="283" r:id="rId31"/>
+    <p:sldId id="284" r:id="rId32"/>
+    <p:sldId id="285" r:id="rId33"/>
+    <p:sldId id="286" r:id="rId34"/>
+    <p:sldId id="287" r:id="rId35"/>
+    <p:sldId id="288" r:id="rId36"/>
+    <p:sldId id="289" r:id="rId37"/>
+    <p:sldId id="290" r:id="rId38"/>
+    <p:sldId id="291" r:id="rId39"/>
+    <p:sldId id="292" r:id="rId40"/>
+    <p:sldId id="293" r:id="rId41"/>
+    <p:sldId id="294" r:id="rId42"/>
+    <p:sldId id="295" r:id="rId43"/>
+    <p:sldId id="296" r:id="rId44"/>
+    <p:sldId id="297" r:id="rId45"/>
+    <p:sldId id="298" r:id="rId46"/>
+    <p:sldId id="299" r:id="rId47"/>
+    <p:sldId id="300" r:id="rId48"/>
+    <p:sldId id="301" r:id="rId49"/>
+    <p:sldId id="302" r:id="rId50"/>
+    <p:sldId id="303" r:id="rId51"/>
+    <p:sldId id="304" r:id="rId52"/>
+    <p:sldId id="305" r:id="rId53"/>
+    <p:sldId id="306" r:id="rId54"/>
+    <p:sldId id="307" r:id="rId55"/>
+    <p:sldId id="308" r:id="rId56"/>
+    <p:sldId id="309" r:id="rId57"/>
+    <p:sldId id="310" r:id="rId58"/>
+    <p:sldId id="311" r:id="rId59"/>
+    <p:sldId id="312" r:id="rId60"/>
+    <p:sldId id="313" r:id="rId61"/>
+    <p:sldId id="314" r:id="rId62"/>
+    <p:sldId id="315" r:id="rId63"/>
+    <p:sldId id="316" r:id="rId64"/>
+    <p:sldId id="317" r:id="rId65"/>
+    <p:sldId id="318" r:id="rId66"/>
+    <p:sldId id="319" r:id="rId67"/>
+    <p:sldId id="320" r:id="rId68"/>
+    <p:sldId id="321" r:id="rId69"/>
+    <p:sldId id="322" r:id="rId70"/>
+    <p:sldId id="323" r:id="rId71"/>
+    <p:sldId id="324" r:id="rId72"/>
+    <p:sldId id="325" r:id="rId73"/>
+    <p:sldId id="326" r:id="rId74"/>
+    <p:sldId id="327" r:id="rId75"/>
+    <p:sldId id="328" r:id="rId76"/>
+    <p:sldId id="329" r:id="rId77"/>
+    <p:sldId id="330" r:id="rId78"/>
+    <p:sldId id="331" r:id="rId79"/>
+    <p:sldId id="332" r:id="rId80"/>
+    <p:sldId id="333" r:id="rId81"/>
+    <p:sldId id="334" r:id="rId82"/>
+    <p:sldId id="335" r:id="rId83"/>
+    <p:sldId id="336" r:id="rId84"/>
+    <p:sldId id="337" r:id="rId85"/>
+    <p:sldId id="338" r:id="rId86"/>
+    <p:sldId id="339" r:id="rId87"/>
+    <p:sldId id="340" r:id="rId88"/>
+    <p:sldId id="341" r:id="rId89"/>
+    <p:sldId id="342" r:id="rId90"/>
+    <p:sldId id="343" r:id="rId91"/>
+    <p:sldId id="344" r:id="rId92"/>
   </p:sldIdLst>
   <p:sldSz cx="9144000" cy="6858000" type="screen4x3"/>
   <p:notesSz cx="6858000" cy="9144000"/>
@@ -192,6 +194,22 @@
       </a:defRPr>
     </a:lvl9pPr>
   </p:defaultTextStyle>
+  <p:extLst>
+    <p:ext uri="{EFAFB233-063F-42B5-8137-9DF3F51BA10A}">
+      <p15:sldGuideLst xmlns:p15="http://schemas.microsoft.com/office/powerpoint/2012/main">
+        <p15:guide id="1" orient="horz" pos="2160">
+          <p15:clr>
+            <a:srgbClr val="A4A3A4"/>
+          </p15:clr>
+        </p15:guide>
+        <p15:guide id="2" pos="2880">
+          <p15:clr>
+            <a:srgbClr val="A4A3A4"/>
+          </p15:clr>
+        </p15:guide>
+      </p15:sldGuideLst>
+    </p:ext>
+  </p:extLst>
 </p:presentation>
 </file>
 
@@ -233,10 +251,9 @@
           <a:lstStyle/>
           <a:p>
             <a:r>
-              <a:rPr lang="en-US" smtClean="0"/>
+              <a:rPr lang="en-US"/>
               <a:t>Click to edit Master title style</a:t>
             </a:r>
-            <a:endParaRPr lang="en-US"/>
           </a:p>
         </p:txBody>
       </p:sp>
@@ -352,10 +369,9 @@
           </a:lstStyle>
           <a:p>
             <a:r>
-              <a:rPr lang="en-US" smtClean="0"/>
+              <a:rPr lang="en-US"/>
               <a:t>Click to edit Master subtitle style</a:t>
             </a:r>
-            <a:endParaRPr lang="en-US"/>
           </a:p>
         </p:txBody>
       </p:sp>
@@ -376,7 +392,7 @@
           <a:p>
             <a:fld id="{5BCAD085-E8A6-8845-BD4E-CB4CCA059FC4}" type="datetimeFigureOut">
               <a:rPr lang="en-US" smtClean="0"/>
-              <a:t>1/27/13</a:t>
+              <a:t>4/9/2026</a:t>
             </a:fld>
             <a:endParaRPr lang="en-US"/>
           </a:p>
@@ -470,10 +486,9 @@
           <a:lstStyle/>
           <a:p>
             <a:r>
-              <a:rPr lang="en-US" smtClean="0"/>
+              <a:rPr lang="en-US"/>
               <a:t>Click to edit Master title style</a:t>
             </a:r>
-            <a:endParaRPr lang="en-US"/>
           </a:p>
         </p:txBody>
       </p:sp>
@@ -494,38 +509,37 @@
           <a:p>
             <a:pPr lvl="0"/>
             <a:r>
-              <a:rPr lang="en-US" smtClean="0"/>
+              <a:rPr lang="en-US"/>
               <a:t>Click to edit Master text styles</a:t>
             </a:r>
           </a:p>
           <a:p>
             <a:pPr lvl="1"/>
             <a:r>
-              <a:rPr lang="en-US" smtClean="0"/>
+              <a:rPr lang="en-US"/>
               <a:t>Second level</a:t>
             </a:r>
           </a:p>
           <a:p>
             <a:pPr lvl="2"/>
             <a:r>
-              <a:rPr lang="en-US" smtClean="0"/>
+              <a:rPr lang="en-US"/>
               <a:t>Third level</a:t>
             </a:r>
           </a:p>
           <a:p>
             <a:pPr lvl="3"/>
             <a:r>
-              <a:rPr lang="en-US" smtClean="0"/>
+              <a:rPr lang="en-US"/>
               <a:t>Fourth level</a:t>
             </a:r>
           </a:p>
           <a:p>
             <a:pPr lvl="4"/>
             <a:r>
-              <a:rPr lang="en-US" smtClean="0"/>
+              <a:rPr lang="en-US"/>
               <a:t>Fifth level</a:t>
             </a:r>
-            <a:endParaRPr lang="en-US"/>
           </a:p>
         </p:txBody>
       </p:sp>
@@ -546,7 +560,7 @@
           <a:p>
             <a:fld id="{5BCAD085-E8A6-8845-BD4E-CB4CCA059FC4}" type="datetimeFigureOut">
               <a:rPr lang="en-US" smtClean="0"/>
-              <a:t>1/27/13</a:t>
+              <a:t>4/9/2026</a:t>
             </a:fld>
             <a:endParaRPr lang="en-US"/>
           </a:p>
@@ -645,10 +659,9 @@
           <a:lstStyle/>
           <a:p>
             <a:r>
-              <a:rPr lang="en-US" smtClean="0"/>
+              <a:rPr lang="en-US"/>
               <a:t>Click to edit Master title style</a:t>
             </a:r>
-            <a:endParaRPr lang="en-US"/>
           </a:p>
         </p:txBody>
       </p:sp>
@@ -674,38 +687,37 @@
           <a:p>
             <a:pPr lvl="0"/>
             <a:r>
-              <a:rPr lang="en-US" smtClean="0"/>
+              <a:rPr lang="en-US"/>
               <a:t>Click to edit Master text styles</a:t>
             </a:r>
           </a:p>
           <a:p>
             <a:pPr lvl="1"/>
             <a:r>
-              <a:rPr lang="en-US" smtClean="0"/>
+              <a:rPr lang="en-US"/>
               <a:t>Second level</a:t>
             </a:r>
           </a:p>
           <a:p>
             <a:pPr lvl="2"/>
             <a:r>
-              <a:rPr lang="en-US" smtClean="0"/>
+              <a:rPr lang="en-US"/>
               <a:t>Third level</a:t>
             </a:r>
           </a:p>
           <a:p>
             <a:pPr lvl="3"/>
             <a:r>
-              <a:rPr lang="en-US" smtClean="0"/>
+              <a:rPr lang="en-US"/>
               <a:t>Fourth level</a:t>
             </a:r>
           </a:p>
           <a:p>
             <a:pPr lvl="4"/>
             <a:r>
-              <a:rPr lang="en-US" smtClean="0"/>
+              <a:rPr lang="en-US"/>
               <a:t>Fifth level</a:t>
             </a:r>
-            <a:endParaRPr lang="en-US"/>
           </a:p>
         </p:txBody>
       </p:sp>
@@ -726,7 +738,7 @@
           <a:p>
             <a:fld id="{5BCAD085-E8A6-8845-BD4E-CB4CCA059FC4}" type="datetimeFigureOut">
               <a:rPr lang="en-US" smtClean="0"/>
-              <a:t>1/27/13</a:t>
+              <a:t>4/9/2026</a:t>
             </a:fld>
             <a:endParaRPr lang="en-US"/>
           </a:p>
@@ -820,10 +832,9 @@
           <a:lstStyle/>
           <a:p>
             <a:r>
-              <a:rPr lang="en-US" smtClean="0"/>
+              <a:rPr lang="en-US"/>
               <a:t>Click to edit Master title style</a:t>
             </a:r>
-            <a:endParaRPr lang="en-US"/>
           </a:p>
         </p:txBody>
       </p:sp>
@@ -844,38 +855,37 @@
           <a:p>
             <a:pPr lvl="0"/>
             <a:r>
-              <a:rPr lang="en-US" smtClean="0"/>
+              <a:rPr lang="en-US"/>
               <a:t>Click to edit Master text styles</a:t>
             </a:r>
           </a:p>
           <a:p>
             <a:pPr lvl="1"/>
             <a:r>
-              <a:rPr lang="en-US" smtClean="0"/>
+              <a:rPr lang="en-US"/>
               <a:t>Second level</a:t>
             </a:r>
           </a:p>
           <a:p>
             <a:pPr lvl="2"/>
             <a:r>
-              <a:rPr lang="en-US" smtClean="0"/>
+              <a:rPr lang="en-US"/>
               <a:t>Third level</a:t>
             </a:r>
           </a:p>
           <a:p>
             <a:pPr lvl="3"/>
             <a:r>
-              <a:rPr lang="en-US" smtClean="0"/>
+              <a:rPr lang="en-US"/>
               <a:t>Fourth level</a:t>
             </a:r>
           </a:p>
           <a:p>
             <a:pPr lvl="4"/>
             <a:r>
-              <a:rPr lang="en-US" smtClean="0"/>
+              <a:rPr lang="en-US"/>
               <a:t>Fifth level</a:t>
             </a:r>
-            <a:endParaRPr lang="en-US"/>
           </a:p>
         </p:txBody>
       </p:sp>
@@ -896,7 +906,7 @@
           <a:p>
             <a:fld id="{5BCAD085-E8A6-8845-BD4E-CB4CCA059FC4}" type="datetimeFigureOut">
               <a:rPr lang="en-US" smtClean="0"/>
-              <a:t>1/27/13</a:t>
+              <a:t>4/9/2026</a:t>
             </a:fld>
             <a:endParaRPr lang="en-US"/>
           </a:p>
@@ -999,10 +1009,9 @@
           </a:lstStyle>
           <a:p>
             <a:r>
-              <a:rPr lang="en-US" smtClean="0"/>
+              <a:rPr lang="en-US"/>
               <a:t>Click to edit Master title style</a:t>
             </a:r>
-            <a:endParaRPr lang="en-US"/>
           </a:p>
         </p:txBody>
       </p:sp>
@@ -1119,7 +1128,7 @@
           <a:p>
             <a:pPr lvl="0"/>
             <a:r>
-              <a:rPr lang="en-US" smtClean="0"/>
+              <a:rPr lang="en-US"/>
               <a:t>Click to edit Master text styles</a:t>
             </a:r>
           </a:p>
@@ -1142,7 +1151,7 @@
           <a:p>
             <a:fld id="{5BCAD085-E8A6-8845-BD4E-CB4CCA059FC4}" type="datetimeFigureOut">
               <a:rPr lang="en-US" smtClean="0"/>
-              <a:t>1/27/13</a:t>
+              <a:t>4/9/2026</a:t>
             </a:fld>
             <a:endParaRPr lang="en-US"/>
           </a:p>
@@ -1236,10 +1245,9 @@
           <a:lstStyle/>
           <a:p>
             <a:r>
-              <a:rPr lang="en-US" smtClean="0"/>
+              <a:rPr lang="en-US"/>
               <a:t>Click to edit Master title style</a:t>
             </a:r>
-            <a:endParaRPr lang="en-US"/>
           </a:p>
         </p:txBody>
       </p:sp>
@@ -1293,38 +1301,37 @@
           <a:p>
             <a:pPr lvl="0"/>
             <a:r>
-              <a:rPr lang="en-US" smtClean="0"/>
+              <a:rPr lang="en-US"/>
               <a:t>Click to edit Master text styles</a:t>
             </a:r>
           </a:p>
           <a:p>
             <a:pPr lvl="1"/>
             <a:r>
-              <a:rPr lang="en-US" smtClean="0"/>
+              <a:rPr lang="en-US"/>
               <a:t>Second level</a:t>
             </a:r>
           </a:p>
           <a:p>
             <a:pPr lvl="2"/>
             <a:r>
-              <a:rPr lang="en-US" smtClean="0"/>
+              <a:rPr lang="en-US"/>
               <a:t>Third level</a:t>
             </a:r>
           </a:p>
           <a:p>
             <a:pPr lvl="3"/>
             <a:r>
-              <a:rPr lang="en-US" smtClean="0"/>
+              <a:rPr lang="en-US"/>
               <a:t>Fourth level</a:t>
             </a:r>
           </a:p>
           <a:p>
             <a:pPr lvl="4"/>
             <a:r>
-              <a:rPr lang="en-US" smtClean="0"/>
+              <a:rPr lang="en-US"/>
               <a:t>Fifth level</a:t>
             </a:r>
-            <a:endParaRPr lang="en-US"/>
           </a:p>
         </p:txBody>
       </p:sp>
@@ -1378,38 +1385,37 @@
           <a:p>
             <a:pPr lvl="0"/>
             <a:r>
-              <a:rPr lang="en-US" smtClean="0"/>
+              <a:rPr lang="en-US"/>
               <a:t>Click to edit Master text styles</a:t>
             </a:r>
           </a:p>
           <a:p>
             <a:pPr lvl="1"/>
             <a:r>
-              <a:rPr lang="en-US" smtClean="0"/>
+              <a:rPr lang="en-US"/>
               <a:t>Second level</a:t>
             </a:r>
           </a:p>
           <a:p>
             <a:pPr lvl="2"/>
             <a:r>
-              <a:rPr lang="en-US" smtClean="0"/>
+              <a:rPr lang="en-US"/>
               <a:t>Third level</a:t>
             </a:r>
           </a:p>
           <a:p>
             <a:pPr lvl="3"/>
             <a:r>
-              <a:rPr lang="en-US" smtClean="0"/>
+              <a:rPr lang="en-US"/>
               <a:t>Fourth level</a:t>
             </a:r>
           </a:p>
           <a:p>
             <a:pPr lvl="4"/>
             <a:r>
-              <a:rPr lang="en-US" smtClean="0"/>
+              <a:rPr lang="en-US"/>
               <a:t>Fifth level</a:t>
             </a:r>
-            <a:endParaRPr lang="en-US"/>
           </a:p>
         </p:txBody>
       </p:sp>
@@ -1430,7 +1436,7 @@
           <a:p>
             <a:fld id="{5BCAD085-E8A6-8845-BD4E-CB4CCA059FC4}" type="datetimeFigureOut">
               <a:rPr lang="en-US" smtClean="0"/>
-              <a:t>1/27/13</a:t>
+              <a:t>4/9/2026</a:t>
             </a:fld>
             <a:endParaRPr lang="en-US"/>
           </a:p>
@@ -1528,10 +1534,9 @@
           </a:lstStyle>
           <a:p>
             <a:r>
-              <a:rPr lang="en-US" smtClean="0"/>
+              <a:rPr lang="en-US"/>
               <a:t>Click to edit Master title style</a:t>
             </a:r>
-            <a:endParaRPr lang="en-US"/>
           </a:p>
         </p:txBody>
       </p:sp>
@@ -1594,7 +1599,7 @@
           <a:p>
             <a:pPr lvl="0"/>
             <a:r>
-              <a:rPr lang="en-US" smtClean="0"/>
+              <a:rPr lang="en-US"/>
               <a:t>Click to edit Master text styles</a:t>
             </a:r>
           </a:p>
@@ -1650,38 +1655,37 @@
           <a:p>
             <a:pPr lvl="0"/>
             <a:r>
-              <a:rPr lang="en-US" smtClean="0"/>
+              <a:rPr lang="en-US"/>
               <a:t>Click to edit Master text styles</a:t>
             </a:r>
           </a:p>
           <a:p>
             <a:pPr lvl="1"/>
             <a:r>
-              <a:rPr lang="en-US" smtClean="0"/>
+              <a:rPr lang="en-US"/>
               <a:t>Second level</a:t>
             </a:r>
           </a:p>
           <a:p>
             <a:pPr lvl="2"/>
             <a:r>
-              <a:rPr lang="en-US" smtClean="0"/>
+              <a:rPr lang="en-US"/>
               <a:t>Third level</a:t>
             </a:r>
           </a:p>
           <a:p>
             <a:pPr lvl="3"/>
             <a:r>
-              <a:rPr lang="en-US" smtClean="0"/>
+              <a:rPr lang="en-US"/>
               <a:t>Fourth level</a:t>
             </a:r>
           </a:p>
           <a:p>
             <a:pPr lvl="4"/>
             <a:r>
-              <a:rPr lang="en-US" smtClean="0"/>
+              <a:rPr lang="en-US"/>
               <a:t>Fifth level</a:t>
             </a:r>
-            <a:endParaRPr lang="en-US"/>
           </a:p>
         </p:txBody>
       </p:sp>
@@ -1744,7 +1748,7 @@
           <a:p>
             <a:pPr lvl="0"/>
             <a:r>
-              <a:rPr lang="en-US" smtClean="0"/>
+              <a:rPr lang="en-US"/>
               <a:t>Click to edit Master text styles</a:t>
             </a:r>
           </a:p>
@@ -1800,38 +1804,37 @@
           <a:p>
             <a:pPr lvl="0"/>
             <a:r>
-              <a:rPr lang="en-US" smtClean="0"/>
+              <a:rPr lang="en-US"/>
               <a:t>Click to edit Master text styles</a:t>
             </a:r>
           </a:p>
           <a:p>
             <a:pPr lvl="1"/>
             <a:r>
-              <a:rPr lang="en-US" smtClean="0"/>
+              <a:rPr lang="en-US"/>
               <a:t>Second level</a:t>
             </a:r>
           </a:p>
           <a:p>
             <a:pPr lvl="2"/>
             <a:r>
-              <a:rPr lang="en-US" smtClean="0"/>
+              <a:rPr lang="en-US"/>
               <a:t>Third level</a:t>
             </a:r>
           </a:p>
           <a:p>
             <a:pPr lvl="3"/>
             <a:r>
-              <a:rPr lang="en-US" smtClean="0"/>
+              <a:rPr lang="en-US"/>
               <a:t>Fourth level</a:t>
             </a:r>
           </a:p>
           <a:p>
             <a:pPr lvl="4"/>
             <a:r>
-              <a:rPr lang="en-US" smtClean="0"/>
+              <a:rPr lang="en-US"/>
               <a:t>Fifth level</a:t>
             </a:r>
-            <a:endParaRPr lang="en-US"/>
           </a:p>
         </p:txBody>
       </p:sp>
@@ -1852,7 +1855,7 @@
           <a:p>
             <a:fld id="{5BCAD085-E8A6-8845-BD4E-CB4CCA059FC4}" type="datetimeFigureOut">
               <a:rPr lang="en-US" smtClean="0"/>
-              <a:t>1/27/13</a:t>
+              <a:t>4/9/2026</a:t>
             </a:fld>
             <a:endParaRPr lang="en-US"/>
           </a:p>
@@ -1946,10 +1949,9 @@
           <a:lstStyle/>
           <a:p>
             <a:r>
-              <a:rPr lang="en-US" smtClean="0"/>
+              <a:rPr lang="en-US"/>
               <a:t>Click to edit Master title style</a:t>
             </a:r>
-            <a:endParaRPr lang="en-US"/>
           </a:p>
         </p:txBody>
       </p:sp>
@@ -1970,7 +1972,7 @@
           <a:p>
             <a:fld id="{5BCAD085-E8A6-8845-BD4E-CB4CCA059FC4}" type="datetimeFigureOut">
               <a:rPr lang="en-US" smtClean="0"/>
-              <a:t>1/27/13</a:t>
+              <a:t>4/9/2026</a:t>
             </a:fld>
             <a:endParaRPr lang="en-US"/>
           </a:p>
@@ -2065,7 +2067,7 @@
           <a:p>
             <a:fld id="{5BCAD085-E8A6-8845-BD4E-CB4CCA059FC4}" type="datetimeFigureOut">
               <a:rPr lang="en-US" smtClean="0"/>
-              <a:t>1/27/13</a:t>
+              <a:t>4/9/2026</a:t>
             </a:fld>
             <a:endParaRPr lang="en-US"/>
           </a:p>
@@ -2168,10 +2170,9 @@
           </a:lstStyle>
           <a:p>
             <a:r>
-              <a:rPr lang="en-US" smtClean="0"/>
+              <a:rPr lang="en-US"/>
               <a:t>Click to edit Master title style</a:t>
             </a:r>
-            <a:endParaRPr lang="en-US"/>
           </a:p>
         </p:txBody>
       </p:sp>
@@ -2225,38 +2226,37 @@
           <a:p>
             <a:pPr lvl="0"/>
             <a:r>
-              <a:rPr lang="en-US" smtClean="0"/>
+              <a:rPr lang="en-US"/>
               <a:t>Click to edit Master text styles</a:t>
             </a:r>
           </a:p>
           <a:p>
             <a:pPr lvl="1"/>
             <a:r>
-              <a:rPr lang="en-US" smtClean="0"/>
+              <a:rPr lang="en-US"/>
               <a:t>Second level</a:t>
             </a:r>
           </a:p>
           <a:p>
             <a:pPr lvl="2"/>
             <a:r>
-              <a:rPr lang="en-US" smtClean="0"/>
+              <a:rPr lang="en-US"/>
               <a:t>Third level</a:t>
             </a:r>
           </a:p>
           <a:p>
             <a:pPr lvl="3"/>
             <a:r>
-              <a:rPr lang="en-US" smtClean="0"/>
+              <a:rPr lang="en-US"/>
               <a:t>Fourth level</a:t>
             </a:r>
           </a:p>
           <a:p>
             <a:pPr lvl="4"/>
             <a:r>
-              <a:rPr lang="en-US" smtClean="0"/>
+              <a:rPr lang="en-US"/>
               <a:t>Fifth level</a:t>
             </a:r>
-            <a:endParaRPr lang="en-US"/>
           </a:p>
         </p:txBody>
       </p:sp>
@@ -2319,7 +2319,7 @@
           <a:p>
             <a:pPr lvl="0"/>
             <a:r>
-              <a:rPr lang="en-US" smtClean="0"/>
+              <a:rPr lang="en-US"/>
               <a:t>Click to edit Master text styles</a:t>
             </a:r>
           </a:p>
@@ -2342,7 +2342,7 @@
           <a:p>
             <a:fld id="{5BCAD085-E8A6-8845-BD4E-CB4CCA059FC4}" type="datetimeFigureOut">
               <a:rPr lang="en-US" smtClean="0"/>
-              <a:t>1/27/13</a:t>
+              <a:t>4/9/2026</a:t>
             </a:fld>
             <a:endParaRPr lang="en-US"/>
           </a:p>
@@ -2445,10 +2445,9 @@
           </a:lstStyle>
           <a:p>
             <a:r>
-              <a:rPr lang="en-US" smtClean="0"/>
+              <a:rPr lang="en-US"/>
               <a:t>Click to edit Master title style</a:t>
             </a:r>
-            <a:endParaRPr lang="en-US"/>
           </a:p>
         </p:txBody>
       </p:sp>
@@ -2572,7 +2571,7 @@
           <a:p>
             <a:pPr lvl="0"/>
             <a:r>
-              <a:rPr lang="en-US" smtClean="0"/>
+              <a:rPr lang="en-US"/>
               <a:t>Click to edit Master text styles</a:t>
             </a:r>
           </a:p>
@@ -2595,7 +2594,7 @@
           <a:p>
             <a:fld id="{5BCAD085-E8A6-8845-BD4E-CB4CCA059FC4}" type="datetimeFigureOut">
               <a:rPr lang="en-US" smtClean="0"/>
-              <a:t>1/27/13</a:t>
+              <a:t>4/9/2026</a:t>
             </a:fld>
             <a:endParaRPr lang="en-US"/>
           </a:p>
@@ -2704,10 +2703,9 @@
           <a:lstStyle/>
           <a:p>
             <a:r>
-              <a:rPr lang="en-US" smtClean="0"/>
+              <a:rPr lang="en-US"/>
               <a:t>Click to edit Master title style</a:t>
             </a:r>
-            <a:endParaRPr lang="en-US"/>
           </a:p>
         </p:txBody>
       </p:sp>
@@ -2738,38 +2736,37 @@
           <a:p>
             <a:pPr lvl="0"/>
             <a:r>
-              <a:rPr lang="en-US" smtClean="0"/>
+              <a:rPr lang="en-US"/>
               <a:t>Click to edit Master text styles</a:t>
             </a:r>
           </a:p>
           <a:p>
             <a:pPr lvl="1"/>
             <a:r>
-              <a:rPr lang="en-US" smtClean="0"/>
+              <a:rPr lang="en-US"/>
               <a:t>Second level</a:t>
             </a:r>
           </a:p>
           <a:p>
             <a:pPr lvl="2"/>
             <a:r>
-              <a:rPr lang="en-US" smtClean="0"/>
+              <a:rPr lang="en-US"/>
               <a:t>Third level</a:t>
             </a:r>
           </a:p>
           <a:p>
             <a:pPr lvl="3"/>
             <a:r>
-              <a:rPr lang="en-US" smtClean="0"/>
+              <a:rPr lang="en-US"/>
               <a:t>Fourth level</a:t>
             </a:r>
           </a:p>
           <a:p>
             <a:pPr lvl="4"/>
             <a:r>
-              <a:rPr lang="en-US" smtClean="0"/>
+              <a:rPr lang="en-US"/>
               <a:t>Fifth level</a:t>
             </a:r>
-            <a:endParaRPr lang="en-US"/>
           </a:p>
         </p:txBody>
       </p:sp>
@@ -2808,7 +2805,7 @@
           <a:p>
             <a:fld id="{5BCAD085-E8A6-8845-BD4E-CB4CCA059FC4}" type="datetimeFigureOut">
               <a:rPr lang="en-US" smtClean="0"/>
-              <a:t>1/27/13</a:t>
+              <a:t>4/9/2026</a:t>
             </a:fld>
             <a:endParaRPr lang="en-US"/>
           </a:p>
@@ -3167,15 +3164,22 @@
 </file>
 
 <file path=ppt/slides/slide1.xml><?xml version="1.0" encoding="utf-8"?>
-<p:sld xmlns:a="http://schemas.openxmlformats.org/drawingml/2006/main" xmlns:p="http://schemas.openxmlformats.org/presentationml/2006/main" xmlns:r="http://schemas.openxmlformats.org/officeDocument/2006/relationships">
-  <p:cSld>
-    <p:spTree>
-      <p:nvGrpSpPr>
-        <p:cNvPr id="1" name=""/>
-        <p:cNvGrpSpPr/>
-        <p:nvPr/>
-      </p:nvGrpSpPr>
-      <p:grpSpPr/>
+<p:sld xmlns:a="http://schemas.openxmlformats.org/drawingml/2006/main" xmlns:r="http://schemas.openxmlformats.org/officeDocument/2006/relationships" xmlns:p="http://schemas.openxmlformats.org/presentationml/2006/main">
+  <p:cSld>
+    <p:spTree>
+      <p:nvGrpSpPr>
+        <p:cNvPr id="1" name=""/>
+        <p:cNvGrpSpPr/>
+        <p:nvPr/>
+      </p:nvGrpSpPr>
+      <p:grpSpPr>
+        <a:xfrm>
+          <a:off x="0" y="0"/>
+          <a:ext cx="0" cy="0"/>
+          <a:chOff x="0" y="0"/>
+          <a:chExt cx="0" cy="0"/>
+        </a:xfrm>
+      </p:grpSpPr>
       <p:sp>
         <p:nvSpPr>
           <p:cNvPr id="2" name="Title 1"/>
@@ -3211,7 +3215,9 @@
         <p:txBody>
           <a:bodyPr/>
           <a:lstStyle/>
-          <a:p/>
+          <a:p>
+            <a:endParaRPr/>
+          </a:p>
         </p:txBody>
       </p:sp>
     </p:spTree>
@@ -3223,15 +3229,120 @@
 </file>
 
 <file path=ppt/slides/slide10.xml><?xml version="1.0" encoding="utf-8"?>
-<p:sld xmlns:a="http://schemas.openxmlformats.org/drawingml/2006/main" xmlns:p="http://schemas.openxmlformats.org/presentationml/2006/main" xmlns:r="http://schemas.openxmlformats.org/officeDocument/2006/relationships">
-  <p:cSld>
-    <p:spTree>
-      <p:nvGrpSpPr>
-        <p:cNvPr id="1" name=""/>
-        <p:cNvGrpSpPr/>
-        <p:nvPr/>
-      </p:nvGrpSpPr>
-      <p:grpSpPr/>
+<p:sld xmlns:a="http://schemas.openxmlformats.org/drawingml/2006/main" xmlns:r="http://schemas.openxmlformats.org/officeDocument/2006/relationships" xmlns:p="http://schemas.openxmlformats.org/presentationml/2006/main">
+  <p:cSld>
+    <p:spTree>
+      <p:nvGrpSpPr>
+        <p:cNvPr id="1" name=""/>
+        <p:cNvGrpSpPr/>
+        <p:nvPr/>
+      </p:nvGrpSpPr>
+      <p:grpSpPr>
+        <a:xfrm>
+          <a:off x="0" y="0"/>
+          <a:ext cx="0" cy="0"/>
+          <a:chOff x="0" y="0"/>
+          <a:chExt cx="0" cy="0"/>
+        </a:xfrm>
+      </p:grpSpPr>
+      <p:pic>
+        <p:nvPicPr>
+          <p:cNvPr id="2" name="Picture 1" descr="UC2_BattleWild_Description.png"/>
+          <p:cNvPicPr>
+            <a:picLocks noChangeAspect="1"/>
+          </p:cNvPicPr>
+          <p:nvPr/>
+        </p:nvPicPr>
+        <p:blipFill>
+          <a:blip r:embed="rId2"/>
+          <a:stretch>
+            <a:fillRect/>
+          </a:stretch>
+        </p:blipFill>
+        <p:spPr>
+          <a:xfrm>
+            <a:off x="1402875" y="914400"/>
+            <a:ext cx="6338250" cy="5394960"/>
+          </a:xfrm>
+          <a:prstGeom prst="rect">
+            <a:avLst/>
+          </a:prstGeom>
+        </p:spPr>
+      </p:pic>
+    </p:spTree>
+  </p:cSld>
+  <p:clrMapOvr>
+    <a:masterClrMapping/>
+  </p:clrMapOvr>
+</p:sld>
+</file>
+
+<file path=ppt/slides/slide11.xml><?xml version="1.0" encoding="utf-8"?>
+<p:sld xmlns:a="http://schemas.openxmlformats.org/drawingml/2006/main" xmlns:r="http://schemas.openxmlformats.org/officeDocument/2006/relationships" xmlns:p="http://schemas.openxmlformats.org/presentationml/2006/main">
+  <p:cSld>
+    <p:spTree>
+      <p:nvGrpSpPr>
+        <p:cNvPr id="1" name=""/>
+        <p:cNvGrpSpPr/>
+        <p:nvPr/>
+      </p:nvGrpSpPr>
+      <p:grpSpPr>
+        <a:xfrm>
+          <a:off x="0" y="0"/>
+          <a:ext cx="0" cy="0"/>
+          <a:chOff x="0" y="0"/>
+          <a:chExt cx="0" cy="0"/>
+        </a:xfrm>
+      </p:grpSpPr>
+      <p:pic>
+        <p:nvPicPr>
+          <p:cNvPr id="2" name="Picture 1" descr="UC2_BattleWild_Activity.png"/>
+          <p:cNvPicPr>
+            <a:picLocks noChangeAspect="1"/>
+          </p:cNvPicPr>
+          <p:nvPr/>
+        </p:nvPicPr>
+        <p:blipFill>
+          <a:blip r:embed="rId2"/>
+          <a:stretch>
+            <a:fillRect/>
+          </a:stretch>
+        </p:blipFill>
+        <p:spPr>
+          <a:xfrm>
+            <a:off x="2578008" y="914400"/>
+            <a:ext cx="3987984" cy="5394960"/>
+          </a:xfrm>
+          <a:prstGeom prst="rect">
+            <a:avLst/>
+          </a:prstGeom>
+        </p:spPr>
+      </p:pic>
+    </p:spTree>
+  </p:cSld>
+  <p:clrMapOvr>
+    <a:masterClrMapping/>
+  </p:clrMapOvr>
+</p:sld>
+</file>
+
+<file path=ppt/slides/slide12.xml><?xml version="1.0" encoding="utf-8"?>
+<p:sld xmlns:a="http://schemas.openxmlformats.org/drawingml/2006/main" xmlns:r="http://schemas.openxmlformats.org/officeDocument/2006/relationships" xmlns:p="http://schemas.openxmlformats.org/presentationml/2006/main">
+  <p:cSld>
+    <p:spTree>
+      <p:nvGrpSpPr>
+        <p:cNvPr id="1" name=""/>
+        <p:cNvGrpSpPr/>
+        <p:nvPr/>
+      </p:nvGrpSpPr>
+      <p:grpSpPr>
+        <a:xfrm>
+          <a:off x="0" y="0"/>
+          <a:ext cx="0" cy="0"/>
+          <a:chOff x="0" y="0"/>
+          <a:chExt cx="0" cy="0"/>
+        </a:xfrm>
+      </p:grpSpPr>
       <p:pic>
         <p:nvPicPr>
           <p:cNvPr id="2" name="Picture 1" descr="UC2_BattleWild_Sequence.png"/>
@@ -3264,16 +3375,23 @@
 </p:sld>
 </file>
 
-<file path=ppt/slides/slide11.xml><?xml version="1.0" encoding="utf-8"?>
-<p:sld xmlns:a="http://schemas.openxmlformats.org/drawingml/2006/main" xmlns:p="http://schemas.openxmlformats.org/presentationml/2006/main" xmlns:r="http://schemas.openxmlformats.org/officeDocument/2006/relationships">
-  <p:cSld>
-    <p:spTree>
-      <p:nvGrpSpPr>
-        <p:cNvPr id="1" name=""/>
-        <p:cNvGrpSpPr/>
-        <p:nvPr/>
-      </p:nvGrpSpPr>
-      <p:grpSpPr/>
+<file path=ppt/slides/slide13.xml><?xml version="1.0" encoding="utf-8"?>
+<p:sld xmlns:a="http://schemas.openxmlformats.org/drawingml/2006/main" xmlns:r="http://schemas.openxmlformats.org/officeDocument/2006/relationships" xmlns:p="http://schemas.openxmlformats.org/presentationml/2006/main">
+  <p:cSld>
+    <p:spTree>
+      <p:nvGrpSpPr>
+        <p:cNvPr id="1" name=""/>
+        <p:cNvGrpSpPr/>
+        <p:nvPr/>
+      </p:nvGrpSpPr>
+      <p:grpSpPr>
+        <a:xfrm>
+          <a:off x="0" y="0"/>
+          <a:ext cx="0" cy="0"/>
+          <a:chOff x="0" y="0"/>
+          <a:chExt cx="0" cy="0"/>
+        </a:xfrm>
+      </p:grpSpPr>
       <p:pic>
         <p:nvPicPr>
           <p:cNvPr id="2" name="Picture 1" descr="UC2_BattleWild_TestCases.png"/>
@@ -3306,16 +3424,23 @@
 </p:sld>
 </file>
 
-<file path=ppt/slides/slide12.xml><?xml version="1.0" encoding="utf-8"?>
-<p:sld xmlns:a="http://schemas.openxmlformats.org/drawingml/2006/main" xmlns:p="http://schemas.openxmlformats.org/presentationml/2006/main" xmlns:r="http://schemas.openxmlformats.org/officeDocument/2006/relationships">
-  <p:cSld>
-    <p:spTree>
-      <p:nvGrpSpPr>
-        <p:cNvPr id="1" name=""/>
-        <p:cNvGrpSpPr/>
-        <p:nvPr/>
-      </p:nvGrpSpPr>
-      <p:grpSpPr/>
+<file path=ppt/slides/slide14.xml><?xml version="1.0" encoding="utf-8"?>
+<p:sld xmlns:a="http://schemas.openxmlformats.org/drawingml/2006/main" xmlns:r="http://schemas.openxmlformats.org/officeDocument/2006/relationships" xmlns:p="http://schemas.openxmlformats.org/presentationml/2006/main">
+  <p:cSld>
+    <p:spTree>
+      <p:nvGrpSpPr>
+        <p:cNvPr id="1" name=""/>
+        <p:cNvGrpSpPr/>
+        <p:nvPr/>
+      </p:nvGrpSpPr>
+      <p:grpSpPr>
+        <a:xfrm>
+          <a:off x="0" y="0"/>
+          <a:ext cx="0" cy="0"/>
+          <a:chOff x="0" y="0"/>
+          <a:chExt cx="0" cy="0"/>
+        </a:xfrm>
+      </p:grpSpPr>
       <p:pic>
         <p:nvPicPr>
           <p:cNvPr id="2" name="Picture 1" descr="UC3_Catch_Description.png"/>
@@ -3348,16 +3473,23 @@
 </p:sld>
 </file>
 
-<file path=ppt/slides/slide13.xml><?xml version="1.0" encoding="utf-8"?>
-<p:sld xmlns:a="http://schemas.openxmlformats.org/drawingml/2006/main" xmlns:p="http://schemas.openxmlformats.org/presentationml/2006/main" xmlns:r="http://schemas.openxmlformats.org/officeDocument/2006/relationships">
-  <p:cSld>
-    <p:spTree>
-      <p:nvGrpSpPr>
-        <p:cNvPr id="1" name=""/>
-        <p:cNvGrpSpPr/>
-        <p:nvPr/>
-      </p:nvGrpSpPr>
-      <p:grpSpPr/>
+<file path=ppt/slides/slide15.xml><?xml version="1.0" encoding="utf-8"?>
+<p:sld xmlns:a="http://schemas.openxmlformats.org/drawingml/2006/main" xmlns:r="http://schemas.openxmlformats.org/officeDocument/2006/relationships" xmlns:p="http://schemas.openxmlformats.org/presentationml/2006/main">
+  <p:cSld>
+    <p:spTree>
+      <p:nvGrpSpPr>
+        <p:cNvPr id="1" name=""/>
+        <p:cNvGrpSpPr/>
+        <p:nvPr/>
+      </p:nvGrpSpPr>
+      <p:grpSpPr>
+        <a:xfrm>
+          <a:off x="0" y="0"/>
+          <a:ext cx="0" cy="0"/>
+          <a:chOff x="0" y="0"/>
+          <a:chExt cx="0" cy="0"/>
+        </a:xfrm>
+      </p:grpSpPr>
       <p:pic>
         <p:nvPicPr>
           <p:cNvPr id="2" name="Picture 1" descr="UC3_CatchPokemon_Activity.png"/>
@@ -3390,16 +3522,23 @@
 </p:sld>
 </file>
 
-<file path=ppt/slides/slide14.xml><?xml version="1.0" encoding="utf-8"?>
-<p:sld xmlns:a="http://schemas.openxmlformats.org/drawingml/2006/main" xmlns:p="http://schemas.openxmlformats.org/presentationml/2006/main" xmlns:r="http://schemas.openxmlformats.org/officeDocument/2006/relationships">
-  <p:cSld>
-    <p:spTree>
-      <p:nvGrpSpPr>
-        <p:cNvPr id="1" name=""/>
-        <p:cNvGrpSpPr/>
-        <p:nvPr/>
-      </p:nvGrpSpPr>
-      <p:grpSpPr/>
+<file path=ppt/slides/slide16.xml><?xml version="1.0" encoding="utf-8"?>
+<p:sld xmlns:a="http://schemas.openxmlformats.org/drawingml/2006/main" xmlns:r="http://schemas.openxmlformats.org/officeDocument/2006/relationships" xmlns:p="http://schemas.openxmlformats.org/presentationml/2006/main">
+  <p:cSld>
+    <p:spTree>
+      <p:nvGrpSpPr>
+        <p:cNvPr id="1" name=""/>
+        <p:cNvGrpSpPr/>
+        <p:nvPr/>
+      </p:nvGrpSpPr>
+      <p:grpSpPr>
+        <a:xfrm>
+          <a:off x="0" y="0"/>
+          <a:ext cx="0" cy="0"/>
+          <a:chOff x="0" y="0"/>
+          <a:chExt cx="0" cy="0"/>
+        </a:xfrm>
+      </p:grpSpPr>
       <p:pic>
         <p:nvPicPr>
           <p:cNvPr id="2" name="Picture 1" descr="UC3_CatchPokemon_Sequence.png"/>
@@ -3432,16 +3571,23 @@
 </p:sld>
 </file>
 
-<file path=ppt/slides/slide15.xml><?xml version="1.0" encoding="utf-8"?>
-<p:sld xmlns:a="http://schemas.openxmlformats.org/drawingml/2006/main" xmlns:p="http://schemas.openxmlformats.org/presentationml/2006/main" xmlns:r="http://schemas.openxmlformats.org/officeDocument/2006/relationships">
-  <p:cSld>
-    <p:spTree>
-      <p:nvGrpSpPr>
-        <p:cNvPr id="1" name=""/>
-        <p:cNvGrpSpPr/>
-        <p:nvPr/>
-      </p:nvGrpSpPr>
-      <p:grpSpPr/>
+<file path=ppt/slides/slide17.xml><?xml version="1.0" encoding="utf-8"?>
+<p:sld xmlns:a="http://schemas.openxmlformats.org/drawingml/2006/main" xmlns:r="http://schemas.openxmlformats.org/officeDocument/2006/relationships" xmlns:p="http://schemas.openxmlformats.org/presentationml/2006/main">
+  <p:cSld>
+    <p:spTree>
+      <p:nvGrpSpPr>
+        <p:cNvPr id="1" name=""/>
+        <p:cNvGrpSpPr/>
+        <p:nvPr/>
+      </p:nvGrpSpPr>
+      <p:grpSpPr>
+        <a:xfrm>
+          <a:off x="0" y="0"/>
+          <a:ext cx="0" cy="0"/>
+          <a:chOff x="0" y="0"/>
+          <a:chExt cx="0" cy="0"/>
+        </a:xfrm>
+      </p:grpSpPr>
       <p:pic>
         <p:nvPicPr>
           <p:cNvPr id="2" name="Picture 1" descr="UC3_Catch_TestCases.png"/>
@@ -3474,16 +3620,23 @@
 </p:sld>
 </file>
 
-<file path=ppt/slides/slide16.xml><?xml version="1.0" encoding="utf-8"?>
-<p:sld xmlns:a="http://schemas.openxmlformats.org/drawingml/2006/main" xmlns:p="http://schemas.openxmlformats.org/presentationml/2006/main" xmlns:r="http://schemas.openxmlformats.org/officeDocument/2006/relationships">
-  <p:cSld>
-    <p:spTree>
-      <p:nvGrpSpPr>
-        <p:cNvPr id="1" name=""/>
-        <p:cNvGrpSpPr/>
-        <p:nvPr/>
-      </p:nvGrpSpPr>
-      <p:grpSpPr/>
+<file path=ppt/slides/slide18.xml><?xml version="1.0" encoding="utf-8"?>
+<p:sld xmlns:a="http://schemas.openxmlformats.org/drawingml/2006/main" xmlns:r="http://schemas.openxmlformats.org/officeDocument/2006/relationships" xmlns:p="http://schemas.openxmlformats.org/presentationml/2006/main">
+  <p:cSld>
+    <p:spTree>
+      <p:nvGrpSpPr>
+        <p:cNvPr id="1" name=""/>
+        <p:cNvGrpSpPr/>
+        <p:nvPr/>
+      </p:nvGrpSpPr>
+      <p:grpSpPr>
+        <a:xfrm>
+          <a:off x="0" y="0"/>
+          <a:ext cx="0" cy="0"/>
+          <a:chOff x="0" y="0"/>
+          <a:chExt cx="0" cy="0"/>
+        </a:xfrm>
+      </p:grpSpPr>
       <p:pic>
         <p:nvPicPr>
           <p:cNvPr id="2" name="Picture 1" descr="UC4_UseItems_Description.png"/>
@@ -3516,16 +3669,23 @@
 </p:sld>
 </file>
 
-<file path=ppt/slides/slide17.xml><?xml version="1.0" encoding="utf-8"?>
-<p:sld xmlns:a="http://schemas.openxmlformats.org/drawingml/2006/main" xmlns:p="http://schemas.openxmlformats.org/presentationml/2006/main" xmlns:r="http://schemas.openxmlformats.org/officeDocument/2006/relationships">
-  <p:cSld>
-    <p:spTree>
-      <p:nvGrpSpPr>
-        <p:cNvPr id="1" name=""/>
-        <p:cNvGrpSpPr/>
-        <p:nvPr/>
-      </p:nvGrpSpPr>
-      <p:grpSpPr/>
+<file path=ppt/slides/slide19.xml><?xml version="1.0" encoding="utf-8"?>
+<p:sld xmlns:a="http://schemas.openxmlformats.org/drawingml/2006/main" xmlns:r="http://schemas.openxmlformats.org/officeDocument/2006/relationships" xmlns:p="http://schemas.openxmlformats.org/presentationml/2006/main">
+  <p:cSld>
+    <p:spTree>
+      <p:nvGrpSpPr>
+        <p:cNvPr id="1" name=""/>
+        <p:cNvGrpSpPr/>
+        <p:nvPr/>
+      </p:nvGrpSpPr>
+      <p:grpSpPr>
+        <a:xfrm>
+          <a:off x="0" y="0"/>
+          <a:ext cx="0" cy="0"/>
+          <a:chOff x="0" y="0"/>
+          <a:chExt cx="0" cy="0"/>
+        </a:xfrm>
+      </p:grpSpPr>
       <p:pic>
         <p:nvPicPr>
           <p:cNvPr id="2" name="Picture 1" descr="UC4_UseItems_Activity.png"/>
@@ -3558,100 +3718,23 @@
 </p:sld>
 </file>
 
-<file path=ppt/slides/slide18.xml><?xml version="1.0" encoding="utf-8"?>
-<p:sld xmlns:a="http://schemas.openxmlformats.org/drawingml/2006/main" xmlns:p="http://schemas.openxmlformats.org/presentationml/2006/main" xmlns:r="http://schemas.openxmlformats.org/officeDocument/2006/relationships">
-  <p:cSld>
-    <p:spTree>
-      <p:nvGrpSpPr>
-        <p:cNvPr id="1" name=""/>
-        <p:cNvGrpSpPr/>
-        <p:nvPr/>
-      </p:nvGrpSpPr>
-      <p:grpSpPr/>
-      <p:pic>
-        <p:nvPicPr>
-          <p:cNvPr id="2" name="Picture 1" descr="UC4_UseItems_Sequence.png"/>
-          <p:cNvPicPr>
-            <a:picLocks noChangeAspect="1"/>
-          </p:cNvPicPr>
-          <p:nvPr/>
-        </p:nvPicPr>
-        <p:blipFill>
-          <a:blip r:embed="rId2"/>
-          <a:stretch>
-            <a:fillRect/>
-          </a:stretch>
-        </p:blipFill>
-        <p:spPr>
-          <a:xfrm>
-            <a:off x="723891" y="914400"/>
-            <a:ext cx="7696217" cy="5394960"/>
-          </a:xfrm>
-          <a:prstGeom prst="rect">
-            <a:avLst/>
-          </a:prstGeom>
-        </p:spPr>
-      </p:pic>
-    </p:spTree>
-  </p:cSld>
-  <p:clrMapOvr>
-    <a:masterClrMapping/>
-  </p:clrMapOvr>
-</p:sld>
-</file>
-
-<file path=ppt/slides/slide19.xml><?xml version="1.0" encoding="utf-8"?>
-<p:sld xmlns:a="http://schemas.openxmlformats.org/drawingml/2006/main" xmlns:p="http://schemas.openxmlformats.org/presentationml/2006/main" xmlns:r="http://schemas.openxmlformats.org/officeDocument/2006/relationships">
-  <p:cSld>
-    <p:spTree>
-      <p:nvGrpSpPr>
-        <p:cNvPr id="1" name=""/>
-        <p:cNvGrpSpPr/>
-        <p:nvPr/>
-      </p:nvGrpSpPr>
-      <p:grpSpPr/>
-      <p:pic>
-        <p:nvPicPr>
-          <p:cNvPr id="2" name="Picture 1" descr="UC4_UseItems_TestCases.png"/>
-          <p:cNvPicPr>
-            <a:picLocks noChangeAspect="1"/>
-          </p:cNvPicPr>
-          <p:nvPr/>
-        </p:nvPicPr>
-        <p:blipFill>
-          <a:blip r:embed="rId2"/>
-          <a:stretch>
-            <a:fillRect/>
-          </a:stretch>
-        </p:blipFill>
-        <p:spPr>
-          <a:xfrm>
-            <a:off x="548640" y="2045717"/>
-            <a:ext cx="8046720" cy="3132326"/>
-          </a:xfrm>
-          <a:prstGeom prst="rect">
-            <a:avLst/>
-          </a:prstGeom>
-        </p:spPr>
-      </p:pic>
-    </p:spTree>
-  </p:cSld>
-  <p:clrMapOvr>
-    <a:masterClrMapping/>
-  </p:clrMapOvr>
-</p:sld>
-</file>
-
 <file path=ppt/slides/slide2.xml><?xml version="1.0" encoding="utf-8"?>
-<p:sld xmlns:a="http://schemas.openxmlformats.org/drawingml/2006/main" xmlns:p="http://schemas.openxmlformats.org/presentationml/2006/main" xmlns:r="http://schemas.openxmlformats.org/officeDocument/2006/relationships">
-  <p:cSld>
-    <p:spTree>
-      <p:nvGrpSpPr>
-        <p:cNvPr id="1" name=""/>
-        <p:cNvGrpSpPr/>
-        <p:nvPr/>
-      </p:nvGrpSpPr>
-      <p:grpSpPr/>
+<p:sld xmlns:a="http://schemas.openxmlformats.org/drawingml/2006/main" xmlns:r="http://schemas.openxmlformats.org/officeDocument/2006/relationships" xmlns:p="http://schemas.openxmlformats.org/presentationml/2006/main">
+  <p:cSld>
+    <p:spTree>
+      <p:nvGrpSpPr>
+        <p:cNvPr id="1" name=""/>
+        <p:cNvGrpSpPr/>
+        <p:nvPr/>
+      </p:nvGrpSpPr>
+      <p:grpSpPr>
+        <a:xfrm>
+          <a:off x="0" y="0"/>
+          <a:ext cx="0" cy="0"/>
+          <a:chOff x="0" y="0"/>
+          <a:chExt cx="0" cy="0"/>
+        </a:xfrm>
+      </p:grpSpPr>
       <p:sp>
         <p:nvSpPr>
           <p:cNvPr id="2" name="Title 1"/>
@@ -3664,7 +3747,9 @@
         </p:nvSpPr>
         <p:spPr/>
         <p:txBody>
-          <a:bodyPr/>
+          <a:bodyPr>
+            <a:normAutofit fontScale="90000"/>
+          </a:bodyPr>
           <a:lstStyle/>
           <a:p>
             <a:r>
@@ -3687,7 +3772,9 @@
         <p:txBody>
           <a:bodyPr/>
           <a:lstStyle/>
-          <a:p/>
+          <a:p>
+            <a:endParaRPr/>
+          </a:p>
         </p:txBody>
       </p:sp>
     </p:spTree>
@@ -3699,15 +3786,120 @@
 </file>
 
 <file path=ppt/slides/slide20.xml><?xml version="1.0" encoding="utf-8"?>
-<p:sld xmlns:a="http://schemas.openxmlformats.org/drawingml/2006/main" xmlns:p="http://schemas.openxmlformats.org/presentationml/2006/main" xmlns:r="http://schemas.openxmlformats.org/officeDocument/2006/relationships">
-  <p:cSld>
-    <p:spTree>
-      <p:nvGrpSpPr>
-        <p:cNvPr id="1" name=""/>
-        <p:cNvGrpSpPr/>
-        <p:nvPr/>
-      </p:nvGrpSpPr>
-      <p:grpSpPr/>
+<p:sld xmlns:a="http://schemas.openxmlformats.org/drawingml/2006/main" xmlns:r="http://schemas.openxmlformats.org/officeDocument/2006/relationships" xmlns:p="http://schemas.openxmlformats.org/presentationml/2006/main">
+  <p:cSld>
+    <p:spTree>
+      <p:nvGrpSpPr>
+        <p:cNvPr id="1" name=""/>
+        <p:cNvGrpSpPr/>
+        <p:nvPr/>
+      </p:nvGrpSpPr>
+      <p:grpSpPr>
+        <a:xfrm>
+          <a:off x="0" y="0"/>
+          <a:ext cx="0" cy="0"/>
+          <a:chOff x="0" y="0"/>
+          <a:chExt cx="0" cy="0"/>
+        </a:xfrm>
+      </p:grpSpPr>
+      <p:pic>
+        <p:nvPicPr>
+          <p:cNvPr id="2" name="Picture 1" descr="UC4_UseItems_Sequence.png"/>
+          <p:cNvPicPr>
+            <a:picLocks noChangeAspect="1"/>
+          </p:cNvPicPr>
+          <p:nvPr/>
+        </p:nvPicPr>
+        <p:blipFill>
+          <a:blip r:embed="rId2"/>
+          <a:stretch>
+            <a:fillRect/>
+          </a:stretch>
+        </p:blipFill>
+        <p:spPr>
+          <a:xfrm>
+            <a:off x="723891" y="914400"/>
+            <a:ext cx="7696217" cy="5394960"/>
+          </a:xfrm>
+          <a:prstGeom prst="rect">
+            <a:avLst/>
+          </a:prstGeom>
+        </p:spPr>
+      </p:pic>
+    </p:spTree>
+  </p:cSld>
+  <p:clrMapOvr>
+    <a:masterClrMapping/>
+  </p:clrMapOvr>
+</p:sld>
+</file>
+
+<file path=ppt/slides/slide21.xml><?xml version="1.0" encoding="utf-8"?>
+<p:sld xmlns:a="http://schemas.openxmlformats.org/drawingml/2006/main" xmlns:r="http://schemas.openxmlformats.org/officeDocument/2006/relationships" xmlns:p="http://schemas.openxmlformats.org/presentationml/2006/main">
+  <p:cSld>
+    <p:spTree>
+      <p:nvGrpSpPr>
+        <p:cNvPr id="1" name=""/>
+        <p:cNvGrpSpPr/>
+        <p:nvPr/>
+      </p:nvGrpSpPr>
+      <p:grpSpPr>
+        <a:xfrm>
+          <a:off x="0" y="0"/>
+          <a:ext cx="0" cy="0"/>
+          <a:chOff x="0" y="0"/>
+          <a:chExt cx="0" cy="0"/>
+        </a:xfrm>
+      </p:grpSpPr>
+      <p:pic>
+        <p:nvPicPr>
+          <p:cNvPr id="2" name="Picture 1" descr="UC4_UseItems_TestCases.png"/>
+          <p:cNvPicPr>
+            <a:picLocks noChangeAspect="1"/>
+          </p:cNvPicPr>
+          <p:nvPr/>
+        </p:nvPicPr>
+        <p:blipFill>
+          <a:blip r:embed="rId2"/>
+          <a:stretch>
+            <a:fillRect/>
+          </a:stretch>
+        </p:blipFill>
+        <p:spPr>
+          <a:xfrm>
+            <a:off x="548640" y="2045717"/>
+            <a:ext cx="8046720" cy="3132326"/>
+          </a:xfrm>
+          <a:prstGeom prst="rect">
+            <a:avLst/>
+          </a:prstGeom>
+        </p:spPr>
+      </p:pic>
+    </p:spTree>
+  </p:cSld>
+  <p:clrMapOvr>
+    <a:masterClrMapping/>
+  </p:clrMapOvr>
+</p:sld>
+</file>
+
+<file path=ppt/slides/slide22.xml><?xml version="1.0" encoding="utf-8"?>
+<p:sld xmlns:a="http://schemas.openxmlformats.org/drawingml/2006/main" xmlns:r="http://schemas.openxmlformats.org/officeDocument/2006/relationships" xmlns:p="http://schemas.openxmlformats.org/presentationml/2006/main">
+  <p:cSld>
+    <p:spTree>
+      <p:nvGrpSpPr>
+        <p:cNvPr id="1" name=""/>
+        <p:cNvGrpSpPr/>
+        <p:nvPr/>
+      </p:nvGrpSpPr>
+      <p:grpSpPr>
+        <a:xfrm>
+          <a:off x="0" y="0"/>
+          <a:ext cx="0" cy="0"/>
+          <a:chOff x="0" y="0"/>
+          <a:chExt cx="0" cy="0"/>
+        </a:xfrm>
+      </p:grpSpPr>
       <p:pic>
         <p:nvPicPr>
           <p:cNvPr id="2" name="Picture 1" descr="UC5_ManageTeam_Description.png"/>
@@ -3740,16 +3932,23 @@
 </p:sld>
 </file>
 
-<file path=ppt/slides/slide21.xml><?xml version="1.0" encoding="utf-8"?>
-<p:sld xmlns:a="http://schemas.openxmlformats.org/drawingml/2006/main" xmlns:p="http://schemas.openxmlformats.org/presentationml/2006/main" xmlns:r="http://schemas.openxmlformats.org/officeDocument/2006/relationships">
-  <p:cSld>
-    <p:spTree>
-      <p:nvGrpSpPr>
-        <p:cNvPr id="1" name=""/>
-        <p:cNvGrpSpPr/>
-        <p:nvPr/>
-      </p:nvGrpSpPr>
-      <p:grpSpPr/>
+<file path=ppt/slides/slide23.xml><?xml version="1.0" encoding="utf-8"?>
+<p:sld xmlns:a="http://schemas.openxmlformats.org/drawingml/2006/main" xmlns:r="http://schemas.openxmlformats.org/officeDocument/2006/relationships" xmlns:p="http://schemas.openxmlformats.org/presentationml/2006/main">
+  <p:cSld>
+    <p:spTree>
+      <p:nvGrpSpPr>
+        <p:cNvPr id="1" name=""/>
+        <p:cNvGrpSpPr/>
+        <p:nvPr/>
+      </p:nvGrpSpPr>
+      <p:grpSpPr>
+        <a:xfrm>
+          <a:off x="0" y="0"/>
+          <a:ext cx="0" cy="0"/>
+          <a:chOff x="0" y="0"/>
+          <a:chExt cx="0" cy="0"/>
+        </a:xfrm>
+      </p:grpSpPr>
       <p:pic>
         <p:nvPicPr>
           <p:cNvPr id="2" name="Picture 1" descr="UC5_ManageTeam_Activity.png"/>
@@ -3782,16 +3981,23 @@
 </p:sld>
 </file>
 
-<file path=ppt/slides/slide22.xml><?xml version="1.0" encoding="utf-8"?>
-<p:sld xmlns:a="http://schemas.openxmlformats.org/drawingml/2006/main" xmlns:p="http://schemas.openxmlformats.org/presentationml/2006/main" xmlns:r="http://schemas.openxmlformats.org/officeDocument/2006/relationships">
-  <p:cSld>
-    <p:spTree>
-      <p:nvGrpSpPr>
-        <p:cNvPr id="1" name=""/>
-        <p:cNvGrpSpPr/>
-        <p:nvPr/>
-      </p:nvGrpSpPr>
-      <p:grpSpPr/>
+<file path=ppt/slides/slide24.xml><?xml version="1.0" encoding="utf-8"?>
+<p:sld xmlns:a="http://schemas.openxmlformats.org/drawingml/2006/main" xmlns:r="http://schemas.openxmlformats.org/officeDocument/2006/relationships" xmlns:p="http://schemas.openxmlformats.org/presentationml/2006/main">
+  <p:cSld>
+    <p:spTree>
+      <p:nvGrpSpPr>
+        <p:cNvPr id="1" name=""/>
+        <p:cNvGrpSpPr/>
+        <p:nvPr/>
+      </p:nvGrpSpPr>
+      <p:grpSpPr>
+        <a:xfrm>
+          <a:off x="0" y="0"/>
+          <a:ext cx="0" cy="0"/>
+          <a:chOff x="0" y="0"/>
+          <a:chExt cx="0" cy="0"/>
+        </a:xfrm>
+      </p:grpSpPr>
       <p:pic>
         <p:nvPicPr>
           <p:cNvPr id="2" name="Picture 1" descr="UC5_ManageTeam_Sequence.png"/>
@@ -3824,16 +4030,23 @@
 </p:sld>
 </file>
 
-<file path=ppt/slides/slide23.xml><?xml version="1.0" encoding="utf-8"?>
-<p:sld xmlns:a="http://schemas.openxmlformats.org/drawingml/2006/main" xmlns:p="http://schemas.openxmlformats.org/presentationml/2006/main" xmlns:r="http://schemas.openxmlformats.org/officeDocument/2006/relationships">
-  <p:cSld>
-    <p:spTree>
-      <p:nvGrpSpPr>
-        <p:cNvPr id="1" name=""/>
-        <p:cNvGrpSpPr/>
-        <p:nvPr/>
-      </p:nvGrpSpPr>
-      <p:grpSpPr/>
+<file path=ppt/slides/slide25.xml><?xml version="1.0" encoding="utf-8"?>
+<p:sld xmlns:a="http://schemas.openxmlformats.org/drawingml/2006/main" xmlns:r="http://schemas.openxmlformats.org/officeDocument/2006/relationships" xmlns:p="http://schemas.openxmlformats.org/presentationml/2006/main">
+  <p:cSld>
+    <p:spTree>
+      <p:nvGrpSpPr>
+        <p:cNvPr id="1" name=""/>
+        <p:cNvGrpSpPr/>
+        <p:nvPr/>
+      </p:nvGrpSpPr>
+      <p:grpSpPr>
+        <a:xfrm>
+          <a:off x="0" y="0"/>
+          <a:ext cx="0" cy="0"/>
+          <a:chOff x="0" y="0"/>
+          <a:chExt cx="0" cy="0"/>
+        </a:xfrm>
+      </p:grpSpPr>
       <p:pic>
         <p:nvPicPr>
           <p:cNvPr id="2" name="Picture 1" descr="UC5_ManageTeam_TestCases.png"/>
@@ -3866,16 +4079,23 @@
 </p:sld>
 </file>
 
-<file path=ppt/slides/slide24.xml><?xml version="1.0" encoding="utf-8"?>
-<p:sld xmlns:a="http://schemas.openxmlformats.org/drawingml/2006/main" xmlns:p="http://schemas.openxmlformats.org/presentationml/2006/main" xmlns:r="http://schemas.openxmlformats.org/officeDocument/2006/relationships">
-  <p:cSld>
-    <p:spTree>
-      <p:nvGrpSpPr>
-        <p:cNvPr id="1" name=""/>
-        <p:cNvGrpSpPr/>
-        <p:nvPr/>
-      </p:nvGrpSpPr>
-      <p:grpSpPr/>
+<file path=ppt/slides/slide26.xml><?xml version="1.0" encoding="utf-8"?>
+<p:sld xmlns:a="http://schemas.openxmlformats.org/drawingml/2006/main" xmlns:r="http://schemas.openxmlformats.org/officeDocument/2006/relationships" xmlns:p="http://schemas.openxmlformats.org/presentationml/2006/main">
+  <p:cSld>
+    <p:spTree>
+      <p:nvGrpSpPr>
+        <p:cNvPr id="1" name=""/>
+        <p:cNvGrpSpPr/>
+        <p:nvPr/>
+      </p:nvGrpSpPr>
+      <p:grpSpPr>
+        <a:xfrm>
+          <a:off x="0" y="0"/>
+          <a:ext cx="0" cy="0"/>
+          <a:chOff x="0" y="0"/>
+          <a:chExt cx="0" cy="0"/>
+        </a:xfrm>
+      </p:grpSpPr>
       <p:pic>
         <p:nvPicPr>
           <p:cNvPr id="2" name="Picture 1" descr="UC6_ExploreStory_Description.png"/>
@@ -3908,16 +4128,23 @@
 </p:sld>
 </file>
 
-<file path=ppt/slides/slide25.xml><?xml version="1.0" encoding="utf-8"?>
-<p:sld xmlns:a="http://schemas.openxmlformats.org/drawingml/2006/main" xmlns:p="http://schemas.openxmlformats.org/presentationml/2006/main" xmlns:r="http://schemas.openxmlformats.org/officeDocument/2006/relationships">
-  <p:cSld>
-    <p:spTree>
-      <p:nvGrpSpPr>
-        <p:cNvPr id="1" name=""/>
-        <p:cNvGrpSpPr/>
-        <p:nvPr/>
-      </p:nvGrpSpPr>
-      <p:grpSpPr/>
+<file path=ppt/slides/slide27.xml><?xml version="1.0" encoding="utf-8"?>
+<p:sld xmlns:a="http://schemas.openxmlformats.org/drawingml/2006/main" xmlns:r="http://schemas.openxmlformats.org/officeDocument/2006/relationships" xmlns:p="http://schemas.openxmlformats.org/presentationml/2006/main">
+  <p:cSld>
+    <p:spTree>
+      <p:nvGrpSpPr>
+        <p:cNvPr id="1" name=""/>
+        <p:cNvGrpSpPr/>
+        <p:nvPr/>
+      </p:nvGrpSpPr>
+      <p:grpSpPr>
+        <a:xfrm>
+          <a:off x="0" y="0"/>
+          <a:ext cx="0" cy="0"/>
+          <a:chOff x="0" y="0"/>
+          <a:chExt cx="0" cy="0"/>
+        </a:xfrm>
+      </p:grpSpPr>
       <p:pic>
         <p:nvPicPr>
           <p:cNvPr id="2" name="Picture 1" descr="UC6_ExploreStory_Activity.png"/>
@@ -3950,16 +4177,23 @@
 </p:sld>
 </file>
 
-<file path=ppt/slides/slide26.xml><?xml version="1.0" encoding="utf-8"?>
-<p:sld xmlns:a="http://schemas.openxmlformats.org/drawingml/2006/main" xmlns:p="http://schemas.openxmlformats.org/presentationml/2006/main" xmlns:r="http://schemas.openxmlformats.org/officeDocument/2006/relationships">
-  <p:cSld>
-    <p:spTree>
-      <p:nvGrpSpPr>
-        <p:cNvPr id="1" name=""/>
-        <p:cNvGrpSpPr/>
-        <p:nvPr/>
-      </p:nvGrpSpPr>
-      <p:grpSpPr/>
+<file path=ppt/slides/slide28.xml><?xml version="1.0" encoding="utf-8"?>
+<p:sld xmlns:a="http://schemas.openxmlformats.org/drawingml/2006/main" xmlns:r="http://schemas.openxmlformats.org/officeDocument/2006/relationships" xmlns:p="http://schemas.openxmlformats.org/presentationml/2006/main">
+  <p:cSld>
+    <p:spTree>
+      <p:nvGrpSpPr>
+        <p:cNvPr id="1" name=""/>
+        <p:cNvGrpSpPr/>
+        <p:nvPr/>
+      </p:nvGrpSpPr>
+      <p:grpSpPr>
+        <a:xfrm>
+          <a:off x="0" y="0"/>
+          <a:ext cx="0" cy="0"/>
+          <a:chOff x="0" y="0"/>
+          <a:chExt cx="0" cy="0"/>
+        </a:xfrm>
+      </p:grpSpPr>
       <p:pic>
         <p:nvPicPr>
           <p:cNvPr id="2" name="Picture 1" descr="UC6_ExploreStory_Sequence.png"/>
@@ -3992,16 +4226,23 @@
 </p:sld>
 </file>
 
-<file path=ppt/slides/slide27.xml><?xml version="1.0" encoding="utf-8"?>
-<p:sld xmlns:a="http://schemas.openxmlformats.org/drawingml/2006/main" xmlns:p="http://schemas.openxmlformats.org/presentationml/2006/main" xmlns:r="http://schemas.openxmlformats.org/officeDocument/2006/relationships">
-  <p:cSld>
-    <p:spTree>
-      <p:nvGrpSpPr>
-        <p:cNvPr id="1" name=""/>
-        <p:cNvGrpSpPr/>
-        <p:nvPr/>
-      </p:nvGrpSpPr>
-      <p:grpSpPr/>
+<file path=ppt/slides/slide29.xml><?xml version="1.0" encoding="utf-8"?>
+<p:sld xmlns:a="http://schemas.openxmlformats.org/drawingml/2006/main" xmlns:r="http://schemas.openxmlformats.org/officeDocument/2006/relationships" xmlns:p="http://schemas.openxmlformats.org/presentationml/2006/main">
+  <p:cSld>
+    <p:spTree>
+      <p:nvGrpSpPr>
+        <p:cNvPr id="1" name=""/>
+        <p:cNvGrpSpPr/>
+        <p:nvPr/>
+      </p:nvGrpSpPr>
+      <p:grpSpPr>
+        <a:xfrm>
+          <a:off x="0" y="0"/>
+          <a:ext cx="0" cy="0"/>
+          <a:chOff x="0" y="0"/>
+          <a:chExt cx="0" cy="0"/>
+        </a:xfrm>
+      </p:grpSpPr>
       <p:pic>
         <p:nvPicPr>
           <p:cNvPr id="2" name="Picture 1" descr="UC6_ExploreStory_TestCases.png"/>
@@ -4034,16 +4275,175 @@
 </p:sld>
 </file>
 
-<file path=ppt/slides/slide28.xml><?xml version="1.0" encoding="utf-8"?>
-<p:sld xmlns:a="http://schemas.openxmlformats.org/drawingml/2006/main" xmlns:p="http://schemas.openxmlformats.org/presentationml/2006/main" xmlns:r="http://schemas.openxmlformats.org/officeDocument/2006/relationships">
-  <p:cSld>
-    <p:spTree>
-      <p:nvGrpSpPr>
-        <p:cNvPr id="1" name=""/>
-        <p:cNvGrpSpPr/>
-        <p:nvPr/>
-      </p:nvGrpSpPr>
-      <p:grpSpPr/>
+<file path=ppt/slides/slide3.xml><?xml version="1.0" encoding="utf-8"?>
+<p:sld xmlns:a="http://schemas.openxmlformats.org/drawingml/2006/main" xmlns:r="http://schemas.openxmlformats.org/officeDocument/2006/relationships" xmlns:p="http://schemas.openxmlformats.org/presentationml/2006/main">
+  <p:cSld>
+    <p:spTree>
+      <p:nvGrpSpPr>
+        <p:cNvPr id="1" name=""/>
+        <p:cNvGrpSpPr/>
+        <p:nvPr/>
+      </p:nvGrpSpPr>
+      <p:grpSpPr>
+        <a:xfrm>
+          <a:off x="0" y="0"/>
+          <a:ext cx="0" cy="0"/>
+          <a:chOff x="0" y="0"/>
+          <a:chExt cx="0" cy="0"/>
+        </a:xfrm>
+      </p:grpSpPr>
+      <p:sp>
+        <p:nvSpPr>
+          <p:cNvPr id="3" name="Content Placeholder 2">
+            <a:extLst>
+              <a:ext uri="{FF2B5EF4-FFF2-40B4-BE49-F238E27FC236}">
+                <a16:creationId xmlns:a16="http://schemas.microsoft.com/office/drawing/2014/main" id="{85339DF3-0DF8-0BDA-821C-589BB86AD4E3}"/>
+              </a:ext>
+            </a:extLst>
+          </p:cNvPr>
+          <p:cNvSpPr>
+            <a:spLocks noGrp="1"/>
+          </p:cNvSpPr>
+          <p:nvPr>
+            <p:ph idx="1"/>
+          </p:nvPr>
+        </p:nvSpPr>
+        <p:spPr>
+          <a:xfrm>
+            <a:off x="457200" y="136358"/>
+            <a:ext cx="8229600" cy="5989805"/>
+          </a:xfrm>
+        </p:spPr>
+        <p:txBody>
+          <a:bodyPr>
+            <a:normAutofit fontScale="70000" lnSpcReduction="20000"/>
+          </a:bodyPr>
+          <a:lstStyle/>
+          <a:p>
+            <a:r>
+              <a:rPr lang="en-US" dirty="0"/>
+              <a:t>I. Project introduction</a:t>
+            </a:r>
+          </a:p>
+          <a:p>
+            <a:r>
+              <a:rPr lang="en-US" dirty="0"/>
+              <a:t>Overview</a:t>
+            </a:r>
+            <a:br>
+              <a:rPr lang="en-US" dirty="0"/>
+            </a:br>
+            <a:r>
+              <a:rPr lang="en-US" dirty="0"/>
+              <a:t>This system is a Pokémon turn‑based game supporting player account management, story exploration, Pokémon collection and team management, turn‑based battles (</a:t>
+            </a:r>
+            <a:r>
+              <a:rPr lang="en-US" dirty="0" err="1"/>
+              <a:t>PvE</a:t>
+            </a:r>
+            <a:r>
+              <a:rPr lang="en-US" dirty="0"/>
+              <a:t> and PvP), and game persistence (save/load). Two primary actor roles are Player and PvP Server (for online matches). The system must reliably maintain game state, protect player data, and provide consistent battle mechanics.</a:t>
+            </a:r>
+          </a:p>
+          <a:p>
+            <a:r>
+              <a:rPr lang="en-US" dirty="0"/>
+              <a:t>Key features</a:t>
+            </a:r>
+          </a:p>
+          <a:p>
+            <a:pPr lvl="1"/>
+            <a:r>
+              <a:rPr lang="en-US" dirty="0"/>
+              <a:t>Player account: register/login</a:t>
+            </a:r>
+          </a:p>
+          <a:p>
+            <a:pPr lvl="1"/>
+            <a:r>
+              <a:rPr lang="en-US" dirty="0"/>
+              <a:t>Story and exploration: encounter wild Pokémon, interact with NPCs</a:t>
+            </a:r>
+          </a:p>
+          <a:p>
+            <a:pPr lvl="1"/>
+            <a:r>
+              <a:rPr lang="en-US" dirty="0"/>
+              <a:t>Pokémon management: catch, heal, level up, evolve, manage team</a:t>
+            </a:r>
+          </a:p>
+          <a:p>
+            <a:pPr lvl="1"/>
+            <a:r>
+              <a:rPr lang="en-US" dirty="0"/>
+              <a:t>Battles: wild encounters (</a:t>
+            </a:r>
+            <a:r>
+              <a:rPr lang="en-US" dirty="0" err="1"/>
+              <a:t>PvE</a:t>
+            </a:r>
+            <a:r>
+              <a:rPr lang="en-US" dirty="0"/>
+              <a:t>) and player-vs-player (PvP)</a:t>
+            </a:r>
+          </a:p>
+          <a:p>
+            <a:pPr lvl="1"/>
+            <a:r>
+              <a:rPr lang="en-US" dirty="0"/>
+              <a:t>Matchmaking: join PvP queue and play online matches</a:t>
+            </a:r>
+          </a:p>
+          <a:p>
+            <a:pPr lvl="1"/>
+            <a:r>
+              <a:rPr lang="en-US" dirty="0"/>
+              <a:t>Persistence: save and load game progress, view match history</a:t>
+            </a:r>
+          </a:p>
+          <a:p>
+            <a:pPr lvl="1"/>
+            <a:r>
+              <a:rPr lang="en-US" dirty="0"/>
+              <a:t>Admin/Server-side: coordinate PvP matches and persistence</a:t>
+            </a:r>
+          </a:p>
+          <a:p>
+            <a:endParaRPr lang="en-US" dirty="0"/>
+          </a:p>
+        </p:txBody>
+      </p:sp>
+    </p:spTree>
+    <p:extLst>
+      <p:ext uri="{BB962C8B-B14F-4D97-AF65-F5344CB8AC3E}">
+        <p14:creationId xmlns:p14="http://schemas.microsoft.com/office/powerpoint/2010/main" val="4165586939"/>
+      </p:ext>
+    </p:extLst>
+  </p:cSld>
+  <p:clrMapOvr>
+    <a:masterClrMapping/>
+  </p:clrMapOvr>
+</p:sld>
+</file>
+
+<file path=ppt/slides/slide30.xml><?xml version="1.0" encoding="utf-8"?>
+<p:sld xmlns:a="http://schemas.openxmlformats.org/drawingml/2006/main" xmlns:r="http://schemas.openxmlformats.org/officeDocument/2006/relationships" xmlns:p="http://schemas.openxmlformats.org/presentationml/2006/main">
+  <p:cSld>
+    <p:spTree>
+      <p:nvGrpSpPr>
+        <p:cNvPr id="1" name=""/>
+        <p:cNvGrpSpPr/>
+        <p:nvPr/>
+      </p:nvGrpSpPr>
+      <p:grpSpPr>
+        <a:xfrm>
+          <a:off x="0" y="0"/>
+          <a:ext cx="0" cy="0"/>
+          <a:chOff x="0" y="0"/>
+          <a:chExt cx="0" cy="0"/>
+        </a:xfrm>
+      </p:grpSpPr>
       <p:pic>
         <p:nvPicPr>
           <p:cNvPr id="2" name="Picture 1" descr="UC7_InteractNPC_Description.png"/>
@@ -4076,16 +4476,23 @@
 </p:sld>
 </file>
 
-<file path=ppt/slides/slide29.xml><?xml version="1.0" encoding="utf-8"?>
-<p:sld xmlns:a="http://schemas.openxmlformats.org/drawingml/2006/main" xmlns:p="http://schemas.openxmlformats.org/presentationml/2006/main" xmlns:r="http://schemas.openxmlformats.org/officeDocument/2006/relationships">
-  <p:cSld>
-    <p:spTree>
-      <p:nvGrpSpPr>
-        <p:cNvPr id="1" name=""/>
-        <p:cNvGrpSpPr/>
-        <p:nvPr/>
-      </p:nvGrpSpPr>
-      <p:grpSpPr/>
+<file path=ppt/slides/slide31.xml><?xml version="1.0" encoding="utf-8"?>
+<p:sld xmlns:a="http://schemas.openxmlformats.org/drawingml/2006/main" xmlns:r="http://schemas.openxmlformats.org/officeDocument/2006/relationships" xmlns:p="http://schemas.openxmlformats.org/presentationml/2006/main">
+  <p:cSld>
+    <p:spTree>
+      <p:nvGrpSpPr>
+        <p:cNvPr id="1" name=""/>
+        <p:cNvGrpSpPr/>
+        <p:nvPr/>
+      </p:nvGrpSpPr>
+      <p:grpSpPr>
+        <a:xfrm>
+          <a:off x="0" y="0"/>
+          <a:ext cx="0" cy="0"/>
+          <a:chOff x="0" y="0"/>
+          <a:chExt cx="0" cy="0"/>
+        </a:xfrm>
+      </p:grpSpPr>
       <p:pic>
         <p:nvPicPr>
           <p:cNvPr id="2" name="Picture 1" descr="UC7_InteractNPC_Activity.png"/>
@@ -4118,16 +4525,1157 @@
 </p:sld>
 </file>
 
-<file path=ppt/slides/slide3.xml><?xml version="1.0" encoding="utf-8"?>
-<p:sld xmlns:a="http://schemas.openxmlformats.org/drawingml/2006/main" xmlns:p="http://schemas.openxmlformats.org/presentationml/2006/main" xmlns:r="http://schemas.openxmlformats.org/officeDocument/2006/relationships">
-  <p:cSld>
-    <p:spTree>
-      <p:nvGrpSpPr>
-        <p:cNvPr id="1" name=""/>
-        <p:cNvGrpSpPr/>
-        <p:nvPr/>
-      </p:nvGrpSpPr>
-      <p:grpSpPr/>
+<file path=ppt/slides/slide32.xml><?xml version="1.0" encoding="utf-8"?>
+<p:sld xmlns:a="http://schemas.openxmlformats.org/drawingml/2006/main" xmlns:r="http://schemas.openxmlformats.org/officeDocument/2006/relationships" xmlns:p="http://schemas.openxmlformats.org/presentationml/2006/main">
+  <p:cSld>
+    <p:spTree>
+      <p:nvGrpSpPr>
+        <p:cNvPr id="1" name=""/>
+        <p:cNvGrpSpPr/>
+        <p:nvPr/>
+      </p:nvGrpSpPr>
+      <p:grpSpPr>
+        <a:xfrm>
+          <a:off x="0" y="0"/>
+          <a:ext cx="0" cy="0"/>
+          <a:chOff x="0" y="0"/>
+          <a:chExt cx="0" cy="0"/>
+        </a:xfrm>
+      </p:grpSpPr>
+      <p:pic>
+        <p:nvPicPr>
+          <p:cNvPr id="2" name="Picture 1" descr="UC7_InteractNPC_Sequence.png"/>
+          <p:cNvPicPr>
+            <a:picLocks noChangeAspect="1"/>
+          </p:cNvPicPr>
+          <p:nvPr/>
+        </p:nvPicPr>
+        <p:blipFill>
+          <a:blip r:embed="rId2"/>
+          <a:stretch>
+            <a:fillRect/>
+          </a:stretch>
+        </p:blipFill>
+        <p:spPr>
+          <a:xfrm>
+            <a:off x="1869267" y="914400"/>
+            <a:ext cx="5405466" cy="5394960"/>
+          </a:xfrm>
+          <a:prstGeom prst="rect">
+            <a:avLst/>
+          </a:prstGeom>
+        </p:spPr>
+      </p:pic>
+    </p:spTree>
+  </p:cSld>
+  <p:clrMapOvr>
+    <a:masterClrMapping/>
+  </p:clrMapOvr>
+</p:sld>
+</file>
+
+<file path=ppt/slides/slide33.xml><?xml version="1.0" encoding="utf-8"?>
+<p:sld xmlns:a="http://schemas.openxmlformats.org/drawingml/2006/main" xmlns:r="http://schemas.openxmlformats.org/officeDocument/2006/relationships" xmlns:p="http://schemas.openxmlformats.org/presentationml/2006/main">
+  <p:cSld>
+    <p:spTree>
+      <p:nvGrpSpPr>
+        <p:cNvPr id="1" name=""/>
+        <p:cNvGrpSpPr/>
+        <p:nvPr/>
+      </p:nvGrpSpPr>
+      <p:grpSpPr>
+        <a:xfrm>
+          <a:off x="0" y="0"/>
+          <a:ext cx="0" cy="0"/>
+          <a:chOff x="0" y="0"/>
+          <a:chExt cx="0" cy="0"/>
+        </a:xfrm>
+      </p:grpSpPr>
+      <p:pic>
+        <p:nvPicPr>
+          <p:cNvPr id="2" name="Picture 1" descr="UC7_InteractNPC_TestCases.png"/>
+          <p:cNvPicPr>
+            <a:picLocks noChangeAspect="1"/>
+          </p:cNvPicPr>
+          <p:nvPr/>
+        </p:nvPicPr>
+        <p:blipFill>
+          <a:blip r:embed="rId2"/>
+          <a:stretch>
+            <a:fillRect/>
+          </a:stretch>
+        </p:blipFill>
+        <p:spPr>
+          <a:xfrm>
+            <a:off x="1762125" y="1487805"/>
+            <a:ext cx="5619750" cy="4248150"/>
+          </a:xfrm>
+          <a:prstGeom prst="rect">
+            <a:avLst/>
+          </a:prstGeom>
+        </p:spPr>
+      </p:pic>
+    </p:spTree>
+  </p:cSld>
+  <p:clrMapOvr>
+    <a:masterClrMapping/>
+  </p:clrMapOvr>
+</p:sld>
+</file>
+
+<file path=ppt/slides/slide34.xml><?xml version="1.0" encoding="utf-8"?>
+<p:sld xmlns:a="http://schemas.openxmlformats.org/drawingml/2006/main" xmlns:r="http://schemas.openxmlformats.org/officeDocument/2006/relationships" xmlns:p="http://schemas.openxmlformats.org/presentationml/2006/main">
+  <p:cSld>
+    <p:spTree>
+      <p:nvGrpSpPr>
+        <p:cNvPr id="1" name=""/>
+        <p:cNvGrpSpPr/>
+        <p:nvPr/>
+      </p:nvGrpSpPr>
+      <p:grpSpPr>
+        <a:xfrm>
+          <a:off x="0" y="0"/>
+          <a:ext cx="0" cy="0"/>
+          <a:chOff x="0" y="0"/>
+          <a:chExt cx="0" cy="0"/>
+        </a:xfrm>
+      </p:grpSpPr>
+      <p:pic>
+        <p:nvPicPr>
+          <p:cNvPr id="2" name="Picture 1" descr="UC8_Matchmaking_Description.png"/>
+          <p:cNvPicPr>
+            <a:picLocks noChangeAspect="1"/>
+          </p:cNvPicPr>
+          <p:nvPr/>
+        </p:nvPicPr>
+        <p:blipFill>
+          <a:blip r:embed="rId2"/>
+          <a:stretch>
+            <a:fillRect/>
+          </a:stretch>
+        </p:blipFill>
+        <p:spPr>
+          <a:xfrm>
+            <a:off x="1563792" y="914400"/>
+            <a:ext cx="6016416" cy="5394960"/>
+          </a:xfrm>
+          <a:prstGeom prst="rect">
+            <a:avLst/>
+          </a:prstGeom>
+        </p:spPr>
+      </p:pic>
+    </p:spTree>
+  </p:cSld>
+  <p:clrMapOvr>
+    <a:masterClrMapping/>
+  </p:clrMapOvr>
+</p:sld>
+</file>
+
+<file path=ppt/slides/slide35.xml><?xml version="1.0" encoding="utf-8"?>
+<p:sld xmlns:a="http://schemas.openxmlformats.org/drawingml/2006/main" xmlns:r="http://schemas.openxmlformats.org/officeDocument/2006/relationships" xmlns:p="http://schemas.openxmlformats.org/presentationml/2006/main">
+  <p:cSld>
+    <p:spTree>
+      <p:nvGrpSpPr>
+        <p:cNvPr id="1" name=""/>
+        <p:cNvGrpSpPr/>
+        <p:nvPr/>
+      </p:nvGrpSpPr>
+      <p:grpSpPr>
+        <a:xfrm>
+          <a:off x="0" y="0"/>
+          <a:ext cx="0" cy="0"/>
+          <a:chOff x="0" y="0"/>
+          <a:chExt cx="0" cy="0"/>
+        </a:xfrm>
+      </p:grpSpPr>
+      <p:pic>
+        <p:nvPicPr>
+          <p:cNvPr id="2" name="Picture 1" descr="UC8_Matchmaking_Activity.png"/>
+          <p:cNvPicPr>
+            <a:picLocks noChangeAspect="1"/>
+          </p:cNvPicPr>
+          <p:nvPr/>
+        </p:nvPicPr>
+        <p:blipFill>
+          <a:blip r:embed="rId2"/>
+          <a:stretch>
+            <a:fillRect/>
+          </a:stretch>
+        </p:blipFill>
+        <p:spPr>
+          <a:xfrm>
+            <a:off x="3058856" y="914400"/>
+            <a:ext cx="3026288" cy="5394960"/>
+          </a:xfrm>
+          <a:prstGeom prst="rect">
+            <a:avLst/>
+          </a:prstGeom>
+        </p:spPr>
+      </p:pic>
+    </p:spTree>
+  </p:cSld>
+  <p:clrMapOvr>
+    <a:masterClrMapping/>
+  </p:clrMapOvr>
+</p:sld>
+</file>
+
+<file path=ppt/slides/slide36.xml><?xml version="1.0" encoding="utf-8"?>
+<p:sld xmlns:a="http://schemas.openxmlformats.org/drawingml/2006/main" xmlns:r="http://schemas.openxmlformats.org/officeDocument/2006/relationships" xmlns:p="http://schemas.openxmlformats.org/presentationml/2006/main">
+  <p:cSld>
+    <p:spTree>
+      <p:nvGrpSpPr>
+        <p:cNvPr id="1" name=""/>
+        <p:cNvGrpSpPr/>
+        <p:nvPr/>
+      </p:nvGrpSpPr>
+      <p:grpSpPr>
+        <a:xfrm>
+          <a:off x="0" y="0"/>
+          <a:ext cx="0" cy="0"/>
+          <a:chOff x="0" y="0"/>
+          <a:chExt cx="0" cy="0"/>
+        </a:xfrm>
+      </p:grpSpPr>
+      <p:pic>
+        <p:nvPicPr>
+          <p:cNvPr id="2" name="Picture 1" descr="UC8_Matchmaking_Sequence.png"/>
+          <p:cNvPicPr>
+            <a:picLocks noChangeAspect="1"/>
+          </p:cNvPicPr>
+          <p:nvPr/>
+        </p:nvPicPr>
+        <p:blipFill>
+          <a:blip r:embed="rId2"/>
+          <a:stretch>
+            <a:fillRect/>
+          </a:stretch>
+        </p:blipFill>
+        <p:spPr>
+          <a:xfrm>
+            <a:off x="1293435" y="914400"/>
+            <a:ext cx="6557130" cy="5394960"/>
+          </a:xfrm>
+          <a:prstGeom prst="rect">
+            <a:avLst/>
+          </a:prstGeom>
+        </p:spPr>
+      </p:pic>
+    </p:spTree>
+  </p:cSld>
+  <p:clrMapOvr>
+    <a:masterClrMapping/>
+  </p:clrMapOvr>
+</p:sld>
+</file>
+
+<file path=ppt/slides/slide37.xml><?xml version="1.0" encoding="utf-8"?>
+<p:sld xmlns:a="http://schemas.openxmlformats.org/drawingml/2006/main" xmlns:r="http://schemas.openxmlformats.org/officeDocument/2006/relationships" xmlns:p="http://schemas.openxmlformats.org/presentationml/2006/main">
+  <p:cSld>
+    <p:spTree>
+      <p:nvGrpSpPr>
+        <p:cNvPr id="1" name=""/>
+        <p:cNvGrpSpPr/>
+        <p:nvPr/>
+      </p:nvGrpSpPr>
+      <p:grpSpPr>
+        <a:xfrm>
+          <a:off x="0" y="0"/>
+          <a:ext cx="0" cy="0"/>
+          <a:chOff x="0" y="0"/>
+          <a:chExt cx="0" cy="0"/>
+        </a:xfrm>
+      </p:grpSpPr>
+      <p:pic>
+        <p:nvPicPr>
+          <p:cNvPr id="2" name="Picture 1" descr="UC8_Matchmaking_TestCases.png"/>
+          <p:cNvPicPr>
+            <a:picLocks noChangeAspect="1"/>
+          </p:cNvPicPr>
+          <p:nvPr/>
+        </p:nvPicPr>
+        <p:blipFill>
+          <a:blip r:embed="rId2"/>
+          <a:stretch>
+            <a:fillRect/>
+          </a:stretch>
+        </p:blipFill>
+        <p:spPr>
+          <a:xfrm>
+            <a:off x="548640" y="2102325"/>
+            <a:ext cx="8046720" cy="3019109"/>
+          </a:xfrm>
+          <a:prstGeom prst="rect">
+            <a:avLst/>
+          </a:prstGeom>
+        </p:spPr>
+      </p:pic>
+    </p:spTree>
+  </p:cSld>
+  <p:clrMapOvr>
+    <a:masterClrMapping/>
+  </p:clrMapOvr>
+</p:sld>
+</file>
+
+<file path=ppt/slides/slide38.xml><?xml version="1.0" encoding="utf-8"?>
+<p:sld xmlns:a="http://schemas.openxmlformats.org/drawingml/2006/main" xmlns:r="http://schemas.openxmlformats.org/officeDocument/2006/relationships" xmlns:p="http://schemas.openxmlformats.org/presentationml/2006/main">
+  <p:cSld>
+    <p:spTree>
+      <p:nvGrpSpPr>
+        <p:cNvPr id="1" name=""/>
+        <p:cNvGrpSpPr/>
+        <p:nvPr/>
+      </p:nvGrpSpPr>
+      <p:grpSpPr>
+        <a:xfrm>
+          <a:off x="0" y="0"/>
+          <a:ext cx="0" cy="0"/>
+          <a:chOff x="0" y="0"/>
+          <a:chExt cx="0" cy="0"/>
+        </a:xfrm>
+      </p:grpSpPr>
+      <p:pic>
+        <p:nvPicPr>
+          <p:cNvPr id="2" name="Picture 1" descr="UC9_PvPBattle_Description.png"/>
+          <p:cNvPicPr>
+            <a:picLocks noChangeAspect="1"/>
+          </p:cNvPicPr>
+          <p:nvPr/>
+        </p:nvPicPr>
+        <p:blipFill>
+          <a:blip r:embed="rId2"/>
+          <a:stretch>
+            <a:fillRect/>
+          </a:stretch>
+        </p:blipFill>
+        <p:spPr>
+          <a:xfrm>
+            <a:off x="1778338" y="914400"/>
+            <a:ext cx="5587324" cy="5394960"/>
+          </a:xfrm>
+          <a:prstGeom prst="rect">
+            <a:avLst/>
+          </a:prstGeom>
+        </p:spPr>
+      </p:pic>
+    </p:spTree>
+  </p:cSld>
+  <p:clrMapOvr>
+    <a:masterClrMapping/>
+  </p:clrMapOvr>
+</p:sld>
+</file>
+
+<file path=ppt/slides/slide39.xml><?xml version="1.0" encoding="utf-8"?>
+<p:sld xmlns:a="http://schemas.openxmlformats.org/drawingml/2006/main" xmlns:r="http://schemas.openxmlformats.org/officeDocument/2006/relationships" xmlns:p="http://schemas.openxmlformats.org/presentationml/2006/main">
+  <p:cSld>
+    <p:spTree>
+      <p:nvGrpSpPr>
+        <p:cNvPr id="1" name=""/>
+        <p:cNvGrpSpPr/>
+        <p:nvPr/>
+      </p:nvGrpSpPr>
+      <p:grpSpPr>
+        <a:xfrm>
+          <a:off x="0" y="0"/>
+          <a:ext cx="0" cy="0"/>
+          <a:chOff x="0" y="0"/>
+          <a:chExt cx="0" cy="0"/>
+        </a:xfrm>
+      </p:grpSpPr>
+      <p:pic>
+        <p:nvPicPr>
+          <p:cNvPr id="2" name="Picture 1" descr="UC9_PvPBattle_Activity.png"/>
+          <p:cNvPicPr>
+            <a:picLocks noChangeAspect="1"/>
+          </p:cNvPicPr>
+          <p:nvPr/>
+        </p:nvPicPr>
+        <p:blipFill>
+          <a:blip r:embed="rId2"/>
+          <a:stretch>
+            <a:fillRect/>
+          </a:stretch>
+        </p:blipFill>
+        <p:spPr>
+          <a:xfrm>
+            <a:off x="3623452" y="914400"/>
+            <a:ext cx="1897095" cy="5394960"/>
+          </a:xfrm>
+          <a:prstGeom prst="rect">
+            <a:avLst/>
+          </a:prstGeom>
+        </p:spPr>
+      </p:pic>
+    </p:spTree>
+  </p:cSld>
+  <p:clrMapOvr>
+    <a:masterClrMapping/>
+  </p:clrMapOvr>
+</p:sld>
+</file>
+
+<file path=ppt/slides/slide4.xml><?xml version="1.0" encoding="utf-8"?>
+<p:sld xmlns:a="http://schemas.openxmlformats.org/drawingml/2006/main" xmlns:r="http://schemas.openxmlformats.org/officeDocument/2006/relationships" xmlns:p="http://schemas.openxmlformats.org/presentationml/2006/main">
+  <p:cSld>
+    <p:spTree>
+      <p:nvGrpSpPr>
+        <p:cNvPr id="1" name=""/>
+        <p:cNvGrpSpPr/>
+        <p:nvPr/>
+      </p:nvGrpSpPr>
+      <p:grpSpPr>
+        <a:xfrm>
+          <a:off x="0" y="0"/>
+          <a:ext cx="0" cy="0"/>
+          <a:chOff x="0" y="0"/>
+          <a:chExt cx="0" cy="0"/>
+        </a:xfrm>
+      </p:grpSpPr>
+      <p:sp>
+        <p:nvSpPr>
+          <p:cNvPr id="3" name="Content Placeholder 2">
+            <a:extLst>
+              <a:ext uri="{FF2B5EF4-FFF2-40B4-BE49-F238E27FC236}">
+                <a16:creationId xmlns:a16="http://schemas.microsoft.com/office/drawing/2014/main" id="{169FE1E8-BBAD-1DF4-4A8E-8C63A9B43FEC}"/>
+              </a:ext>
+            </a:extLst>
+          </p:cNvPr>
+          <p:cNvSpPr>
+            <a:spLocks noGrp="1"/>
+          </p:cNvSpPr>
+          <p:nvPr>
+            <p:ph idx="1"/>
+          </p:nvPr>
+        </p:nvSpPr>
+        <p:spPr>
+          <a:xfrm>
+            <a:off x="457200" y="160422"/>
+            <a:ext cx="8229600" cy="5965742"/>
+          </a:xfrm>
+        </p:spPr>
+        <p:txBody>
+          <a:bodyPr>
+            <a:normAutofit fontScale="32500" lnSpcReduction="20000"/>
+          </a:bodyPr>
+          <a:lstStyle/>
+          <a:p>
+            <a:r>
+              <a:rPr lang="en-US" dirty="0"/>
+              <a:t>Proposed system</a:t>
+            </a:r>
+          </a:p>
+          <a:p>
+            <a:r>
+              <a:rPr lang="en-US" dirty="0"/>
+              <a:t>Implement game logic for players to explore, battle, catch, and manage Pokémon.</a:t>
+            </a:r>
+          </a:p>
+          <a:p>
+            <a:r>
+              <a:rPr lang="en-US" dirty="0"/>
+              <a:t>Implement server-side match coordination for PvP and persistence for saves and match history.</a:t>
+            </a:r>
+          </a:p>
+          <a:p>
+            <a:r>
+              <a:rPr lang="en-US" dirty="0"/>
+              <a:t>Project scope</a:t>
+            </a:r>
+          </a:p>
+          <a:p>
+            <a:r>
+              <a:rPr lang="en-US" dirty="0"/>
+              <a:t>Primary actors: Player, PvP Server (and optionally NPC/AI).</a:t>
+            </a:r>
+          </a:p>
+          <a:p>
+            <a:r>
+              <a:rPr lang="en-US" dirty="0"/>
+              <a:t>Scope: client-side gameplay flows (exploration, battles, inventory/team management), and backend capabilities for matchmaking and persistence.</a:t>
+            </a:r>
+          </a:p>
+          <a:p>
+            <a:r>
+              <a:rPr lang="en-US" dirty="0"/>
+              <a:t>System name</a:t>
+            </a:r>
+          </a:p>
+          <a:p>
+            <a:r>
+              <a:rPr lang="en-US" dirty="0"/>
+              <a:t>Pokémon Turn-Based Game System (or </a:t>
+            </a:r>
+            <a:r>
+              <a:rPr lang="en-US" dirty="0" err="1"/>
+              <a:t>TurnBasedPokemon</a:t>
+            </a:r>
+            <a:r>
+              <a:rPr lang="en-US" dirty="0"/>
+              <a:t>)</a:t>
+            </a:r>
+          </a:p>
+          <a:p>
+            <a:r>
+              <a:rPr lang="en-US" dirty="0"/>
+              <a:t>Deployment environment</a:t>
+            </a:r>
+          </a:p>
+          <a:p>
+            <a:r>
+              <a:rPr lang="en-US" dirty="0"/>
+              <a:t>Windows, Linux, macOS (desktop). Backend/services compatible with Linux servers.</a:t>
+            </a:r>
+          </a:p>
+          <a:p>
+            <a:r>
+              <a:rPr lang="en-US" dirty="0"/>
+              <a:t>Development tools</a:t>
+            </a:r>
+          </a:p>
+          <a:p>
+            <a:r>
+              <a:rPr lang="en-US" dirty="0"/>
+              <a:t>Visual Studio Code</a:t>
+            </a:r>
+          </a:p>
+          <a:p>
+            <a:r>
+              <a:rPr lang="en-US" dirty="0" err="1"/>
+              <a:t>PlantUML</a:t>
+            </a:r>
+            <a:r>
+              <a:rPr lang="en-US" dirty="0"/>
+              <a:t> / draw.io for diagrams</a:t>
+            </a:r>
+          </a:p>
+          <a:p>
+            <a:r>
+              <a:rPr lang="en-US" dirty="0"/>
+              <a:t>Python/.NET/your chosen runtime for game logic</a:t>
+            </a:r>
+          </a:p>
+          <a:p>
+            <a:r>
+              <a:rPr lang="en-US" dirty="0"/>
+              <a:t>MySQL / SQLite or other DB for persistence</a:t>
+            </a:r>
+          </a:p>
+          <a:p>
+            <a:r>
+              <a:rPr lang="en-US" dirty="0"/>
+              <a:t>python-pptx / other tooling for generating reports (optional)</a:t>
+            </a:r>
+          </a:p>
+          <a:p>
+            <a:r>
+              <a:rPr lang="en-US" dirty="0"/>
+              <a:t>Customer requirements (high-level)</a:t>
+            </a:r>
+          </a:p>
+          <a:p>
+            <a:r>
+              <a:rPr lang="en-US" dirty="0"/>
+              <a:t>Player registration and login</a:t>
+            </a:r>
+          </a:p>
+          <a:p>
+            <a:r>
+              <a:rPr lang="en-US" dirty="0"/>
+              <a:t>Display Pokémon list and details</a:t>
+            </a:r>
+          </a:p>
+          <a:p>
+            <a:r>
+              <a:rPr lang="en-US" dirty="0"/>
+              <a:t>Start and participate in battles (wild &amp; trainer/PvP)</a:t>
+            </a:r>
+          </a:p>
+          <a:p>
+            <a:r>
+              <a:rPr lang="en-US" dirty="0"/>
+              <a:t>Catch Pokémon and manage team</a:t>
+            </a:r>
+          </a:p>
+          <a:p>
+            <a:r>
+              <a:rPr lang="en-US" dirty="0"/>
+              <a:t>Use items and heal team</a:t>
+            </a:r>
+          </a:p>
+          <a:p>
+            <a:r>
+              <a:rPr lang="en-US" dirty="0"/>
+              <a:t>Save and load game progress</a:t>
+            </a:r>
+          </a:p>
+          <a:p>
+            <a:r>
+              <a:rPr lang="en-US" dirty="0"/>
+              <a:t>View match history</a:t>
+            </a:r>
+          </a:p>
+          <a:p>
+            <a:r>
+              <a:rPr lang="en-US" dirty="0"/>
+              <a:t>Join matchmaking and play PvP</a:t>
+            </a:r>
+          </a:p>
+          <a:p>
+            <a:r>
+              <a:rPr lang="en-US" dirty="0"/>
+              <a:t>Select starter Pokémon</a:t>
+            </a:r>
+          </a:p>
+          <a:p>
+            <a:r>
+              <a:rPr lang="en-US" dirty="0"/>
+              <a:t>Register new players</a:t>
+            </a:r>
+          </a:p>
+          <a:p>
+            <a:r>
+              <a:rPr lang="en-US" dirty="0"/>
+              <a:t>II. System requirements analysis (brief)</a:t>
+            </a:r>
+          </a:p>
+          <a:p>
+            <a:r>
+              <a:rPr lang="en-US" dirty="0"/>
+              <a:t>Purpose: provide a polished turn‑based Pokémon experience where players can progress, collect Pokémon, and compete. The system must reliably handle game state (transactions for saves and battle outcomes), enforce game rules for battles and captures, and protect player accounts/data. </a:t>
+            </a:r>
+            <a:r>
+              <a:rPr lang="en-US"/>
+              <a:t>The backend must coordinate PvP matches and provide persistence for saves and match history.</a:t>
+            </a:r>
+          </a:p>
+          <a:p>
+            <a:endParaRPr lang="en-US" dirty="0"/>
+          </a:p>
+        </p:txBody>
+      </p:sp>
+    </p:spTree>
+    <p:extLst>
+      <p:ext uri="{BB962C8B-B14F-4D97-AF65-F5344CB8AC3E}">
+        <p14:creationId xmlns:p14="http://schemas.microsoft.com/office/powerpoint/2010/main" val="3662944809"/>
+      </p:ext>
+    </p:extLst>
+  </p:cSld>
+  <p:clrMapOvr>
+    <a:masterClrMapping/>
+  </p:clrMapOvr>
+</p:sld>
+</file>
+
+<file path=ppt/slides/slide40.xml><?xml version="1.0" encoding="utf-8"?>
+<p:sld xmlns:a="http://schemas.openxmlformats.org/drawingml/2006/main" xmlns:r="http://schemas.openxmlformats.org/officeDocument/2006/relationships" xmlns:p="http://schemas.openxmlformats.org/presentationml/2006/main">
+  <p:cSld>
+    <p:spTree>
+      <p:nvGrpSpPr>
+        <p:cNvPr id="1" name=""/>
+        <p:cNvGrpSpPr/>
+        <p:nvPr/>
+      </p:nvGrpSpPr>
+      <p:grpSpPr>
+        <a:xfrm>
+          <a:off x="0" y="0"/>
+          <a:ext cx="0" cy="0"/>
+          <a:chOff x="0" y="0"/>
+          <a:chExt cx="0" cy="0"/>
+        </a:xfrm>
+      </p:grpSpPr>
+      <p:pic>
+        <p:nvPicPr>
+          <p:cNvPr id="2" name="Picture 1" descr="UC9_PvPBattle_Sequence.png"/>
+          <p:cNvPicPr>
+            <a:picLocks noChangeAspect="1"/>
+          </p:cNvPicPr>
+          <p:nvPr/>
+        </p:nvPicPr>
+        <p:blipFill>
+          <a:blip r:embed="rId2"/>
+          <a:stretch>
+            <a:fillRect/>
+          </a:stretch>
+        </p:blipFill>
+        <p:spPr>
+          <a:xfrm>
+            <a:off x="548640" y="1022680"/>
+            <a:ext cx="8046720" cy="5178400"/>
+          </a:xfrm>
+          <a:prstGeom prst="rect">
+            <a:avLst/>
+          </a:prstGeom>
+        </p:spPr>
+      </p:pic>
+    </p:spTree>
+  </p:cSld>
+  <p:clrMapOvr>
+    <a:masterClrMapping/>
+  </p:clrMapOvr>
+</p:sld>
+</file>
+
+<file path=ppt/slides/slide41.xml><?xml version="1.0" encoding="utf-8"?>
+<p:sld xmlns:a="http://schemas.openxmlformats.org/drawingml/2006/main" xmlns:r="http://schemas.openxmlformats.org/officeDocument/2006/relationships" xmlns:p="http://schemas.openxmlformats.org/presentationml/2006/main">
+  <p:cSld>
+    <p:spTree>
+      <p:nvGrpSpPr>
+        <p:cNvPr id="1" name=""/>
+        <p:cNvGrpSpPr/>
+        <p:nvPr/>
+      </p:nvGrpSpPr>
+      <p:grpSpPr>
+        <a:xfrm>
+          <a:off x="0" y="0"/>
+          <a:ext cx="0" cy="0"/>
+          <a:chOff x="0" y="0"/>
+          <a:chExt cx="0" cy="0"/>
+        </a:xfrm>
+      </p:grpSpPr>
+      <p:pic>
+        <p:nvPicPr>
+          <p:cNvPr id="2" name="Picture 1" descr="UC9_PvPBattle_TestCases.png"/>
+          <p:cNvPicPr>
+            <a:picLocks noChangeAspect="1"/>
+          </p:cNvPicPr>
+          <p:nvPr/>
+        </p:nvPicPr>
+        <p:blipFill>
+          <a:blip r:embed="rId2"/>
+          <a:stretch>
+            <a:fillRect/>
+          </a:stretch>
+        </p:blipFill>
+        <p:spPr>
+          <a:xfrm>
+            <a:off x="548640" y="2565846"/>
+            <a:ext cx="8046720" cy="2092067"/>
+          </a:xfrm>
+          <a:prstGeom prst="rect">
+            <a:avLst/>
+          </a:prstGeom>
+        </p:spPr>
+      </p:pic>
+    </p:spTree>
+  </p:cSld>
+  <p:clrMapOvr>
+    <a:masterClrMapping/>
+  </p:clrMapOvr>
+</p:sld>
+</file>
+
+<file path=ppt/slides/slide42.xml><?xml version="1.0" encoding="utf-8"?>
+<p:sld xmlns:a="http://schemas.openxmlformats.org/drawingml/2006/main" xmlns:r="http://schemas.openxmlformats.org/officeDocument/2006/relationships" xmlns:p="http://schemas.openxmlformats.org/presentationml/2006/main">
+  <p:cSld>
+    <p:spTree>
+      <p:nvGrpSpPr>
+        <p:cNvPr id="1" name=""/>
+        <p:cNvGrpSpPr/>
+        <p:nvPr/>
+      </p:nvGrpSpPr>
+      <p:grpSpPr>
+        <a:xfrm>
+          <a:off x="0" y="0"/>
+          <a:ext cx="0" cy="0"/>
+          <a:chOff x="0" y="0"/>
+          <a:chExt cx="0" cy="0"/>
+        </a:xfrm>
+      </p:grpSpPr>
+      <p:pic>
+        <p:nvPicPr>
+          <p:cNvPr id="2" name="Picture 1" descr="UC10_SaveLoad_Description.png"/>
+          <p:cNvPicPr>
+            <a:picLocks noChangeAspect="1"/>
+          </p:cNvPicPr>
+          <p:nvPr/>
+        </p:nvPicPr>
+        <p:blipFill>
+          <a:blip r:embed="rId2"/>
+          <a:stretch>
+            <a:fillRect/>
+          </a:stretch>
+        </p:blipFill>
+        <p:spPr>
+          <a:xfrm>
+            <a:off x="1447800" y="925830"/>
+            <a:ext cx="6248400" cy="5372100"/>
+          </a:xfrm>
+          <a:prstGeom prst="rect">
+            <a:avLst/>
+          </a:prstGeom>
+        </p:spPr>
+      </p:pic>
+    </p:spTree>
+  </p:cSld>
+  <p:clrMapOvr>
+    <a:masterClrMapping/>
+  </p:clrMapOvr>
+</p:sld>
+</file>
+
+<file path=ppt/slides/slide43.xml><?xml version="1.0" encoding="utf-8"?>
+<p:sld xmlns:a="http://schemas.openxmlformats.org/drawingml/2006/main" xmlns:r="http://schemas.openxmlformats.org/officeDocument/2006/relationships" xmlns:p="http://schemas.openxmlformats.org/presentationml/2006/main">
+  <p:cSld>
+    <p:spTree>
+      <p:nvGrpSpPr>
+        <p:cNvPr id="1" name=""/>
+        <p:cNvGrpSpPr/>
+        <p:nvPr/>
+      </p:nvGrpSpPr>
+      <p:grpSpPr>
+        <a:xfrm>
+          <a:off x="0" y="0"/>
+          <a:ext cx="0" cy="0"/>
+          <a:chOff x="0" y="0"/>
+          <a:chExt cx="0" cy="0"/>
+        </a:xfrm>
+      </p:grpSpPr>
+      <p:pic>
+        <p:nvPicPr>
+          <p:cNvPr id="2" name="Picture 1" descr="UC10_SaveLoad_Activity.png"/>
+          <p:cNvPicPr>
+            <a:picLocks noChangeAspect="1"/>
+          </p:cNvPicPr>
+          <p:nvPr/>
+        </p:nvPicPr>
+        <p:blipFill>
+          <a:blip r:embed="rId2"/>
+          <a:stretch>
+            <a:fillRect/>
+          </a:stretch>
+        </p:blipFill>
+        <p:spPr>
+          <a:xfrm>
+            <a:off x="1143471" y="914400"/>
+            <a:ext cx="6857058" cy="5394960"/>
+          </a:xfrm>
+          <a:prstGeom prst="rect">
+            <a:avLst/>
+          </a:prstGeom>
+        </p:spPr>
+      </p:pic>
+    </p:spTree>
+  </p:cSld>
+  <p:clrMapOvr>
+    <a:masterClrMapping/>
+  </p:clrMapOvr>
+</p:sld>
+</file>
+
+<file path=ppt/slides/slide44.xml><?xml version="1.0" encoding="utf-8"?>
+<p:sld xmlns:a="http://schemas.openxmlformats.org/drawingml/2006/main" xmlns:r="http://schemas.openxmlformats.org/officeDocument/2006/relationships" xmlns:p="http://schemas.openxmlformats.org/presentationml/2006/main">
+  <p:cSld>
+    <p:spTree>
+      <p:nvGrpSpPr>
+        <p:cNvPr id="1" name=""/>
+        <p:cNvGrpSpPr/>
+        <p:nvPr/>
+      </p:nvGrpSpPr>
+      <p:grpSpPr>
+        <a:xfrm>
+          <a:off x="0" y="0"/>
+          <a:ext cx="0" cy="0"/>
+          <a:chOff x="0" y="0"/>
+          <a:chExt cx="0" cy="0"/>
+        </a:xfrm>
+      </p:grpSpPr>
+      <p:pic>
+        <p:nvPicPr>
+          <p:cNvPr id="2" name="Picture 1" descr="UC10_SaveLoad_Sequence.png"/>
+          <p:cNvPicPr>
+            <a:picLocks noChangeAspect="1"/>
+          </p:cNvPicPr>
+          <p:nvPr/>
+        </p:nvPicPr>
+        <p:blipFill>
+          <a:blip r:embed="rId2"/>
+          <a:stretch>
+            <a:fillRect/>
+          </a:stretch>
+        </p:blipFill>
+        <p:spPr>
+          <a:xfrm>
+            <a:off x="1793439" y="914400"/>
+            <a:ext cx="5557121" cy="5394960"/>
+          </a:xfrm>
+          <a:prstGeom prst="rect">
+            <a:avLst/>
+          </a:prstGeom>
+        </p:spPr>
+      </p:pic>
+    </p:spTree>
+  </p:cSld>
+  <p:clrMapOvr>
+    <a:masterClrMapping/>
+  </p:clrMapOvr>
+</p:sld>
+</file>
+
+<file path=ppt/slides/slide45.xml><?xml version="1.0" encoding="utf-8"?>
+<p:sld xmlns:a="http://schemas.openxmlformats.org/drawingml/2006/main" xmlns:r="http://schemas.openxmlformats.org/officeDocument/2006/relationships" xmlns:p="http://schemas.openxmlformats.org/presentationml/2006/main">
+  <p:cSld>
+    <p:spTree>
+      <p:nvGrpSpPr>
+        <p:cNvPr id="1" name=""/>
+        <p:cNvGrpSpPr/>
+        <p:nvPr/>
+      </p:nvGrpSpPr>
+      <p:grpSpPr>
+        <a:xfrm>
+          <a:off x="0" y="0"/>
+          <a:ext cx="0" cy="0"/>
+          <a:chOff x="0" y="0"/>
+          <a:chExt cx="0" cy="0"/>
+        </a:xfrm>
+      </p:grpSpPr>
+      <p:pic>
+        <p:nvPicPr>
+          <p:cNvPr id="2" name="Picture 1" descr="UC10_SaveLoad_TestCases.png"/>
+          <p:cNvPicPr>
+            <a:picLocks noChangeAspect="1"/>
+          </p:cNvPicPr>
+          <p:nvPr/>
+        </p:nvPicPr>
+        <p:blipFill>
+          <a:blip r:embed="rId2"/>
+          <a:stretch>
+            <a:fillRect/>
+          </a:stretch>
+        </p:blipFill>
+        <p:spPr>
+          <a:xfrm>
+            <a:off x="548640" y="2261532"/>
+            <a:ext cx="8046720" cy="2700695"/>
+          </a:xfrm>
+          <a:prstGeom prst="rect">
+            <a:avLst/>
+          </a:prstGeom>
+        </p:spPr>
+      </p:pic>
+    </p:spTree>
+  </p:cSld>
+  <p:clrMapOvr>
+    <a:masterClrMapping/>
+  </p:clrMapOvr>
+</p:sld>
+</file>
+
+<file path=ppt/slides/slide46.xml><?xml version="1.0" encoding="utf-8"?>
+<p:sld xmlns:a="http://schemas.openxmlformats.org/drawingml/2006/main" xmlns:r="http://schemas.openxmlformats.org/officeDocument/2006/relationships" xmlns:p="http://schemas.openxmlformats.org/presentationml/2006/main">
+  <p:cSld>
+    <p:spTree>
+      <p:nvGrpSpPr>
+        <p:cNvPr id="1" name=""/>
+        <p:cNvGrpSpPr/>
+        <p:nvPr/>
+      </p:nvGrpSpPr>
+      <p:grpSpPr>
+        <a:xfrm>
+          <a:off x="0" y="0"/>
+          <a:ext cx="0" cy="0"/>
+          <a:chOff x="0" y="0"/>
+          <a:chExt cx="0" cy="0"/>
+        </a:xfrm>
+      </p:grpSpPr>
+      <p:pic>
+        <p:nvPicPr>
+          <p:cNvPr id="2" name="Picture 1" descr="UC11_MatchHistory_Description.png"/>
+          <p:cNvPicPr>
+            <a:picLocks noChangeAspect="1"/>
+          </p:cNvPicPr>
+          <p:nvPr/>
+        </p:nvPicPr>
+        <p:blipFill>
+          <a:blip r:embed="rId2"/>
+          <a:stretch>
+            <a:fillRect/>
+          </a:stretch>
+        </p:blipFill>
+        <p:spPr>
+          <a:xfrm>
+            <a:off x="1433512" y="1259205"/>
+            <a:ext cx="6276975" cy="4705350"/>
+          </a:xfrm>
+          <a:prstGeom prst="rect">
+            <a:avLst/>
+          </a:prstGeom>
+        </p:spPr>
+      </p:pic>
+    </p:spTree>
+  </p:cSld>
+  <p:clrMapOvr>
+    <a:masterClrMapping/>
+  </p:clrMapOvr>
+</p:sld>
+</file>
+
+<file path=ppt/slides/slide47.xml><?xml version="1.0" encoding="utf-8"?>
+<p:sld xmlns:a="http://schemas.openxmlformats.org/drawingml/2006/main" xmlns:r="http://schemas.openxmlformats.org/officeDocument/2006/relationships" xmlns:p="http://schemas.openxmlformats.org/presentationml/2006/main">
+  <p:cSld>
+    <p:spTree>
+      <p:nvGrpSpPr>
+        <p:cNvPr id="1" name=""/>
+        <p:cNvGrpSpPr/>
+        <p:nvPr/>
+      </p:nvGrpSpPr>
+      <p:grpSpPr>
+        <a:xfrm>
+          <a:off x="0" y="0"/>
+          <a:ext cx="0" cy="0"/>
+          <a:chOff x="0" y="0"/>
+          <a:chExt cx="0" cy="0"/>
+        </a:xfrm>
+      </p:grpSpPr>
+      <p:pic>
+        <p:nvPicPr>
+          <p:cNvPr id="2" name="Picture 1" descr="UC11_MatchHistory_Activity.png"/>
+          <p:cNvPicPr>
+            <a:picLocks noChangeAspect="1"/>
+          </p:cNvPicPr>
+          <p:nvPr/>
+        </p:nvPicPr>
+        <p:blipFill>
+          <a:blip r:embed="rId2"/>
+          <a:stretch>
+            <a:fillRect/>
+          </a:stretch>
+        </p:blipFill>
+        <p:spPr>
+          <a:xfrm>
+            <a:off x="1847850" y="1187767"/>
+            <a:ext cx="5448300" cy="4848225"/>
+          </a:xfrm>
+          <a:prstGeom prst="rect">
+            <a:avLst/>
+          </a:prstGeom>
+        </p:spPr>
+      </p:pic>
+    </p:spTree>
+  </p:cSld>
+  <p:clrMapOvr>
+    <a:masterClrMapping/>
+  </p:clrMapOvr>
+</p:sld>
+</file>
+
+<file path=ppt/slides/slide48.xml><?xml version="1.0" encoding="utf-8"?>
+<p:sld xmlns:a="http://schemas.openxmlformats.org/drawingml/2006/main" xmlns:r="http://schemas.openxmlformats.org/officeDocument/2006/relationships" xmlns:p="http://schemas.openxmlformats.org/presentationml/2006/main">
+  <p:cSld>
+    <p:spTree>
+      <p:nvGrpSpPr>
+        <p:cNvPr id="1" name=""/>
+        <p:cNvGrpSpPr/>
+        <p:nvPr/>
+      </p:nvGrpSpPr>
+      <p:grpSpPr>
+        <a:xfrm>
+          <a:off x="0" y="0"/>
+          <a:ext cx="0" cy="0"/>
+          <a:chOff x="0" y="0"/>
+          <a:chExt cx="0" cy="0"/>
+        </a:xfrm>
+      </p:grpSpPr>
+      <p:pic>
+        <p:nvPicPr>
+          <p:cNvPr id="2" name="Picture 1" descr="UC11_MatchHistory_Sequence.png"/>
+          <p:cNvPicPr>
+            <a:picLocks noChangeAspect="1"/>
+          </p:cNvPicPr>
+          <p:nvPr/>
+        </p:nvPicPr>
+        <p:blipFill>
+          <a:blip r:embed="rId2"/>
+          <a:stretch>
+            <a:fillRect/>
+          </a:stretch>
+        </p:blipFill>
+        <p:spPr>
+          <a:xfrm>
+            <a:off x="1552575" y="1206817"/>
+            <a:ext cx="6038850" cy="4810125"/>
+          </a:xfrm>
+          <a:prstGeom prst="rect">
+            <a:avLst/>
+          </a:prstGeom>
+        </p:spPr>
+      </p:pic>
+    </p:spTree>
+  </p:cSld>
+  <p:clrMapOvr>
+    <a:masterClrMapping/>
+  </p:clrMapOvr>
+</p:sld>
+</file>
+
+<file path=ppt/slides/slide49.xml><?xml version="1.0" encoding="utf-8"?>
+<p:sld xmlns:a="http://schemas.openxmlformats.org/drawingml/2006/main" xmlns:r="http://schemas.openxmlformats.org/officeDocument/2006/relationships" xmlns:p="http://schemas.openxmlformats.org/presentationml/2006/main">
+  <p:cSld>
+    <p:spTree>
+      <p:nvGrpSpPr>
+        <p:cNvPr id="1" name=""/>
+        <p:cNvGrpSpPr/>
+        <p:nvPr/>
+      </p:nvGrpSpPr>
+      <p:grpSpPr>
+        <a:xfrm>
+          <a:off x="0" y="0"/>
+          <a:ext cx="0" cy="0"/>
+          <a:chOff x="0" y="0"/>
+          <a:chExt cx="0" cy="0"/>
+        </a:xfrm>
+      </p:grpSpPr>
+      <p:pic>
+        <p:nvPicPr>
+          <p:cNvPr id="2" name="Picture 1" descr="UC11_MatchHistory_TestCases.png"/>
+          <p:cNvPicPr>
+            <a:picLocks noChangeAspect="1"/>
+          </p:cNvPicPr>
+          <p:nvPr/>
+        </p:nvPicPr>
+        <p:blipFill>
+          <a:blip r:embed="rId2"/>
+          <a:stretch>
+            <a:fillRect/>
+          </a:stretch>
+        </p:blipFill>
+        <p:spPr>
+          <a:xfrm>
+            <a:off x="548640" y="1864288"/>
+            <a:ext cx="8046720" cy="3495183"/>
+          </a:xfrm>
+          <a:prstGeom prst="rect">
+            <a:avLst/>
+          </a:prstGeom>
+        </p:spPr>
+      </p:pic>
+    </p:spTree>
+  </p:cSld>
+  <p:clrMapOvr>
+    <a:masterClrMapping/>
+  </p:clrMapOvr>
+</p:sld>
+</file>
+
+<file path=ppt/slides/slide5.xml><?xml version="1.0" encoding="utf-8"?>
+<p:sld xmlns:a="http://schemas.openxmlformats.org/drawingml/2006/main" xmlns:r="http://schemas.openxmlformats.org/officeDocument/2006/relationships" xmlns:p="http://schemas.openxmlformats.org/presentationml/2006/main">
+  <p:cSld>
+    <p:spTree>
+      <p:nvGrpSpPr>
+        <p:cNvPr id="1" name=""/>
+        <p:cNvGrpSpPr/>
+        <p:nvPr/>
+      </p:nvGrpSpPr>
+      <p:grpSpPr>
+        <a:xfrm>
+          <a:off x="0" y="0"/>
+          <a:ext cx="0" cy="0"/>
+          <a:chOff x="0" y="0"/>
+          <a:chExt cx="0" cy="0"/>
+        </a:xfrm>
+      </p:grpSpPr>
       <p:pic>
         <p:nvPicPr>
           <p:cNvPr id="2" name="Picture 1" descr="UC_Overview.png"/>
@@ -4160,436 +5708,513 @@
 </p:sld>
 </file>
 
-<file path=ppt/slides/slide30.xml><?xml version="1.0" encoding="utf-8"?>
-<p:sld xmlns:a="http://schemas.openxmlformats.org/drawingml/2006/main" xmlns:p="http://schemas.openxmlformats.org/presentationml/2006/main" xmlns:r="http://schemas.openxmlformats.org/officeDocument/2006/relationships">
-  <p:cSld>
-    <p:spTree>
-      <p:nvGrpSpPr>
-        <p:cNvPr id="1" name=""/>
-        <p:cNvGrpSpPr/>
-        <p:nvPr/>
-      </p:nvGrpSpPr>
-      <p:grpSpPr/>
-      <p:pic>
-        <p:nvPicPr>
-          <p:cNvPr id="2" name="Picture 1" descr="UC7_InteractNPC_Sequence.png"/>
-          <p:cNvPicPr>
-            <a:picLocks noChangeAspect="1"/>
-          </p:cNvPicPr>
-          <p:nvPr/>
-        </p:nvPicPr>
-        <p:blipFill>
-          <a:blip r:embed="rId2"/>
-          <a:stretch>
-            <a:fillRect/>
-          </a:stretch>
-        </p:blipFill>
-        <p:spPr>
-          <a:xfrm>
-            <a:off x="1869267" y="914400"/>
-            <a:ext cx="5405466" cy="5394960"/>
-          </a:xfrm>
-          <a:prstGeom prst="rect">
-            <a:avLst/>
-          </a:prstGeom>
-        </p:spPr>
-      </p:pic>
-    </p:spTree>
-  </p:cSld>
-  <p:clrMapOvr>
-    <a:masterClrMapping/>
-  </p:clrMapOvr>
-</p:sld>
-</file>
-
-<file path=ppt/slides/slide31.xml><?xml version="1.0" encoding="utf-8"?>
-<p:sld xmlns:a="http://schemas.openxmlformats.org/drawingml/2006/main" xmlns:p="http://schemas.openxmlformats.org/presentationml/2006/main" xmlns:r="http://schemas.openxmlformats.org/officeDocument/2006/relationships">
-  <p:cSld>
-    <p:spTree>
-      <p:nvGrpSpPr>
-        <p:cNvPr id="1" name=""/>
-        <p:cNvGrpSpPr/>
-        <p:nvPr/>
-      </p:nvGrpSpPr>
-      <p:grpSpPr/>
-      <p:pic>
-        <p:nvPicPr>
-          <p:cNvPr id="2" name="Picture 1" descr="UC7_InteractNPC_TestCases.png"/>
-          <p:cNvPicPr>
-            <a:picLocks noChangeAspect="1"/>
-          </p:cNvPicPr>
-          <p:nvPr/>
-        </p:nvPicPr>
-        <p:blipFill>
-          <a:blip r:embed="rId2"/>
-          <a:stretch>
-            <a:fillRect/>
-          </a:stretch>
-        </p:blipFill>
-        <p:spPr>
-          <a:xfrm>
-            <a:off x="1762125" y="1487805"/>
-            <a:ext cx="5619750" cy="4248150"/>
-          </a:xfrm>
-          <a:prstGeom prst="rect">
-            <a:avLst/>
-          </a:prstGeom>
-        </p:spPr>
-      </p:pic>
-    </p:spTree>
-  </p:cSld>
-  <p:clrMapOvr>
-    <a:masterClrMapping/>
-  </p:clrMapOvr>
-</p:sld>
-</file>
-
-<file path=ppt/slides/slide32.xml><?xml version="1.0" encoding="utf-8"?>
-<p:sld xmlns:a="http://schemas.openxmlformats.org/drawingml/2006/main" xmlns:p="http://schemas.openxmlformats.org/presentationml/2006/main" xmlns:r="http://schemas.openxmlformats.org/officeDocument/2006/relationships">
-  <p:cSld>
-    <p:spTree>
-      <p:nvGrpSpPr>
-        <p:cNvPr id="1" name=""/>
-        <p:cNvGrpSpPr/>
-        <p:nvPr/>
-      </p:nvGrpSpPr>
-      <p:grpSpPr/>
-      <p:pic>
-        <p:nvPicPr>
-          <p:cNvPr id="2" name="Picture 1" descr="UC8_Matchmaking_Description.png"/>
-          <p:cNvPicPr>
-            <a:picLocks noChangeAspect="1"/>
-          </p:cNvPicPr>
-          <p:nvPr/>
-        </p:nvPicPr>
-        <p:blipFill>
-          <a:blip r:embed="rId2"/>
-          <a:stretch>
-            <a:fillRect/>
-          </a:stretch>
-        </p:blipFill>
-        <p:spPr>
-          <a:xfrm>
-            <a:off x="1563792" y="914400"/>
-            <a:ext cx="6016416" cy="5394960"/>
-          </a:xfrm>
-          <a:prstGeom prst="rect">
-            <a:avLst/>
-          </a:prstGeom>
-        </p:spPr>
-      </p:pic>
-    </p:spTree>
-  </p:cSld>
-  <p:clrMapOvr>
-    <a:masterClrMapping/>
-  </p:clrMapOvr>
-</p:sld>
-</file>
-
-<file path=ppt/slides/slide33.xml><?xml version="1.0" encoding="utf-8"?>
-<p:sld xmlns:a="http://schemas.openxmlformats.org/drawingml/2006/main" xmlns:p="http://schemas.openxmlformats.org/presentationml/2006/main" xmlns:r="http://schemas.openxmlformats.org/officeDocument/2006/relationships">
-  <p:cSld>
-    <p:spTree>
-      <p:nvGrpSpPr>
-        <p:cNvPr id="1" name=""/>
-        <p:cNvGrpSpPr/>
-        <p:nvPr/>
-      </p:nvGrpSpPr>
-      <p:grpSpPr/>
-      <p:pic>
-        <p:nvPicPr>
-          <p:cNvPr id="2" name="Picture 1" descr="UC8_Matchmaking_Activity.png"/>
-          <p:cNvPicPr>
-            <a:picLocks noChangeAspect="1"/>
-          </p:cNvPicPr>
-          <p:nvPr/>
-        </p:nvPicPr>
-        <p:blipFill>
-          <a:blip r:embed="rId2"/>
-          <a:stretch>
-            <a:fillRect/>
-          </a:stretch>
-        </p:blipFill>
-        <p:spPr>
-          <a:xfrm>
-            <a:off x="3058856" y="914400"/>
-            <a:ext cx="3026288" cy="5394960"/>
-          </a:xfrm>
-          <a:prstGeom prst="rect">
-            <a:avLst/>
-          </a:prstGeom>
-        </p:spPr>
-      </p:pic>
-    </p:spTree>
-  </p:cSld>
-  <p:clrMapOvr>
-    <a:masterClrMapping/>
-  </p:clrMapOvr>
-</p:sld>
-</file>
-
-<file path=ppt/slides/slide34.xml><?xml version="1.0" encoding="utf-8"?>
-<p:sld xmlns:a="http://schemas.openxmlformats.org/drawingml/2006/main" xmlns:p="http://schemas.openxmlformats.org/presentationml/2006/main" xmlns:r="http://schemas.openxmlformats.org/officeDocument/2006/relationships">
-  <p:cSld>
-    <p:spTree>
-      <p:nvGrpSpPr>
-        <p:cNvPr id="1" name=""/>
-        <p:cNvGrpSpPr/>
-        <p:nvPr/>
-      </p:nvGrpSpPr>
-      <p:grpSpPr/>
-      <p:pic>
-        <p:nvPicPr>
-          <p:cNvPr id="2" name="Picture 1" descr="UC8_Matchmaking_Sequence.png"/>
-          <p:cNvPicPr>
-            <a:picLocks noChangeAspect="1"/>
-          </p:cNvPicPr>
-          <p:nvPr/>
-        </p:nvPicPr>
-        <p:blipFill>
-          <a:blip r:embed="rId2"/>
-          <a:stretch>
-            <a:fillRect/>
-          </a:stretch>
-        </p:blipFill>
-        <p:spPr>
-          <a:xfrm>
-            <a:off x="1293435" y="914400"/>
-            <a:ext cx="6557130" cy="5394960"/>
-          </a:xfrm>
-          <a:prstGeom prst="rect">
-            <a:avLst/>
-          </a:prstGeom>
-        </p:spPr>
-      </p:pic>
-    </p:spTree>
-  </p:cSld>
-  <p:clrMapOvr>
-    <a:masterClrMapping/>
-  </p:clrMapOvr>
-</p:sld>
-</file>
-
-<file path=ppt/slides/slide35.xml><?xml version="1.0" encoding="utf-8"?>
-<p:sld xmlns:a="http://schemas.openxmlformats.org/drawingml/2006/main" xmlns:p="http://schemas.openxmlformats.org/presentationml/2006/main" xmlns:r="http://schemas.openxmlformats.org/officeDocument/2006/relationships">
-  <p:cSld>
-    <p:spTree>
-      <p:nvGrpSpPr>
-        <p:cNvPr id="1" name=""/>
-        <p:cNvGrpSpPr/>
-        <p:nvPr/>
-      </p:nvGrpSpPr>
-      <p:grpSpPr/>
-      <p:pic>
-        <p:nvPicPr>
-          <p:cNvPr id="2" name="Picture 1" descr="UC8_Matchmaking_TestCases.png"/>
-          <p:cNvPicPr>
-            <a:picLocks noChangeAspect="1"/>
-          </p:cNvPicPr>
-          <p:nvPr/>
-        </p:nvPicPr>
-        <p:blipFill>
-          <a:blip r:embed="rId2"/>
-          <a:stretch>
-            <a:fillRect/>
-          </a:stretch>
-        </p:blipFill>
-        <p:spPr>
-          <a:xfrm>
-            <a:off x="548640" y="2102325"/>
-            <a:ext cx="8046720" cy="3019109"/>
-          </a:xfrm>
-          <a:prstGeom prst="rect">
-            <a:avLst/>
-          </a:prstGeom>
-        </p:spPr>
-      </p:pic>
-    </p:spTree>
-  </p:cSld>
-  <p:clrMapOvr>
-    <a:masterClrMapping/>
-  </p:clrMapOvr>
-</p:sld>
-</file>
-
-<file path=ppt/slides/slide36.xml><?xml version="1.0" encoding="utf-8"?>
-<p:sld xmlns:a="http://schemas.openxmlformats.org/drawingml/2006/main" xmlns:p="http://schemas.openxmlformats.org/presentationml/2006/main" xmlns:r="http://schemas.openxmlformats.org/officeDocument/2006/relationships">
-  <p:cSld>
-    <p:spTree>
-      <p:nvGrpSpPr>
-        <p:cNvPr id="1" name=""/>
-        <p:cNvGrpSpPr/>
-        <p:nvPr/>
-      </p:nvGrpSpPr>
-      <p:grpSpPr/>
-      <p:pic>
-        <p:nvPicPr>
-          <p:cNvPr id="2" name="Picture 1" descr="UC9_PvPBattle_Description.png"/>
-          <p:cNvPicPr>
-            <a:picLocks noChangeAspect="1"/>
-          </p:cNvPicPr>
-          <p:nvPr/>
-        </p:nvPicPr>
-        <p:blipFill>
-          <a:blip r:embed="rId2"/>
-          <a:stretch>
-            <a:fillRect/>
-          </a:stretch>
-        </p:blipFill>
-        <p:spPr>
-          <a:xfrm>
-            <a:off x="1778338" y="914400"/>
-            <a:ext cx="5587324" cy="5394960"/>
-          </a:xfrm>
-          <a:prstGeom prst="rect">
-            <a:avLst/>
-          </a:prstGeom>
-        </p:spPr>
-      </p:pic>
-    </p:spTree>
-  </p:cSld>
-  <p:clrMapOvr>
-    <a:masterClrMapping/>
-  </p:clrMapOvr>
-</p:sld>
-</file>
-
-<file path=ppt/slides/slide37.xml><?xml version="1.0" encoding="utf-8"?>
-<p:sld xmlns:a="http://schemas.openxmlformats.org/drawingml/2006/main" xmlns:p="http://schemas.openxmlformats.org/presentationml/2006/main" xmlns:r="http://schemas.openxmlformats.org/officeDocument/2006/relationships">
-  <p:cSld>
-    <p:spTree>
-      <p:nvGrpSpPr>
-        <p:cNvPr id="1" name=""/>
-        <p:cNvGrpSpPr/>
-        <p:nvPr/>
-      </p:nvGrpSpPr>
-      <p:grpSpPr/>
-      <p:pic>
-        <p:nvPicPr>
-          <p:cNvPr id="2" name="Picture 1" descr="UC9_PvPBattle_Activity.png"/>
-          <p:cNvPicPr>
-            <a:picLocks noChangeAspect="1"/>
-          </p:cNvPicPr>
-          <p:nvPr/>
-        </p:nvPicPr>
-        <p:blipFill>
-          <a:blip r:embed="rId2"/>
-          <a:stretch>
-            <a:fillRect/>
-          </a:stretch>
-        </p:blipFill>
-        <p:spPr>
-          <a:xfrm>
-            <a:off x="3623452" y="914400"/>
-            <a:ext cx="1897095" cy="5394960"/>
-          </a:xfrm>
-          <a:prstGeom prst="rect">
-            <a:avLst/>
-          </a:prstGeom>
-        </p:spPr>
-      </p:pic>
-    </p:spTree>
-  </p:cSld>
-  <p:clrMapOvr>
-    <a:masterClrMapping/>
-  </p:clrMapOvr>
-</p:sld>
-</file>
-
-<file path=ppt/slides/slide38.xml><?xml version="1.0" encoding="utf-8"?>
-<p:sld xmlns:a="http://schemas.openxmlformats.org/drawingml/2006/main" xmlns:p="http://schemas.openxmlformats.org/presentationml/2006/main" xmlns:r="http://schemas.openxmlformats.org/officeDocument/2006/relationships">
-  <p:cSld>
-    <p:spTree>
-      <p:nvGrpSpPr>
-        <p:cNvPr id="1" name=""/>
-        <p:cNvGrpSpPr/>
-        <p:nvPr/>
-      </p:nvGrpSpPr>
-      <p:grpSpPr/>
-      <p:pic>
-        <p:nvPicPr>
-          <p:cNvPr id="2" name="Picture 1" descr="UC9_PvPBattle_Sequence.png"/>
-          <p:cNvPicPr>
-            <a:picLocks noChangeAspect="1"/>
-          </p:cNvPicPr>
-          <p:nvPr/>
-        </p:nvPicPr>
-        <p:blipFill>
-          <a:blip r:embed="rId2"/>
-          <a:stretch>
-            <a:fillRect/>
-          </a:stretch>
-        </p:blipFill>
-        <p:spPr>
-          <a:xfrm>
-            <a:off x="548640" y="1022680"/>
-            <a:ext cx="8046720" cy="5178400"/>
-          </a:xfrm>
-          <a:prstGeom prst="rect">
-            <a:avLst/>
-          </a:prstGeom>
-        </p:spPr>
-      </p:pic>
-    </p:spTree>
-  </p:cSld>
-  <p:clrMapOvr>
-    <a:masterClrMapping/>
-  </p:clrMapOvr>
-</p:sld>
-</file>
-
-<file path=ppt/slides/slide39.xml><?xml version="1.0" encoding="utf-8"?>
-<p:sld xmlns:a="http://schemas.openxmlformats.org/drawingml/2006/main" xmlns:p="http://schemas.openxmlformats.org/presentationml/2006/main" xmlns:r="http://schemas.openxmlformats.org/officeDocument/2006/relationships">
-  <p:cSld>
-    <p:spTree>
-      <p:nvGrpSpPr>
-        <p:cNvPr id="1" name=""/>
-        <p:cNvGrpSpPr/>
-        <p:nvPr/>
-      </p:nvGrpSpPr>
-      <p:grpSpPr/>
-      <p:pic>
-        <p:nvPicPr>
-          <p:cNvPr id="2" name="Picture 1" descr="UC9_PvPBattle_TestCases.png"/>
-          <p:cNvPicPr>
-            <a:picLocks noChangeAspect="1"/>
-          </p:cNvPicPr>
-          <p:nvPr/>
-        </p:nvPicPr>
-        <p:blipFill>
-          <a:blip r:embed="rId2"/>
-          <a:stretch>
-            <a:fillRect/>
-          </a:stretch>
-        </p:blipFill>
-        <p:spPr>
-          <a:xfrm>
-            <a:off x="548640" y="2565846"/>
-            <a:ext cx="8046720" cy="2092067"/>
-          </a:xfrm>
-          <a:prstGeom prst="rect">
-            <a:avLst/>
-          </a:prstGeom>
-        </p:spPr>
-      </p:pic>
-    </p:spTree>
-  </p:cSld>
-  <p:clrMapOvr>
-    <a:masterClrMapping/>
-  </p:clrMapOvr>
-</p:sld>
-</file>
-
-<file path=ppt/slides/slide4.xml><?xml version="1.0" encoding="utf-8"?>
-<p:sld xmlns:a="http://schemas.openxmlformats.org/drawingml/2006/main" xmlns:p="http://schemas.openxmlformats.org/presentationml/2006/main" xmlns:r="http://schemas.openxmlformats.org/officeDocument/2006/relationships">
-  <p:cSld>
-    <p:spTree>
-      <p:nvGrpSpPr>
-        <p:cNvPr id="1" name=""/>
-        <p:cNvGrpSpPr/>
-        <p:nvPr/>
-      </p:nvGrpSpPr>
-      <p:grpSpPr/>
+<file path=ppt/slides/slide50.xml><?xml version="1.0" encoding="utf-8"?>
+<p:sld xmlns:a="http://schemas.openxmlformats.org/drawingml/2006/main" xmlns:r="http://schemas.openxmlformats.org/officeDocument/2006/relationships" xmlns:p="http://schemas.openxmlformats.org/presentationml/2006/main">
+  <p:cSld>
+    <p:spTree>
+      <p:nvGrpSpPr>
+        <p:cNvPr id="1" name=""/>
+        <p:cNvGrpSpPr/>
+        <p:nvPr/>
+      </p:nvGrpSpPr>
+      <p:grpSpPr>
+        <a:xfrm>
+          <a:off x="0" y="0"/>
+          <a:ext cx="0" cy="0"/>
+          <a:chOff x="0" y="0"/>
+          <a:chExt cx="0" cy="0"/>
+        </a:xfrm>
+      </p:grpSpPr>
+      <p:pic>
+        <p:nvPicPr>
+          <p:cNvPr id="2" name="Picture 1" descr="UC12_LevelUp_Description.png"/>
+          <p:cNvPicPr>
+            <a:picLocks noChangeAspect="1"/>
+          </p:cNvPicPr>
+          <p:nvPr/>
+        </p:nvPicPr>
+        <p:blipFill>
+          <a:blip r:embed="rId2"/>
+          <a:stretch>
+            <a:fillRect/>
+          </a:stretch>
+        </p:blipFill>
+        <p:spPr>
+          <a:xfrm>
+            <a:off x="1181011" y="914400"/>
+            <a:ext cx="6781978" cy="5394960"/>
+          </a:xfrm>
+          <a:prstGeom prst="rect">
+            <a:avLst/>
+          </a:prstGeom>
+        </p:spPr>
+      </p:pic>
+    </p:spTree>
+  </p:cSld>
+  <p:clrMapOvr>
+    <a:masterClrMapping/>
+  </p:clrMapOvr>
+</p:sld>
+</file>
+
+<file path=ppt/slides/slide51.xml><?xml version="1.0" encoding="utf-8"?>
+<p:sld xmlns:a="http://schemas.openxmlformats.org/drawingml/2006/main" xmlns:r="http://schemas.openxmlformats.org/officeDocument/2006/relationships" xmlns:p="http://schemas.openxmlformats.org/presentationml/2006/main">
+  <p:cSld>
+    <p:spTree>
+      <p:nvGrpSpPr>
+        <p:cNvPr id="1" name=""/>
+        <p:cNvGrpSpPr/>
+        <p:nvPr/>
+      </p:nvGrpSpPr>
+      <p:grpSpPr>
+        <a:xfrm>
+          <a:off x="0" y="0"/>
+          <a:ext cx="0" cy="0"/>
+          <a:chOff x="0" y="0"/>
+          <a:chExt cx="0" cy="0"/>
+        </a:xfrm>
+      </p:grpSpPr>
+      <p:pic>
+        <p:nvPicPr>
+          <p:cNvPr id="2" name="Picture 1" descr="UC12_LevelUp_Activity.png"/>
+          <p:cNvPicPr>
+            <a:picLocks noChangeAspect="1"/>
+          </p:cNvPicPr>
+          <p:nvPr/>
+        </p:nvPicPr>
+        <p:blipFill>
+          <a:blip r:embed="rId2"/>
+          <a:stretch>
+            <a:fillRect/>
+          </a:stretch>
+        </p:blipFill>
+        <p:spPr>
+          <a:xfrm>
+            <a:off x="2497015" y="914400"/>
+            <a:ext cx="4149969" cy="5394960"/>
+          </a:xfrm>
+          <a:prstGeom prst="rect">
+            <a:avLst/>
+          </a:prstGeom>
+        </p:spPr>
+      </p:pic>
+    </p:spTree>
+  </p:cSld>
+  <p:clrMapOvr>
+    <a:masterClrMapping/>
+  </p:clrMapOvr>
+</p:sld>
+</file>
+
+<file path=ppt/slides/slide52.xml><?xml version="1.0" encoding="utf-8"?>
+<p:sld xmlns:a="http://schemas.openxmlformats.org/drawingml/2006/main" xmlns:r="http://schemas.openxmlformats.org/officeDocument/2006/relationships" xmlns:p="http://schemas.openxmlformats.org/presentationml/2006/main">
+  <p:cSld>
+    <p:spTree>
+      <p:nvGrpSpPr>
+        <p:cNvPr id="1" name=""/>
+        <p:cNvGrpSpPr/>
+        <p:nvPr/>
+      </p:nvGrpSpPr>
+      <p:grpSpPr>
+        <a:xfrm>
+          <a:off x="0" y="0"/>
+          <a:ext cx="0" cy="0"/>
+          <a:chOff x="0" y="0"/>
+          <a:chExt cx="0" cy="0"/>
+        </a:xfrm>
+      </p:grpSpPr>
+      <p:pic>
+        <p:nvPicPr>
+          <p:cNvPr id="2" name="Picture 1" descr="UC12_LevelUp_Sequence.png"/>
+          <p:cNvPicPr>
+            <a:picLocks noChangeAspect="1"/>
+          </p:cNvPicPr>
+          <p:nvPr/>
+        </p:nvPicPr>
+        <p:blipFill>
+          <a:blip r:embed="rId2"/>
+          <a:stretch>
+            <a:fillRect/>
+          </a:stretch>
+        </p:blipFill>
+        <p:spPr>
+          <a:xfrm>
+            <a:off x="1065950" y="914400"/>
+            <a:ext cx="7012100" cy="5394960"/>
+          </a:xfrm>
+          <a:prstGeom prst="rect">
+            <a:avLst/>
+          </a:prstGeom>
+        </p:spPr>
+      </p:pic>
+    </p:spTree>
+  </p:cSld>
+  <p:clrMapOvr>
+    <a:masterClrMapping/>
+  </p:clrMapOvr>
+</p:sld>
+</file>
+
+<file path=ppt/slides/slide53.xml><?xml version="1.0" encoding="utf-8"?>
+<p:sld xmlns:a="http://schemas.openxmlformats.org/drawingml/2006/main" xmlns:r="http://schemas.openxmlformats.org/officeDocument/2006/relationships" xmlns:p="http://schemas.openxmlformats.org/presentationml/2006/main">
+  <p:cSld>
+    <p:spTree>
+      <p:nvGrpSpPr>
+        <p:cNvPr id="1" name=""/>
+        <p:cNvGrpSpPr/>
+        <p:nvPr/>
+      </p:nvGrpSpPr>
+      <p:grpSpPr>
+        <a:xfrm>
+          <a:off x="0" y="0"/>
+          <a:ext cx="0" cy="0"/>
+          <a:chOff x="0" y="0"/>
+          <a:chExt cx="0" cy="0"/>
+        </a:xfrm>
+      </p:grpSpPr>
+      <p:pic>
+        <p:nvPicPr>
+          <p:cNvPr id="2" name="Picture 1" descr="UC12_LevelUp_TestCases.png"/>
+          <p:cNvPicPr>
+            <a:picLocks noChangeAspect="1"/>
+          </p:cNvPicPr>
+          <p:nvPr/>
+        </p:nvPicPr>
+        <p:blipFill>
+          <a:blip r:embed="rId2"/>
+          <a:stretch>
+            <a:fillRect/>
+          </a:stretch>
+        </p:blipFill>
+        <p:spPr>
+          <a:xfrm>
+            <a:off x="548640" y="2166499"/>
+            <a:ext cx="8046720" cy="2890761"/>
+          </a:xfrm>
+          <a:prstGeom prst="rect">
+            <a:avLst/>
+          </a:prstGeom>
+        </p:spPr>
+      </p:pic>
+    </p:spTree>
+  </p:cSld>
+  <p:clrMapOvr>
+    <a:masterClrMapping/>
+  </p:clrMapOvr>
+</p:sld>
+</file>
+
+<file path=ppt/slides/slide54.xml><?xml version="1.0" encoding="utf-8"?>
+<p:sld xmlns:a="http://schemas.openxmlformats.org/drawingml/2006/main" xmlns:r="http://schemas.openxmlformats.org/officeDocument/2006/relationships" xmlns:p="http://schemas.openxmlformats.org/presentationml/2006/main">
+  <p:cSld>
+    <p:spTree>
+      <p:nvGrpSpPr>
+        <p:cNvPr id="1" name=""/>
+        <p:cNvGrpSpPr/>
+        <p:nvPr/>
+      </p:nvGrpSpPr>
+      <p:grpSpPr>
+        <a:xfrm>
+          <a:off x="0" y="0"/>
+          <a:ext cx="0" cy="0"/>
+          <a:chOff x="0" y="0"/>
+          <a:chExt cx="0" cy="0"/>
+        </a:xfrm>
+      </p:grpSpPr>
+      <p:pic>
+        <p:nvPicPr>
+          <p:cNvPr id="2" name="Picture 1" descr="UC13_HealTeam_Description.png"/>
+          <p:cNvPicPr>
+            <a:picLocks noChangeAspect="1"/>
+          </p:cNvPicPr>
+          <p:nvPr/>
+        </p:nvPicPr>
+        <p:blipFill>
+          <a:blip r:embed="rId2"/>
+          <a:stretch>
+            <a:fillRect/>
+          </a:stretch>
+        </p:blipFill>
+        <p:spPr>
+          <a:xfrm>
+            <a:off x="1524000" y="1092517"/>
+            <a:ext cx="6096000" cy="5038725"/>
+          </a:xfrm>
+          <a:prstGeom prst="rect">
+            <a:avLst/>
+          </a:prstGeom>
+        </p:spPr>
+      </p:pic>
+    </p:spTree>
+  </p:cSld>
+  <p:clrMapOvr>
+    <a:masterClrMapping/>
+  </p:clrMapOvr>
+</p:sld>
+</file>
+
+<file path=ppt/slides/slide55.xml><?xml version="1.0" encoding="utf-8"?>
+<p:sld xmlns:a="http://schemas.openxmlformats.org/drawingml/2006/main" xmlns:r="http://schemas.openxmlformats.org/officeDocument/2006/relationships" xmlns:p="http://schemas.openxmlformats.org/presentationml/2006/main">
+  <p:cSld>
+    <p:spTree>
+      <p:nvGrpSpPr>
+        <p:cNvPr id="1" name=""/>
+        <p:cNvGrpSpPr/>
+        <p:nvPr/>
+      </p:nvGrpSpPr>
+      <p:grpSpPr>
+        <a:xfrm>
+          <a:off x="0" y="0"/>
+          <a:ext cx="0" cy="0"/>
+          <a:chOff x="0" y="0"/>
+          <a:chExt cx="0" cy="0"/>
+        </a:xfrm>
+      </p:grpSpPr>
+      <p:pic>
+        <p:nvPicPr>
+          <p:cNvPr id="2" name="Picture 1" descr="UC13_HealTeam_Activity.png"/>
+          <p:cNvPicPr>
+            <a:picLocks noChangeAspect="1"/>
+          </p:cNvPicPr>
+          <p:nvPr/>
+        </p:nvPicPr>
+        <p:blipFill>
+          <a:blip r:embed="rId2"/>
+          <a:stretch>
+            <a:fillRect/>
+          </a:stretch>
+        </p:blipFill>
+        <p:spPr>
+          <a:xfrm>
+            <a:off x="2876550" y="1044892"/>
+            <a:ext cx="3390900" cy="5133975"/>
+          </a:xfrm>
+          <a:prstGeom prst="rect">
+            <a:avLst/>
+          </a:prstGeom>
+        </p:spPr>
+      </p:pic>
+    </p:spTree>
+  </p:cSld>
+  <p:clrMapOvr>
+    <a:masterClrMapping/>
+  </p:clrMapOvr>
+</p:sld>
+</file>
+
+<file path=ppt/slides/slide56.xml><?xml version="1.0" encoding="utf-8"?>
+<p:sld xmlns:a="http://schemas.openxmlformats.org/drawingml/2006/main" xmlns:r="http://schemas.openxmlformats.org/officeDocument/2006/relationships" xmlns:p="http://schemas.openxmlformats.org/presentationml/2006/main">
+  <p:cSld>
+    <p:spTree>
+      <p:nvGrpSpPr>
+        <p:cNvPr id="1" name=""/>
+        <p:cNvGrpSpPr/>
+        <p:nvPr/>
+      </p:nvGrpSpPr>
+      <p:grpSpPr>
+        <a:xfrm>
+          <a:off x="0" y="0"/>
+          <a:ext cx="0" cy="0"/>
+          <a:chOff x="0" y="0"/>
+          <a:chExt cx="0" cy="0"/>
+        </a:xfrm>
+      </p:grpSpPr>
+      <p:pic>
+        <p:nvPicPr>
+          <p:cNvPr id="2" name="Picture 1" descr="UC13_HealTeam_Sequence.png"/>
+          <p:cNvPicPr>
+            <a:picLocks noChangeAspect="1"/>
+          </p:cNvPicPr>
+          <p:nvPr/>
+        </p:nvPicPr>
+        <p:blipFill>
+          <a:blip r:embed="rId2"/>
+          <a:stretch>
+            <a:fillRect/>
+          </a:stretch>
+        </p:blipFill>
+        <p:spPr>
+          <a:xfrm>
+            <a:off x="728662" y="1940242"/>
+            <a:ext cx="7686675" cy="3343275"/>
+          </a:xfrm>
+          <a:prstGeom prst="rect">
+            <a:avLst/>
+          </a:prstGeom>
+        </p:spPr>
+      </p:pic>
+    </p:spTree>
+  </p:cSld>
+  <p:clrMapOvr>
+    <a:masterClrMapping/>
+  </p:clrMapOvr>
+</p:sld>
+</file>
+
+<file path=ppt/slides/slide57.xml><?xml version="1.0" encoding="utf-8"?>
+<p:sld xmlns:a="http://schemas.openxmlformats.org/drawingml/2006/main" xmlns:r="http://schemas.openxmlformats.org/officeDocument/2006/relationships" xmlns:p="http://schemas.openxmlformats.org/presentationml/2006/main">
+  <p:cSld>
+    <p:spTree>
+      <p:nvGrpSpPr>
+        <p:cNvPr id="1" name=""/>
+        <p:cNvGrpSpPr/>
+        <p:nvPr/>
+      </p:nvGrpSpPr>
+      <p:grpSpPr>
+        <a:xfrm>
+          <a:off x="0" y="0"/>
+          <a:ext cx="0" cy="0"/>
+          <a:chOff x="0" y="0"/>
+          <a:chExt cx="0" cy="0"/>
+        </a:xfrm>
+      </p:grpSpPr>
+      <p:pic>
+        <p:nvPicPr>
+          <p:cNvPr id="2" name="Picture 1" descr="UC13_HealTeam_TestCases.png"/>
+          <p:cNvPicPr>
+            <a:picLocks noChangeAspect="1"/>
+          </p:cNvPicPr>
+          <p:nvPr/>
+        </p:nvPicPr>
+        <p:blipFill>
+          <a:blip r:embed="rId2"/>
+          <a:stretch>
+            <a:fillRect/>
+          </a:stretch>
+        </p:blipFill>
+        <p:spPr>
+          <a:xfrm>
+            <a:off x="548640" y="2214466"/>
+            <a:ext cx="8046720" cy="2794827"/>
+          </a:xfrm>
+          <a:prstGeom prst="rect">
+            <a:avLst/>
+          </a:prstGeom>
+        </p:spPr>
+      </p:pic>
+    </p:spTree>
+  </p:cSld>
+  <p:clrMapOvr>
+    <a:masterClrMapping/>
+  </p:clrMapOvr>
+</p:sld>
+</file>
+
+<file path=ppt/slides/slide58.xml><?xml version="1.0" encoding="utf-8"?>
+<p:sld xmlns:a="http://schemas.openxmlformats.org/drawingml/2006/main" xmlns:r="http://schemas.openxmlformats.org/officeDocument/2006/relationships" xmlns:p="http://schemas.openxmlformats.org/presentationml/2006/main">
+  <p:cSld>
+    <p:spTree>
+      <p:nvGrpSpPr>
+        <p:cNvPr id="1" name=""/>
+        <p:cNvGrpSpPr/>
+        <p:nvPr/>
+      </p:nvGrpSpPr>
+      <p:grpSpPr>
+        <a:xfrm>
+          <a:off x="0" y="0"/>
+          <a:ext cx="0" cy="0"/>
+          <a:chOff x="0" y="0"/>
+          <a:chExt cx="0" cy="0"/>
+        </a:xfrm>
+      </p:grpSpPr>
+      <p:pic>
+        <p:nvPicPr>
+          <p:cNvPr id="2" name="Picture 1" descr="UC14_ChallengeGym_Description.png"/>
+          <p:cNvPicPr>
+            <a:picLocks noChangeAspect="1"/>
+          </p:cNvPicPr>
+          <p:nvPr/>
+        </p:nvPicPr>
+        <p:blipFill>
+          <a:blip r:embed="rId2"/>
+          <a:stretch>
+            <a:fillRect/>
+          </a:stretch>
+        </p:blipFill>
+        <p:spPr>
+          <a:xfrm>
+            <a:off x="1480558" y="914400"/>
+            <a:ext cx="6182883" cy="5394960"/>
+          </a:xfrm>
+          <a:prstGeom prst="rect">
+            <a:avLst/>
+          </a:prstGeom>
+        </p:spPr>
+      </p:pic>
+    </p:spTree>
+  </p:cSld>
+  <p:clrMapOvr>
+    <a:masterClrMapping/>
+  </p:clrMapOvr>
+</p:sld>
+</file>
+
+<file path=ppt/slides/slide59.xml><?xml version="1.0" encoding="utf-8"?>
+<p:sld xmlns:a="http://schemas.openxmlformats.org/drawingml/2006/main" xmlns:r="http://schemas.openxmlformats.org/officeDocument/2006/relationships" xmlns:p="http://schemas.openxmlformats.org/presentationml/2006/main">
+  <p:cSld>
+    <p:spTree>
+      <p:nvGrpSpPr>
+        <p:cNvPr id="1" name=""/>
+        <p:cNvGrpSpPr/>
+        <p:nvPr/>
+      </p:nvGrpSpPr>
+      <p:grpSpPr>
+        <a:xfrm>
+          <a:off x="0" y="0"/>
+          <a:ext cx="0" cy="0"/>
+          <a:chOff x="0" y="0"/>
+          <a:chExt cx="0" cy="0"/>
+        </a:xfrm>
+      </p:grpSpPr>
+      <p:pic>
+        <p:nvPicPr>
+          <p:cNvPr id="2" name="Picture 1" descr="UC14_ChallengeGym_Activity.png"/>
+          <p:cNvPicPr>
+            <a:picLocks noChangeAspect="1"/>
+          </p:cNvPicPr>
+          <p:nvPr/>
+        </p:nvPicPr>
+        <p:blipFill>
+          <a:blip r:embed="rId2"/>
+          <a:stretch>
+            <a:fillRect/>
+          </a:stretch>
+        </p:blipFill>
+        <p:spPr>
+          <a:xfrm>
+            <a:off x="2504723" y="914400"/>
+            <a:ext cx="4134553" cy="5394960"/>
+          </a:xfrm>
+          <a:prstGeom prst="rect">
+            <a:avLst/>
+          </a:prstGeom>
+        </p:spPr>
+      </p:pic>
+    </p:spTree>
+  </p:cSld>
+  <p:clrMapOvr>
+    <a:masterClrMapping/>
+  </p:clrMapOvr>
+</p:sld>
+</file>
+
+<file path=ppt/slides/slide6.xml><?xml version="1.0" encoding="utf-8"?>
+<p:sld xmlns:a="http://schemas.openxmlformats.org/drawingml/2006/main" xmlns:r="http://schemas.openxmlformats.org/officeDocument/2006/relationships" xmlns:p="http://schemas.openxmlformats.org/presentationml/2006/main">
+  <p:cSld>
+    <p:spTree>
+      <p:nvGrpSpPr>
+        <p:cNvPr id="1" name=""/>
+        <p:cNvGrpSpPr/>
+        <p:nvPr/>
+      </p:nvGrpSpPr>
+      <p:grpSpPr>
+        <a:xfrm>
+          <a:off x="0" y="0"/>
+          <a:ext cx="0" cy="0"/>
+          <a:chOff x="0" y="0"/>
+          <a:chExt cx="0" cy="0"/>
+        </a:xfrm>
+      </p:grpSpPr>
       <p:pic>
         <p:nvPicPr>
           <p:cNvPr id="2" name="Picture 1" descr="UC1_Login_Description.png"/>
@@ -4622,436 +6247,513 @@
 </p:sld>
 </file>
 
-<file path=ppt/slides/slide40.xml><?xml version="1.0" encoding="utf-8"?>
-<p:sld xmlns:a="http://schemas.openxmlformats.org/drawingml/2006/main" xmlns:p="http://schemas.openxmlformats.org/presentationml/2006/main" xmlns:r="http://schemas.openxmlformats.org/officeDocument/2006/relationships">
-  <p:cSld>
-    <p:spTree>
-      <p:nvGrpSpPr>
-        <p:cNvPr id="1" name=""/>
-        <p:cNvGrpSpPr/>
-        <p:nvPr/>
-      </p:nvGrpSpPr>
-      <p:grpSpPr/>
-      <p:pic>
-        <p:nvPicPr>
-          <p:cNvPr id="2" name="Picture 1" descr="UC10_SaveLoad_Description.png"/>
-          <p:cNvPicPr>
-            <a:picLocks noChangeAspect="1"/>
-          </p:cNvPicPr>
-          <p:nvPr/>
-        </p:nvPicPr>
-        <p:blipFill>
-          <a:blip r:embed="rId2"/>
-          <a:stretch>
-            <a:fillRect/>
-          </a:stretch>
-        </p:blipFill>
-        <p:spPr>
-          <a:xfrm>
-            <a:off x="1447800" y="925830"/>
-            <a:ext cx="6248400" cy="5372100"/>
-          </a:xfrm>
-          <a:prstGeom prst="rect">
-            <a:avLst/>
-          </a:prstGeom>
-        </p:spPr>
-      </p:pic>
-    </p:spTree>
-  </p:cSld>
-  <p:clrMapOvr>
-    <a:masterClrMapping/>
-  </p:clrMapOvr>
-</p:sld>
-</file>
-
-<file path=ppt/slides/slide41.xml><?xml version="1.0" encoding="utf-8"?>
-<p:sld xmlns:a="http://schemas.openxmlformats.org/drawingml/2006/main" xmlns:p="http://schemas.openxmlformats.org/presentationml/2006/main" xmlns:r="http://schemas.openxmlformats.org/officeDocument/2006/relationships">
-  <p:cSld>
-    <p:spTree>
-      <p:nvGrpSpPr>
-        <p:cNvPr id="1" name=""/>
-        <p:cNvGrpSpPr/>
-        <p:nvPr/>
-      </p:nvGrpSpPr>
-      <p:grpSpPr/>
-      <p:pic>
-        <p:nvPicPr>
-          <p:cNvPr id="2" name="Picture 1" descr="UC10_SaveLoad_Activity.png"/>
-          <p:cNvPicPr>
-            <a:picLocks noChangeAspect="1"/>
-          </p:cNvPicPr>
-          <p:nvPr/>
-        </p:nvPicPr>
-        <p:blipFill>
-          <a:blip r:embed="rId2"/>
-          <a:stretch>
-            <a:fillRect/>
-          </a:stretch>
-        </p:blipFill>
-        <p:spPr>
-          <a:xfrm>
-            <a:off x="1143471" y="914400"/>
-            <a:ext cx="6857058" cy="5394960"/>
-          </a:xfrm>
-          <a:prstGeom prst="rect">
-            <a:avLst/>
-          </a:prstGeom>
-        </p:spPr>
-      </p:pic>
-    </p:spTree>
-  </p:cSld>
-  <p:clrMapOvr>
-    <a:masterClrMapping/>
-  </p:clrMapOvr>
-</p:sld>
-</file>
-
-<file path=ppt/slides/slide42.xml><?xml version="1.0" encoding="utf-8"?>
-<p:sld xmlns:a="http://schemas.openxmlformats.org/drawingml/2006/main" xmlns:p="http://schemas.openxmlformats.org/presentationml/2006/main" xmlns:r="http://schemas.openxmlformats.org/officeDocument/2006/relationships">
-  <p:cSld>
-    <p:spTree>
-      <p:nvGrpSpPr>
-        <p:cNvPr id="1" name=""/>
-        <p:cNvGrpSpPr/>
-        <p:nvPr/>
-      </p:nvGrpSpPr>
-      <p:grpSpPr/>
-      <p:pic>
-        <p:nvPicPr>
-          <p:cNvPr id="2" name="Picture 1" descr="UC10_SaveLoad_Sequence.png"/>
-          <p:cNvPicPr>
-            <a:picLocks noChangeAspect="1"/>
-          </p:cNvPicPr>
-          <p:nvPr/>
-        </p:nvPicPr>
-        <p:blipFill>
-          <a:blip r:embed="rId2"/>
-          <a:stretch>
-            <a:fillRect/>
-          </a:stretch>
-        </p:blipFill>
-        <p:spPr>
-          <a:xfrm>
-            <a:off x="1793439" y="914400"/>
-            <a:ext cx="5557121" cy="5394960"/>
-          </a:xfrm>
-          <a:prstGeom prst="rect">
-            <a:avLst/>
-          </a:prstGeom>
-        </p:spPr>
-      </p:pic>
-    </p:spTree>
-  </p:cSld>
-  <p:clrMapOvr>
-    <a:masterClrMapping/>
-  </p:clrMapOvr>
-</p:sld>
-</file>
-
-<file path=ppt/slides/slide43.xml><?xml version="1.0" encoding="utf-8"?>
-<p:sld xmlns:a="http://schemas.openxmlformats.org/drawingml/2006/main" xmlns:p="http://schemas.openxmlformats.org/presentationml/2006/main" xmlns:r="http://schemas.openxmlformats.org/officeDocument/2006/relationships">
-  <p:cSld>
-    <p:spTree>
-      <p:nvGrpSpPr>
-        <p:cNvPr id="1" name=""/>
-        <p:cNvGrpSpPr/>
-        <p:nvPr/>
-      </p:nvGrpSpPr>
-      <p:grpSpPr/>
-      <p:pic>
-        <p:nvPicPr>
-          <p:cNvPr id="2" name="Picture 1" descr="UC10_SaveLoad_TestCases.png"/>
-          <p:cNvPicPr>
-            <a:picLocks noChangeAspect="1"/>
-          </p:cNvPicPr>
-          <p:nvPr/>
-        </p:nvPicPr>
-        <p:blipFill>
-          <a:blip r:embed="rId2"/>
-          <a:stretch>
-            <a:fillRect/>
-          </a:stretch>
-        </p:blipFill>
-        <p:spPr>
-          <a:xfrm>
-            <a:off x="548640" y="2261532"/>
-            <a:ext cx="8046720" cy="2700695"/>
-          </a:xfrm>
-          <a:prstGeom prst="rect">
-            <a:avLst/>
-          </a:prstGeom>
-        </p:spPr>
-      </p:pic>
-    </p:spTree>
-  </p:cSld>
-  <p:clrMapOvr>
-    <a:masterClrMapping/>
-  </p:clrMapOvr>
-</p:sld>
-</file>
-
-<file path=ppt/slides/slide44.xml><?xml version="1.0" encoding="utf-8"?>
-<p:sld xmlns:a="http://schemas.openxmlformats.org/drawingml/2006/main" xmlns:p="http://schemas.openxmlformats.org/presentationml/2006/main" xmlns:r="http://schemas.openxmlformats.org/officeDocument/2006/relationships">
-  <p:cSld>
-    <p:spTree>
-      <p:nvGrpSpPr>
-        <p:cNvPr id="1" name=""/>
-        <p:cNvGrpSpPr/>
-        <p:nvPr/>
-      </p:nvGrpSpPr>
-      <p:grpSpPr/>
-      <p:pic>
-        <p:nvPicPr>
-          <p:cNvPr id="2" name="Picture 1" descr="UC11_MatchHistory_Description.png"/>
-          <p:cNvPicPr>
-            <a:picLocks noChangeAspect="1"/>
-          </p:cNvPicPr>
-          <p:nvPr/>
-        </p:nvPicPr>
-        <p:blipFill>
-          <a:blip r:embed="rId2"/>
-          <a:stretch>
-            <a:fillRect/>
-          </a:stretch>
-        </p:blipFill>
-        <p:spPr>
-          <a:xfrm>
-            <a:off x="1433512" y="1259205"/>
-            <a:ext cx="6276975" cy="4705350"/>
-          </a:xfrm>
-          <a:prstGeom prst="rect">
-            <a:avLst/>
-          </a:prstGeom>
-        </p:spPr>
-      </p:pic>
-    </p:spTree>
-  </p:cSld>
-  <p:clrMapOvr>
-    <a:masterClrMapping/>
-  </p:clrMapOvr>
-</p:sld>
-</file>
-
-<file path=ppt/slides/slide45.xml><?xml version="1.0" encoding="utf-8"?>
-<p:sld xmlns:a="http://schemas.openxmlformats.org/drawingml/2006/main" xmlns:p="http://schemas.openxmlformats.org/presentationml/2006/main" xmlns:r="http://schemas.openxmlformats.org/officeDocument/2006/relationships">
-  <p:cSld>
-    <p:spTree>
-      <p:nvGrpSpPr>
-        <p:cNvPr id="1" name=""/>
-        <p:cNvGrpSpPr/>
-        <p:nvPr/>
-      </p:nvGrpSpPr>
-      <p:grpSpPr/>
-      <p:pic>
-        <p:nvPicPr>
-          <p:cNvPr id="2" name="Picture 1" descr="UC11_MatchHistory_Activity.png"/>
-          <p:cNvPicPr>
-            <a:picLocks noChangeAspect="1"/>
-          </p:cNvPicPr>
-          <p:nvPr/>
-        </p:nvPicPr>
-        <p:blipFill>
-          <a:blip r:embed="rId2"/>
-          <a:stretch>
-            <a:fillRect/>
-          </a:stretch>
-        </p:blipFill>
-        <p:spPr>
-          <a:xfrm>
-            <a:off x="1847850" y="1187767"/>
-            <a:ext cx="5448300" cy="4848225"/>
-          </a:xfrm>
-          <a:prstGeom prst="rect">
-            <a:avLst/>
-          </a:prstGeom>
-        </p:spPr>
-      </p:pic>
-    </p:spTree>
-  </p:cSld>
-  <p:clrMapOvr>
-    <a:masterClrMapping/>
-  </p:clrMapOvr>
-</p:sld>
-</file>
-
-<file path=ppt/slides/slide46.xml><?xml version="1.0" encoding="utf-8"?>
-<p:sld xmlns:a="http://schemas.openxmlformats.org/drawingml/2006/main" xmlns:p="http://schemas.openxmlformats.org/presentationml/2006/main" xmlns:r="http://schemas.openxmlformats.org/officeDocument/2006/relationships">
-  <p:cSld>
-    <p:spTree>
-      <p:nvGrpSpPr>
-        <p:cNvPr id="1" name=""/>
-        <p:cNvGrpSpPr/>
-        <p:nvPr/>
-      </p:nvGrpSpPr>
-      <p:grpSpPr/>
-      <p:pic>
-        <p:nvPicPr>
-          <p:cNvPr id="2" name="Picture 1" descr="UC11_MatchHistory_Sequence.png"/>
-          <p:cNvPicPr>
-            <a:picLocks noChangeAspect="1"/>
-          </p:cNvPicPr>
-          <p:nvPr/>
-        </p:nvPicPr>
-        <p:blipFill>
-          <a:blip r:embed="rId2"/>
-          <a:stretch>
-            <a:fillRect/>
-          </a:stretch>
-        </p:blipFill>
-        <p:spPr>
-          <a:xfrm>
-            <a:off x="1552575" y="1206817"/>
-            <a:ext cx="6038850" cy="4810125"/>
-          </a:xfrm>
-          <a:prstGeom prst="rect">
-            <a:avLst/>
-          </a:prstGeom>
-        </p:spPr>
-      </p:pic>
-    </p:spTree>
-  </p:cSld>
-  <p:clrMapOvr>
-    <a:masterClrMapping/>
-  </p:clrMapOvr>
-</p:sld>
-</file>
-
-<file path=ppt/slides/slide47.xml><?xml version="1.0" encoding="utf-8"?>
-<p:sld xmlns:a="http://schemas.openxmlformats.org/drawingml/2006/main" xmlns:p="http://schemas.openxmlformats.org/presentationml/2006/main" xmlns:r="http://schemas.openxmlformats.org/officeDocument/2006/relationships">
-  <p:cSld>
-    <p:spTree>
-      <p:nvGrpSpPr>
-        <p:cNvPr id="1" name=""/>
-        <p:cNvGrpSpPr/>
-        <p:nvPr/>
-      </p:nvGrpSpPr>
-      <p:grpSpPr/>
-      <p:pic>
-        <p:nvPicPr>
-          <p:cNvPr id="2" name="Picture 1" descr="UC11_MatchHistory_TestCases.png"/>
-          <p:cNvPicPr>
-            <a:picLocks noChangeAspect="1"/>
-          </p:cNvPicPr>
-          <p:nvPr/>
-        </p:nvPicPr>
-        <p:blipFill>
-          <a:blip r:embed="rId2"/>
-          <a:stretch>
-            <a:fillRect/>
-          </a:stretch>
-        </p:blipFill>
-        <p:spPr>
-          <a:xfrm>
-            <a:off x="548640" y="1864288"/>
-            <a:ext cx="8046720" cy="3495183"/>
-          </a:xfrm>
-          <a:prstGeom prst="rect">
-            <a:avLst/>
-          </a:prstGeom>
-        </p:spPr>
-      </p:pic>
-    </p:spTree>
-  </p:cSld>
-  <p:clrMapOvr>
-    <a:masterClrMapping/>
-  </p:clrMapOvr>
-</p:sld>
-</file>
-
-<file path=ppt/slides/slide48.xml><?xml version="1.0" encoding="utf-8"?>
-<p:sld xmlns:a="http://schemas.openxmlformats.org/drawingml/2006/main" xmlns:p="http://schemas.openxmlformats.org/presentationml/2006/main" xmlns:r="http://schemas.openxmlformats.org/officeDocument/2006/relationships">
-  <p:cSld>
-    <p:spTree>
-      <p:nvGrpSpPr>
-        <p:cNvPr id="1" name=""/>
-        <p:cNvGrpSpPr/>
-        <p:nvPr/>
-      </p:nvGrpSpPr>
-      <p:grpSpPr/>
-      <p:pic>
-        <p:nvPicPr>
-          <p:cNvPr id="2" name="Picture 1" descr="UC12_LevelUp_Description.png"/>
-          <p:cNvPicPr>
-            <a:picLocks noChangeAspect="1"/>
-          </p:cNvPicPr>
-          <p:nvPr/>
-        </p:nvPicPr>
-        <p:blipFill>
-          <a:blip r:embed="rId2"/>
-          <a:stretch>
-            <a:fillRect/>
-          </a:stretch>
-        </p:blipFill>
-        <p:spPr>
-          <a:xfrm>
-            <a:off x="1181011" y="914400"/>
-            <a:ext cx="6781978" cy="5394960"/>
-          </a:xfrm>
-          <a:prstGeom prst="rect">
-            <a:avLst/>
-          </a:prstGeom>
-        </p:spPr>
-      </p:pic>
-    </p:spTree>
-  </p:cSld>
-  <p:clrMapOvr>
-    <a:masterClrMapping/>
-  </p:clrMapOvr>
-</p:sld>
-</file>
-
-<file path=ppt/slides/slide49.xml><?xml version="1.0" encoding="utf-8"?>
-<p:sld xmlns:a="http://schemas.openxmlformats.org/drawingml/2006/main" xmlns:p="http://schemas.openxmlformats.org/presentationml/2006/main" xmlns:r="http://schemas.openxmlformats.org/officeDocument/2006/relationships">
-  <p:cSld>
-    <p:spTree>
-      <p:nvGrpSpPr>
-        <p:cNvPr id="1" name=""/>
-        <p:cNvGrpSpPr/>
-        <p:nvPr/>
-      </p:nvGrpSpPr>
-      <p:grpSpPr/>
-      <p:pic>
-        <p:nvPicPr>
-          <p:cNvPr id="2" name="Picture 1" descr="UC12_LevelUp_Activity.png"/>
-          <p:cNvPicPr>
-            <a:picLocks noChangeAspect="1"/>
-          </p:cNvPicPr>
-          <p:nvPr/>
-        </p:nvPicPr>
-        <p:blipFill>
-          <a:blip r:embed="rId2"/>
-          <a:stretch>
-            <a:fillRect/>
-          </a:stretch>
-        </p:blipFill>
-        <p:spPr>
-          <a:xfrm>
-            <a:off x="2497015" y="914400"/>
-            <a:ext cx="4149969" cy="5394960"/>
-          </a:xfrm>
-          <a:prstGeom prst="rect">
-            <a:avLst/>
-          </a:prstGeom>
-        </p:spPr>
-      </p:pic>
-    </p:spTree>
-  </p:cSld>
-  <p:clrMapOvr>
-    <a:masterClrMapping/>
-  </p:clrMapOvr>
-</p:sld>
-</file>
-
-<file path=ppt/slides/slide5.xml><?xml version="1.0" encoding="utf-8"?>
-<p:sld xmlns:a="http://schemas.openxmlformats.org/drawingml/2006/main" xmlns:p="http://schemas.openxmlformats.org/presentationml/2006/main" xmlns:r="http://schemas.openxmlformats.org/officeDocument/2006/relationships">
-  <p:cSld>
-    <p:spTree>
-      <p:nvGrpSpPr>
-        <p:cNvPr id="1" name=""/>
-        <p:cNvGrpSpPr/>
-        <p:nvPr/>
-      </p:nvGrpSpPr>
-      <p:grpSpPr/>
+<file path=ppt/slides/slide60.xml><?xml version="1.0" encoding="utf-8"?>
+<p:sld xmlns:a="http://schemas.openxmlformats.org/drawingml/2006/main" xmlns:r="http://schemas.openxmlformats.org/officeDocument/2006/relationships" xmlns:p="http://schemas.openxmlformats.org/presentationml/2006/main">
+  <p:cSld>
+    <p:spTree>
+      <p:nvGrpSpPr>
+        <p:cNvPr id="1" name=""/>
+        <p:cNvGrpSpPr/>
+        <p:nvPr/>
+      </p:nvGrpSpPr>
+      <p:grpSpPr>
+        <a:xfrm>
+          <a:off x="0" y="0"/>
+          <a:ext cx="0" cy="0"/>
+          <a:chOff x="0" y="0"/>
+          <a:chExt cx="0" cy="0"/>
+        </a:xfrm>
+      </p:grpSpPr>
+      <p:pic>
+        <p:nvPicPr>
+          <p:cNvPr id="2" name="Picture 1" descr="UC14_ChallengeGym_Sequence.png"/>
+          <p:cNvPicPr>
+            <a:picLocks noChangeAspect="1"/>
+          </p:cNvPicPr>
+          <p:nvPr/>
+        </p:nvPicPr>
+        <p:blipFill>
+          <a:blip r:embed="rId2"/>
+          <a:stretch>
+            <a:fillRect/>
+          </a:stretch>
+        </p:blipFill>
+        <p:spPr>
+          <a:xfrm>
+            <a:off x="1146490" y="914400"/>
+            <a:ext cx="6851019" cy="5394960"/>
+          </a:xfrm>
+          <a:prstGeom prst="rect">
+            <a:avLst/>
+          </a:prstGeom>
+        </p:spPr>
+      </p:pic>
+    </p:spTree>
+  </p:cSld>
+  <p:clrMapOvr>
+    <a:masterClrMapping/>
+  </p:clrMapOvr>
+</p:sld>
+</file>
+
+<file path=ppt/slides/slide61.xml><?xml version="1.0" encoding="utf-8"?>
+<p:sld xmlns:a="http://schemas.openxmlformats.org/drawingml/2006/main" xmlns:r="http://schemas.openxmlformats.org/officeDocument/2006/relationships" xmlns:p="http://schemas.openxmlformats.org/presentationml/2006/main">
+  <p:cSld>
+    <p:spTree>
+      <p:nvGrpSpPr>
+        <p:cNvPr id="1" name=""/>
+        <p:cNvGrpSpPr/>
+        <p:nvPr/>
+      </p:nvGrpSpPr>
+      <p:grpSpPr>
+        <a:xfrm>
+          <a:off x="0" y="0"/>
+          <a:ext cx="0" cy="0"/>
+          <a:chOff x="0" y="0"/>
+          <a:chExt cx="0" cy="0"/>
+        </a:xfrm>
+      </p:grpSpPr>
+      <p:pic>
+        <p:nvPicPr>
+          <p:cNvPr id="2" name="Picture 1" descr="UC14_ChallengeGym_TestCases.png"/>
+          <p:cNvPicPr>
+            <a:picLocks noChangeAspect="1"/>
+          </p:cNvPicPr>
+          <p:nvPr/>
+        </p:nvPicPr>
+        <p:blipFill>
+          <a:blip r:embed="rId2"/>
+          <a:stretch>
+            <a:fillRect/>
+          </a:stretch>
+        </p:blipFill>
+        <p:spPr>
+          <a:xfrm>
+            <a:off x="548640" y="1952943"/>
+            <a:ext cx="8046719" cy="3317874"/>
+          </a:xfrm>
+          <a:prstGeom prst="rect">
+            <a:avLst/>
+          </a:prstGeom>
+        </p:spPr>
+      </p:pic>
+    </p:spTree>
+  </p:cSld>
+  <p:clrMapOvr>
+    <a:masterClrMapping/>
+  </p:clrMapOvr>
+</p:sld>
+</file>
+
+<file path=ppt/slides/slide62.xml><?xml version="1.0" encoding="utf-8"?>
+<p:sld xmlns:a="http://schemas.openxmlformats.org/drawingml/2006/main" xmlns:r="http://schemas.openxmlformats.org/officeDocument/2006/relationships" xmlns:p="http://schemas.openxmlformats.org/presentationml/2006/main">
+  <p:cSld>
+    <p:spTree>
+      <p:nvGrpSpPr>
+        <p:cNvPr id="1" name=""/>
+        <p:cNvGrpSpPr/>
+        <p:nvPr/>
+      </p:nvGrpSpPr>
+      <p:grpSpPr>
+        <a:xfrm>
+          <a:off x="0" y="0"/>
+          <a:ext cx="0" cy="0"/>
+          <a:chOff x="0" y="0"/>
+          <a:chExt cx="0" cy="0"/>
+        </a:xfrm>
+      </p:grpSpPr>
+      <p:pic>
+        <p:nvPicPr>
+          <p:cNvPr id="2" name="Picture 1" descr="UC15_ChallengeLeague_Description.png"/>
+          <p:cNvPicPr>
+            <a:picLocks noChangeAspect="1"/>
+          </p:cNvPicPr>
+          <p:nvPr/>
+        </p:nvPicPr>
+        <p:blipFill>
+          <a:blip r:embed="rId2"/>
+          <a:stretch>
+            <a:fillRect/>
+          </a:stretch>
+        </p:blipFill>
+        <p:spPr>
+          <a:xfrm>
+            <a:off x="1691568" y="914400"/>
+            <a:ext cx="5760864" cy="5394960"/>
+          </a:xfrm>
+          <a:prstGeom prst="rect">
+            <a:avLst/>
+          </a:prstGeom>
+        </p:spPr>
+      </p:pic>
+    </p:spTree>
+  </p:cSld>
+  <p:clrMapOvr>
+    <a:masterClrMapping/>
+  </p:clrMapOvr>
+</p:sld>
+</file>
+
+<file path=ppt/slides/slide63.xml><?xml version="1.0" encoding="utf-8"?>
+<p:sld xmlns:a="http://schemas.openxmlformats.org/drawingml/2006/main" xmlns:r="http://schemas.openxmlformats.org/officeDocument/2006/relationships" xmlns:p="http://schemas.openxmlformats.org/presentationml/2006/main">
+  <p:cSld>
+    <p:spTree>
+      <p:nvGrpSpPr>
+        <p:cNvPr id="1" name=""/>
+        <p:cNvGrpSpPr/>
+        <p:nvPr/>
+      </p:nvGrpSpPr>
+      <p:grpSpPr>
+        <a:xfrm>
+          <a:off x="0" y="0"/>
+          <a:ext cx="0" cy="0"/>
+          <a:chOff x="0" y="0"/>
+          <a:chExt cx="0" cy="0"/>
+        </a:xfrm>
+      </p:grpSpPr>
+      <p:pic>
+        <p:nvPicPr>
+          <p:cNvPr id="2" name="Picture 1" descr="UC15_ChallengePokemonLeague_Activity.png"/>
+          <p:cNvPicPr>
+            <a:picLocks noChangeAspect="1"/>
+          </p:cNvPicPr>
+          <p:nvPr/>
+        </p:nvPicPr>
+        <p:blipFill>
+          <a:blip r:embed="rId2"/>
+          <a:stretch>
+            <a:fillRect/>
+          </a:stretch>
+        </p:blipFill>
+        <p:spPr>
+          <a:xfrm>
+            <a:off x="3024572" y="914400"/>
+            <a:ext cx="3094855" cy="5394960"/>
+          </a:xfrm>
+          <a:prstGeom prst="rect">
+            <a:avLst/>
+          </a:prstGeom>
+        </p:spPr>
+      </p:pic>
+    </p:spTree>
+  </p:cSld>
+  <p:clrMapOvr>
+    <a:masterClrMapping/>
+  </p:clrMapOvr>
+</p:sld>
+</file>
+
+<file path=ppt/slides/slide64.xml><?xml version="1.0" encoding="utf-8"?>
+<p:sld xmlns:a="http://schemas.openxmlformats.org/drawingml/2006/main" xmlns:r="http://schemas.openxmlformats.org/officeDocument/2006/relationships" xmlns:p="http://schemas.openxmlformats.org/presentationml/2006/main">
+  <p:cSld>
+    <p:spTree>
+      <p:nvGrpSpPr>
+        <p:cNvPr id="1" name=""/>
+        <p:cNvGrpSpPr/>
+        <p:nvPr/>
+      </p:nvGrpSpPr>
+      <p:grpSpPr>
+        <a:xfrm>
+          <a:off x="0" y="0"/>
+          <a:ext cx="0" cy="0"/>
+          <a:chOff x="0" y="0"/>
+          <a:chExt cx="0" cy="0"/>
+        </a:xfrm>
+      </p:grpSpPr>
+      <p:pic>
+        <p:nvPicPr>
+          <p:cNvPr id="2" name="Picture 1" descr="UC15_ChallengePokemonLeague_Sequence.png"/>
+          <p:cNvPicPr>
+            <a:picLocks noChangeAspect="1"/>
+          </p:cNvPicPr>
+          <p:nvPr/>
+        </p:nvPicPr>
+        <p:blipFill>
+          <a:blip r:embed="rId2"/>
+          <a:stretch>
+            <a:fillRect/>
+          </a:stretch>
+        </p:blipFill>
+        <p:spPr>
+          <a:xfrm>
+            <a:off x="1477753" y="914400"/>
+            <a:ext cx="6188493" cy="5394960"/>
+          </a:xfrm>
+          <a:prstGeom prst="rect">
+            <a:avLst/>
+          </a:prstGeom>
+        </p:spPr>
+      </p:pic>
+    </p:spTree>
+  </p:cSld>
+  <p:clrMapOvr>
+    <a:masterClrMapping/>
+  </p:clrMapOvr>
+</p:sld>
+</file>
+
+<file path=ppt/slides/slide65.xml><?xml version="1.0" encoding="utf-8"?>
+<p:sld xmlns:a="http://schemas.openxmlformats.org/drawingml/2006/main" xmlns:r="http://schemas.openxmlformats.org/officeDocument/2006/relationships" xmlns:p="http://schemas.openxmlformats.org/presentationml/2006/main">
+  <p:cSld>
+    <p:spTree>
+      <p:nvGrpSpPr>
+        <p:cNvPr id="1" name=""/>
+        <p:cNvGrpSpPr/>
+        <p:nvPr/>
+      </p:nvGrpSpPr>
+      <p:grpSpPr>
+        <a:xfrm>
+          <a:off x="0" y="0"/>
+          <a:ext cx="0" cy="0"/>
+          <a:chOff x="0" y="0"/>
+          <a:chExt cx="0" cy="0"/>
+        </a:xfrm>
+      </p:grpSpPr>
+      <p:pic>
+        <p:nvPicPr>
+          <p:cNvPr id="2" name="Picture 1" descr="UC15_ChallengeLeague_TestCases.png"/>
+          <p:cNvPicPr>
+            <a:picLocks noChangeAspect="1"/>
+          </p:cNvPicPr>
+          <p:nvPr/>
+        </p:nvPicPr>
+        <p:blipFill>
+          <a:blip r:embed="rId2"/>
+          <a:stretch>
+            <a:fillRect/>
+          </a:stretch>
+        </p:blipFill>
+        <p:spPr>
+          <a:xfrm>
+            <a:off x="548640" y="2048299"/>
+            <a:ext cx="8046720" cy="3127161"/>
+          </a:xfrm>
+          <a:prstGeom prst="rect">
+            <a:avLst/>
+          </a:prstGeom>
+        </p:spPr>
+      </p:pic>
+    </p:spTree>
+  </p:cSld>
+  <p:clrMapOvr>
+    <a:masterClrMapping/>
+  </p:clrMapOvr>
+</p:sld>
+</file>
+
+<file path=ppt/slides/slide66.xml><?xml version="1.0" encoding="utf-8"?>
+<p:sld xmlns:a="http://schemas.openxmlformats.org/drawingml/2006/main" xmlns:r="http://schemas.openxmlformats.org/officeDocument/2006/relationships" xmlns:p="http://schemas.openxmlformats.org/presentationml/2006/main">
+  <p:cSld>
+    <p:spTree>
+      <p:nvGrpSpPr>
+        <p:cNvPr id="1" name=""/>
+        <p:cNvGrpSpPr/>
+        <p:nvPr/>
+      </p:nvGrpSpPr>
+      <p:grpSpPr>
+        <a:xfrm>
+          <a:off x="0" y="0"/>
+          <a:ext cx="0" cy="0"/>
+          <a:chOff x="0" y="0"/>
+          <a:chExt cx="0" cy="0"/>
+        </a:xfrm>
+      </p:grpSpPr>
+      <p:pic>
+        <p:nvPicPr>
+          <p:cNvPr id="2" name="Picture 1" descr="UC16_ChallengeTrainer_Description.png"/>
+          <p:cNvPicPr>
+            <a:picLocks noChangeAspect="1"/>
+          </p:cNvPicPr>
+          <p:nvPr/>
+        </p:nvPicPr>
+        <p:blipFill>
+          <a:blip r:embed="rId2"/>
+          <a:stretch>
+            <a:fillRect/>
+          </a:stretch>
+        </p:blipFill>
+        <p:spPr>
+          <a:xfrm>
+            <a:off x="1714500" y="1011555"/>
+            <a:ext cx="5715000" cy="5200650"/>
+          </a:xfrm>
+          <a:prstGeom prst="rect">
+            <a:avLst/>
+          </a:prstGeom>
+        </p:spPr>
+      </p:pic>
+    </p:spTree>
+  </p:cSld>
+  <p:clrMapOvr>
+    <a:masterClrMapping/>
+  </p:clrMapOvr>
+</p:sld>
+</file>
+
+<file path=ppt/slides/slide67.xml><?xml version="1.0" encoding="utf-8"?>
+<p:sld xmlns:a="http://schemas.openxmlformats.org/drawingml/2006/main" xmlns:r="http://schemas.openxmlformats.org/officeDocument/2006/relationships" xmlns:p="http://schemas.openxmlformats.org/presentationml/2006/main">
+  <p:cSld>
+    <p:spTree>
+      <p:nvGrpSpPr>
+        <p:cNvPr id="1" name=""/>
+        <p:cNvGrpSpPr/>
+        <p:nvPr/>
+      </p:nvGrpSpPr>
+      <p:grpSpPr>
+        <a:xfrm>
+          <a:off x="0" y="0"/>
+          <a:ext cx="0" cy="0"/>
+          <a:chOff x="0" y="0"/>
+          <a:chExt cx="0" cy="0"/>
+        </a:xfrm>
+      </p:grpSpPr>
+      <p:pic>
+        <p:nvPicPr>
+          <p:cNvPr id="2" name="Picture 1" descr="UC16_ChallengeTrainer_Activity.png"/>
+          <p:cNvPicPr>
+            <a:picLocks noChangeAspect="1"/>
+          </p:cNvPicPr>
+          <p:nvPr/>
+        </p:nvPicPr>
+        <p:blipFill>
+          <a:blip r:embed="rId2"/>
+          <a:stretch>
+            <a:fillRect/>
+          </a:stretch>
+        </p:blipFill>
+        <p:spPr>
+          <a:xfrm>
+            <a:off x="2037821" y="914400"/>
+            <a:ext cx="5068358" cy="5394960"/>
+          </a:xfrm>
+          <a:prstGeom prst="rect">
+            <a:avLst/>
+          </a:prstGeom>
+        </p:spPr>
+      </p:pic>
+    </p:spTree>
+  </p:cSld>
+  <p:clrMapOvr>
+    <a:masterClrMapping/>
+  </p:clrMapOvr>
+</p:sld>
+</file>
+
+<file path=ppt/slides/slide68.xml><?xml version="1.0" encoding="utf-8"?>
+<p:sld xmlns:a="http://schemas.openxmlformats.org/drawingml/2006/main" xmlns:r="http://schemas.openxmlformats.org/officeDocument/2006/relationships" xmlns:p="http://schemas.openxmlformats.org/presentationml/2006/main">
+  <p:cSld>
+    <p:spTree>
+      <p:nvGrpSpPr>
+        <p:cNvPr id="1" name=""/>
+        <p:cNvGrpSpPr/>
+        <p:nvPr/>
+      </p:nvGrpSpPr>
+      <p:grpSpPr>
+        <a:xfrm>
+          <a:off x="0" y="0"/>
+          <a:ext cx="0" cy="0"/>
+          <a:chOff x="0" y="0"/>
+          <a:chExt cx="0" cy="0"/>
+        </a:xfrm>
+      </p:grpSpPr>
+      <p:pic>
+        <p:nvPicPr>
+          <p:cNvPr id="2" name="Picture 1" descr="UC16_ChallengeTrainer_Sequence.png"/>
+          <p:cNvPicPr>
+            <a:picLocks noChangeAspect="1"/>
+          </p:cNvPicPr>
+          <p:nvPr/>
+        </p:nvPicPr>
+        <p:blipFill>
+          <a:blip r:embed="rId2"/>
+          <a:stretch>
+            <a:fillRect/>
+          </a:stretch>
+        </p:blipFill>
+        <p:spPr>
+          <a:xfrm>
+            <a:off x="548640" y="964848"/>
+            <a:ext cx="8046720" cy="5294063"/>
+          </a:xfrm>
+          <a:prstGeom prst="rect">
+            <a:avLst/>
+          </a:prstGeom>
+        </p:spPr>
+      </p:pic>
+    </p:spTree>
+  </p:cSld>
+  <p:clrMapOvr>
+    <a:masterClrMapping/>
+  </p:clrMapOvr>
+</p:sld>
+</file>
+
+<file path=ppt/slides/slide69.xml><?xml version="1.0" encoding="utf-8"?>
+<p:sld xmlns:a="http://schemas.openxmlformats.org/drawingml/2006/main" xmlns:r="http://schemas.openxmlformats.org/officeDocument/2006/relationships" xmlns:p="http://schemas.openxmlformats.org/presentationml/2006/main">
+  <p:cSld>
+    <p:spTree>
+      <p:nvGrpSpPr>
+        <p:cNvPr id="1" name=""/>
+        <p:cNvGrpSpPr/>
+        <p:nvPr/>
+      </p:nvGrpSpPr>
+      <p:grpSpPr>
+        <a:xfrm>
+          <a:off x="0" y="0"/>
+          <a:ext cx="0" cy="0"/>
+          <a:chOff x="0" y="0"/>
+          <a:chExt cx="0" cy="0"/>
+        </a:xfrm>
+      </p:grpSpPr>
+      <p:pic>
+        <p:nvPicPr>
+          <p:cNvPr id="2" name="Picture 1" descr="UC16_ChallengeTrainer_TestCases.png"/>
+          <p:cNvPicPr>
+            <a:picLocks noChangeAspect="1"/>
+          </p:cNvPicPr>
+          <p:nvPr/>
+        </p:nvPicPr>
+        <p:blipFill>
+          <a:blip r:embed="rId2"/>
+          <a:stretch>
+            <a:fillRect/>
+          </a:stretch>
+        </p:blipFill>
+        <p:spPr>
+          <a:xfrm>
+            <a:off x="548640" y="1704975"/>
+            <a:ext cx="8046719" cy="3813809"/>
+          </a:xfrm>
+          <a:prstGeom prst="rect">
+            <a:avLst/>
+          </a:prstGeom>
+        </p:spPr>
+      </p:pic>
+    </p:spTree>
+  </p:cSld>
+  <p:clrMapOvr>
+    <a:masterClrMapping/>
+  </p:clrMapOvr>
+</p:sld>
+</file>
+
+<file path=ppt/slides/slide7.xml><?xml version="1.0" encoding="utf-8"?>
+<p:sld xmlns:a="http://schemas.openxmlformats.org/drawingml/2006/main" xmlns:r="http://schemas.openxmlformats.org/officeDocument/2006/relationships" xmlns:p="http://schemas.openxmlformats.org/presentationml/2006/main">
+  <p:cSld>
+    <p:spTree>
+      <p:nvGrpSpPr>
+        <p:cNvPr id="1" name=""/>
+        <p:cNvGrpSpPr/>
+        <p:nvPr/>
+      </p:nvGrpSpPr>
+      <p:grpSpPr>
+        <a:xfrm>
+          <a:off x="0" y="0"/>
+          <a:ext cx="0" cy="0"/>
+          <a:chOff x="0" y="0"/>
+          <a:chExt cx="0" cy="0"/>
+        </a:xfrm>
+      </p:grpSpPr>
       <p:pic>
         <p:nvPicPr>
           <p:cNvPr id="2" name="Picture 1" descr="UC1_Login_Activity.png"/>
@@ -5084,436 +6786,513 @@
 </p:sld>
 </file>
 
-<file path=ppt/slides/slide50.xml><?xml version="1.0" encoding="utf-8"?>
-<p:sld xmlns:a="http://schemas.openxmlformats.org/drawingml/2006/main" xmlns:p="http://schemas.openxmlformats.org/presentationml/2006/main" xmlns:r="http://schemas.openxmlformats.org/officeDocument/2006/relationships">
-  <p:cSld>
-    <p:spTree>
-      <p:nvGrpSpPr>
-        <p:cNvPr id="1" name=""/>
-        <p:cNvGrpSpPr/>
-        <p:nvPr/>
-      </p:nvGrpSpPr>
-      <p:grpSpPr/>
-      <p:pic>
-        <p:nvPicPr>
-          <p:cNvPr id="2" name="Picture 1" descr="UC12_LevelUp_Sequence.png"/>
-          <p:cNvPicPr>
-            <a:picLocks noChangeAspect="1"/>
-          </p:cNvPicPr>
-          <p:nvPr/>
-        </p:nvPicPr>
-        <p:blipFill>
-          <a:blip r:embed="rId2"/>
-          <a:stretch>
-            <a:fillRect/>
-          </a:stretch>
-        </p:blipFill>
-        <p:spPr>
-          <a:xfrm>
-            <a:off x="1065950" y="914400"/>
-            <a:ext cx="7012100" cy="5394960"/>
-          </a:xfrm>
-          <a:prstGeom prst="rect">
-            <a:avLst/>
-          </a:prstGeom>
-        </p:spPr>
-      </p:pic>
-    </p:spTree>
-  </p:cSld>
-  <p:clrMapOvr>
-    <a:masterClrMapping/>
-  </p:clrMapOvr>
-</p:sld>
-</file>
-
-<file path=ppt/slides/slide51.xml><?xml version="1.0" encoding="utf-8"?>
-<p:sld xmlns:a="http://schemas.openxmlformats.org/drawingml/2006/main" xmlns:p="http://schemas.openxmlformats.org/presentationml/2006/main" xmlns:r="http://schemas.openxmlformats.org/officeDocument/2006/relationships">
-  <p:cSld>
-    <p:spTree>
-      <p:nvGrpSpPr>
-        <p:cNvPr id="1" name=""/>
-        <p:cNvGrpSpPr/>
-        <p:nvPr/>
-      </p:nvGrpSpPr>
-      <p:grpSpPr/>
-      <p:pic>
-        <p:nvPicPr>
-          <p:cNvPr id="2" name="Picture 1" descr="UC12_LevelUp_TestCases.png"/>
-          <p:cNvPicPr>
-            <a:picLocks noChangeAspect="1"/>
-          </p:cNvPicPr>
-          <p:nvPr/>
-        </p:nvPicPr>
-        <p:blipFill>
-          <a:blip r:embed="rId2"/>
-          <a:stretch>
-            <a:fillRect/>
-          </a:stretch>
-        </p:blipFill>
-        <p:spPr>
-          <a:xfrm>
-            <a:off x="548640" y="2166499"/>
-            <a:ext cx="8046720" cy="2890761"/>
-          </a:xfrm>
-          <a:prstGeom prst="rect">
-            <a:avLst/>
-          </a:prstGeom>
-        </p:spPr>
-      </p:pic>
-    </p:spTree>
-  </p:cSld>
-  <p:clrMapOvr>
-    <a:masterClrMapping/>
-  </p:clrMapOvr>
-</p:sld>
-</file>
-
-<file path=ppt/slides/slide52.xml><?xml version="1.0" encoding="utf-8"?>
-<p:sld xmlns:a="http://schemas.openxmlformats.org/drawingml/2006/main" xmlns:p="http://schemas.openxmlformats.org/presentationml/2006/main" xmlns:r="http://schemas.openxmlformats.org/officeDocument/2006/relationships">
-  <p:cSld>
-    <p:spTree>
-      <p:nvGrpSpPr>
-        <p:cNvPr id="1" name=""/>
-        <p:cNvGrpSpPr/>
-        <p:nvPr/>
-      </p:nvGrpSpPr>
-      <p:grpSpPr/>
-      <p:pic>
-        <p:nvPicPr>
-          <p:cNvPr id="2" name="Picture 1" descr="UC13_HealTeam_Description.png"/>
-          <p:cNvPicPr>
-            <a:picLocks noChangeAspect="1"/>
-          </p:cNvPicPr>
-          <p:nvPr/>
-        </p:nvPicPr>
-        <p:blipFill>
-          <a:blip r:embed="rId2"/>
-          <a:stretch>
-            <a:fillRect/>
-          </a:stretch>
-        </p:blipFill>
-        <p:spPr>
-          <a:xfrm>
-            <a:off x="1524000" y="1092517"/>
-            <a:ext cx="6096000" cy="5038725"/>
-          </a:xfrm>
-          <a:prstGeom prst="rect">
-            <a:avLst/>
-          </a:prstGeom>
-        </p:spPr>
-      </p:pic>
-    </p:spTree>
-  </p:cSld>
-  <p:clrMapOvr>
-    <a:masterClrMapping/>
-  </p:clrMapOvr>
-</p:sld>
-</file>
-
-<file path=ppt/slides/slide53.xml><?xml version="1.0" encoding="utf-8"?>
-<p:sld xmlns:a="http://schemas.openxmlformats.org/drawingml/2006/main" xmlns:p="http://schemas.openxmlformats.org/presentationml/2006/main" xmlns:r="http://schemas.openxmlformats.org/officeDocument/2006/relationships">
-  <p:cSld>
-    <p:spTree>
-      <p:nvGrpSpPr>
-        <p:cNvPr id="1" name=""/>
-        <p:cNvGrpSpPr/>
-        <p:nvPr/>
-      </p:nvGrpSpPr>
-      <p:grpSpPr/>
-      <p:pic>
-        <p:nvPicPr>
-          <p:cNvPr id="2" name="Picture 1" descr="UC13_HealTeam_Activity.png"/>
-          <p:cNvPicPr>
-            <a:picLocks noChangeAspect="1"/>
-          </p:cNvPicPr>
-          <p:nvPr/>
-        </p:nvPicPr>
-        <p:blipFill>
-          <a:blip r:embed="rId2"/>
-          <a:stretch>
-            <a:fillRect/>
-          </a:stretch>
-        </p:blipFill>
-        <p:spPr>
-          <a:xfrm>
-            <a:off x="2876550" y="1044892"/>
-            <a:ext cx="3390900" cy="5133975"/>
-          </a:xfrm>
-          <a:prstGeom prst="rect">
-            <a:avLst/>
-          </a:prstGeom>
-        </p:spPr>
-      </p:pic>
-    </p:spTree>
-  </p:cSld>
-  <p:clrMapOvr>
-    <a:masterClrMapping/>
-  </p:clrMapOvr>
-</p:sld>
-</file>
-
-<file path=ppt/slides/slide54.xml><?xml version="1.0" encoding="utf-8"?>
-<p:sld xmlns:a="http://schemas.openxmlformats.org/drawingml/2006/main" xmlns:p="http://schemas.openxmlformats.org/presentationml/2006/main" xmlns:r="http://schemas.openxmlformats.org/officeDocument/2006/relationships">
-  <p:cSld>
-    <p:spTree>
-      <p:nvGrpSpPr>
-        <p:cNvPr id="1" name=""/>
-        <p:cNvGrpSpPr/>
-        <p:nvPr/>
-      </p:nvGrpSpPr>
-      <p:grpSpPr/>
-      <p:pic>
-        <p:nvPicPr>
-          <p:cNvPr id="2" name="Picture 1" descr="UC13_HealTeam_Sequence.png"/>
-          <p:cNvPicPr>
-            <a:picLocks noChangeAspect="1"/>
-          </p:cNvPicPr>
-          <p:nvPr/>
-        </p:nvPicPr>
-        <p:blipFill>
-          <a:blip r:embed="rId2"/>
-          <a:stretch>
-            <a:fillRect/>
-          </a:stretch>
-        </p:blipFill>
-        <p:spPr>
-          <a:xfrm>
-            <a:off x="728662" y="1940242"/>
-            <a:ext cx="7686675" cy="3343275"/>
-          </a:xfrm>
-          <a:prstGeom prst="rect">
-            <a:avLst/>
-          </a:prstGeom>
-        </p:spPr>
-      </p:pic>
-    </p:spTree>
-  </p:cSld>
-  <p:clrMapOvr>
-    <a:masterClrMapping/>
-  </p:clrMapOvr>
-</p:sld>
-</file>
-
-<file path=ppt/slides/slide55.xml><?xml version="1.0" encoding="utf-8"?>
-<p:sld xmlns:a="http://schemas.openxmlformats.org/drawingml/2006/main" xmlns:p="http://schemas.openxmlformats.org/presentationml/2006/main" xmlns:r="http://schemas.openxmlformats.org/officeDocument/2006/relationships">
-  <p:cSld>
-    <p:spTree>
-      <p:nvGrpSpPr>
-        <p:cNvPr id="1" name=""/>
-        <p:cNvGrpSpPr/>
-        <p:nvPr/>
-      </p:nvGrpSpPr>
-      <p:grpSpPr/>
-      <p:pic>
-        <p:nvPicPr>
-          <p:cNvPr id="2" name="Picture 1" descr="UC13_HealTeam_TestCases.png"/>
-          <p:cNvPicPr>
-            <a:picLocks noChangeAspect="1"/>
-          </p:cNvPicPr>
-          <p:nvPr/>
-        </p:nvPicPr>
-        <p:blipFill>
-          <a:blip r:embed="rId2"/>
-          <a:stretch>
-            <a:fillRect/>
-          </a:stretch>
-        </p:blipFill>
-        <p:spPr>
-          <a:xfrm>
-            <a:off x="548640" y="2214466"/>
-            <a:ext cx="8046720" cy="2794827"/>
-          </a:xfrm>
-          <a:prstGeom prst="rect">
-            <a:avLst/>
-          </a:prstGeom>
-        </p:spPr>
-      </p:pic>
-    </p:spTree>
-  </p:cSld>
-  <p:clrMapOvr>
-    <a:masterClrMapping/>
-  </p:clrMapOvr>
-</p:sld>
-</file>
-
-<file path=ppt/slides/slide56.xml><?xml version="1.0" encoding="utf-8"?>
-<p:sld xmlns:a="http://schemas.openxmlformats.org/drawingml/2006/main" xmlns:p="http://schemas.openxmlformats.org/presentationml/2006/main" xmlns:r="http://schemas.openxmlformats.org/officeDocument/2006/relationships">
-  <p:cSld>
-    <p:spTree>
-      <p:nvGrpSpPr>
-        <p:cNvPr id="1" name=""/>
-        <p:cNvGrpSpPr/>
-        <p:nvPr/>
-      </p:nvGrpSpPr>
-      <p:grpSpPr/>
-      <p:pic>
-        <p:nvPicPr>
-          <p:cNvPr id="2" name="Picture 1" descr="UC14_ChallengeGym_Description.png"/>
-          <p:cNvPicPr>
-            <a:picLocks noChangeAspect="1"/>
-          </p:cNvPicPr>
-          <p:nvPr/>
-        </p:nvPicPr>
-        <p:blipFill>
-          <a:blip r:embed="rId2"/>
-          <a:stretch>
-            <a:fillRect/>
-          </a:stretch>
-        </p:blipFill>
-        <p:spPr>
-          <a:xfrm>
-            <a:off x="1480558" y="914400"/>
-            <a:ext cx="6182883" cy="5394960"/>
-          </a:xfrm>
-          <a:prstGeom prst="rect">
-            <a:avLst/>
-          </a:prstGeom>
-        </p:spPr>
-      </p:pic>
-    </p:spTree>
-  </p:cSld>
-  <p:clrMapOvr>
-    <a:masterClrMapping/>
-  </p:clrMapOvr>
-</p:sld>
-</file>
-
-<file path=ppt/slides/slide57.xml><?xml version="1.0" encoding="utf-8"?>
-<p:sld xmlns:a="http://schemas.openxmlformats.org/drawingml/2006/main" xmlns:p="http://schemas.openxmlformats.org/presentationml/2006/main" xmlns:r="http://schemas.openxmlformats.org/officeDocument/2006/relationships">
-  <p:cSld>
-    <p:spTree>
-      <p:nvGrpSpPr>
-        <p:cNvPr id="1" name=""/>
-        <p:cNvGrpSpPr/>
-        <p:nvPr/>
-      </p:nvGrpSpPr>
-      <p:grpSpPr/>
-      <p:pic>
-        <p:nvPicPr>
-          <p:cNvPr id="2" name="Picture 1" descr="UC14_ChallengeGym_Activity.png"/>
-          <p:cNvPicPr>
-            <a:picLocks noChangeAspect="1"/>
-          </p:cNvPicPr>
-          <p:nvPr/>
-        </p:nvPicPr>
-        <p:blipFill>
-          <a:blip r:embed="rId2"/>
-          <a:stretch>
-            <a:fillRect/>
-          </a:stretch>
-        </p:blipFill>
-        <p:spPr>
-          <a:xfrm>
-            <a:off x="2504723" y="914400"/>
-            <a:ext cx="4134553" cy="5394960"/>
-          </a:xfrm>
-          <a:prstGeom prst="rect">
-            <a:avLst/>
-          </a:prstGeom>
-        </p:spPr>
-      </p:pic>
-    </p:spTree>
-  </p:cSld>
-  <p:clrMapOvr>
-    <a:masterClrMapping/>
-  </p:clrMapOvr>
-</p:sld>
-</file>
-
-<file path=ppt/slides/slide58.xml><?xml version="1.0" encoding="utf-8"?>
-<p:sld xmlns:a="http://schemas.openxmlformats.org/drawingml/2006/main" xmlns:p="http://schemas.openxmlformats.org/presentationml/2006/main" xmlns:r="http://schemas.openxmlformats.org/officeDocument/2006/relationships">
-  <p:cSld>
-    <p:spTree>
-      <p:nvGrpSpPr>
-        <p:cNvPr id="1" name=""/>
-        <p:cNvGrpSpPr/>
-        <p:nvPr/>
-      </p:nvGrpSpPr>
-      <p:grpSpPr/>
-      <p:pic>
-        <p:nvPicPr>
-          <p:cNvPr id="2" name="Picture 1" descr="UC14_ChallengeGym_Sequence.png"/>
-          <p:cNvPicPr>
-            <a:picLocks noChangeAspect="1"/>
-          </p:cNvPicPr>
-          <p:nvPr/>
-        </p:nvPicPr>
-        <p:blipFill>
-          <a:blip r:embed="rId2"/>
-          <a:stretch>
-            <a:fillRect/>
-          </a:stretch>
-        </p:blipFill>
-        <p:spPr>
-          <a:xfrm>
-            <a:off x="1146490" y="914400"/>
-            <a:ext cx="6851019" cy="5394960"/>
-          </a:xfrm>
-          <a:prstGeom prst="rect">
-            <a:avLst/>
-          </a:prstGeom>
-        </p:spPr>
-      </p:pic>
-    </p:spTree>
-  </p:cSld>
-  <p:clrMapOvr>
-    <a:masterClrMapping/>
-  </p:clrMapOvr>
-</p:sld>
-</file>
-
-<file path=ppt/slides/slide59.xml><?xml version="1.0" encoding="utf-8"?>
-<p:sld xmlns:a="http://schemas.openxmlformats.org/drawingml/2006/main" xmlns:p="http://schemas.openxmlformats.org/presentationml/2006/main" xmlns:r="http://schemas.openxmlformats.org/officeDocument/2006/relationships">
-  <p:cSld>
-    <p:spTree>
-      <p:nvGrpSpPr>
-        <p:cNvPr id="1" name=""/>
-        <p:cNvGrpSpPr/>
-        <p:nvPr/>
-      </p:nvGrpSpPr>
-      <p:grpSpPr/>
-      <p:pic>
-        <p:nvPicPr>
-          <p:cNvPr id="2" name="Picture 1" descr="UC14_ChallengeGym_TestCases.png"/>
-          <p:cNvPicPr>
-            <a:picLocks noChangeAspect="1"/>
-          </p:cNvPicPr>
-          <p:nvPr/>
-        </p:nvPicPr>
-        <p:blipFill>
-          <a:blip r:embed="rId2"/>
-          <a:stretch>
-            <a:fillRect/>
-          </a:stretch>
-        </p:blipFill>
-        <p:spPr>
-          <a:xfrm>
-            <a:off x="548640" y="1952943"/>
-            <a:ext cx="8046719" cy="3317874"/>
-          </a:xfrm>
-          <a:prstGeom prst="rect">
-            <a:avLst/>
-          </a:prstGeom>
-        </p:spPr>
-      </p:pic>
-    </p:spTree>
-  </p:cSld>
-  <p:clrMapOvr>
-    <a:masterClrMapping/>
-  </p:clrMapOvr>
-</p:sld>
-</file>
-
-<file path=ppt/slides/slide6.xml><?xml version="1.0" encoding="utf-8"?>
-<p:sld xmlns:a="http://schemas.openxmlformats.org/drawingml/2006/main" xmlns:p="http://schemas.openxmlformats.org/presentationml/2006/main" xmlns:r="http://schemas.openxmlformats.org/officeDocument/2006/relationships">
-  <p:cSld>
-    <p:spTree>
-      <p:nvGrpSpPr>
-        <p:cNvPr id="1" name=""/>
-        <p:cNvGrpSpPr/>
-        <p:nvPr/>
-      </p:nvGrpSpPr>
-      <p:grpSpPr/>
+<file path=ppt/slides/slide70.xml><?xml version="1.0" encoding="utf-8"?>
+<p:sld xmlns:a="http://schemas.openxmlformats.org/drawingml/2006/main" xmlns:r="http://schemas.openxmlformats.org/officeDocument/2006/relationships" xmlns:p="http://schemas.openxmlformats.org/presentationml/2006/main">
+  <p:cSld>
+    <p:spTree>
+      <p:nvGrpSpPr>
+        <p:cNvPr id="1" name=""/>
+        <p:cNvGrpSpPr/>
+        <p:nvPr/>
+      </p:nvGrpSpPr>
+      <p:grpSpPr>
+        <a:xfrm>
+          <a:off x="0" y="0"/>
+          <a:ext cx="0" cy="0"/>
+          <a:chOff x="0" y="0"/>
+          <a:chExt cx="0" cy="0"/>
+        </a:xfrm>
+      </p:grpSpPr>
+      <p:pic>
+        <p:nvPicPr>
+          <p:cNvPr id="2" name="Picture 1" descr="UC17_SelectStarter_Description.png"/>
+          <p:cNvPicPr>
+            <a:picLocks noChangeAspect="1"/>
+          </p:cNvPicPr>
+          <p:nvPr/>
+        </p:nvPicPr>
+        <p:blipFill>
+          <a:blip r:embed="rId2"/>
+          <a:stretch>
+            <a:fillRect/>
+          </a:stretch>
+        </p:blipFill>
+        <p:spPr>
+          <a:xfrm>
+            <a:off x="1366837" y="1011555"/>
+            <a:ext cx="6410325" cy="5200650"/>
+          </a:xfrm>
+          <a:prstGeom prst="rect">
+            <a:avLst/>
+          </a:prstGeom>
+        </p:spPr>
+      </p:pic>
+    </p:spTree>
+  </p:cSld>
+  <p:clrMapOvr>
+    <a:masterClrMapping/>
+  </p:clrMapOvr>
+</p:sld>
+</file>
+
+<file path=ppt/slides/slide71.xml><?xml version="1.0" encoding="utf-8"?>
+<p:sld xmlns:a="http://schemas.openxmlformats.org/drawingml/2006/main" xmlns:r="http://schemas.openxmlformats.org/officeDocument/2006/relationships" xmlns:p="http://schemas.openxmlformats.org/presentationml/2006/main">
+  <p:cSld>
+    <p:spTree>
+      <p:nvGrpSpPr>
+        <p:cNvPr id="1" name=""/>
+        <p:cNvGrpSpPr/>
+        <p:nvPr/>
+      </p:nvGrpSpPr>
+      <p:grpSpPr>
+        <a:xfrm>
+          <a:off x="0" y="0"/>
+          <a:ext cx="0" cy="0"/>
+          <a:chOff x="0" y="0"/>
+          <a:chExt cx="0" cy="0"/>
+        </a:xfrm>
+      </p:grpSpPr>
+      <p:pic>
+        <p:nvPicPr>
+          <p:cNvPr id="2" name="Picture 1" descr="UC17_SelectStarter_Activity.png"/>
+          <p:cNvPicPr>
+            <a:picLocks noChangeAspect="1"/>
+          </p:cNvPicPr>
+          <p:nvPr/>
+        </p:nvPicPr>
+        <p:blipFill>
+          <a:blip r:embed="rId2"/>
+          <a:stretch>
+            <a:fillRect/>
+          </a:stretch>
+        </p:blipFill>
+        <p:spPr>
+          <a:xfrm>
+            <a:off x="2566730" y="914400"/>
+            <a:ext cx="4010539" cy="5394960"/>
+          </a:xfrm>
+          <a:prstGeom prst="rect">
+            <a:avLst/>
+          </a:prstGeom>
+        </p:spPr>
+      </p:pic>
+    </p:spTree>
+  </p:cSld>
+  <p:clrMapOvr>
+    <a:masterClrMapping/>
+  </p:clrMapOvr>
+</p:sld>
+</file>
+
+<file path=ppt/slides/slide72.xml><?xml version="1.0" encoding="utf-8"?>
+<p:sld xmlns:a="http://schemas.openxmlformats.org/drawingml/2006/main" xmlns:r="http://schemas.openxmlformats.org/officeDocument/2006/relationships" xmlns:p="http://schemas.openxmlformats.org/presentationml/2006/main">
+  <p:cSld>
+    <p:spTree>
+      <p:nvGrpSpPr>
+        <p:cNvPr id="1" name=""/>
+        <p:cNvGrpSpPr/>
+        <p:nvPr/>
+      </p:nvGrpSpPr>
+      <p:grpSpPr>
+        <a:xfrm>
+          <a:off x="0" y="0"/>
+          <a:ext cx="0" cy="0"/>
+          <a:chOff x="0" y="0"/>
+          <a:chExt cx="0" cy="0"/>
+        </a:xfrm>
+      </p:grpSpPr>
+      <p:pic>
+        <p:nvPicPr>
+          <p:cNvPr id="2" name="Picture 1" descr="UC17_SelectStarter_Sequence.png"/>
+          <p:cNvPicPr>
+            <a:picLocks noChangeAspect="1"/>
+          </p:cNvPicPr>
+          <p:nvPr/>
+        </p:nvPicPr>
+        <p:blipFill>
+          <a:blip r:embed="rId2"/>
+          <a:stretch>
+            <a:fillRect/>
+          </a:stretch>
+        </p:blipFill>
+        <p:spPr>
+          <a:xfrm>
+            <a:off x="548640" y="1601816"/>
+            <a:ext cx="8046720" cy="4020128"/>
+          </a:xfrm>
+          <a:prstGeom prst="rect">
+            <a:avLst/>
+          </a:prstGeom>
+        </p:spPr>
+      </p:pic>
+    </p:spTree>
+  </p:cSld>
+  <p:clrMapOvr>
+    <a:masterClrMapping/>
+  </p:clrMapOvr>
+</p:sld>
+</file>
+
+<file path=ppt/slides/slide73.xml><?xml version="1.0" encoding="utf-8"?>
+<p:sld xmlns:a="http://schemas.openxmlformats.org/drawingml/2006/main" xmlns:r="http://schemas.openxmlformats.org/officeDocument/2006/relationships" xmlns:p="http://schemas.openxmlformats.org/presentationml/2006/main">
+  <p:cSld>
+    <p:spTree>
+      <p:nvGrpSpPr>
+        <p:cNvPr id="1" name=""/>
+        <p:cNvGrpSpPr/>
+        <p:nvPr/>
+      </p:nvGrpSpPr>
+      <p:grpSpPr>
+        <a:xfrm>
+          <a:off x="0" y="0"/>
+          <a:ext cx="0" cy="0"/>
+          <a:chOff x="0" y="0"/>
+          <a:chExt cx="0" cy="0"/>
+        </a:xfrm>
+      </p:grpSpPr>
+      <p:pic>
+        <p:nvPicPr>
+          <p:cNvPr id="2" name="Picture 1" descr="UC17_SelectStarter_TestCases.png"/>
+          <p:cNvPicPr>
+            <a:picLocks noChangeAspect="1"/>
+          </p:cNvPicPr>
+          <p:nvPr/>
+        </p:nvPicPr>
+        <p:blipFill>
+          <a:blip r:embed="rId2"/>
+          <a:stretch>
+            <a:fillRect/>
+          </a:stretch>
+        </p:blipFill>
+        <p:spPr>
+          <a:xfrm>
+            <a:off x="548640" y="1911617"/>
+            <a:ext cx="8046719" cy="3400526"/>
+          </a:xfrm>
+          <a:prstGeom prst="rect">
+            <a:avLst/>
+          </a:prstGeom>
+        </p:spPr>
+      </p:pic>
+    </p:spTree>
+  </p:cSld>
+  <p:clrMapOvr>
+    <a:masterClrMapping/>
+  </p:clrMapOvr>
+</p:sld>
+</file>
+
+<file path=ppt/slides/slide74.xml><?xml version="1.0" encoding="utf-8"?>
+<p:sld xmlns:a="http://schemas.openxmlformats.org/drawingml/2006/main" xmlns:r="http://schemas.openxmlformats.org/officeDocument/2006/relationships" xmlns:p="http://schemas.openxmlformats.org/presentationml/2006/main">
+  <p:cSld>
+    <p:spTree>
+      <p:nvGrpSpPr>
+        <p:cNvPr id="1" name=""/>
+        <p:cNvGrpSpPr/>
+        <p:nvPr/>
+      </p:nvGrpSpPr>
+      <p:grpSpPr>
+        <a:xfrm>
+          <a:off x="0" y="0"/>
+          <a:ext cx="0" cy="0"/>
+          <a:chOff x="0" y="0"/>
+          <a:chExt cx="0" cy="0"/>
+        </a:xfrm>
+      </p:grpSpPr>
+      <p:pic>
+        <p:nvPicPr>
+          <p:cNvPr id="2" name="Picture 1" descr="UC18_Register_Description.png"/>
+          <p:cNvPicPr>
+            <a:picLocks noChangeAspect="1"/>
+          </p:cNvPicPr>
+          <p:nvPr/>
+        </p:nvPicPr>
+        <p:blipFill>
+          <a:blip r:embed="rId2"/>
+          <a:stretch>
+            <a:fillRect/>
+          </a:stretch>
+        </p:blipFill>
+        <p:spPr>
+          <a:xfrm>
+            <a:off x="2086549" y="914400"/>
+            <a:ext cx="4970902" cy="5394960"/>
+          </a:xfrm>
+          <a:prstGeom prst="rect">
+            <a:avLst/>
+          </a:prstGeom>
+        </p:spPr>
+      </p:pic>
+    </p:spTree>
+  </p:cSld>
+  <p:clrMapOvr>
+    <a:masterClrMapping/>
+  </p:clrMapOvr>
+</p:sld>
+</file>
+
+<file path=ppt/slides/slide75.xml><?xml version="1.0" encoding="utf-8"?>
+<p:sld xmlns:a="http://schemas.openxmlformats.org/drawingml/2006/main" xmlns:r="http://schemas.openxmlformats.org/officeDocument/2006/relationships" xmlns:p="http://schemas.openxmlformats.org/presentationml/2006/main">
+  <p:cSld>
+    <p:spTree>
+      <p:nvGrpSpPr>
+        <p:cNvPr id="1" name=""/>
+        <p:cNvGrpSpPr/>
+        <p:nvPr/>
+      </p:nvGrpSpPr>
+      <p:grpSpPr>
+        <a:xfrm>
+          <a:off x="0" y="0"/>
+          <a:ext cx="0" cy="0"/>
+          <a:chOff x="0" y="0"/>
+          <a:chExt cx="0" cy="0"/>
+        </a:xfrm>
+      </p:grpSpPr>
+      <p:pic>
+        <p:nvPicPr>
+          <p:cNvPr id="2" name="Picture 1" descr="UC18_Register_Activity.png"/>
+          <p:cNvPicPr>
+            <a:picLocks noChangeAspect="1"/>
+          </p:cNvPicPr>
+          <p:nvPr/>
+        </p:nvPicPr>
+        <p:blipFill>
+          <a:blip r:embed="rId2"/>
+          <a:stretch>
+            <a:fillRect/>
+          </a:stretch>
+        </p:blipFill>
+        <p:spPr>
+          <a:xfrm>
+            <a:off x="2369976" y="914400"/>
+            <a:ext cx="4404048" cy="5394960"/>
+          </a:xfrm>
+          <a:prstGeom prst="rect">
+            <a:avLst/>
+          </a:prstGeom>
+        </p:spPr>
+      </p:pic>
+    </p:spTree>
+  </p:cSld>
+  <p:clrMapOvr>
+    <a:masterClrMapping/>
+  </p:clrMapOvr>
+</p:sld>
+</file>
+
+<file path=ppt/slides/slide76.xml><?xml version="1.0" encoding="utf-8"?>
+<p:sld xmlns:a="http://schemas.openxmlformats.org/drawingml/2006/main" xmlns:r="http://schemas.openxmlformats.org/officeDocument/2006/relationships" xmlns:p="http://schemas.openxmlformats.org/presentationml/2006/main">
+  <p:cSld>
+    <p:spTree>
+      <p:nvGrpSpPr>
+        <p:cNvPr id="1" name=""/>
+        <p:cNvGrpSpPr/>
+        <p:nvPr/>
+      </p:nvGrpSpPr>
+      <p:grpSpPr>
+        <a:xfrm>
+          <a:off x="0" y="0"/>
+          <a:ext cx="0" cy="0"/>
+          <a:chOff x="0" y="0"/>
+          <a:chExt cx="0" cy="0"/>
+        </a:xfrm>
+      </p:grpSpPr>
+      <p:pic>
+        <p:nvPicPr>
+          <p:cNvPr id="2" name="Picture 1" descr="UC18_Register_Sequence.png"/>
+          <p:cNvPicPr>
+            <a:picLocks noChangeAspect="1"/>
+          </p:cNvPicPr>
+          <p:nvPr/>
+        </p:nvPicPr>
+        <p:blipFill>
+          <a:blip r:embed="rId2"/>
+          <a:stretch>
+            <a:fillRect/>
+          </a:stretch>
+        </p:blipFill>
+        <p:spPr>
+          <a:xfrm>
+            <a:off x="551933" y="914400"/>
+            <a:ext cx="8040134" cy="5394960"/>
+          </a:xfrm>
+          <a:prstGeom prst="rect">
+            <a:avLst/>
+          </a:prstGeom>
+        </p:spPr>
+      </p:pic>
+    </p:spTree>
+  </p:cSld>
+  <p:clrMapOvr>
+    <a:masterClrMapping/>
+  </p:clrMapOvr>
+</p:sld>
+</file>
+
+<file path=ppt/slides/slide77.xml><?xml version="1.0" encoding="utf-8"?>
+<p:sld xmlns:a="http://schemas.openxmlformats.org/drawingml/2006/main" xmlns:r="http://schemas.openxmlformats.org/officeDocument/2006/relationships" xmlns:p="http://schemas.openxmlformats.org/presentationml/2006/main">
+  <p:cSld>
+    <p:spTree>
+      <p:nvGrpSpPr>
+        <p:cNvPr id="1" name=""/>
+        <p:cNvGrpSpPr/>
+        <p:nvPr/>
+      </p:nvGrpSpPr>
+      <p:grpSpPr>
+        <a:xfrm>
+          <a:off x="0" y="0"/>
+          <a:ext cx="0" cy="0"/>
+          <a:chOff x="0" y="0"/>
+          <a:chExt cx="0" cy="0"/>
+        </a:xfrm>
+      </p:grpSpPr>
+      <p:pic>
+        <p:nvPicPr>
+          <p:cNvPr id="2" name="Picture 1" descr="UC18_Register_TestCases.png"/>
+          <p:cNvPicPr>
+            <a:picLocks noChangeAspect="1"/>
+          </p:cNvPicPr>
+          <p:nvPr/>
+        </p:nvPicPr>
+        <p:blipFill>
+          <a:blip r:embed="rId2"/>
+          <a:stretch>
+            <a:fillRect/>
+          </a:stretch>
+        </p:blipFill>
+        <p:spPr>
+          <a:xfrm>
+            <a:off x="548640" y="1254871"/>
+            <a:ext cx="8046719" cy="4714018"/>
+          </a:xfrm>
+          <a:prstGeom prst="rect">
+            <a:avLst/>
+          </a:prstGeom>
+        </p:spPr>
+      </p:pic>
+    </p:spTree>
+  </p:cSld>
+  <p:clrMapOvr>
+    <a:masterClrMapping/>
+  </p:clrMapOvr>
+</p:sld>
+</file>
+
+<file path=ppt/slides/slide78.xml><?xml version="1.0" encoding="utf-8"?>
+<p:sld xmlns:a="http://schemas.openxmlformats.org/drawingml/2006/main" xmlns:r="http://schemas.openxmlformats.org/officeDocument/2006/relationships" xmlns:p="http://schemas.openxmlformats.org/presentationml/2006/main">
+  <p:cSld>
+    <p:spTree>
+      <p:nvGrpSpPr>
+        <p:cNvPr id="1" name=""/>
+        <p:cNvGrpSpPr/>
+        <p:nvPr/>
+      </p:nvGrpSpPr>
+      <p:grpSpPr>
+        <a:xfrm>
+          <a:off x="0" y="0"/>
+          <a:ext cx="0" cy="0"/>
+          <a:chOff x="0" y="0"/>
+          <a:chExt cx="0" cy="0"/>
+        </a:xfrm>
+      </p:grpSpPr>
+      <p:pic>
+        <p:nvPicPr>
+          <p:cNvPr id="2" name="Picture 1" descr="PokemonDB_TableDesign.png"/>
+          <p:cNvPicPr>
+            <a:picLocks noChangeAspect="1"/>
+          </p:cNvPicPr>
+          <p:nvPr/>
+        </p:nvPicPr>
+        <p:blipFill>
+          <a:blip r:embed="rId2"/>
+          <a:stretch>
+            <a:fillRect/>
+          </a:stretch>
+        </p:blipFill>
+        <p:spPr>
+          <a:xfrm>
+            <a:off x="2965475" y="914400"/>
+            <a:ext cx="3213049" cy="5394960"/>
+          </a:xfrm>
+          <a:prstGeom prst="rect">
+            <a:avLst/>
+          </a:prstGeom>
+        </p:spPr>
+      </p:pic>
+    </p:spTree>
+  </p:cSld>
+  <p:clrMapOvr>
+    <a:masterClrMapping/>
+  </p:clrMapOvr>
+</p:sld>
+</file>
+
+<file path=ppt/slides/slide79.xml><?xml version="1.0" encoding="utf-8"?>
+<p:sld xmlns:a="http://schemas.openxmlformats.org/drawingml/2006/main" xmlns:r="http://schemas.openxmlformats.org/officeDocument/2006/relationships" xmlns:p="http://schemas.openxmlformats.org/presentationml/2006/main">
+  <p:cSld>
+    <p:spTree>
+      <p:nvGrpSpPr>
+        <p:cNvPr id="1" name=""/>
+        <p:cNvGrpSpPr/>
+        <p:nvPr/>
+      </p:nvGrpSpPr>
+      <p:grpSpPr>
+        <a:xfrm>
+          <a:off x="0" y="0"/>
+          <a:ext cx="0" cy="0"/>
+          <a:chOff x="0" y="0"/>
+          <a:chExt cx="0" cy="0"/>
+        </a:xfrm>
+      </p:grpSpPr>
+      <p:pic>
+        <p:nvPicPr>
+          <p:cNvPr id="2" name="Picture 1" descr="Pokemon_ERD.png"/>
+          <p:cNvPicPr>
+            <a:picLocks noChangeAspect="1"/>
+          </p:cNvPicPr>
+          <p:nvPr/>
+        </p:nvPicPr>
+        <p:blipFill>
+          <a:blip r:embed="rId2"/>
+          <a:stretch>
+            <a:fillRect/>
+          </a:stretch>
+        </p:blipFill>
+        <p:spPr>
+          <a:xfrm>
+            <a:off x="1397274" y="914400"/>
+            <a:ext cx="6349452" cy="5394960"/>
+          </a:xfrm>
+          <a:prstGeom prst="rect">
+            <a:avLst/>
+          </a:prstGeom>
+        </p:spPr>
+      </p:pic>
+    </p:spTree>
+  </p:cSld>
+  <p:clrMapOvr>
+    <a:masterClrMapping/>
+  </p:clrMapOvr>
+</p:sld>
+</file>
+
+<file path=ppt/slides/slide8.xml><?xml version="1.0" encoding="utf-8"?>
+<p:sld xmlns:a="http://schemas.openxmlformats.org/drawingml/2006/main" xmlns:r="http://schemas.openxmlformats.org/officeDocument/2006/relationships" xmlns:p="http://schemas.openxmlformats.org/presentationml/2006/main">
+  <p:cSld>
+    <p:spTree>
+      <p:nvGrpSpPr>
+        <p:cNvPr id="1" name=""/>
+        <p:cNvGrpSpPr/>
+        <p:nvPr/>
+      </p:nvGrpSpPr>
+      <p:grpSpPr>
+        <a:xfrm>
+          <a:off x="0" y="0"/>
+          <a:ext cx="0" cy="0"/>
+          <a:chOff x="0" y="0"/>
+          <a:chExt cx="0" cy="0"/>
+        </a:xfrm>
+      </p:grpSpPr>
       <p:pic>
         <p:nvPicPr>
           <p:cNvPr id="2" name="Picture 1" descr="UC1_Login_Sequence.png"/>
@@ -5546,436 +7325,513 @@
 </p:sld>
 </file>
 
-<file path=ppt/slides/slide60.xml><?xml version="1.0" encoding="utf-8"?>
-<p:sld xmlns:a="http://schemas.openxmlformats.org/drawingml/2006/main" xmlns:p="http://schemas.openxmlformats.org/presentationml/2006/main" xmlns:r="http://schemas.openxmlformats.org/officeDocument/2006/relationships">
-  <p:cSld>
-    <p:spTree>
-      <p:nvGrpSpPr>
-        <p:cNvPr id="1" name=""/>
-        <p:cNvGrpSpPr/>
-        <p:nvPr/>
-      </p:nvGrpSpPr>
-      <p:grpSpPr/>
-      <p:pic>
-        <p:nvPicPr>
-          <p:cNvPr id="2" name="Picture 1" descr="UC15_ChallengeLeague_Description.png"/>
-          <p:cNvPicPr>
-            <a:picLocks noChangeAspect="1"/>
-          </p:cNvPicPr>
-          <p:nvPr/>
-        </p:nvPicPr>
-        <p:blipFill>
-          <a:blip r:embed="rId2"/>
-          <a:stretch>
-            <a:fillRect/>
-          </a:stretch>
-        </p:blipFill>
-        <p:spPr>
-          <a:xfrm>
-            <a:off x="1691568" y="914400"/>
-            <a:ext cx="5760864" cy="5394960"/>
-          </a:xfrm>
-          <a:prstGeom prst="rect">
-            <a:avLst/>
-          </a:prstGeom>
-        </p:spPr>
-      </p:pic>
-    </p:spTree>
-  </p:cSld>
-  <p:clrMapOvr>
-    <a:masterClrMapping/>
-  </p:clrMapOvr>
-</p:sld>
-</file>
-
-<file path=ppt/slides/slide61.xml><?xml version="1.0" encoding="utf-8"?>
-<p:sld xmlns:a="http://schemas.openxmlformats.org/drawingml/2006/main" xmlns:p="http://schemas.openxmlformats.org/presentationml/2006/main" xmlns:r="http://schemas.openxmlformats.org/officeDocument/2006/relationships">
-  <p:cSld>
-    <p:spTree>
-      <p:nvGrpSpPr>
-        <p:cNvPr id="1" name=""/>
-        <p:cNvGrpSpPr/>
-        <p:nvPr/>
-      </p:nvGrpSpPr>
-      <p:grpSpPr/>
-      <p:pic>
-        <p:nvPicPr>
-          <p:cNvPr id="2" name="Picture 1" descr="UC15_ChallengePokemonLeague_Activity.png"/>
-          <p:cNvPicPr>
-            <a:picLocks noChangeAspect="1"/>
-          </p:cNvPicPr>
-          <p:nvPr/>
-        </p:nvPicPr>
-        <p:blipFill>
-          <a:blip r:embed="rId2"/>
-          <a:stretch>
-            <a:fillRect/>
-          </a:stretch>
-        </p:blipFill>
-        <p:spPr>
-          <a:xfrm>
-            <a:off x="3024572" y="914400"/>
-            <a:ext cx="3094855" cy="5394960"/>
-          </a:xfrm>
-          <a:prstGeom prst="rect">
-            <a:avLst/>
-          </a:prstGeom>
-        </p:spPr>
-      </p:pic>
-    </p:spTree>
-  </p:cSld>
-  <p:clrMapOvr>
-    <a:masterClrMapping/>
-  </p:clrMapOvr>
-</p:sld>
-</file>
-
-<file path=ppt/slides/slide62.xml><?xml version="1.0" encoding="utf-8"?>
-<p:sld xmlns:a="http://schemas.openxmlformats.org/drawingml/2006/main" xmlns:p="http://schemas.openxmlformats.org/presentationml/2006/main" xmlns:r="http://schemas.openxmlformats.org/officeDocument/2006/relationships">
-  <p:cSld>
-    <p:spTree>
-      <p:nvGrpSpPr>
-        <p:cNvPr id="1" name=""/>
-        <p:cNvGrpSpPr/>
-        <p:nvPr/>
-      </p:nvGrpSpPr>
-      <p:grpSpPr/>
-      <p:pic>
-        <p:nvPicPr>
-          <p:cNvPr id="2" name="Picture 1" descr="UC15_ChallengePokemonLeague_Sequence.png"/>
-          <p:cNvPicPr>
-            <a:picLocks noChangeAspect="1"/>
-          </p:cNvPicPr>
-          <p:nvPr/>
-        </p:nvPicPr>
-        <p:blipFill>
-          <a:blip r:embed="rId2"/>
-          <a:stretch>
-            <a:fillRect/>
-          </a:stretch>
-        </p:blipFill>
-        <p:spPr>
-          <a:xfrm>
-            <a:off x="1477753" y="914400"/>
-            <a:ext cx="6188493" cy="5394960"/>
-          </a:xfrm>
-          <a:prstGeom prst="rect">
-            <a:avLst/>
-          </a:prstGeom>
-        </p:spPr>
-      </p:pic>
-    </p:spTree>
-  </p:cSld>
-  <p:clrMapOvr>
-    <a:masterClrMapping/>
-  </p:clrMapOvr>
-</p:sld>
-</file>
-
-<file path=ppt/slides/slide63.xml><?xml version="1.0" encoding="utf-8"?>
-<p:sld xmlns:a="http://schemas.openxmlformats.org/drawingml/2006/main" xmlns:p="http://schemas.openxmlformats.org/presentationml/2006/main" xmlns:r="http://schemas.openxmlformats.org/officeDocument/2006/relationships">
-  <p:cSld>
-    <p:spTree>
-      <p:nvGrpSpPr>
-        <p:cNvPr id="1" name=""/>
-        <p:cNvGrpSpPr/>
-        <p:nvPr/>
-      </p:nvGrpSpPr>
-      <p:grpSpPr/>
-      <p:pic>
-        <p:nvPicPr>
-          <p:cNvPr id="2" name="Picture 1" descr="UC15_ChallengeLeague_TestCases.png"/>
-          <p:cNvPicPr>
-            <a:picLocks noChangeAspect="1"/>
-          </p:cNvPicPr>
-          <p:nvPr/>
-        </p:nvPicPr>
-        <p:blipFill>
-          <a:blip r:embed="rId2"/>
-          <a:stretch>
-            <a:fillRect/>
-          </a:stretch>
-        </p:blipFill>
-        <p:spPr>
-          <a:xfrm>
-            <a:off x="548640" y="2048299"/>
-            <a:ext cx="8046720" cy="3127161"/>
-          </a:xfrm>
-          <a:prstGeom prst="rect">
-            <a:avLst/>
-          </a:prstGeom>
-        </p:spPr>
-      </p:pic>
-    </p:spTree>
-  </p:cSld>
-  <p:clrMapOvr>
-    <a:masterClrMapping/>
-  </p:clrMapOvr>
-</p:sld>
-</file>
-
-<file path=ppt/slides/slide64.xml><?xml version="1.0" encoding="utf-8"?>
-<p:sld xmlns:a="http://schemas.openxmlformats.org/drawingml/2006/main" xmlns:p="http://schemas.openxmlformats.org/presentationml/2006/main" xmlns:r="http://schemas.openxmlformats.org/officeDocument/2006/relationships">
-  <p:cSld>
-    <p:spTree>
-      <p:nvGrpSpPr>
-        <p:cNvPr id="1" name=""/>
-        <p:cNvGrpSpPr/>
-        <p:nvPr/>
-      </p:nvGrpSpPr>
-      <p:grpSpPr/>
-      <p:pic>
-        <p:nvPicPr>
-          <p:cNvPr id="2" name="Picture 1" descr="UC16_ChallengeTrainer_Description.png"/>
-          <p:cNvPicPr>
-            <a:picLocks noChangeAspect="1"/>
-          </p:cNvPicPr>
-          <p:nvPr/>
-        </p:nvPicPr>
-        <p:blipFill>
-          <a:blip r:embed="rId2"/>
-          <a:stretch>
-            <a:fillRect/>
-          </a:stretch>
-        </p:blipFill>
-        <p:spPr>
-          <a:xfrm>
-            <a:off x="1714500" y="1011555"/>
-            <a:ext cx="5715000" cy="5200650"/>
-          </a:xfrm>
-          <a:prstGeom prst="rect">
-            <a:avLst/>
-          </a:prstGeom>
-        </p:spPr>
-      </p:pic>
-    </p:spTree>
-  </p:cSld>
-  <p:clrMapOvr>
-    <a:masterClrMapping/>
-  </p:clrMapOvr>
-</p:sld>
-</file>
-
-<file path=ppt/slides/slide65.xml><?xml version="1.0" encoding="utf-8"?>
-<p:sld xmlns:a="http://schemas.openxmlformats.org/drawingml/2006/main" xmlns:p="http://schemas.openxmlformats.org/presentationml/2006/main" xmlns:r="http://schemas.openxmlformats.org/officeDocument/2006/relationships">
-  <p:cSld>
-    <p:spTree>
-      <p:nvGrpSpPr>
-        <p:cNvPr id="1" name=""/>
-        <p:cNvGrpSpPr/>
-        <p:nvPr/>
-      </p:nvGrpSpPr>
-      <p:grpSpPr/>
-      <p:pic>
-        <p:nvPicPr>
-          <p:cNvPr id="2" name="Picture 1" descr="UC16_ChallengeTrainer_Activity.png"/>
-          <p:cNvPicPr>
-            <a:picLocks noChangeAspect="1"/>
-          </p:cNvPicPr>
-          <p:nvPr/>
-        </p:nvPicPr>
-        <p:blipFill>
-          <a:blip r:embed="rId2"/>
-          <a:stretch>
-            <a:fillRect/>
-          </a:stretch>
-        </p:blipFill>
-        <p:spPr>
-          <a:xfrm>
-            <a:off x="2037821" y="914400"/>
-            <a:ext cx="5068358" cy="5394960"/>
-          </a:xfrm>
-          <a:prstGeom prst="rect">
-            <a:avLst/>
-          </a:prstGeom>
-        </p:spPr>
-      </p:pic>
-    </p:spTree>
-  </p:cSld>
-  <p:clrMapOvr>
-    <a:masterClrMapping/>
-  </p:clrMapOvr>
-</p:sld>
-</file>
-
-<file path=ppt/slides/slide66.xml><?xml version="1.0" encoding="utf-8"?>
-<p:sld xmlns:a="http://schemas.openxmlformats.org/drawingml/2006/main" xmlns:p="http://schemas.openxmlformats.org/presentationml/2006/main" xmlns:r="http://schemas.openxmlformats.org/officeDocument/2006/relationships">
-  <p:cSld>
-    <p:spTree>
-      <p:nvGrpSpPr>
-        <p:cNvPr id="1" name=""/>
-        <p:cNvGrpSpPr/>
-        <p:nvPr/>
-      </p:nvGrpSpPr>
-      <p:grpSpPr/>
-      <p:pic>
-        <p:nvPicPr>
-          <p:cNvPr id="2" name="Picture 1" descr="UC16_ChallengeTrainer_Sequence.png"/>
-          <p:cNvPicPr>
-            <a:picLocks noChangeAspect="1"/>
-          </p:cNvPicPr>
-          <p:nvPr/>
-        </p:nvPicPr>
-        <p:blipFill>
-          <a:blip r:embed="rId2"/>
-          <a:stretch>
-            <a:fillRect/>
-          </a:stretch>
-        </p:blipFill>
-        <p:spPr>
-          <a:xfrm>
-            <a:off x="548640" y="964848"/>
-            <a:ext cx="8046720" cy="5294063"/>
-          </a:xfrm>
-          <a:prstGeom prst="rect">
-            <a:avLst/>
-          </a:prstGeom>
-        </p:spPr>
-      </p:pic>
-    </p:spTree>
-  </p:cSld>
-  <p:clrMapOvr>
-    <a:masterClrMapping/>
-  </p:clrMapOvr>
-</p:sld>
-</file>
-
-<file path=ppt/slides/slide67.xml><?xml version="1.0" encoding="utf-8"?>
-<p:sld xmlns:a="http://schemas.openxmlformats.org/drawingml/2006/main" xmlns:p="http://schemas.openxmlformats.org/presentationml/2006/main" xmlns:r="http://schemas.openxmlformats.org/officeDocument/2006/relationships">
-  <p:cSld>
-    <p:spTree>
-      <p:nvGrpSpPr>
-        <p:cNvPr id="1" name=""/>
-        <p:cNvGrpSpPr/>
-        <p:nvPr/>
-      </p:nvGrpSpPr>
-      <p:grpSpPr/>
-      <p:pic>
-        <p:nvPicPr>
-          <p:cNvPr id="2" name="Picture 1" descr="UC16_ChallengeTrainer_TestCases.png"/>
-          <p:cNvPicPr>
-            <a:picLocks noChangeAspect="1"/>
-          </p:cNvPicPr>
-          <p:nvPr/>
-        </p:nvPicPr>
-        <p:blipFill>
-          <a:blip r:embed="rId2"/>
-          <a:stretch>
-            <a:fillRect/>
-          </a:stretch>
-        </p:blipFill>
-        <p:spPr>
-          <a:xfrm>
-            <a:off x="548640" y="1704975"/>
-            <a:ext cx="8046719" cy="3813809"/>
-          </a:xfrm>
-          <a:prstGeom prst="rect">
-            <a:avLst/>
-          </a:prstGeom>
-        </p:spPr>
-      </p:pic>
-    </p:spTree>
-  </p:cSld>
-  <p:clrMapOvr>
-    <a:masterClrMapping/>
-  </p:clrMapOvr>
-</p:sld>
-</file>
-
-<file path=ppt/slides/slide68.xml><?xml version="1.0" encoding="utf-8"?>
-<p:sld xmlns:a="http://schemas.openxmlformats.org/drawingml/2006/main" xmlns:p="http://schemas.openxmlformats.org/presentationml/2006/main" xmlns:r="http://schemas.openxmlformats.org/officeDocument/2006/relationships">
-  <p:cSld>
-    <p:spTree>
-      <p:nvGrpSpPr>
-        <p:cNvPr id="1" name=""/>
-        <p:cNvGrpSpPr/>
-        <p:nvPr/>
-      </p:nvGrpSpPr>
-      <p:grpSpPr/>
-      <p:pic>
-        <p:nvPicPr>
-          <p:cNvPr id="2" name="Picture 1" descr="UC17_SelectStarter_Description.png"/>
-          <p:cNvPicPr>
-            <a:picLocks noChangeAspect="1"/>
-          </p:cNvPicPr>
-          <p:nvPr/>
-        </p:nvPicPr>
-        <p:blipFill>
-          <a:blip r:embed="rId2"/>
-          <a:stretch>
-            <a:fillRect/>
-          </a:stretch>
-        </p:blipFill>
-        <p:spPr>
-          <a:xfrm>
-            <a:off x="1366837" y="1011555"/>
-            <a:ext cx="6410325" cy="5200650"/>
-          </a:xfrm>
-          <a:prstGeom prst="rect">
-            <a:avLst/>
-          </a:prstGeom>
-        </p:spPr>
-      </p:pic>
-    </p:spTree>
-  </p:cSld>
-  <p:clrMapOvr>
-    <a:masterClrMapping/>
-  </p:clrMapOvr>
-</p:sld>
-</file>
-
-<file path=ppt/slides/slide69.xml><?xml version="1.0" encoding="utf-8"?>
-<p:sld xmlns:a="http://schemas.openxmlformats.org/drawingml/2006/main" xmlns:p="http://schemas.openxmlformats.org/presentationml/2006/main" xmlns:r="http://schemas.openxmlformats.org/officeDocument/2006/relationships">
-  <p:cSld>
-    <p:spTree>
-      <p:nvGrpSpPr>
-        <p:cNvPr id="1" name=""/>
-        <p:cNvGrpSpPr/>
-        <p:nvPr/>
-      </p:nvGrpSpPr>
-      <p:grpSpPr/>
-      <p:pic>
-        <p:nvPicPr>
-          <p:cNvPr id="2" name="Picture 1" descr="UC17_SelectStarter_Activity.png"/>
-          <p:cNvPicPr>
-            <a:picLocks noChangeAspect="1"/>
-          </p:cNvPicPr>
-          <p:nvPr/>
-        </p:nvPicPr>
-        <p:blipFill>
-          <a:blip r:embed="rId2"/>
-          <a:stretch>
-            <a:fillRect/>
-          </a:stretch>
-        </p:blipFill>
-        <p:spPr>
-          <a:xfrm>
-            <a:off x="2566730" y="914400"/>
-            <a:ext cx="4010539" cy="5394960"/>
-          </a:xfrm>
-          <a:prstGeom prst="rect">
-            <a:avLst/>
-          </a:prstGeom>
-        </p:spPr>
-      </p:pic>
-    </p:spTree>
-  </p:cSld>
-  <p:clrMapOvr>
-    <a:masterClrMapping/>
-  </p:clrMapOvr>
-</p:sld>
-</file>
-
-<file path=ppt/slides/slide7.xml><?xml version="1.0" encoding="utf-8"?>
-<p:sld xmlns:a="http://schemas.openxmlformats.org/drawingml/2006/main" xmlns:p="http://schemas.openxmlformats.org/presentationml/2006/main" xmlns:r="http://schemas.openxmlformats.org/officeDocument/2006/relationships">
-  <p:cSld>
-    <p:spTree>
-      <p:nvGrpSpPr>
-        <p:cNvPr id="1" name=""/>
-        <p:cNvGrpSpPr/>
-        <p:nvPr/>
-      </p:nvGrpSpPr>
-      <p:grpSpPr/>
+<file path=ppt/slides/slide80.xml><?xml version="1.0" encoding="utf-8"?>
+<p:sld xmlns:a="http://schemas.openxmlformats.org/drawingml/2006/main" xmlns:r="http://schemas.openxmlformats.org/officeDocument/2006/relationships" xmlns:p="http://schemas.openxmlformats.org/presentationml/2006/main">
+  <p:cSld>
+    <p:spTree>
+      <p:nvGrpSpPr>
+        <p:cNvPr id="1" name=""/>
+        <p:cNvGrpSpPr/>
+        <p:nvPr/>
+      </p:nvGrpSpPr>
+      <p:grpSpPr>
+        <a:xfrm>
+          <a:off x="0" y="0"/>
+          <a:ext cx="0" cy="0"/>
+          <a:chOff x="0" y="0"/>
+          <a:chExt cx="0" cy="0"/>
+        </a:xfrm>
+      </p:grpSpPr>
+      <p:pic>
+        <p:nvPicPr>
+          <p:cNvPr id="2" name="Picture 1" descr="ApplicationLayerServices.png"/>
+          <p:cNvPicPr>
+            <a:picLocks noChangeAspect="1"/>
+          </p:cNvPicPr>
+          <p:nvPr/>
+        </p:nvPicPr>
+        <p:blipFill>
+          <a:blip r:embed="rId2"/>
+          <a:stretch>
+            <a:fillRect/>
+          </a:stretch>
+        </p:blipFill>
+        <p:spPr>
+          <a:xfrm>
+            <a:off x="548640" y="2789724"/>
+            <a:ext cx="8046720" cy="1644312"/>
+          </a:xfrm>
+          <a:prstGeom prst="rect">
+            <a:avLst/>
+          </a:prstGeom>
+        </p:spPr>
+      </p:pic>
+    </p:spTree>
+  </p:cSld>
+  <p:clrMapOvr>
+    <a:masterClrMapping/>
+  </p:clrMapOvr>
+</p:sld>
+</file>
+
+<file path=ppt/slides/slide81.xml><?xml version="1.0" encoding="utf-8"?>
+<p:sld xmlns:a="http://schemas.openxmlformats.org/drawingml/2006/main" xmlns:r="http://schemas.openxmlformats.org/officeDocument/2006/relationships" xmlns:p="http://schemas.openxmlformats.org/presentationml/2006/main">
+  <p:cSld>
+    <p:spTree>
+      <p:nvGrpSpPr>
+        <p:cNvPr id="1" name=""/>
+        <p:cNvGrpSpPr/>
+        <p:nvPr/>
+      </p:nvGrpSpPr>
+      <p:grpSpPr>
+        <a:xfrm>
+          <a:off x="0" y="0"/>
+          <a:ext cx="0" cy="0"/>
+          <a:chOff x="0" y="0"/>
+          <a:chExt cx="0" cy="0"/>
+        </a:xfrm>
+      </p:grpSpPr>
+      <p:pic>
+        <p:nvPicPr>
+          <p:cNvPr id="2" name="Picture 1" descr="BattleServices.png"/>
+          <p:cNvPicPr>
+            <a:picLocks noChangeAspect="1"/>
+          </p:cNvPicPr>
+          <p:nvPr/>
+        </p:nvPicPr>
+        <p:blipFill>
+          <a:blip r:embed="rId2"/>
+          <a:stretch>
+            <a:fillRect/>
+          </a:stretch>
+        </p:blipFill>
+        <p:spPr>
+          <a:xfrm>
+            <a:off x="548640" y="2474695"/>
+            <a:ext cx="8046720" cy="2274369"/>
+          </a:xfrm>
+          <a:prstGeom prst="rect">
+            <a:avLst/>
+          </a:prstGeom>
+        </p:spPr>
+      </p:pic>
+    </p:spTree>
+  </p:cSld>
+  <p:clrMapOvr>
+    <a:masterClrMapping/>
+  </p:clrMapOvr>
+</p:sld>
+</file>
+
+<file path=ppt/slides/slide82.xml><?xml version="1.0" encoding="utf-8"?>
+<p:sld xmlns:a="http://schemas.openxmlformats.org/drawingml/2006/main" xmlns:r="http://schemas.openxmlformats.org/officeDocument/2006/relationships" xmlns:p="http://schemas.openxmlformats.org/presentationml/2006/main">
+  <p:cSld>
+    <p:spTree>
+      <p:nvGrpSpPr>
+        <p:cNvPr id="1" name=""/>
+        <p:cNvGrpSpPr/>
+        <p:nvPr/>
+      </p:nvGrpSpPr>
+      <p:grpSpPr>
+        <a:xfrm>
+          <a:off x="0" y="0"/>
+          <a:ext cx="0" cy="0"/>
+          <a:chOff x="0" y="0"/>
+          <a:chExt cx="0" cy="0"/>
+        </a:xfrm>
+      </p:grpSpPr>
+      <p:pic>
+        <p:nvPicPr>
+          <p:cNvPr id="2" name="Picture 1" descr="CatchAndAuthServices.png"/>
+          <p:cNvPicPr>
+            <a:picLocks noChangeAspect="1"/>
+          </p:cNvPicPr>
+          <p:nvPr/>
+        </p:nvPicPr>
+        <p:blipFill>
+          <a:blip r:embed="rId2"/>
+          <a:stretch>
+            <a:fillRect/>
+          </a:stretch>
+        </p:blipFill>
+        <p:spPr>
+          <a:xfrm>
+            <a:off x="548640" y="2572734"/>
+            <a:ext cx="8046719" cy="2078292"/>
+          </a:xfrm>
+          <a:prstGeom prst="rect">
+            <a:avLst/>
+          </a:prstGeom>
+        </p:spPr>
+      </p:pic>
+    </p:spTree>
+  </p:cSld>
+  <p:clrMapOvr>
+    <a:masterClrMapping/>
+  </p:clrMapOvr>
+</p:sld>
+</file>
+
+<file path=ppt/slides/slide83.xml><?xml version="1.0" encoding="utf-8"?>
+<p:sld xmlns:a="http://schemas.openxmlformats.org/drawingml/2006/main" xmlns:r="http://schemas.openxmlformats.org/officeDocument/2006/relationships" xmlns:p="http://schemas.openxmlformats.org/presentationml/2006/main">
+  <p:cSld>
+    <p:spTree>
+      <p:nvGrpSpPr>
+        <p:cNvPr id="1" name=""/>
+        <p:cNvGrpSpPr/>
+        <p:nvPr/>
+      </p:nvGrpSpPr>
+      <p:grpSpPr>
+        <a:xfrm>
+          <a:off x="0" y="0"/>
+          <a:ext cx="0" cy="0"/>
+          <a:chOff x="0" y="0"/>
+          <a:chExt cx="0" cy="0"/>
+        </a:xfrm>
+      </p:grpSpPr>
+      <p:pic>
+        <p:nvPicPr>
+          <p:cNvPr id="2" name="Picture 1" descr="DomainLayerEntities.png"/>
+          <p:cNvPicPr>
+            <a:picLocks noChangeAspect="1"/>
+          </p:cNvPicPr>
+          <p:nvPr/>
+        </p:nvPicPr>
+        <p:blipFill>
+          <a:blip r:embed="rId2"/>
+          <a:stretch>
+            <a:fillRect/>
+          </a:stretch>
+        </p:blipFill>
+        <p:spPr>
+          <a:xfrm>
+            <a:off x="1983704" y="914400"/>
+            <a:ext cx="5176592" cy="5394960"/>
+          </a:xfrm>
+          <a:prstGeom prst="rect">
+            <a:avLst/>
+          </a:prstGeom>
+        </p:spPr>
+      </p:pic>
+    </p:spTree>
+  </p:cSld>
+  <p:clrMapOvr>
+    <a:masterClrMapping/>
+  </p:clrMapOvr>
+</p:sld>
+</file>
+
+<file path=ppt/slides/slide84.xml><?xml version="1.0" encoding="utf-8"?>
+<p:sld xmlns:a="http://schemas.openxmlformats.org/drawingml/2006/main" xmlns:r="http://schemas.openxmlformats.org/officeDocument/2006/relationships" xmlns:p="http://schemas.openxmlformats.org/presentationml/2006/main">
+  <p:cSld>
+    <p:spTree>
+      <p:nvGrpSpPr>
+        <p:cNvPr id="1" name=""/>
+        <p:cNvGrpSpPr/>
+        <p:nvPr/>
+      </p:nvGrpSpPr>
+      <p:grpSpPr>
+        <a:xfrm>
+          <a:off x="0" y="0"/>
+          <a:ext cx="0" cy="0"/>
+          <a:chOff x="0" y="0"/>
+          <a:chExt cx="0" cy="0"/>
+        </a:xfrm>
+      </p:grpSpPr>
+      <p:pic>
+        <p:nvPicPr>
+          <p:cNvPr id="2" name="Picture 1" descr="ExpAndHealingServices.png"/>
+          <p:cNvPicPr>
+            <a:picLocks noChangeAspect="1"/>
+          </p:cNvPicPr>
+          <p:nvPr/>
+        </p:nvPicPr>
+        <p:blipFill>
+          <a:blip r:embed="rId2"/>
+          <a:stretch>
+            <a:fillRect/>
+          </a:stretch>
+        </p:blipFill>
+        <p:spPr>
+          <a:xfrm>
+            <a:off x="548640" y="2500720"/>
+            <a:ext cx="8046720" cy="2222319"/>
+          </a:xfrm>
+          <a:prstGeom prst="rect">
+            <a:avLst/>
+          </a:prstGeom>
+        </p:spPr>
+      </p:pic>
+    </p:spTree>
+  </p:cSld>
+  <p:clrMapOvr>
+    <a:masterClrMapping/>
+  </p:clrMapOvr>
+</p:sld>
+</file>
+
+<file path=ppt/slides/slide85.xml><?xml version="1.0" encoding="utf-8"?>
+<p:sld xmlns:a="http://schemas.openxmlformats.org/drawingml/2006/main" xmlns:r="http://schemas.openxmlformats.org/officeDocument/2006/relationships" xmlns:p="http://schemas.openxmlformats.org/presentationml/2006/main">
+  <p:cSld>
+    <p:spTree>
+      <p:nvGrpSpPr>
+        <p:cNvPr id="1" name=""/>
+        <p:cNvGrpSpPr/>
+        <p:nvPr/>
+      </p:nvGrpSpPr>
+      <p:grpSpPr>
+        <a:xfrm>
+          <a:off x="0" y="0"/>
+          <a:ext cx="0" cy="0"/>
+          <a:chOff x="0" y="0"/>
+          <a:chExt cx="0" cy="0"/>
+        </a:xfrm>
+      </p:grpSpPr>
+      <p:pic>
+        <p:nvPicPr>
+          <p:cNvPr id="2" name="Picture 1" descr="FileAndWorldGenServices.png"/>
+          <p:cNvPicPr>
+            <a:picLocks noChangeAspect="1"/>
+          </p:cNvPicPr>
+          <p:nvPr/>
+        </p:nvPicPr>
+        <p:blipFill>
+          <a:blip r:embed="rId2"/>
+          <a:stretch>
+            <a:fillRect/>
+          </a:stretch>
+        </p:blipFill>
+        <p:spPr>
+          <a:xfrm>
+            <a:off x="548640" y="2298130"/>
+            <a:ext cx="8046719" cy="2627500"/>
+          </a:xfrm>
+          <a:prstGeom prst="rect">
+            <a:avLst/>
+          </a:prstGeom>
+        </p:spPr>
+      </p:pic>
+    </p:spTree>
+  </p:cSld>
+  <p:clrMapOvr>
+    <a:masterClrMapping/>
+  </p:clrMapOvr>
+</p:sld>
+</file>
+
+<file path=ppt/slides/slide86.xml><?xml version="1.0" encoding="utf-8"?>
+<p:sld xmlns:a="http://schemas.openxmlformats.org/drawingml/2006/main" xmlns:r="http://schemas.openxmlformats.org/officeDocument/2006/relationships" xmlns:p="http://schemas.openxmlformats.org/presentationml/2006/main">
+  <p:cSld>
+    <p:spTree>
+      <p:nvGrpSpPr>
+        <p:cNvPr id="1" name=""/>
+        <p:cNvGrpSpPr/>
+        <p:nvPr/>
+      </p:nvGrpSpPr>
+      <p:grpSpPr>
+        <a:xfrm>
+          <a:off x="0" y="0"/>
+          <a:ext cx="0" cy="0"/>
+          <a:chOff x="0" y="0"/>
+          <a:chExt cx="0" cy="0"/>
+        </a:xfrm>
+      </p:grpSpPr>
+      <p:pic>
+        <p:nvPicPr>
+          <p:cNvPr id="2" name="Picture 1" descr="InfrastructureLayerRepositories.png"/>
+          <p:cNvPicPr>
+            <a:picLocks noChangeAspect="1"/>
+          </p:cNvPicPr>
+          <p:nvPr/>
+        </p:nvPicPr>
+        <p:blipFill>
+          <a:blip r:embed="rId2"/>
+          <a:stretch>
+            <a:fillRect/>
+          </a:stretch>
+        </p:blipFill>
+        <p:spPr>
+          <a:xfrm>
+            <a:off x="548640" y="3112729"/>
+            <a:ext cx="8046720" cy="998302"/>
+          </a:xfrm>
+          <a:prstGeom prst="rect">
+            <a:avLst/>
+          </a:prstGeom>
+        </p:spPr>
+      </p:pic>
+    </p:spTree>
+  </p:cSld>
+  <p:clrMapOvr>
+    <a:masterClrMapping/>
+  </p:clrMapOvr>
+</p:sld>
+</file>
+
+<file path=ppt/slides/slide87.xml><?xml version="1.0" encoding="utf-8"?>
+<p:sld xmlns:a="http://schemas.openxmlformats.org/drawingml/2006/main" xmlns:r="http://schemas.openxmlformats.org/officeDocument/2006/relationships" xmlns:p="http://schemas.openxmlformats.org/presentationml/2006/main">
+  <p:cSld>
+    <p:spTree>
+      <p:nvGrpSpPr>
+        <p:cNvPr id="1" name=""/>
+        <p:cNvGrpSpPr/>
+        <p:nvPr/>
+      </p:nvGrpSpPr>
+      <p:grpSpPr>
+        <a:xfrm>
+          <a:off x="0" y="0"/>
+          <a:ext cx="0" cy="0"/>
+          <a:chOff x="0" y="0"/>
+          <a:chExt cx="0" cy="0"/>
+        </a:xfrm>
+      </p:grpSpPr>
+      <p:pic>
+        <p:nvPicPr>
+          <p:cNvPr id="2" name="Picture 1" descr="LayerInteractionDiagram.png"/>
+          <p:cNvPicPr>
+            <a:picLocks noChangeAspect="1"/>
+          </p:cNvPicPr>
+          <p:nvPr/>
+        </p:nvPicPr>
+        <p:blipFill>
+          <a:blip r:embed="rId2"/>
+          <a:stretch>
+            <a:fillRect/>
+          </a:stretch>
+        </p:blipFill>
+        <p:spPr>
+          <a:xfrm>
+            <a:off x="548640" y="2012672"/>
+            <a:ext cx="8046720" cy="3198416"/>
+          </a:xfrm>
+          <a:prstGeom prst="rect">
+            <a:avLst/>
+          </a:prstGeom>
+        </p:spPr>
+      </p:pic>
+    </p:spTree>
+  </p:cSld>
+  <p:clrMapOvr>
+    <a:masterClrMapping/>
+  </p:clrMapOvr>
+</p:sld>
+</file>
+
+<file path=ppt/slides/slide88.xml><?xml version="1.0" encoding="utf-8"?>
+<p:sld xmlns:a="http://schemas.openxmlformats.org/drawingml/2006/main" xmlns:r="http://schemas.openxmlformats.org/officeDocument/2006/relationships" xmlns:p="http://schemas.openxmlformats.org/presentationml/2006/main">
+  <p:cSld>
+    <p:spTree>
+      <p:nvGrpSpPr>
+        <p:cNvPr id="1" name=""/>
+        <p:cNvGrpSpPr/>
+        <p:nvPr/>
+      </p:nvGrpSpPr>
+      <p:grpSpPr>
+        <a:xfrm>
+          <a:off x="0" y="0"/>
+          <a:ext cx="0" cy="0"/>
+          <a:chOff x="0" y="0"/>
+          <a:chExt cx="0" cy="0"/>
+        </a:xfrm>
+      </p:grpSpPr>
+      <p:pic>
+        <p:nvPicPr>
+          <p:cNvPr id="2" name="Picture 1" descr="NetworkAndMatchmakingServices.png"/>
+          <p:cNvPicPr>
+            <a:picLocks noChangeAspect="1"/>
+          </p:cNvPicPr>
+          <p:nvPr/>
+        </p:nvPicPr>
+        <p:blipFill>
+          <a:blip r:embed="rId2"/>
+          <a:stretch>
+            <a:fillRect/>
+          </a:stretch>
+        </p:blipFill>
+        <p:spPr>
+          <a:xfrm>
+            <a:off x="689490" y="914400"/>
+            <a:ext cx="7765019" cy="5394960"/>
+          </a:xfrm>
+          <a:prstGeom prst="rect">
+            <a:avLst/>
+          </a:prstGeom>
+        </p:spPr>
+      </p:pic>
+    </p:spTree>
+  </p:cSld>
+  <p:clrMapOvr>
+    <a:masterClrMapping/>
+  </p:clrMapOvr>
+</p:sld>
+</file>
+
+<file path=ppt/slides/slide89.xml><?xml version="1.0" encoding="utf-8"?>
+<p:sld xmlns:a="http://schemas.openxmlformats.org/drawingml/2006/main" xmlns:r="http://schemas.openxmlformats.org/officeDocument/2006/relationships" xmlns:p="http://schemas.openxmlformats.org/presentationml/2006/main">
+  <p:cSld>
+    <p:spTree>
+      <p:nvGrpSpPr>
+        <p:cNvPr id="1" name=""/>
+        <p:cNvGrpSpPr/>
+        <p:nvPr/>
+      </p:nvGrpSpPr>
+      <p:grpSpPr>
+        <a:xfrm>
+          <a:off x="0" y="0"/>
+          <a:ext cx="0" cy="0"/>
+          <a:chOff x="0" y="0"/>
+          <a:chExt cx="0" cy="0"/>
+        </a:xfrm>
+      </p:grpSpPr>
+      <p:pic>
+        <p:nvPicPr>
+          <p:cNvPr id="2" name="Picture 1" descr="PokemonGameArchitecture.png"/>
+          <p:cNvPicPr>
+            <a:picLocks noChangeAspect="1"/>
+          </p:cNvPicPr>
+          <p:nvPr/>
+        </p:nvPicPr>
+        <p:blipFill>
+          <a:blip r:embed="rId2"/>
+          <a:stretch>
+            <a:fillRect/>
+          </a:stretch>
+        </p:blipFill>
+        <p:spPr>
+          <a:xfrm>
+            <a:off x="548640" y="2585513"/>
+            <a:ext cx="8046720" cy="2052734"/>
+          </a:xfrm>
+          <a:prstGeom prst="rect">
+            <a:avLst/>
+          </a:prstGeom>
+        </p:spPr>
+      </p:pic>
+    </p:spTree>
+  </p:cSld>
+  <p:clrMapOvr>
+    <a:masterClrMapping/>
+  </p:clrMapOvr>
+</p:sld>
+</file>
+
+<file path=ppt/slides/slide9.xml><?xml version="1.0" encoding="utf-8"?>
+<p:sld xmlns:a="http://schemas.openxmlformats.org/drawingml/2006/main" xmlns:r="http://schemas.openxmlformats.org/officeDocument/2006/relationships" xmlns:p="http://schemas.openxmlformats.org/presentationml/2006/main">
+  <p:cSld>
+    <p:spTree>
+      <p:nvGrpSpPr>
+        <p:cNvPr id="1" name=""/>
+        <p:cNvGrpSpPr/>
+        <p:nvPr/>
+      </p:nvGrpSpPr>
+      <p:grpSpPr>
+        <a:xfrm>
+          <a:off x="0" y="0"/>
+          <a:ext cx="0" cy="0"/>
+          <a:chOff x="0" y="0"/>
+          <a:chExt cx="0" cy="0"/>
+        </a:xfrm>
+      </p:grpSpPr>
       <p:pic>
         <p:nvPicPr>
           <p:cNvPr id="2" name="Picture 1" descr="UC1_Login_TestCases.png"/>
@@ -6008,814 +7864,23 @@
 </p:sld>
 </file>
 
-<file path=ppt/slides/slide70.xml><?xml version="1.0" encoding="utf-8"?>
-<p:sld xmlns:a="http://schemas.openxmlformats.org/drawingml/2006/main" xmlns:p="http://schemas.openxmlformats.org/presentationml/2006/main" xmlns:r="http://schemas.openxmlformats.org/officeDocument/2006/relationships">
-  <p:cSld>
-    <p:spTree>
-      <p:nvGrpSpPr>
-        <p:cNvPr id="1" name=""/>
-        <p:cNvGrpSpPr/>
-        <p:nvPr/>
-      </p:nvGrpSpPr>
-      <p:grpSpPr/>
-      <p:pic>
-        <p:nvPicPr>
-          <p:cNvPr id="2" name="Picture 1" descr="UC17_SelectStarter_Sequence.png"/>
-          <p:cNvPicPr>
-            <a:picLocks noChangeAspect="1"/>
-          </p:cNvPicPr>
-          <p:nvPr/>
-        </p:nvPicPr>
-        <p:blipFill>
-          <a:blip r:embed="rId2"/>
-          <a:stretch>
-            <a:fillRect/>
-          </a:stretch>
-        </p:blipFill>
-        <p:spPr>
-          <a:xfrm>
-            <a:off x="548640" y="1601816"/>
-            <a:ext cx="8046720" cy="4020128"/>
-          </a:xfrm>
-          <a:prstGeom prst="rect">
-            <a:avLst/>
-          </a:prstGeom>
-        </p:spPr>
-      </p:pic>
-    </p:spTree>
-  </p:cSld>
-  <p:clrMapOvr>
-    <a:masterClrMapping/>
-  </p:clrMapOvr>
-</p:sld>
-</file>
-
-<file path=ppt/slides/slide71.xml><?xml version="1.0" encoding="utf-8"?>
-<p:sld xmlns:a="http://schemas.openxmlformats.org/drawingml/2006/main" xmlns:p="http://schemas.openxmlformats.org/presentationml/2006/main" xmlns:r="http://schemas.openxmlformats.org/officeDocument/2006/relationships">
-  <p:cSld>
-    <p:spTree>
-      <p:nvGrpSpPr>
-        <p:cNvPr id="1" name=""/>
-        <p:cNvGrpSpPr/>
-        <p:nvPr/>
-      </p:nvGrpSpPr>
-      <p:grpSpPr/>
-      <p:pic>
-        <p:nvPicPr>
-          <p:cNvPr id="2" name="Picture 1" descr="UC17_SelectStarter_TestCases.png"/>
-          <p:cNvPicPr>
-            <a:picLocks noChangeAspect="1"/>
-          </p:cNvPicPr>
-          <p:nvPr/>
-        </p:nvPicPr>
-        <p:blipFill>
-          <a:blip r:embed="rId2"/>
-          <a:stretch>
-            <a:fillRect/>
-          </a:stretch>
-        </p:blipFill>
-        <p:spPr>
-          <a:xfrm>
-            <a:off x="548640" y="1911617"/>
-            <a:ext cx="8046719" cy="3400526"/>
-          </a:xfrm>
-          <a:prstGeom prst="rect">
-            <a:avLst/>
-          </a:prstGeom>
-        </p:spPr>
-      </p:pic>
-    </p:spTree>
-  </p:cSld>
-  <p:clrMapOvr>
-    <a:masterClrMapping/>
-  </p:clrMapOvr>
-</p:sld>
-</file>
-
-<file path=ppt/slides/slide72.xml><?xml version="1.0" encoding="utf-8"?>
-<p:sld xmlns:a="http://schemas.openxmlformats.org/drawingml/2006/main" xmlns:p="http://schemas.openxmlformats.org/presentationml/2006/main" xmlns:r="http://schemas.openxmlformats.org/officeDocument/2006/relationships">
-  <p:cSld>
-    <p:spTree>
-      <p:nvGrpSpPr>
-        <p:cNvPr id="1" name=""/>
-        <p:cNvGrpSpPr/>
-        <p:nvPr/>
-      </p:nvGrpSpPr>
-      <p:grpSpPr/>
-      <p:pic>
-        <p:nvPicPr>
-          <p:cNvPr id="2" name="Picture 1" descr="UC18_Register_Description.png"/>
-          <p:cNvPicPr>
-            <a:picLocks noChangeAspect="1"/>
-          </p:cNvPicPr>
-          <p:nvPr/>
-        </p:nvPicPr>
-        <p:blipFill>
-          <a:blip r:embed="rId2"/>
-          <a:stretch>
-            <a:fillRect/>
-          </a:stretch>
-        </p:blipFill>
-        <p:spPr>
-          <a:xfrm>
-            <a:off x="2086549" y="914400"/>
-            <a:ext cx="4970902" cy="5394960"/>
-          </a:xfrm>
-          <a:prstGeom prst="rect">
-            <a:avLst/>
-          </a:prstGeom>
-        </p:spPr>
-      </p:pic>
-    </p:spTree>
-  </p:cSld>
-  <p:clrMapOvr>
-    <a:masterClrMapping/>
-  </p:clrMapOvr>
-</p:sld>
-</file>
-
-<file path=ppt/slides/slide73.xml><?xml version="1.0" encoding="utf-8"?>
-<p:sld xmlns:a="http://schemas.openxmlformats.org/drawingml/2006/main" xmlns:p="http://schemas.openxmlformats.org/presentationml/2006/main" xmlns:r="http://schemas.openxmlformats.org/officeDocument/2006/relationships">
-  <p:cSld>
-    <p:spTree>
-      <p:nvGrpSpPr>
-        <p:cNvPr id="1" name=""/>
-        <p:cNvGrpSpPr/>
-        <p:nvPr/>
-      </p:nvGrpSpPr>
-      <p:grpSpPr/>
-      <p:pic>
-        <p:nvPicPr>
-          <p:cNvPr id="2" name="Picture 1" descr="UC18_Register_Activity.png"/>
-          <p:cNvPicPr>
-            <a:picLocks noChangeAspect="1"/>
-          </p:cNvPicPr>
-          <p:nvPr/>
-        </p:nvPicPr>
-        <p:blipFill>
-          <a:blip r:embed="rId2"/>
-          <a:stretch>
-            <a:fillRect/>
-          </a:stretch>
-        </p:blipFill>
-        <p:spPr>
-          <a:xfrm>
-            <a:off x="2369976" y="914400"/>
-            <a:ext cx="4404048" cy="5394960"/>
-          </a:xfrm>
-          <a:prstGeom prst="rect">
-            <a:avLst/>
-          </a:prstGeom>
-        </p:spPr>
-      </p:pic>
-    </p:spTree>
-  </p:cSld>
-  <p:clrMapOvr>
-    <a:masterClrMapping/>
-  </p:clrMapOvr>
-</p:sld>
-</file>
-
-<file path=ppt/slides/slide74.xml><?xml version="1.0" encoding="utf-8"?>
-<p:sld xmlns:a="http://schemas.openxmlformats.org/drawingml/2006/main" xmlns:p="http://schemas.openxmlformats.org/presentationml/2006/main" xmlns:r="http://schemas.openxmlformats.org/officeDocument/2006/relationships">
-  <p:cSld>
-    <p:spTree>
-      <p:nvGrpSpPr>
-        <p:cNvPr id="1" name=""/>
-        <p:cNvGrpSpPr/>
-        <p:nvPr/>
-      </p:nvGrpSpPr>
-      <p:grpSpPr/>
-      <p:pic>
-        <p:nvPicPr>
-          <p:cNvPr id="2" name="Picture 1" descr="UC18_Register_Sequence.png"/>
-          <p:cNvPicPr>
-            <a:picLocks noChangeAspect="1"/>
-          </p:cNvPicPr>
-          <p:nvPr/>
-        </p:nvPicPr>
-        <p:blipFill>
-          <a:blip r:embed="rId2"/>
-          <a:stretch>
-            <a:fillRect/>
-          </a:stretch>
-        </p:blipFill>
-        <p:spPr>
-          <a:xfrm>
-            <a:off x="551933" y="914400"/>
-            <a:ext cx="8040134" cy="5394960"/>
-          </a:xfrm>
-          <a:prstGeom prst="rect">
-            <a:avLst/>
-          </a:prstGeom>
-        </p:spPr>
-      </p:pic>
-    </p:spTree>
-  </p:cSld>
-  <p:clrMapOvr>
-    <a:masterClrMapping/>
-  </p:clrMapOvr>
-</p:sld>
-</file>
-
-<file path=ppt/slides/slide75.xml><?xml version="1.0" encoding="utf-8"?>
-<p:sld xmlns:a="http://schemas.openxmlformats.org/drawingml/2006/main" xmlns:p="http://schemas.openxmlformats.org/presentationml/2006/main" xmlns:r="http://schemas.openxmlformats.org/officeDocument/2006/relationships">
-  <p:cSld>
-    <p:spTree>
-      <p:nvGrpSpPr>
-        <p:cNvPr id="1" name=""/>
-        <p:cNvGrpSpPr/>
-        <p:nvPr/>
-      </p:nvGrpSpPr>
-      <p:grpSpPr/>
-      <p:pic>
-        <p:nvPicPr>
-          <p:cNvPr id="2" name="Picture 1" descr="UC18_Register_TestCases.png"/>
-          <p:cNvPicPr>
-            <a:picLocks noChangeAspect="1"/>
-          </p:cNvPicPr>
-          <p:nvPr/>
-        </p:nvPicPr>
-        <p:blipFill>
-          <a:blip r:embed="rId2"/>
-          <a:stretch>
-            <a:fillRect/>
-          </a:stretch>
-        </p:blipFill>
-        <p:spPr>
-          <a:xfrm>
-            <a:off x="548640" y="1254871"/>
-            <a:ext cx="8046719" cy="4714018"/>
-          </a:xfrm>
-          <a:prstGeom prst="rect">
-            <a:avLst/>
-          </a:prstGeom>
-        </p:spPr>
-      </p:pic>
-    </p:spTree>
-  </p:cSld>
-  <p:clrMapOvr>
-    <a:masterClrMapping/>
-  </p:clrMapOvr>
-</p:sld>
-</file>
-
-<file path=ppt/slides/slide76.xml><?xml version="1.0" encoding="utf-8"?>
-<p:sld xmlns:a="http://schemas.openxmlformats.org/drawingml/2006/main" xmlns:p="http://schemas.openxmlformats.org/presentationml/2006/main" xmlns:r="http://schemas.openxmlformats.org/officeDocument/2006/relationships">
-  <p:cSld>
-    <p:spTree>
-      <p:nvGrpSpPr>
-        <p:cNvPr id="1" name=""/>
-        <p:cNvGrpSpPr/>
-        <p:nvPr/>
-      </p:nvGrpSpPr>
-      <p:grpSpPr/>
-      <p:pic>
-        <p:nvPicPr>
-          <p:cNvPr id="2" name="Picture 1" descr="PokemonDB_TableDesign.png"/>
-          <p:cNvPicPr>
-            <a:picLocks noChangeAspect="1"/>
-          </p:cNvPicPr>
-          <p:nvPr/>
-        </p:nvPicPr>
-        <p:blipFill>
-          <a:blip r:embed="rId2"/>
-          <a:stretch>
-            <a:fillRect/>
-          </a:stretch>
-        </p:blipFill>
-        <p:spPr>
-          <a:xfrm>
-            <a:off x="2965475" y="914400"/>
-            <a:ext cx="3213049" cy="5394960"/>
-          </a:xfrm>
-          <a:prstGeom prst="rect">
-            <a:avLst/>
-          </a:prstGeom>
-        </p:spPr>
-      </p:pic>
-    </p:spTree>
-  </p:cSld>
-  <p:clrMapOvr>
-    <a:masterClrMapping/>
-  </p:clrMapOvr>
-</p:sld>
-</file>
-
-<file path=ppt/slides/slide77.xml><?xml version="1.0" encoding="utf-8"?>
-<p:sld xmlns:a="http://schemas.openxmlformats.org/drawingml/2006/main" xmlns:p="http://schemas.openxmlformats.org/presentationml/2006/main" xmlns:r="http://schemas.openxmlformats.org/officeDocument/2006/relationships">
-  <p:cSld>
-    <p:spTree>
-      <p:nvGrpSpPr>
-        <p:cNvPr id="1" name=""/>
-        <p:cNvGrpSpPr/>
-        <p:nvPr/>
-      </p:nvGrpSpPr>
-      <p:grpSpPr/>
-      <p:pic>
-        <p:nvPicPr>
-          <p:cNvPr id="2" name="Picture 1" descr="Pokemon_ERD.png"/>
-          <p:cNvPicPr>
-            <a:picLocks noChangeAspect="1"/>
-          </p:cNvPicPr>
-          <p:nvPr/>
-        </p:nvPicPr>
-        <p:blipFill>
-          <a:blip r:embed="rId2"/>
-          <a:stretch>
-            <a:fillRect/>
-          </a:stretch>
-        </p:blipFill>
-        <p:spPr>
-          <a:xfrm>
-            <a:off x="1397274" y="914400"/>
-            <a:ext cx="6349452" cy="5394960"/>
-          </a:xfrm>
-          <a:prstGeom prst="rect">
-            <a:avLst/>
-          </a:prstGeom>
-        </p:spPr>
-      </p:pic>
-    </p:spTree>
-  </p:cSld>
-  <p:clrMapOvr>
-    <a:masterClrMapping/>
-  </p:clrMapOvr>
-</p:sld>
-</file>
-
-<file path=ppt/slides/slide78.xml><?xml version="1.0" encoding="utf-8"?>
-<p:sld xmlns:a="http://schemas.openxmlformats.org/drawingml/2006/main" xmlns:p="http://schemas.openxmlformats.org/presentationml/2006/main" xmlns:r="http://schemas.openxmlformats.org/officeDocument/2006/relationships">
-  <p:cSld>
-    <p:spTree>
-      <p:nvGrpSpPr>
-        <p:cNvPr id="1" name=""/>
-        <p:cNvGrpSpPr/>
-        <p:nvPr/>
-      </p:nvGrpSpPr>
-      <p:grpSpPr/>
-      <p:pic>
-        <p:nvPicPr>
-          <p:cNvPr id="2" name="Picture 1" descr="ApplicationLayerServices.png"/>
-          <p:cNvPicPr>
-            <a:picLocks noChangeAspect="1"/>
-          </p:cNvPicPr>
-          <p:nvPr/>
-        </p:nvPicPr>
-        <p:blipFill>
-          <a:blip r:embed="rId2"/>
-          <a:stretch>
-            <a:fillRect/>
-          </a:stretch>
-        </p:blipFill>
-        <p:spPr>
-          <a:xfrm>
-            <a:off x="548640" y="2789724"/>
-            <a:ext cx="8046720" cy="1644312"/>
-          </a:xfrm>
-          <a:prstGeom prst="rect">
-            <a:avLst/>
-          </a:prstGeom>
-        </p:spPr>
-      </p:pic>
-    </p:spTree>
-  </p:cSld>
-  <p:clrMapOvr>
-    <a:masterClrMapping/>
-  </p:clrMapOvr>
-</p:sld>
-</file>
-
-<file path=ppt/slides/slide79.xml><?xml version="1.0" encoding="utf-8"?>
-<p:sld xmlns:a="http://schemas.openxmlformats.org/drawingml/2006/main" xmlns:p="http://schemas.openxmlformats.org/presentationml/2006/main" xmlns:r="http://schemas.openxmlformats.org/officeDocument/2006/relationships">
-  <p:cSld>
-    <p:spTree>
-      <p:nvGrpSpPr>
-        <p:cNvPr id="1" name=""/>
-        <p:cNvGrpSpPr/>
-        <p:nvPr/>
-      </p:nvGrpSpPr>
-      <p:grpSpPr/>
-      <p:pic>
-        <p:nvPicPr>
-          <p:cNvPr id="2" name="Picture 1" descr="BattleServices.png"/>
-          <p:cNvPicPr>
-            <a:picLocks noChangeAspect="1"/>
-          </p:cNvPicPr>
-          <p:nvPr/>
-        </p:nvPicPr>
-        <p:blipFill>
-          <a:blip r:embed="rId2"/>
-          <a:stretch>
-            <a:fillRect/>
-          </a:stretch>
-        </p:blipFill>
-        <p:spPr>
-          <a:xfrm>
-            <a:off x="548640" y="2474695"/>
-            <a:ext cx="8046720" cy="2274369"/>
-          </a:xfrm>
-          <a:prstGeom prst="rect">
-            <a:avLst/>
-          </a:prstGeom>
-        </p:spPr>
-      </p:pic>
-    </p:spTree>
-  </p:cSld>
-  <p:clrMapOvr>
-    <a:masterClrMapping/>
-  </p:clrMapOvr>
-</p:sld>
-</file>
-
-<file path=ppt/slides/slide8.xml><?xml version="1.0" encoding="utf-8"?>
-<p:sld xmlns:a="http://schemas.openxmlformats.org/drawingml/2006/main" xmlns:p="http://schemas.openxmlformats.org/presentationml/2006/main" xmlns:r="http://schemas.openxmlformats.org/officeDocument/2006/relationships">
-  <p:cSld>
-    <p:spTree>
-      <p:nvGrpSpPr>
-        <p:cNvPr id="1" name=""/>
-        <p:cNvGrpSpPr/>
-        <p:nvPr/>
-      </p:nvGrpSpPr>
-      <p:grpSpPr/>
-      <p:pic>
-        <p:nvPicPr>
-          <p:cNvPr id="2" name="Picture 1" descr="UC2_BattleWild_Description.png"/>
-          <p:cNvPicPr>
-            <a:picLocks noChangeAspect="1"/>
-          </p:cNvPicPr>
-          <p:nvPr/>
-        </p:nvPicPr>
-        <p:blipFill>
-          <a:blip r:embed="rId2"/>
-          <a:stretch>
-            <a:fillRect/>
-          </a:stretch>
-        </p:blipFill>
-        <p:spPr>
-          <a:xfrm>
-            <a:off x="1402875" y="914400"/>
-            <a:ext cx="6338250" cy="5394960"/>
-          </a:xfrm>
-          <a:prstGeom prst="rect">
-            <a:avLst/>
-          </a:prstGeom>
-        </p:spPr>
-      </p:pic>
-    </p:spTree>
-  </p:cSld>
-  <p:clrMapOvr>
-    <a:masterClrMapping/>
-  </p:clrMapOvr>
-</p:sld>
-</file>
-
-<file path=ppt/slides/slide80.xml><?xml version="1.0" encoding="utf-8"?>
-<p:sld xmlns:a="http://schemas.openxmlformats.org/drawingml/2006/main" xmlns:p="http://schemas.openxmlformats.org/presentationml/2006/main" xmlns:r="http://schemas.openxmlformats.org/officeDocument/2006/relationships">
-  <p:cSld>
-    <p:spTree>
-      <p:nvGrpSpPr>
-        <p:cNvPr id="1" name=""/>
-        <p:cNvGrpSpPr/>
-        <p:nvPr/>
-      </p:nvGrpSpPr>
-      <p:grpSpPr/>
-      <p:pic>
-        <p:nvPicPr>
-          <p:cNvPr id="2" name="Picture 1" descr="CatchAndAuthServices.png"/>
-          <p:cNvPicPr>
-            <a:picLocks noChangeAspect="1"/>
-          </p:cNvPicPr>
-          <p:nvPr/>
-        </p:nvPicPr>
-        <p:blipFill>
-          <a:blip r:embed="rId2"/>
-          <a:stretch>
-            <a:fillRect/>
-          </a:stretch>
-        </p:blipFill>
-        <p:spPr>
-          <a:xfrm>
-            <a:off x="548640" y="2572734"/>
-            <a:ext cx="8046719" cy="2078292"/>
-          </a:xfrm>
-          <a:prstGeom prst="rect">
-            <a:avLst/>
-          </a:prstGeom>
-        </p:spPr>
-      </p:pic>
-    </p:spTree>
-  </p:cSld>
-  <p:clrMapOvr>
-    <a:masterClrMapping/>
-  </p:clrMapOvr>
-</p:sld>
-</file>
-
-<file path=ppt/slides/slide81.xml><?xml version="1.0" encoding="utf-8"?>
-<p:sld xmlns:a="http://schemas.openxmlformats.org/drawingml/2006/main" xmlns:p="http://schemas.openxmlformats.org/presentationml/2006/main" xmlns:r="http://schemas.openxmlformats.org/officeDocument/2006/relationships">
-  <p:cSld>
-    <p:spTree>
-      <p:nvGrpSpPr>
-        <p:cNvPr id="1" name=""/>
-        <p:cNvGrpSpPr/>
-        <p:nvPr/>
-      </p:nvGrpSpPr>
-      <p:grpSpPr/>
-      <p:pic>
-        <p:nvPicPr>
-          <p:cNvPr id="2" name="Picture 1" descr="DomainLayerEntities.png"/>
-          <p:cNvPicPr>
-            <a:picLocks noChangeAspect="1"/>
-          </p:cNvPicPr>
-          <p:nvPr/>
-        </p:nvPicPr>
-        <p:blipFill>
-          <a:blip r:embed="rId2"/>
-          <a:stretch>
-            <a:fillRect/>
-          </a:stretch>
-        </p:blipFill>
-        <p:spPr>
-          <a:xfrm>
-            <a:off x="1983704" y="914400"/>
-            <a:ext cx="5176592" cy="5394960"/>
-          </a:xfrm>
-          <a:prstGeom prst="rect">
-            <a:avLst/>
-          </a:prstGeom>
-        </p:spPr>
-      </p:pic>
-    </p:spTree>
-  </p:cSld>
-  <p:clrMapOvr>
-    <a:masterClrMapping/>
-  </p:clrMapOvr>
-</p:sld>
-</file>
-
-<file path=ppt/slides/slide82.xml><?xml version="1.0" encoding="utf-8"?>
-<p:sld xmlns:a="http://schemas.openxmlformats.org/drawingml/2006/main" xmlns:p="http://schemas.openxmlformats.org/presentationml/2006/main" xmlns:r="http://schemas.openxmlformats.org/officeDocument/2006/relationships">
-  <p:cSld>
-    <p:spTree>
-      <p:nvGrpSpPr>
-        <p:cNvPr id="1" name=""/>
-        <p:cNvGrpSpPr/>
-        <p:nvPr/>
-      </p:nvGrpSpPr>
-      <p:grpSpPr/>
-      <p:pic>
-        <p:nvPicPr>
-          <p:cNvPr id="2" name="Picture 1" descr="ExpAndHealingServices.png"/>
-          <p:cNvPicPr>
-            <a:picLocks noChangeAspect="1"/>
-          </p:cNvPicPr>
-          <p:nvPr/>
-        </p:nvPicPr>
-        <p:blipFill>
-          <a:blip r:embed="rId2"/>
-          <a:stretch>
-            <a:fillRect/>
-          </a:stretch>
-        </p:blipFill>
-        <p:spPr>
-          <a:xfrm>
-            <a:off x="548640" y="2500720"/>
-            <a:ext cx="8046720" cy="2222319"/>
-          </a:xfrm>
-          <a:prstGeom prst="rect">
-            <a:avLst/>
-          </a:prstGeom>
-        </p:spPr>
-      </p:pic>
-    </p:spTree>
-  </p:cSld>
-  <p:clrMapOvr>
-    <a:masterClrMapping/>
-  </p:clrMapOvr>
-</p:sld>
-</file>
-
-<file path=ppt/slides/slide83.xml><?xml version="1.0" encoding="utf-8"?>
-<p:sld xmlns:a="http://schemas.openxmlformats.org/drawingml/2006/main" xmlns:p="http://schemas.openxmlformats.org/presentationml/2006/main" xmlns:r="http://schemas.openxmlformats.org/officeDocument/2006/relationships">
-  <p:cSld>
-    <p:spTree>
-      <p:nvGrpSpPr>
-        <p:cNvPr id="1" name=""/>
-        <p:cNvGrpSpPr/>
-        <p:nvPr/>
-      </p:nvGrpSpPr>
-      <p:grpSpPr/>
-      <p:pic>
-        <p:nvPicPr>
-          <p:cNvPr id="2" name="Picture 1" descr="FileAndWorldGenServices.png"/>
-          <p:cNvPicPr>
-            <a:picLocks noChangeAspect="1"/>
-          </p:cNvPicPr>
-          <p:nvPr/>
-        </p:nvPicPr>
-        <p:blipFill>
-          <a:blip r:embed="rId2"/>
-          <a:stretch>
-            <a:fillRect/>
-          </a:stretch>
-        </p:blipFill>
-        <p:spPr>
-          <a:xfrm>
-            <a:off x="548640" y="2298130"/>
-            <a:ext cx="8046719" cy="2627500"/>
-          </a:xfrm>
-          <a:prstGeom prst="rect">
-            <a:avLst/>
-          </a:prstGeom>
-        </p:spPr>
-      </p:pic>
-    </p:spTree>
-  </p:cSld>
-  <p:clrMapOvr>
-    <a:masterClrMapping/>
-  </p:clrMapOvr>
-</p:sld>
-</file>
-
-<file path=ppt/slides/slide84.xml><?xml version="1.0" encoding="utf-8"?>
-<p:sld xmlns:a="http://schemas.openxmlformats.org/drawingml/2006/main" xmlns:p="http://schemas.openxmlformats.org/presentationml/2006/main" xmlns:r="http://schemas.openxmlformats.org/officeDocument/2006/relationships">
-  <p:cSld>
-    <p:spTree>
-      <p:nvGrpSpPr>
-        <p:cNvPr id="1" name=""/>
-        <p:cNvGrpSpPr/>
-        <p:nvPr/>
-      </p:nvGrpSpPr>
-      <p:grpSpPr/>
-      <p:pic>
-        <p:nvPicPr>
-          <p:cNvPr id="2" name="Picture 1" descr="InfrastructureLayerRepositories.png"/>
-          <p:cNvPicPr>
-            <a:picLocks noChangeAspect="1"/>
-          </p:cNvPicPr>
-          <p:nvPr/>
-        </p:nvPicPr>
-        <p:blipFill>
-          <a:blip r:embed="rId2"/>
-          <a:stretch>
-            <a:fillRect/>
-          </a:stretch>
-        </p:blipFill>
-        <p:spPr>
-          <a:xfrm>
-            <a:off x="548640" y="3112729"/>
-            <a:ext cx="8046720" cy="998302"/>
-          </a:xfrm>
-          <a:prstGeom prst="rect">
-            <a:avLst/>
-          </a:prstGeom>
-        </p:spPr>
-      </p:pic>
-    </p:spTree>
-  </p:cSld>
-  <p:clrMapOvr>
-    <a:masterClrMapping/>
-  </p:clrMapOvr>
-</p:sld>
-</file>
-
-<file path=ppt/slides/slide85.xml><?xml version="1.0" encoding="utf-8"?>
-<p:sld xmlns:a="http://schemas.openxmlformats.org/drawingml/2006/main" xmlns:p="http://schemas.openxmlformats.org/presentationml/2006/main" xmlns:r="http://schemas.openxmlformats.org/officeDocument/2006/relationships">
-  <p:cSld>
-    <p:spTree>
-      <p:nvGrpSpPr>
-        <p:cNvPr id="1" name=""/>
-        <p:cNvGrpSpPr/>
-        <p:nvPr/>
-      </p:nvGrpSpPr>
-      <p:grpSpPr/>
-      <p:pic>
-        <p:nvPicPr>
-          <p:cNvPr id="2" name="Picture 1" descr="LayerInteractionDiagram.png"/>
-          <p:cNvPicPr>
-            <a:picLocks noChangeAspect="1"/>
-          </p:cNvPicPr>
-          <p:nvPr/>
-        </p:nvPicPr>
-        <p:blipFill>
-          <a:blip r:embed="rId2"/>
-          <a:stretch>
-            <a:fillRect/>
-          </a:stretch>
-        </p:blipFill>
-        <p:spPr>
-          <a:xfrm>
-            <a:off x="548640" y="2012672"/>
-            <a:ext cx="8046720" cy="3198416"/>
-          </a:xfrm>
-          <a:prstGeom prst="rect">
-            <a:avLst/>
-          </a:prstGeom>
-        </p:spPr>
-      </p:pic>
-    </p:spTree>
-  </p:cSld>
-  <p:clrMapOvr>
-    <a:masterClrMapping/>
-  </p:clrMapOvr>
-</p:sld>
-</file>
-
-<file path=ppt/slides/slide86.xml><?xml version="1.0" encoding="utf-8"?>
-<p:sld xmlns:a="http://schemas.openxmlformats.org/drawingml/2006/main" xmlns:p="http://schemas.openxmlformats.org/presentationml/2006/main" xmlns:r="http://schemas.openxmlformats.org/officeDocument/2006/relationships">
-  <p:cSld>
-    <p:spTree>
-      <p:nvGrpSpPr>
-        <p:cNvPr id="1" name=""/>
-        <p:cNvGrpSpPr/>
-        <p:nvPr/>
-      </p:nvGrpSpPr>
-      <p:grpSpPr/>
-      <p:pic>
-        <p:nvPicPr>
-          <p:cNvPr id="2" name="Picture 1" descr="NetworkAndMatchmakingServices.png"/>
-          <p:cNvPicPr>
-            <a:picLocks noChangeAspect="1"/>
-          </p:cNvPicPr>
-          <p:nvPr/>
-        </p:nvPicPr>
-        <p:blipFill>
-          <a:blip r:embed="rId2"/>
-          <a:stretch>
-            <a:fillRect/>
-          </a:stretch>
-        </p:blipFill>
-        <p:spPr>
-          <a:xfrm>
-            <a:off x="689490" y="914400"/>
-            <a:ext cx="7765019" cy="5394960"/>
-          </a:xfrm>
-          <a:prstGeom prst="rect">
-            <a:avLst/>
-          </a:prstGeom>
-        </p:spPr>
-      </p:pic>
-    </p:spTree>
-  </p:cSld>
-  <p:clrMapOvr>
-    <a:masterClrMapping/>
-  </p:clrMapOvr>
-</p:sld>
-</file>
-
-<file path=ppt/slides/slide87.xml><?xml version="1.0" encoding="utf-8"?>
-<p:sld xmlns:a="http://schemas.openxmlformats.org/drawingml/2006/main" xmlns:p="http://schemas.openxmlformats.org/presentationml/2006/main" xmlns:r="http://schemas.openxmlformats.org/officeDocument/2006/relationships">
-  <p:cSld>
-    <p:spTree>
-      <p:nvGrpSpPr>
-        <p:cNvPr id="1" name=""/>
-        <p:cNvGrpSpPr/>
-        <p:nvPr/>
-      </p:nvGrpSpPr>
-      <p:grpSpPr/>
-      <p:pic>
-        <p:nvPicPr>
-          <p:cNvPr id="2" name="Picture 1" descr="PokemonGameArchitecture.png"/>
-          <p:cNvPicPr>
-            <a:picLocks noChangeAspect="1"/>
-          </p:cNvPicPr>
-          <p:nvPr/>
-        </p:nvPicPr>
-        <p:blipFill>
-          <a:blip r:embed="rId2"/>
-          <a:stretch>
-            <a:fillRect/>
-          </a:stretch>
-        </p:blipFill>
-        <p:spPr>
-          <a:xfrm>
-            <a:off x="548640" y="2585513"/>
-            <a:ext cx="8046720" cy="2052734"/>
-          </a:xfrm>
-          <a:prstGeom prst="rect">
-            <a:avLst/>
-          </a:prstGeom>
-        </p:spPr>
-      </p:pic>
-    </p:spTree>
-  </p:cSld>
-  <p:clrMapOvr>
-    <a:masterClrMapping/>
-  </p:clrMapOvr>
-</p:sld>
-</file>
-
-<file path=ppt/slides/slide88.xml><?xml version="1.0" encoding="utf-8"?>
-<p:sld xmlns:a="http://schemas.openxmlformats.org/drawingml/2006/main" xmlns:p="http://schemas.openxmlformats.org/presentationml/2006/main" xmlns:r="http://schemas.openxmlformats.org/officeDocument/2006/relationships">
-  <p:cSld>
-    <p:spTree>
-      <p:nvGrpSpPr>
-        <p:cNvPr id="1" name=""/>
-        <p:cNvGrpSpPr/>
-        <p:nvPr/>
-      </p:nvGrpSpPr>
-      <p:grpSpPr/>
+<file path=ppt/slides/slide90.xml><?xml version="1.0" encoding="utf-8"?>
+<p:sld xmlns:a="http://schemas.openxmlformats.org/drawingml/2006/main" xmlns:r="http://schemas.openxmlformats.org/officeDocument/2006/relationships" xmlns:p="http://schemas.openxmlformats.org/presentationml/2006/main">
+  <p:cSld>
+    <p:spTree>
+      <p:nvGrpSpPr>
+        <p:cNvPr id="1" name=""/>
+        <p:cNvGrpSpPr/>
+        <p:nvPr/>
+      </p:nvGrpSpPr>
+      <p:grpSpPr>
+        <a:xfrm>
+          <a:off x="0" y="0"/>
+          <a:ext cx="0" cy="0"/>
+          <a:chOff x="0" y="0"/>
+          <a:chExt cx="0" cy="0"/>
+        </a:xfrm>
+      </p:grpSpPr>
       <p:pic>
         <p:nvPicPr>
           <p:cNvPr id="2" name="Picture 1" descr="PresentationLayerScreens.png"/>
@@ -6848,16 +7913,23 @@
 </p:sld>
 </file>
 
-<file path=ppt/slides/slide89.xml><?xml version="1.0" encoding="utf-8"?>
-<p:sld xmlns:a="http://schemas.openxmlformats.org/drawingml/2006/main" xmlns:p="http://schemas.openxmlformats.org/presentationml/2006/main" xmlns:r="http://schemas.openxmlformats.org/officeDocument/2006/relationships">
-  <p:cSld>
-    <p:spTree>
-      <p:nvGrpSpPr>
-        <p:cNvPr id="1" name=""/>
-        <p:cNvGrpSpPr/>
-        <p:nvPr/>
-      </p:nvGrpSpPr>
-      <p:grpSpPr/>
+<file path=ppt/slides/slide91.xml><?xml version="1.0" encoding="utf-8"?>
+<p:sld xmlns:a="http://schemas.openxmlformats.org/drawingml/2006/main" xmlns:r="http://schemas.openxmlformats.org/officeDocument/2006/relationships" xmlns:p="http://schemas.openxmlformats.org/presentationml/2006/main">
+  <p:cSld>
+    <p:spTree>
+      <p:nvGrpSpPr>
+        <p:cNvPr id="1" name=""/>
+        <p:cNvGrpSpPr/>
+        <p:nvPr/>
+      </p:nvGrpSpPr>
+      <p:grpSpPr>
+        <a:xfrm>
+          <a:off x="0" y="0"/>
+          <a:ext cx="0" cy="0"/>
+          <a:chOff x="0" y="0"/>
+          <a:chExt cx="0" cy="0"/>
+        </a:xfrm>
+      </p:grpSpPr>
       <p:pic>
         <p:nvPicPr>
           <p:cNvPr id="2" name="Picture 1" descr="StoryServices.png"/>
@@ -6876,48 +7948,6 @@
           <a:xfrm>
             <a:off x="548640" y="1365153"/>
             <a:ext cx="8046720" cy="4493454"/>
-          </a:xfrm>
-          <a:prstGeom prst="rect">
-            <a:avLst/>
-          </a:prstGeom>
-        </p:spPr>
-      </p:pic>
-    </p:spTree>
-  </p:cSld>
-  <p:clrMapOvr>
-    <a:masterClrMapping/>
-  </p:clrMapOvr>
-</p:sld>
-</file>
-
-<file path=ppt/slides/slide9.xml><?xml version="1.0" encoding="utf-8"?>
-<p:sld xmlns:a="http://schemas.openxmlformats.org/drawingml/2006/main" xmlns:p="http://schemas.openxmlformats.org/presentationml/2006/main" xmlns:r="http://schemas.openxmlformats.org/officeDocument/2006/relationships">
-  <p:cSld>
-    <p:spTree>
-      <p:nvGrpSpPr>
-        <p:cNvPr id="1" name=""/>
-        <p:cNvGrpSpPr/>
-        <p:nvPr/>
-      </p:nvGrpSpPr>
-      <p:grpSpPr/>
-      <p:pic>
-        <p:nvPicPr>
-          <p:cNvPr id="2" name="Picture 1" descr="UC2_BattleWild_Activity.png"/>
-          <p:cNvPicPr>
-            <a:picLocks noChangeAspect="1"/>
-          </p:cNvPicPr>
-          <p:nvPr/>
-        </p:nvPicPr>
-        <p:blipFill>
-          <a:blip r:embed="rId2"/>
-          <a:stretch>
-            <a:fillRect/>
-          </a:stretch>
-        </p:blipFill>
-        <p:spPr>
-          <a:xfrm>
-            <a:off x="2578008" y="914400"/>
-            <a:ext cx="3987984" cy="5394960"/>
           </a:xfrm>
           <a:prstGeom prst="rect">
             <a:avLst/>
